--- a/VIA/vehicle_inspection_app_case_study.pptx
+++ b/VIA/vehicle_inspection_app_case_study.pptx
@@ -10,10 +10,10 @@
   <p:sldIdLst>
     <p:sldId id="256" r:id="rId2"/>
     <p:sldId id="257" r:id="rId3"/>
-    <p:sldId id="261" r:id="rId4"/>
-    <p:sldId id="262" r:id="rId5"/>
-    <p:sldId id="258" r:id="rId6"/>
-    <p:sldId id="259" r:id="rId7"/>
+    <p:sldId id="259" r:id="rId4"/>
+    <p:sldId id="263" r:id="rId5"/>
+    <p:sldId id="261" r:id="rId6"/>
+    <p:sldId id="258" r:id="rId7"/>
     <p:sldId id="260" r:id="rId8"/>
   </p:sldIdLst>
   <p:sldSz cx="12192000" cy="6858000"/>
@@ -392,28 +392,149 @@
           <a:lstStyle/>
           <a:p>
             <a:r>
+              <a:rPr dirty="0"/>
               <a:t>SPEAKER NOTES:</a:t>
             </a:r>
           </a:p>
           <a:p>
             <a:r>
+              <a:rPr dirty="0"/>
               <a:t>Focus on the 'Executive Challenge' here.</a:t>
             </a:r>
           </a:p>
           <a:p>
             <a:r>
+              <a:rPr dirty="0"/>
               <a:t>Explain that when you analyzed the environment, you realized this wasn't just an IT development request—it was a critical business sustainability and compliance problem.</a:t>
             </a:r>
           </a:p>
           <a:p>
             <a:r>
+              <a:rPr dirty="0"/>
               <a:t>Mention that 200k inspections annually meant that even a 2-minute delay per run was highly expensive, translating to massive operational leakage.</a:t>
             </a:r>
           </a:p>
           <a:p>
             <a:r>
+              <a:rPr dirty="0"/>
               <a:t>Highlight the risks of having physical, un-obfuscated PII paper files floating around roadside patrol vans.</a:t>
             </a:r>
+            <a:endParaRPr lang="en-AU" dirty="0"/>
+          </a:p>
+          <a:p>
+            <a:endParaRPr lang="en-AU" dirty="0"/>
+          </a:p>
+          <a:p>
+            <a:r>
+              <a:rPr lang="en-AU" sz="1200" b="1" kern="1200" dirty="0">
+                <a:solidFill>
+                  <a:schemeClr val="tx1"/>
+                </a:solidFill>
+                <a:effectLst/>
+                <a:latin typeface="+mn-lt"/>
+                <a:ea typeface="+mn-ea"/>
+                <a:cs typeface="+mn-cs"/>
+              </a:rPr>
+              <a:t>Context (The Business Problem)</a:t>
+            </a:r>
+            <a:endParaRPr lang="en-AU" sz="1200" kern="1200" dirty="0">
+              <a:solidFill>
+                <a:schemeClr val="tx1"/>
+              </a:solidFill>
+              <a:effectLst/>
+              <a:latin typeface="+mn-lt"/>
+              <a:ea typeface="+mn-ea"/>
+              <a:cs typeface="+mn-cs"/>
+            </a:endParaRPr>
+          </a:p>
+          <a:p>
+            <a:r>
+              <a:rPr lang="en-AU" sz="1200" kern="1200" dirty="0">
+                <a:solidFill>
+                  <a:schemeClr val="tx1"/>
+                </a:solidFill>
+                <a:effectLst/>
+                <a:latin typeface="+mn-lt"/>
+                <a:ea typeface="+mn-ea"/>
+                <a:cs typeface="+mn-cs"/>
+              </a:rPr>
+              <a:t>"At RAC, I led the digital transformation of the </a:t>
+            </a:r>
+            <a:r>
+              <a:rPr lang="en-AU" sz="1200" b="1" kern="1200" dirty="0">
+                <a:solidFill>
+                  <a:schemeClr val="tx1"/>
+                </a:solidFill>
+                <a:effectLst/>
+                <a:latin typeface="+mn-lt"/>
+                <a:ea typeface="+mn-ea"/>
+                <a:cs typeface="+mn-cs"/>
+              </a:rPr>
+              <a:t>Vehicle Inspection Application (VIA)</a:t>
+            </a:r>
+            <a:r>
+              <a:rPr lang="en-AU" sz="1200" kern="1200" dirty="0">
+                <a:solidFill>
+                  <a:schemeClr val="tx1"/>
+                </a:solidFill>
+                <a:effectLst/>
+                <a:latin typeface="+mn-lt"/>
+                <a:ea typeface="+mn-ea"/>
+                <a:cs typeface="+mn-cs"/>
+              </a:rPr>
+              <a:t>. Our Breakdown Patrols were using paper forms, causing massive data silos and operational delays. As the </a:t>
+            </a:r>
+            <a:r>
+              <a:rPr lang="en-AU" sz="1200" b="1" kern="1200" dirty="0">
+                <a:solidFill>
+                  <a:schemeClr val="tx1"/>
+                </a:solidFill>
+                <a:effectLst/>
+                <a:latin typeface="+mn-lt"/>
+                <a:ea typeface="+mn-ea"/>
+                <a:cs typeface="+mn-cs"/>
+              </a:rPr>
+              <a:t>Analyst Programmer</a:t>
+            </a:r>
+            <a:r>
+              <a:rPr lang="en-AU" sz="1200" kern="1200" dirty="0">
+                <a:solidFill>
+                  <a:schemeClr val="tx1"/>
+                </a:solidFill>
+                <a:effectLst/>
+                <a:latin typeface="+mn-lt"/>
+                <a:ea typeface="+mn-ea"/>
+                <a:cs typeface="+mn-cs"/>
+              </a:rPr>
+              <a:t>, I was tasked with moving this to a high-performance </a:t>
+            </a:r>
+            <a:r>
+              <a:rPr lang="en-AU" sz="1200" b="1" kern="1200" dirty="0">
+                <a:solidFill>
+                  <a:schemeClr val="tx1"/>
+                </a:solidFill>
+                <a:effectLst/>
+                <a:latin typeface="+mn-lt"/>
+                <a:ea typeface="+mn-ea"/>
+                <a:cs typeface="+mn-cs"/>
+              </a:rPr>
+              <a:t>Dataverse</a:t>
+            </a:r>
+            <a:r>
+              <a:rPr lang="en-AU" sz="1200" kern="1200" dirty="0">
+                <a:solidFill>
+                  <a:schemeClr val="tx1"/>
+                </a:solidFill>
+                <a:effectLst/>
+                <a:latin typeface="+mn-lt"/>
+                <a:ea typeface="+mn-ea"/>
+                <a:cs typeface="+mn-cs"/>
+              </a:rPr>
+              <a:t> solution optimized for Surface Go tablets. My goal was to create a 'Single Source of Truth' that could handle 200,000 annual inspections while maintaining strict compliance for the Auto Services division."</a:t>
+            </a:r>
+          </a:p>
+          <a:p>
+            <a:endParaRPr dirty="0"/>
           </a:p>
         </p:txBody>
       </p:sp>
@@ -438,6 +559,957 @@
 </file>
 
 <file path=ppt/notesSlides/notesSlide3.xml><?xml version="1.0" encoding="utf-8"?>
+<p:notes xmlns:a="http://schemas.openxmlformats.org/drawingml/2006/main" xmlns:r="http://schemas.openxmlformats.org/officeDocument/2006/relationships" xmlns:p="http://schemas.openxmlformats.org/presentationml/2006/main">
+  <p:cSld>
+    <p:spTree>
+      <p:nvGrpSpPr>
+        <p:cNvPr id="1" name=""/>
+        <p:cNvGrpSpPr/>
+        <p:nvPr/>
+      </p:nvGrpSpPr>
+      <p:grpSpPr>
+        <a:xfrm>
+          <a:off x="0" y="0"/>
+          <a:ext cx="0" cy="0"/>
+          <a:chOff x="0" y="0"/>
+          <a:chExt cx="0" cy="0"/>
+        </a:xfrm>
+      </p:grpSpPr>
+      <p:sp>
+        <p:nvSpPr>
+          <p:cNvPr id="2" name="Slide Image Placeholder 1"/>
+          <p:cNvSpPr>
+            <a:spLocks noGrp="1" noRot="1" noChangeAspect="1"/>
+          </p:cNvSpPr>
+          <p:nvPr>
+            <p:ph type="sldImg" idx="2"/>
+          </p:nvPr>
+        </p:nvSpPr>
+        <p:spPr/>
+      </p:sp>
+      <p:sp>
+        <p:nvSpPr>
+          <p:cNvPr id="3" name="Notes Placeholder 2"/>
+          <p:cNvSpPr>
+            <a:spLocks noGrp="1"/>
+          </p:cNvSpPr>
+          <p:nvPr>
+            <p:ph type="body" sz="quarter" idx="3"/>
+          </p:nvPr>
+        </p:nvSpPr>
+        <p:spPr/>
+        <p:txBody>
+          <a:bodyPr/>
+          <a:lstStyle/>
+          <a:p>
+            <a:r>
+              <a:rPr dirty="0"/>
+              <a:t>SPEAKER NOTES:</a:t>
+            </a:r>
+          </a:p>
+          <a:p>
+            <a:r>
+              <a:rPr dirty="0"/>
+              <a:t>Use this slide to demonstrate your 'Engineering Craft' and complete ownership of the SDLC.</a:t>
+            </a:r>
+          </a:p>
+          <a:p>
+            <a:r>
+              <a:rPr dirty="0"/>
+              <a:t>Explain your role as the 'Strategic Translator' bridging the gap between business needs and developer execution.</a:t>
+            </a:r>
+          </a:p>
+          <a:p>
+            <a:r>
+              <a:rPr dirty="0"/>
+              <a:t>Discuss Step 1: Running discovery workshops with roadside patrols and writing the SIDs.</a:t>
+            </a:r>
+          </a:p>
+          <a:p>
+            <a:r>
+              <a:rPr dirty="0"/>
+              <a:t>Discuss Step 2: Running scrum ceremonies (PSM I), backlog refinement, and introducing Zephyr Scale testing templates to prevent the 'rushed delivery' traps from earlier roles.</a:t>
+            </a:r>
+          </a:p>
+          <a:p>
+            <a:r>
+              <a:rPr dirty="0"/>
+              <a:t>Discuss Step 3: Managing pipelines, authoring the environment deployment guides, and handing over support to Helpdesk.</a:t>
+            </a:r>
+            <a:endParaRPr lang="en-AU" dirty="0"/>
+          </a:p>
+          <a:p>
+            <a:endParaRPr lang="en-AU" dirty="0"/>
+          </a:p>
+          <a:p>
+            <a:pPr lvl="0" rtl="0" fontAlgn="ctr"/>
+            <a:r>
+              <a:rPr lang="en-AU" sz="1200" kern="1200" dirty="0">
+                <a:solidFill>
+                  <a:schemeClr val="tx1"/>
+                </a:solidFill>
+                <a:effectLst/>
+                <a:latin typeface="+mn-lt"/>
+                <a:ea typeface="+mn-ea"/>
+                <a:cs typeface="+mn-cs"/>
+              </a:rPr>
+              <a:t>I began by </a:t>
+            </a:r>
+            <a:r>
+              <a:rPr lang="en-AU" sz="1200" b="1" kern="1200" dirty="0">
+                <a:solidFill>
+                  <a:schemeClr val="tx1"/>
+                </a:solidFill>
+                <a:effectLst/>
+                <a:latin typeface="+mn-lt"/>
+                <a:ea typeface="+mn-ea"/>
+                <a:cs typeface="+mn-cs"/>
+              </a:rPr>
+              <a:t>engaging directly with Breakdown Patrols and key stakeholders to gather detailed requirements during inception worksho</a:t>
+            </a:r>
+            <a:r>
+              <a:rPr lang="en-AU" sz="1200" kern="1200" dirty="0">
+                <a:solidFill>
+                  <a:schemeClr val="tx1"/>
+                </a:solidFill>
+                <a:effectLst/>
+                <a:latin typeface="+mn-lt"/>
+                <a:ea typeface="+mn-ea"/>
+                <a:cs typeface="+mn-cs"/>
+              </a:rPr>
+              <a:t>p, deeply understanding their on-the-ground challenges with the manual, paper-based forms. </a:t>
+            </a:r>
+            <a:endParaRPr lang="en-AU" sz="1050" kern="1200" dirty="0">
+              <a:solidFill>
+                <a:schemeClr val="tx1"/>
+              </a:solidFill>
+              <a:effectLst/>
+              <a:latin typeface="+mn-lt"/>
+              <a:ea typeface="+mn-ea"/>
+              <a:cs typeface="+mn-cs"/>
+            </a:endParaRPr>
+          </a:p>
+          <a:p>
+            <a:pPr lvl="0" rtl="0" fontAlgn="ctr"/>
+            <a:r>
+              <a:rPr lang="en-AU" sz="1200" kern="1200" dirty="0">
+                <a:solidFill>
+                  <a:schemeClr val="tx1"/>
+                </a:solidFill>
+                <a:effectLst/>
+                <a:latin typeface="+mn-lt"/>
+                <a:ea typeface="+mn-ea"/>
+                <a:cs typeface="+mn-cs"/>
+              </a:rPr>
+              <a:t>"A key challenge was the stakeholder's request to pre-fill vehicle data like make, model via a lookup table. After conducting a technical discovery, I authored a </a:t>
+            </a:r>
+            <a:r>
+              <a:rPr lang="en-AU" sz="1200" b="1" kern="1200" dirty="0">
+                <a:solidFill>
+                  <a:schemeClr val="tx1"/>
+                </a:solidFill>
+                <a:effectLst/>
+                <a:latin typeface="+mn-lt"/>
+                <a:ea typeface="+mn-ea"/>
+                <a:cs typeface="+mn-cs"/>
+              </a:rPr>
+              <a:t>Vehicle Data Options Paper</a:t>
+            </a:r>
+            <a:r>
+              <a:rPr lang="en-AU" sz="1200" kern="1200" dirty="0">
+                <a:solidFill>
+                  <a:schemeClr val="tx1"/>
+                </a:solidFill>
+                <a:effectLst/>
+                <a:latin typeface="+mn-lt"/>
+                <a:ea typeface="+mn-ea"/>
+                <a:cs typeface="+mn-cs"/>
+              </a:rPr>
+              <a:t>. I identified that while an API integration was the 'ideal' end-state for future release, it would introduce significant technical debt and delay the MVP due to the complexity of the Auto Info API authentication.</a:t>
+            </a:r>
+            <a:endParaRPr lang="en-AU" sz="1050" kern="1200" dirty="0">
+              <a:solidFill>
+                <a:schemeClr val="tx1"/>
+              </a:solidFill>
+              <a:effectLst/>
+              <a:latin typeface="+mn-lt"/>
+              <a:ea typeface="+mn-ea"/>
+              <a:cs typeface="+mn-cs"/>
+            </a:endParaRPr>
+          </a:p>
+          <a:p>
+            <a:pPr lvl="0" rtl="0" fontAlgn="ctr"/>
+            <a:r>
+              <a:rPr lang="en-AU" sz="1200" kern="1200" dirty="0">
+                <a:solidFill>
+                  <a:schemeClr val="tx1"/>
+                </a:solidFill>
+                <a:effectLst/>
+                <a:latin typeface="+mn-lt"/>
+                <a:ea typeface="+mn-ea"/>
+                <a:cs typeface="+mn-cs"/>
+              </a:rPr>
+              <a:t>I made the strategic decision to implement a </a:t>
+            </a:r>
+            <a:r>
+              <a:rPr lang="en-AU" sz="1200" b="1" kern="1200" dirty="0">
+                <a:solidFill>
+                  <a:schemeClr val="tx1"/>
+                </a:solidFill>
+                <a:effectLst/>
+                <a:latin typeface="+mn-lt"/>
+                <a:ea typeface="+mn-ea"/>
+                <a:cs typeface="+mn-cs"/>
+              </a:rPr>
+              <a:t>system for R3</a:t>
+            </a:r>
+            <a:r>
+              <a:rPr lang="en-AU" sz="1200" kern="1200" dirty="0">
+                <a:solidFill>
+                  <a:schemeClr val="tx1"/>
+                </a:solidFill>
+                <a:effectLst/>
+                <a:latin typeface="+mn-lt"/>
+                <a:ea typeface="+mn-ea"/>
+                <a:cs typeface="+mn-cs"/>
+              </a:rPr>
+              <a:t>—standardizing the data entry within Dataverse but keeping it manual for speed-to-market. I architected the back-end using </a:t>
+            </a:r>
+            <a:r>
+              <a:rPr lang="en-AU" sz="1200" b="1" kern="1200" dirty="0">
+                <a:solidFill>
+                  <a:schemeClr val="tx1"/>
+                </a:solidFill>
+                <a:effectLst/>
+                <a:latin typeface="+mn-lt"/>
+                <a:ea typeface="+mn-ea"/>
+                <a:cs typeface="+mn-cs"/>
+              </a:rPr>
+              <a:t>Relational Data </a:t>
+            </a:r>
+            <a:r>
+              <a:rPr lang="en-AU" sz="1200" b="1" kern="1200" dirty="0" err="1">
+                <a:solidFill>
+                  <a:schemeClr val="tx1"/>
+                </a:solidFill>
+                <a:effectLst/>
+                <a:latin typeface="+mn-lt"/>
+                <a:ea typeface="+mn-ea"/>
+                <a:cs typeface="+mn-cs"/>
+              </a:rPr>
+              <a:t>Modeling</a:t>
+            </a:r>
+            <a:r>
+              <a:rPr lang="en-AU" sz="1200" kern="1200" dirty="0">
+                <a:solidFill>
+                  <a:schemeClr val="tx1"/>
+                </a:solidFill>
+                <a:effectLst/>
+                <a:latin typeface="+mn-lt"/>
+                <a:ea typeface="+mn-ea"/>
+                <a:cs typeface="+mn-cs"/>
+              </a:rPr>
+              <a:t> (Normalizing the Header and Checklist tables) and built a </a:t>
+            </a:r>
+            <a:r>
+              <a:rPr lang="en-AU" sz="1200" b="1" kern="1200" dirty="0">
+                <a:solidFill>
+                  <a:schemeClr val="tx1"/>
+                </a:solidFill>
+                <a:effectLst/>
+                <a:latin typeface="+mn-lt"/>
+                <a:ea typeface="+mn-ea"/>
+                <a:cs typeface="+mn-cs"/>
+              </a:rPr>
+              <a:t>Custom Access Control Model</a:t>
+            </a:r>
+            <a:r>
+              <a:rPr lang="en-AU" sz="1200" kern="1200" dirty="0">
+                <a:solidFill>
+                  <a:schemeClr val="tx1"/>
+                </a:solidFill>
+                <a:effectLst/>
+                <a:latin typeface="+mn-lt"/>
+                <a:ea typeface="+mn-ea"/>
+                <a:cs typeface="+mn-cs"/>
+              </a:rPr>
+              <a:t>. </a:t>
+            </a:r>
+            <a:endParaRPr lang="en-AU" sz="1050" kern="1200" dirty="0">
+              <a:solidFill>
+                <a:schemeClr val="tx1"/>
+              </a:solidFill>
+              <a:effectLst/>
+              <a:latin typeface="+mn-lt"/>
+              <a:ea typeface="+mn-ea"/>
+              <a:cs typeface="+mn-cs"/>
+            </a:endParaRPr>
+          </a:p>
+          <a:p>
+            <a:pPr lvl="0" rtl="0" fontAlgn="ctr"/>
+            <a:r>
+              <a:rPr lang="en-AU" sz="1200" kern="1200" dirty="0">
+                <a:solidFill>
+                  <a:schemeClr val="tx1"/>
+                </a:solidFill>
+                <a:effectLst/>
+                <a:latin typeface="+mn-lt"/>
+                <a:ea typeface="+mn-ea"/>
+                <a:cs typeface="+mn-cs"/>
+              </a:rPr>
+              <a:t>I cloned the 'Basic User' security role to create a custom profile that restricted data access to specific AD Groups, ensuring we met PII (Personally Identifiable Information) standards. </a:t>
+            </a:r>
+            <a:endParaRPr lang="en-AU" sz="1050" kern="1200" dirty="0">
+              <a:solidFill>
+                <a:schemeClr val="tx1"/>
+              </a:solidFill>
+              <a:effectLst/>
+              <a:latin typeface="+mn-lt"/>
+              <a:ea typeface="+mn-ea"/>
+              <a:cs typeface="+mn-cs"/>
+            </a:endParaRPr>
+          </a:p>
+          <a:p>
+            <a:pPr lvl="0" rtl="0" fontAlgn="ctr"/>
+            <a:r>
+              <a:rPr lang="en-AU" sz="1200" kern="1200" dirty="0">
+                <a:solidFill>
+                  <a:schemeClr val="tx1"/>
+                </a:solidFill>
+                <a:effectLst/>
+                <a:latin typeface="+mn-lt"/>
+                <a:ea typeface="+mn-ea"/>
+                <a:cs typeface="+mn-cs"/>
+              </a:rPr>
+              <a:t>Integrated the canvas app with </a:t>
+            </a:r>
+            <a:r>
+              <a:rPr lang="en-AU" sz="1200" b="1" kern="1200" dirty="0">
+                <a:solidFill>
+                  <a:schemeClr val="tx1"/>
+                </a:solidFill>
+                <a:effectLst/>
+                <a:latin typeface="+mn-lt"/>
+                <a:ea typeface="+mn-ea"/>
+                <a:cs typeface="+mn-cs"/>
+              </a:rPr>
+              <a:t>Power Automate</a:t>
+            </a:r>
+            <a:r>
+              <a:rPr lang="en-AU" sz="1200" kern="1200" dirty="0">
+                <a:solidFill>
+                  <a:schemeClr val="tx1"/>
+                </a:solidFill>
+                <a:effectLst/>
+                <a:latin typeface="+mn-lt"/>
+                <a:ea typeface="+mn-ea"/>
+                <a:cs typeface="+mn-cs"/>
+              </a:rPr>
+              <a:t> for efficient workflow automation and backend data processing. </a:t>
+            </a:r>
+            <a:endParaRPr lang="en-AU" sz="1050" kern="1200" dirty="0">
+              <a:solidFill>
+                <a:schemeClr val="tx1"/>
+              </a:solidFill>
+              <a:effectLst/>
+              <a:latin typeface="+mn-lt"/>
+              <a:ea typeface="+mn-ea"/>
+              <a:cs typeface="+mn-cs"/>
+            </a:endParaRPr>
+          </a:p>
+          <a:p>
+            <a:pPr lvl="1" rtl="0" fontAlgn="ctr"/>
+            <a:r>
+              <a:rPr lang="en-AU" sz="1200" kern="1200" dirty="0">
+                <a:solidFill>
+                  <a:schemeClr val="tx1"/>
+                </a:solidFill>
+                <a:effectLst/>
+                <a:latin typeface="+mn-lt"/>
+                <a:ea typeface="+mn-ea"/>
+                <a:cs typeface="+mn-cs"/>
+              </a:rPr>
+              <a:t>Save record to Dataverse</a:t>
+            </a:r>
+            <a:endParaRPr lang="en-AU" sz="1050" kern="1200" dirty="0">
+              <a:solidFill>
+                <a:schemeClr val="tx1"/>
+              </a:solidFill>
+              <a:effectLst/>
+              <a:latin typeface="+mn-lt"/>
+              <a:ea typeface="+mn-ea"/>
+              <a:cs typeface="+mn-cs"/>
+            </a:endParaRPr>
+          </a:p>
+          <a:p>
+            <a:pPr lvl="1" rtl="0" fontAlgn="ctr"/>
+            <a:r>
+              <a:rPr lang="en-AU" sz="1200" kern="1200" dirty="0">
+                <a:solidFill>
+                  <a:schemeClr val="tx1"/>
+                </a:solidFill>
+                <a:effectLst/>
+                <a:latin typeface="+mn-lt"/>
+                <a:ea typeface="+mn-ea"/>
+                <a:cs typeface="+mn-cs"/>
+              </a:rPr>
+              <a:t>Convert the form to PDF and upload the car inspection checklist report to SharePoint doc library, so that mechanic can later email the report to the customers.</a:t>
+            </a:r>
+            <a:endParaRPr lang="en-AU" sz="1050" kern="1200" dirty="0">
+              <a:solidFill>
+                <a:schemeClr val="tx1"/>
+              </a:solidFill>
+              <a:effectLst/>
+              <a:latin typeface="+mn-lt"/>
+              <a:ea typeface="+mn-ea"/>
+              <a:cs typeface="+mn-cs"/>
+            </a:endParaRPr>
+          </a:p>
+          <a:p>
+            <a:pPr lvl="0" rtl="0" fontAlgn="ctr"/>
+            <a:r>
+              <a:rPr lang="en-AU" sz="1200" kern="1200" dirty="0">
+                <a:solidFill>
+                  <a:schemeClr val="tx1"/>
+                </a:solidFill>
+                <a:effectLst/>
+                <a:latin typeface="+mn-lt"/>
+                <a:ea typeface="+mn-ea"/>
+                <a:cs typeface="+mn-cs"/>
+              </a:rPr>
+              <a:t> </a:t>
+            </a:r>
+          </a:p>
+          <a:p>
+            <a:pPr lvl="0" rtl="0" fontAlgn="ctr"/>
+            <a:r>
+              <a:rPr lang="en-AU" sz="1200" kern="1200" dirty="0">
+                <a:solidFill>
+                  <a:schemeClr val="tx1"/>
+                </a:solidFill>
+                <a:effectLst/>
+                <a:latin typeface="+mn-lt"/>
+                <a:ea typeface="+mn-ea"/>
+                <a:cs typeface="+mn-cs"/>
+              </a:rPr>
+              <a:t>I also managed the full </a:t>
+            </a:r>
+            <a:r>
+              <a:rPr lang="en-AU" sz="1200" b="1" kern="1200" dirty="0">
+                <a:solidFill>
+                  <a:schemeClr val="tx1"/>
+                </a:solidFill>
+                <a:effectLst/>
+                <a:latin typeface="+mn-lt"/>
+                <a:ea typeface="+mn-ea"/>
+                <a:cs typeface="+mn-cs"/>
+              </a:rPr>
+              <a:t> pipeline</a:t>
+            </a:r>
+            <a:r>
+              <a:rPr lang="en-AU" sz="1200" kern="1200" dirty="0">
+                <a:solidFill>
+                  <a:schemeClr val="tx1"/>
+                </a:solidFill>
+                <a:effectLst/>
+                <a:latin typeface="+mn-lt"/>
+                <a:ea typeface="+mn-ea"/>
+                <a:cs typeface="+mn-cs"/>
+              </a:rPr>
+              <a:t> to move the solution from DEV-&gt;UAT to Production, ensuring no environment drift occurred.</a:t>
+            </a:r>
+            <a:endParaRPr lang="en-AU" sz="1050" kern="1200" dirty="0">
+              <a:solidFill>
+                <a:schemeClr val="tx1"/>
+              </a:solidFill>
+              <a:effectLst/>
+              <a:latin typeface="+mn-lt"/>
+              <a:ea typeface="+mn-ea"/>
+              <a:cs typeface="+mn-cs"/>
+            </a:endParaRPr>
+          </a:p>
+          <a:p>
+            <a:pPr lvl="1" rtl="0" fontAlgn="ctr"/>
+            <a:r>
+              <a:rPr lang="en-AU" sz="1200" kern="1200" dirty="0">
+                <a:solidFill>
+                  <a:schemeClr val="tx1"/>
+                </a:solidFill>
+                <a:effectLst/>
+                <a:latin typeface="+mn-lt"/>
+                <a:ea typeface="+mn-ea"/>
+                <a:cs typeface="+mn-cs"/>
+              </a:rPr>
+              <a:t>Export and importing vehicle lookup data from DEV across to UAT &amp; production</a:t>
+            </a:r>
+            <a:endParaRPr lang="en-AU" sz="1050" kern="1200" dirty="0">
+              <a:solidFill>
+                <a:schemeClr val="tx1"/>
+              </a:solidFill>
+              <a:effectLst/>
+              <a:latin typeface="+mn-lt"/>
+              <a:ea typeface="+mn-ea"/>
+              <a:cs typeface="+mn-cs"/>
+            </a:endParaRPr>
+          </a:p>
+          <a:p>
+            <a:pPr lvl="0" rtl="0" fontAlgn="ctr"/>
+            <a:r>
+              <a:rPr lang="en-AU" sz="1200" kern="1200" dirty="0">
+                <a:solidFill>
+                  <a:schemeClr val="tx1"/>
+                </a:solidFill>
+                <a:effectLst/>
+                <a:latin typeface="+mn-lt"/>
+                <a:ea typeface="+mn-ea"/>
+                <a:cs typeface="+mn-cs"/>
+              </a:rPr>
+              <a:t>Created a c</a:t>
+            </a:r>
+            <a:r>
+              <a:rPr lang="en-AU" sz="1200" b="1" kern="1200" dirty="0">
+                <a:solidFill>
+                  <a:schemeClr val="tx1"/>
+                </a:solidFill>
+                <a:effectLst/>
+                <a:latin typeface="+mn-lt"/>
+                <a:ea typeface="+mn-ea"/>
+                <a:cs typeface="+mn-cs"/>
+              </a:rPr>
+              <a:t>omprehensive deployment guide</a:t>
+            </a:r>
+            <a:r>
+              <a:rPr lang="en-AU" sz="1200" kern="1200" dirty="0">
+                <a:solidFill>
+                  <a:schemeClr val="tx1"/>
+                </a:solidFill>
+                <a:effectLst/>
+                <a:latin typeface="+mn-lt"/>
+                <a:ea typeface="+mn-ea"/>
+                <a:cs typeface="+mn-cs"/>
+              </a:rPr>
+              <a:t> for moving the app from UAT to production, as no existing documentation was available when I inherited the work</a:t>
+            </a:r>
+            <a:endParaRPr lang="en-AU" sz="1050" kern="1200" dirty="0">
+              <a:solidFill>
+                <a:schemeClr val="tx1"/>
+              </a:solidFill>
+              <a:effectLst/>
+              <a:latin typeface="+mn-lt"/>
+              <a:ea typeface="+mn-ea"/>
+              <a:cs typeface="+mn-cs"/>
+            </a:endParaRPr>
+          </a:p>
+          <a:p>
+            <a:pPr lvl="1" rtl="0" fontAlgn="ctr"/>
+            <a:r>
+              <a:rPr lang="en-AU" sz="1200" kern="1200" dirty="0">
+                <a:solidFill>
+                  <a:schemeClr val="tx1"/>
+                </a:solidFill>
+                <a:effectLst/>
+                <a:latin typeface="+mn-lt"/>
+                <a:ea typeface="+mn-ea"/>
+                <a:cs typeface="+mn-cs"/>
+              </a:rPr>
+              <a:t>Including </a:t>
+            </a:r>
+            <a:r>
+              <a:rPr lang="en-AU" sz="1200" b="1" kern="1200" dirty="0">
+                <a:solidFill>
+                  <a:schemeClr val="tx1"/>
+                </a:solidFill>
+                <a:effectLst/>
+                <a:latin typeface="+mn-lt"/>
+                <a:ea typeface="+mn-ea"/>
+                <a:cs typeface="+mn-cs"/>
+              </a:rPr>
+              <a:t>deployment As-Built document </a:t>
+            </a:r>
+            <a:r>
+              <a:rPr lang="en-AU" sz="1200" kern="1200" dirty="0">
+                <a:solidFill>
+                  <a:schemeClr val="tx1"/>
+                </a:solidFill>
+                <a:effectLst/>
+                <a:latin typeface="+mn-lt"/>
+                <a:ea typeface="+mn-ea"/>
+                <a:cs typeface="+mn-cs"/>
+              </a:rPr>
+              <a:t>for ISO certification process requires</a:t>
+            </a:r>
+            <a:endParaRPr lang="en-AU" sz="1050" kern="1200" dirty="0">
+              <a:solidFill>
+                <a:schemeClr val="tx1"/>
+              </a:solidFill>
+              <a:effectLst/>
+              <a:latin typeface="+mn-lt"/>
+              <a:ea typeface="+mn-ea"/>
+              <a:cs typeface="+mn-cs"/>
+            </a:endParaRPr>
+          </a:p>
+          <a:p>
+            <a:endParaRPr dirty="0"/>
+          </a:p>
+        </p:txBody>
+      </p:sp>
+      <p:sp>
+        <p:nvSpPr>
+          <p:cNvPr id="4" name="Slide Number Placeholder 3"/>
+          <p:cNvSpPr>
+            <a:spLocks noGrp="1"/>
+          </p:cNvSpPr>
+          <p:nvPr>
+            <p:ph type="sldNum" sz="quarter" idx="5"/>
+          </p:nvPr>
+        </p:nvSpPr>
+        <p:spPr/>
+      </p:sp>
+    </p:spTree>
+  </p:cSld>
+  <p:clrMapOvr>
+    <a:masterClrMapping/>
+  </p:clrMapOvr>
+</p:notes>
+</file>
+
+<file path=ppt/notesSlides/notesSlide4.xml><?xml version="1.0" encoding="utf-8"?>
+<p:notes xmlns:a="http://schemas.openxmlformats.org/drawingml/2006/main" xmlns:r="http://schemas.openxmlformats.org/officeDocument/2006/relationships" xmlns:p="http://schemas.openxmlformats.org/presentationml/2006/main">
+  <p:cSld>
+    <p:spTree>
+      <p:nvGrpSpPr>
+        <p:cNvPr id="1" name="">
+          <a:extLst>
+            <a:ext uri="{FF2B5EF4-FFF2-40B4-BE49-F238E27FC236}">
+              <a16:creationId xmlns:a16="http://schemas.microsoft.com/office/drawing/2014/main" id="{7A2D3FE0-6FBA-9DE2-EF99-6D56C33E4899}"/>
+            </a:ext>
+          </a:extLst>
+        </p:cNvPr>
+        <p:cNvGrpSpPr/>
+        <p:nvPr/>
+      </p:nvGrpSpPr>
+      <p:grpSpPr>
+        <a:xfrm>
+          <a:off x="0" y="0"/>
+          <a:ext cx="0" cy="0"/>
+          <a:chOff x="0" y="0"/>
+          <a:chExt cx="0" cy="0"/>
+        </a:xfrm>
+      </p:grpSpPr>
+      <p:sp>
+        <p:nvSpPr>
+          <p:cNvPr id="2" name="Slide Image Placeholder 1">
+            <a:extLst>
+              <a:ext uri="{FF2B5EF4-FFF2-40B4-BE49-F238E27FC236}">
+                <a16:creationId xmlns:a16="http://schemas.microsoft.com/office/drawing/2014/main" id="{C1959C5E-5928-E689-13F0-AB4E7526F6A5}"/>
+              </a:ext>
+            </a:extLst>
+          </p:cNvPr>
+          <p:cNvSpPr>
+            <a:spLocks noGrp="1" noRot="1" noChangeAspect="1"/>
+          </p:cNvSpPr>
+          <p:nvPr>
+            <p:ph type="sldImg" idx="2"/>
+          </p:nvPr>
+        </p:nvSpPr>
+        <p:spPr/>
+      </p:sp>
+      <p:sp>
+        <p:nvSpPr>
+          <p:cNvPr id="3" name="Notes Placeholder 2">
+            <a:extLst>
+              <a:ext uri="{FF2B5EF4-FFF2-40B4-BE49-F238E27FC236}">
+                <a16:creationId xmlns:a16="http://schemas.microsoft.com/office/drawing/2014/main" id="{5BB29E6C-0C69-0D7E-A909-98A68D57B320}"/>
+              </a:ext>
+            </a:extLst>
+          </p:cNvPr>
+          <p:cNvSpPr>
+            <a:spLocks noGrp="1"/>
+          </p:cNvSpPr>
+          <p:nvPr>
+            <p:ph type="body" sz="quarter" idx="3"/>
+          </p:nvPr>
+        </p:nvSpPr>
+        <p:spPr/>
+        <p:txBody>
+          <a:bodyPr/>
+          <a:lstStyle/>
+          <a:p>
+            <a:r>
+              <a:rPr dirty="0"/>
+              <a:t>SPEAKER NOTES:</a:t>
+            </a:r>
+          </a:p>
+          <a:p>
+            <a:r>
+              <a:rPr dirty="0"/>
+              <a:t>This is your 'Architectural Blueprint' slide.</a:t>
+            </a:r>
+          </a:p>
+          <a:p>
+            <a:r>
+              <a:rPr dirty="0"/>
+              <a:t>Explain that rather than using a flat-file database like SharePoint which lacks enterprise-grade relational integrity, you insisted on Microsoft Dataverse.</a:t>
+            </a:r>
+          </a:p>
+          <a:p>
+            <a:r>
+              <a:rPr dirty="0"/>
+              <a:t>Explain the 5 tables: Vehicle lookup master, Questions dynamic config, Summary header, Response transactional lines, and Media metadata.</a:t>
+            </a:r>
+          </a:p>
+          <a:p>
+            <a:r>
+              <a:rPr dirty="0"/>
+              <a:t>Detail how the Questions table keeps the app data-driven: adding new questions doesn't require code updates, eliminating future technical debt.</a:t>
+            </a:r>
+          </a:p>
+          <a:p>
+            <a:r>
+              <a:rPr dirty="0"/>
+              <a:t>Discuss security: 'Basic User - MWPSOL-141' custom role cloned to restrict Delete/Share, mapped to AD groups, and released via staged rings (0 to 4).</a:t>
+            </a:r>
+            <a:endParaRPr lang="en-AU" dirty="0"/>
+          </a:p>
+          <a:p>
+            <a:endParaRPr lang="en-AU" dirty="0"/>
+          </a:p>
+          <a:p>
+            <a:r>
+              <a:rPr lang="en-AU" sz="1200" kern="1200" dirty="0">
+                <a:solidFill>
+                  <a:schemeClr val="tx1"/>
+                </a:solidFill>
+                <a:effectLst/>
+                <a:latin typeface="+mn-lt"/>
+                <a:ea typeface="+mn-ea"/>
+                <a:cs typeface="+mn-cs"/>
+              </a:rPr>
+              <a:t>followed a </a:t>
+            </a:r>
+            <a:r>
+              <a:rPr lang="en-AU" sz="1200" b="1" kern="1200" dirty="0">
+                <a:solidFill>
+                  <a:schemeClr val="tx1"/>
+                </a:solidFill>
+                <a:effectLst/>
+                <a:latin typeface="+mn-lt"/>
+                <a:ea typeface="+mn-ea"/>
+                <a:cs typeface="+mn-cs"/>
+              </a:rPr>
+              <a:t>'Least Privilege' model</a:t>
+            </a:r>
+            <a:r>
+              <a:rPr lang="en-AU" sz="1200" kern="1200" dirty="0">
+                <a:solidFill>
+                  <a:schemeClr val="tx1"/>
+                </a:solidFill>
+                <a:effectLst/>
+                <a:latin typeface="+mn-lt"/>
+                <a:ea typeface="+mn-ea"/>
+                <a:cs typeface="+mn-cs"/>
+              </a:rPr>
+              <a:t>. I created a custom role called </a:t>
+            </a:r>
+            <a:r>
+              <a:rPr lang="en-AU" sz="1200" b="1" kern="1200" dirty="0">
+                <a:solidFill>
+                  <a:schemeClr val="tx1"/>
+                </a:solidFill>
+                <a:effectLst/>
+                <a:latin typeface="+mn-lt"/>
+                <a:ea typeface="+mn-ea"/>
+                <a:cs typeface="+mn-cs"/>
+              </a:rPr>
+              <a:t>'Basic User - MWPSOL-141'</a:t>
+            </a:r>
+            <a:r>
+              <a:rPr lang="en-AU" sz="1200" kern="1200" dirty="0">
+                <a:solidFill>
+                  <a:schemeClr val="tx1"/>
+                </a:solidFill>
+                <a:effectLst/>
+                <a:latin typeface="+mn-lt"/>
+                <a:ea typeface="+mn-ea"/>
+                <a:cs typeface="+mn-cs"/>
+              </a:rPr>
+              <a:t> by cloning the standard base role and hardening it. I specifically restricted the </a:t>
+            </a:r>
+            <a:r>
+              <a:rPr lang="en-AU" sz="1200" b="1" kern="1200" dirty="0">
+                <a:solidFill>
+                  <a:schemeClr val="tx1"/>
+                </a:solidFill>
+                <a:effectLst/>
+                <a:latin typeface="+mn-lt"/>
+                <a:ea typeface="+mn-ea"/>
+                <a:cs typeface="+mn-cs"/>
+              </a:rPr>
+              <a:t>Delete</a:t>
+            </a:r>
+            <a:r>
+              <a:rPr lang="en-AU" sz="1200" kern="1200" dirty="0">
+                <a:solidFill>
+                  <a:schemeClr val="tx1"/>
+                </a:solidFill>
+                <a:effectLst/>
+                <a:latin typeface="+mn-lt"/>
+                <a:ea typeface="+mn-ea"/>
+                <a:cs typeface="+mn-cs"/>
+              </a:rPr>
+              <a:t> and </a:t>
+            </a:r>
+            <a:r>
+              <a:rPr lang="en-AU" sz="1200" b="1" kern="1200" dirty="0">
+                <a:solidFill>
+                  <a:schemeClr val="tx1"/>
+                </a:solidFill>
+                <a:effectLst/>
+                <a:latin typeface="+mn-lt"/>
+                <a:ea typeface="+mn-ea"/>
+                <a:cs typeface="+mn-cs"/>
+              </a:rPr>
+              <a:t>Share</a:t>
+            </a:r>
+            <a:r>
+              <a:rPr lang="en-AU" sz="1200" kern="1200" dirty="0">
+                <a:solidFill>
+                  <a:schemeClr val="tx1"/>
+                </a:solidFill>
+                <a:effectLst/>
+                <a:latin typeface="+mn-lt"/>
+                <a:ea typeface="+mn-ea"/>
+                <a:cs typeface="+mn-cs"/>
+              </a:rPr>
+              <a:t> permissions on the Inspection tables to protect PII. </a:t>
+            </a:r>
+          </a:p>
+          <a:p>
+            <a:r>
+              <a:rPr lang="en-AU" sz="1200" kern="1200" dirty="0">
+                <a:solidFill>
+                  <a:schemeClr val="tx1"/>
+                </a:solidFill>
+                <a:effectLst/>
+                <a:latin typeface="+mn-lt"/>
+                <a:ea typeface="+mn-ea"/>
+                <a:cs typeface="+mn-cs"/>
+              </a:rPr>
+              <a:t>This ensured that only members of the verified AD Security Group could interact with the data, which is the same level of compliance rigor I’d apply to the client's SaaS environment.</a:t>
+            </a:r>
+          </a:p>
+          <a:p>
+            <a:endParaRPr lang="en-AU" dirty="0"/>
+          </a:p>
+          <a:p>
+            <a:pPr lvl="0" rtl="0" fontAlgn="ctr"/>
+            <a:r>
+              <a:rPr lang="en-AU" sz="1200" b="1" kern="1200" dirty="0">
+                <a:solidFill>
+                  <a:schemeClr val="tx1"/>
+                </a:solidFill>
+                <a:effectLst/>
+                <a:latin typeface="+mn-lt"/>
+                <a:ea typeface="+mn-ea"/>
+                <a:cs typeface="+mn-cs"/>
+              </a:rPr>
+              <a:t>Question &amp; Inspection Summary Table:</a:t>
+            </a:r>
+            <a:r>
+              <a:rPr lang="en-AU" sz="1200" kern="1200" dirty="0">
+                <a:solidFill>
+                  <a:schemeClr val="tx1"/>
+                </a:solidFill>
+                <a:effectLst/>
+                <a:latin typeface="+mn-lt"/>
+                <a:ea typeface="+mn-ea"/>
+                <a:cs typeface="+mn-cs"/>
+              </a:rPr>
+              <a:t> You granted </a:t>
+            </a:r>
+            <a:r>
+              <a:rPr lang="en-AU" sz="1200" b="1" kern="1200" dirty="0">
+                <a:solidFill>
+                  <a:schemeClr val="tx1"/>
+                </a:solidFill>
+                <a:effectLst/>
+                <a:latin typeface="+mn-lt"/>
+                <a:ea typeface="+mn-ea"/>
+                <a:cs typeface="+mn-cs"/>
+              </a:rPr>
+              <a:t>User-level </a:t>
+            </a:r>
+            <a:r>
+              <a:rPr lang="en-AU" sz="1200" kern="1200" dirty="0">
+                <a:solidFill>
+                  <a:schemeClr val="tx1"/>
+                </a:solidFill>
+                <a:effectLst/>
+                <a:latin typeface="+mn-lt"/>
+                <a:ea typeface="+mn-ea"/>
+                <a:cs typeface="+mn-cs"/>
+              </a:rPr>
+              <a:t>access of </a:t>
+            </a:r>
+            <a:r>
+              <a:rPr lang="en-AU" sz="1200" b="1" kern="1200" dirty="0">
+                <a:solidFill>
+                  <a:schemeClr val="tx1"/>
+                </a:solidFill>
+                <a:effectLst/>
+                <a:latin typeface="+mn-lt"/>
+                <a:ea typeface="+mn-ea"/>
+                <a:cs typeface="+mn-cs"/>
+              </a:rPr>
+              <a:t>Create &amp; write for users who own the records they create are assigned to the basic user security role</a:t>
+            </a:r>
+            <a:r>
+              <a:rPr lang="en-AU" sz="1200" kern="1200" dirty="0">
+                <a:solidFill>
+                  <a:schemeClr val="tx1"/>
+                </a:solidFill>
+                <a:effectLst/>
+                <a:latin typeface="+mn-lt"/>
+                <a:ea typeface="+mn-ea"/>
+                <a:cs typeface="+mn-cs"/>
+              </a:rPr>
+              <a:t>. The organisation (every other user else in the basic user security role) will have read access to every record, but no one is allowed to delete the records. This ensured that a patrol member could create and edit their own inspections but couldn't necessarily delete records or view inspections from unrelated departments.</a:t>
+            </a:r>
+          </a:p>
+        </p:txBody>
+      </p:sp>
+      <p:sp>
+        <p:nvSpPr>
+          <p:cNvPr id="4" name="Slide Number Placeholder 3">
+            <a:extLst>
+              <a:ext uri="{FF2B5EF4-FFF2-40B4-BE49-F238E27FC236}">
+                <a16:creationId xmlns:a16="http://schemas.microsoft.com/office/drawing/2014/main" id="{0D06A168-7B92-D2E5-4E80-B298DE27E907}"/>
+              </a:ext>
+            </a:extLst>
+          </p:cNvPr>
+          <p:cNvSpPr>
+            <a:spLocks noGrp="1"/>
+          </p:cNvSpPr>
+          <p:nvPr>
+            <p:ph type="sldNum" sz="quarter" idx="5"/>
+          </p:nvPr>
+        </p:nvSpPr>
+        <p:spPr/>
+      </p:sp>
+    </p:spTree>
+    <p:extLst>
+      <p:ext uri="{BB962C8B-B14F-4D97-AF65-F5344CB8AC3E}">
+        <p14:creationId xmlns:p14="http://schemas.microsoft.com/office/powerpoint/2010/main" val="3962657640"/>
+      </p:ext>
+    </p:extLst>
+  </p:cSld>
+  <p:clrMapOvr>
+    <a:masterClrMapping/>
+  </p:clrMapOvr>
+</p:notes>
+</file>
+
+<file path=ppt/notesSlides/notesSlide5.xml><?xml version="1.0" encoding="utf-8"?>
 <p:notes xmlns:a="http://schemas.openxmlformats.org/drawingml/2006/main" xmlns:r="http://schemas.openxmlformats.org/officeDocument/2006/relationships" xmlns:p="http://schemas.openxmlformats.org/presentationml/2006/main">
   <p:cSld>
     <p:spTree>
@@ -499,248 +1571,6 @@
           <a:bodyPr/>
           <a:lstStyle/>
           <a:p>
-            <a:r>
-              <a:rPr dirty="0"/>
-              <a:t>SPEAKER NOTES:</a:t>
-            </a:r>
-          </a:p>
-          <a:p>
-            <a:r>
-              <a:rPr dirty="0"/>
-              <a:t>This is your 'Architectural Blueprint' slide.</a:t>
-            </a:r>
-          </a:p>
-          <a:p>
-            <a:r>
-              <a:rPr dirty="0"/>
-              <a:t>Explain that rather than using a flat-file database like SharePoint which lacks enterprise-grade relational integrity, you insisted on Microsoft Dataverse.</a:t>
-            </a:r>
-          </a:p>
-          <a:p>
-            <a:r>
-              <a:rPr dirty="0"/>
-              <a:t>Explain the 5 tables: Vehicle lookup master, Questions dynamic config, Summary header, Response transactional lines, and Media metadata.</a:t>
-            </a:r>
-          </a:p>
-          <a:p>
-            <a:r>
-              <a:rPr dirty="0"/>
-              <a:t>Detail how the Questions table keeps the app data-driven: adding new questions doesn't require code updates, eliminating future technical debt.</a:t>
-            </a:r>
-          </a:p>
-          <a:p>
-            <a:r>
-              <a:rPr dirty="0"/>
-              <a:t>Discuss security: 'Basic User - MWPSOL-141' custom role cloned to restrict Delete/Share, mapped to AD groups, and released via staged rings (0 to 4).</a:t>
-            </a:r>
-            <a:endParaRPr lang="en-AU" dirty="0"/>
-          </a:p>
-          <a:p>
-            <a:endParaRPr lang="en-AU" dirty="0"/>
-          </a:p>
-          <a:p>
-            <a:r>
-              <a:rPr lang="en-AU" sz="1200" kern="1200" dirty="0">
-                <a:solidFill>
-                  <a:schemeClr val="tx1"/>
-                </a:solidFill>
-                <a:effectLst/>
-                <a:latin typeface="+mn-lt"/>
-                <a:ea typeface="+mn-ea"/>
-                <a:cs typeface="+mn-cs"/>
-              </a:rPr>
-              <a:t>followed a </a:t>
-            </a:r>
-            <a:r>
-              <a:rPr lang="en-AU" sz="1200" b="1" kern="1200" dirty="0">
-                <a:solidFill>
-                  <a:schemeClr val="tx1"/>
-                </a:solidFill>
-                <a:effectLst/>
-                <a:latin typeface="+mn-lt"/>
-                <a:ea typeface="+mn-ea"/>
-                <a:cs typeface="+mn-cs"/>
-              </a:rPr>
-              <a:t>'Least Privilege' model</a:t>
-            </a:r>
-            <a:r>
-              <a:rPr lang="en-AU" sz="1200" kern="1200" dirty="0">
-                <a:solidFill>
-                  <a:schemeClr val="tx1"/>
-                </a:solidFill>
-                <a:effectLst/>
-                <a:latin typeface="+mn-lt"/>
-                <a:ea typeface="+mn-ea"/>
-                <a:cs typeface="+mn-cs"/>
-              </a:rPr>
-              <a:t>. I created a custom role called </a:t>
-            </a:r>
-            <a:r>
-              <a:rPr lang="en-AU" sz="1200" b="1" kern="1200" dirty="0">
-                <a:solidFill>
-                  <a:schemeClr val="tx1"/>
-                </a:solidFill>
-                <a:effectLst/>
-                <a:latin typeface="+mn-lt"/>
-                <a:ea typeface="+mn-ea"/>
-                <a:cs typeface="+mn-cs"/>
-              </a:rPr>
-              <a:t>'Basic User - MWPSOL-141'</a:t>
-            </a:r>
-            <a:r>
-              <a:rPr lang="en-AU" sz="1200" kern="1200" dirty="0">
-                <a:solidFill>
-                  <a:schemeClr val="tx1"/>
-                </a:solidFill>
-                <a:effectLst/>
-                <a:latin typeface="+mn-lt"/>
-                <a:ea typeface="+mn-ea"/>
-                <a:cs typeface="+mn-cs"/>
-              </a:rPr>
-              <a:t> by cloning the standard base role and hardening it. I specifically restricted the </a:t>
-            </a:r>
-            <a:r>
-              <a:rPr lang="en-AU" sz="1200" b="1" kern="1200" dirty="0">
-                <a:solidFill>
-                  <a:schemeClr val="tx1"/>
-                </a:solidFill>
-                <a:effectLst/>
-                <a:latin typeface="+mn-lt"/>
-                <a:ea typeface="+mn-ea"/>
-                <a:cs typeface="+mn-cs"/>
-              </a:rPr>
-              <a:t>Delete</a:t>
-            </a:r>
-            <a:r>
-              <a:rPr lang="en-AU" sz="1200" kern="1200" dirty="0">
-                <a:solidFill>
-                  <a:schemeClr val="tx1"/>
-                </a:solidFill>
-                <a:effectLst/>
-                <a:latin typeface="+mn-lt"/>
-                <a:ea typeface="+mn-ea"/>
-                <a:cs typeface="+mn-cs"/>
-              </a:rPr>
-              <a:t> and </a:t>
-            </a:r>
-            <a:r>
-              <a:rPr lang="en-AU" sz="1200" b="1" kern="1200" dirty="0">
-                <a:solidFill>
-                  <a:schemeClr val="tx1"/>
-                </a:solidFill>
-                <a:effectLst/>
-                <a:latin typeface="+mn-lt"/>
-                <a:ea typeface="+mn-ea"/>
-                <a:cs typeface="+mn-cs"/>
-              </a:rPr>
-              <a:t>Share</a:t>
-            </a:r>
-            <a:r>
-              <a:rPr lang="en-AU" sz="1200" kern="1200" dirty="0">
-                <a:solidFill>
-                  <a:schemeClr val="tx1"/>
-                </a:solidFill>
-                <a:effectLst/>
-                <a:latin typeface="+mn-lt"/>
-                <a:ea typeface="+mn-ea"/>
-                <a:cs typeface="+mn-cs"/>
-              </a:rPr>
-              <a:t> permissions on the Inspection tables to protect PII. </a:t>
-            </a:r>
-          </a:p>
-          <a:p>
-            <a:r>
-              <a:rPr lang="en-AU" sz="1200" kern="1200" dirty="0">
-                <a:solidFill>
-                  <a:schemeClr val="tx1"/>
-                </a:solidFill>
-                <a:effectLst/>
-                <a:latin typeface="+mn-lt"/>
-                <a:ea typeface="+mn-ea"/>
-                <a:cs typeface="+mn-cs"/>
-              </a:rPr>
-              <a:t>This ensured that only members of the verified AD Security Group could interact with the data, which is the same level of compliance rigor I’d apply to the client's SaaS environment.</a:t>
-            </a:r>
-          </a:p>
-          <a:p>
-            <a:endParaRPr lang="en-AU" dirty="0"/>
-          </a:p>
-          <a:p>
-            <a:pPr lvl="0" rtl="0" fontAlgn="ctr"/>
-            <a:r>
-              <a:rPr lang="en-AU" sz="1200" b="1" kern="1200" dirty="0">
-                <a:solidFill>
-                  <a:schemeClr val="tx1"/>
-                </a:solidFill>
-                <a:effectLst/>
-                <a:latin typeface="+mn-lt"/>
-                <a:ea typeface="+mn-ea"/>
-                <a:cs typeface="+mn-cs"/>
-              </a:rPr>
-              <a:t>Question &amp; Inspection Summary Table:</a:t>
-            </a:r>
-            <a:r>
-              <a:rPr lang="en-AU" sz="1200" kern="1200" dirty="0">
-                <a:solidFill>
-                  <a:schemeClr val="tx1"/>
-                </a:solidFill>
-                <a:effectLst/>
-                <a:latin typeface="+mn-lt"/>
-                <a:ea typeface="+mn-ea"/>
-                <a:cs typeface="+mn-cs"/>
-              </a:rPr>
-              <a:t> You granted </a:t>
-            </a:r>
-            <a:r>
-              <a:rPr lang="en-AU" sz="1200" b="1" kern="1200" dirty="0">
-                <a:solidFill>
-                  <a:schemeClr val="tx1"/>
-                </a:solidFill>
-                <a:effectLst/>
-                <a:latin typeface="+mn-lt"/>
-                <a:ea typeface="+mn-ea"/>
-                <a:cs typeface="+mn-cs"/>
-              </a:rPr>
-              <a:t>User-level </a:t>
-            </a:r>
-            <a:r>
-              <a:rPr lang="en-AU" sz="1200" kern="1200" dirty="0">
-                <a:solidFill>
-                  <a:schemeClr val="tx1"/>
-                </a:solidFill>
-                <a:effectLst/>
-                <a:latin typeface="+mn-lt"/>
-                <a:ea typeface="+mn-ea"/>
-                <a:cs typeface="+mn-cs"/>
-              </a:rPr>
-              <a:t>access of </a:t>
-            </a:r>
-            <a:r>
-              <a:rPr lang="en-AU" sz="1200" b="1" kern="1200" dirty="0">
-                <a:solidFill>
-                  <a:schemeClr val="tx1"/>
-                </a:solidFill>
-                <a:effectLst/>
-                <a:latin typeface="+mn-lt"/>
-                <a:ea typeface="+mn-ea"/>
-                <a:cs typeface="+mn-cs"/>
-              </a:rPr>
-              <a:t>Create &amp; write for users who own the records they create are assigned to the basic user security role</a:t>
-            </a:r>
-            <a:r>
-              <a:rPr lang="en-AU" sz="1200" kern="1200" dirty="0">
-                <a:solidFill>
-                  <a:schemeClr val="tx1"/>
-                </a:solidFill>
-                <a:effectLst/>
-                <a:latin typeface="+mn-lt"/>
-                <a:ea typeface="+mn-ea"/>
-                <a:cs typeface="+mn-cs"/>
-              </a:rPr>
-              <a:t>. The organisation (every other user else in the basic user security role) will have read access to every record, but no one is allowed to delete the records. This ensured that a patrol member could create and edit their own inspections but couldn't necessarily delete records or view inspections from unrelated departments.</a:t>
-            </a:r>
-          </a:p>
-          <a:p>
             <a:pPr lvl="0" rtl="0" fontAlgn="ctr"/>
             <a:r>
               <a:rPr lang="en-AU" sz="1200" b="1" kern="1200" dirty="0">
@@ -1014,196 +1844,6 @@
         <p14:creationId xmlns:p14="http://schemas.microsoft.com/office/powerpoint/2010/main" val="226301030"/>
       </p:ext>
     </p:extLst>
-  </p:cSld>
-  <p:clrMapOvr>
-    <a:masterClrMapping/>
-  </p:clrMapOvr>
-</p:notes>
-</file>
-
-<file path=ppt/notesSlides/notesSlide4.xml><?xml version="1.0" encoding="utf-8"?>
-<p:notes xmlns:a="http://schemas.openxmlformats.org/drawingml/2006/main" xmlns:r="http://schemas.openxmlformats.org/officeDocument/2006/relationships" xmlns:p="http://schemas.openxmlformats.org/presentationml/2006/main">
-  <p:cSld>
-    <p:spTree>
-      <p:nvGrpSpPr>
-        <p:cNvPr id="1" name=""/>
-        <p:cNvGrpSpPr/>
-        <p:nvPr/>
-      </p:nvGrpSpPr>
-      <p:grpSpPr>
-        <a:xfrm>
-          <a:off x="0" y="0"/>
-          <a:ext cx="0" cy="0"/>
-          <a:chOff x="0" y="0"/>
-          <a:chExt cx="0" cy="0"/>
-        </a:xfrm>
-      </p:grpSpPr>
-      <p:sp>
-        <p:nvSpPr>
-          <p:cNvPr id="2" name="Slide Image Placeholder 1"/>
-          <p:cNvSpPr>
-            <a:spLocks noGrp="1" noRot="1" noChangeAspect="1"/>
-          </p:cNvSpPr>
-          <p:nvPr>
-            <p:ph type="sldImg" idx="2"/>
-          </p:nvPr>
-        </p:nvSpPr>
-        <p:spPr/>
-      </p:sp>
-      <p:sp>
-        <p:nvSpPr>
-          <p:cNvPr id="3" name="Notes Placeholder 2"/>
-          <p:cNvSpPr>
-            <a:spLocks noGrp="1"/>
-          </p:cNvSpPr>
-          <p:nvPr>
-            <p:ph type="body" sz="quarter" idx="3"/>
-          </p:nvPr>
-        </p:nvSpPr>
-        <p:spPr/>
-        <p:txBody>
-          <a:bodyPr/>
-          <a:lstStyle/>
-          <a:p>
-            <a:r>
-              <a:t>SPEAKER NOTES:</a:t>
-            </a:r>
-          </a:p>
-          <a:p>
-            <a:r>
-              <a:t>This is your 'Architectural Blueprint' slide.</a:t>
-            </a:r>
-          </a:p>
-          <a:p>
-            <a:r>
-              <a:t>Explain that rather than using a flat-file database like SharePoint which lacks enterprise-grade relational integrity, you insisted on Microsoft Dataverse.</a:t>
-            </a:r>
-          </a:p>
-          <a:p>
-            <a:r>
-              <a:t>Explain the 5 tables: Vehicle lookup master, Questions dynamic config, Summary header, Response transactional lines, and Media metadata.</a:t>
-            </a:r>
-          </a:p>
-          <a:p>
-            <a:r>
-              <a:t>Detail how the Questions table keeps the app data-driven: adding new questions doesn't require code updates, eliminating future technical debt.</a:t>
-            </a:r>
-          </a:p>
-          <a:p>
-            <a:r>
-              <a:t>Discuss security: 'Basic User - MWPSOL-141' custom role cloned to restrict Delete/Share, mapped to AD groups, and released via staged rings (0 to 4).</a:t>
-            </a:r>
-          </a:p>
-        </p:txBody>
-      </p:sp>
-      <p:sp>
-        <p:nvSpPr>
-          <p:cNvPr id="4" name="Slide Number Placeholder 3"/>
-          <p:cNvSpPr>
-            <a:spLocks noGrp="1"/>
-          </p:cNvSpPr>
-          <p:nvPr>
-            <p:ph type="sldNum" sz="quarter" idx="5"/>
-          </p:nvPr>
-        </p:nvSpPr>
-        <p:spPr/>
-      </p:sp>
-    </p:spTree>
-  </p:cSld>
-  <p:clrMapOvr>
-    <a:masterClrMapping/>
-  </p:clrMapOvr>
-</p:notes>
-</file>
-
-<file path=ppt/notesSlides/notesSlide5.xml><?xml version="1.0" encoding="utf-8"?>
-<p:notes xmlns:a="http://schemas.openxmlformats.org/drawingml/2006/main" xmlns:r="http://schemas.openxmlformats.org/officeDocument/2006/relationships" xmlns:p="http://schemas.openxmlformats.org/presentationml/2006/main">
-  <p:cSld>
-    <p:spTree>
-      <p:nvGrpSpPr>
-        <p:cNvPr id="1" name=""/>
-        <p:cNvGrpSpPr/>
-        <p:nvPr/>
-      </p:nvGrpSpPr>
-      <p:grpSpPr>
-        <a:xfrm>
-          <a:off x="0" y="0"/>
-          <a:ext cx="0" cy="0"/>
-          <a:chOff x="0" y="0"/>
-          <a:chExt cx="0" cy="0"/>
-        </a:xfrm>
-      </p:grpSpPr>
-      <p:sp>
-        <p:nvSpPr>
-          <p:cNvPr id="2" name="Slide Image Placeholder 1"/>
-          <p:cNvSpPr>
-            <a:spLocks noGrp="1" noRot="1" noChangeAspect="1"/>
-          </p:cNvSpPr>
-          <p:nvPr>
-            <p:ph type="sldImg" idx="2"/>
-          </p:nvPr>
-        </p:nvSpPr>
-        <p:spPr/>
-      </p:sp>
-      <p:sp>
-        <p:nvSpPr>
-          <p:cNvPr id="3" name="Notes Placeholder 2"/>
-          <p:cNvSpPr>
-            <a:spLocks noGrp="1"/>
-          </p:cNvSpPr>
-          <p:nvPr>
-            <p:ph type="body" sz="quarter" idx="3"/>
-          </p:nvPr>
-        </p:nvSpPr>
-        <p:spPr/>
-        <p:txBody>
-          <a:bodyPr/>
-          <a:lstStyle/>
-          <a:p>
-            <a:r>
-              <a:t>SPEAKER NOTES:</a:t>
-            </a:r>
-          </a:p>
-          <a:p>
-            <a:r>
-              <a:t>Use this slide to demonstrate your 'Engineering Craft' and complete ownership of the SDLC.</a:t>
-            </a:r>
-          </a:p>
-          <a:p>
-            <a:r>
-              <a:t>Explain your role as the 'Strategic Translator' bridging the gap between business needs and developer execution.</a:t>
-            </a:r>
-          </a:p>
-          <a:p>
-            <a:r>
-              <a:t>Discuss Step 1: Running discovery workshops with roadside patrols and writing the SIDs.</a:t>
-            </a:r>
-          </a:p>
-          <a:p>
-            <a:r>
-              <a:t>Discuss Step 2: Running scrum ceremonies (PSM I), backlog refinement, and introducing Zephyr Scale testing templates to prevent the 'rushed delivery' traps from earlier roles.</a:t>
-            </a:r>
-          </a:p>
-          <a:p>
-            <a:r>
-              <a:t>Discuss Step 3: Managing pipelines, authoring the environment deployment guides, and handing over support to Helpdesk.</a:t>
-            </a:r>
-          </a:p>
-        </p:txBody>
-      </p:sp>
-      <p:sp>
-        <p:nvSpPr>
-          <p:cNvPr id="4" name="Slide Number Placeholder 3"/>
-          <p:cNvSpPr>
-            <a:spLocks noGrp="1"/>
-          </p:cNvSpPr>
-          <p:nvPr>
-            <p:ph type="sldNum" sz="quarter" idx="5"/>
-          </p:nvPr>
-        </p:nvSpPr>
-        <p:spPr/>
-      </p:sp>
-    </p:spTree>
   </p:cSld>
   <p:clrMapOvr>
     <a:masterClrMapping/>
@@ -1261,28 +1901,425 @@
           </a:p>
           <a:p>
             <a:r>
-              <a:t>Deliver the 'Quantified Value'—your mic-drop moment.</a:t>
-            </a:r>
-          </a:p>
-          <a:p>
-            <a:r>
-              <a:t>Explain that you didn't just build an app; you recovered 10,000 hours, equivalent to over 5 FTEs.</a:t>
-            </a:r>
-          </a:p>
-          <a:p>
-            <a:r>
-              <a:t>Highlight the financial impact: over AU$500,000 in recurring annual value returned to RAC's Motoring Services.</a:t>
-            </a:r>
-          </a:p>
-          <a:p>
-            <a:r>
-              <a:t>Close by emphasizing that you achieved this with zero technical debt—a clean 3NF database schema and custom security roles that cleared all compliance reviews.</a:t>
-            </a:r>
-          </a:p>
-          <a:p>
-            <a:r>
-              <a:t>Frame this as the exact blueprint of the results, security posture, and quality standards you will bring to the hiring manager's team.</a:t>
-            </a:r>
+              <a:t>This is your 'Architectural Blueprint' slide.</a:t>
+            </a:r>
+          </a:p>
+          <a:p>
+            <a:r>
+              <a:t>Explain that rather than using a flat-file database like SharePoint which lacks enterprise-grade relational integrity, you insisted on Microsoft Dataverse.</a:t>
+            </a:r>
+          </a:p>
+          <a:p>
+            <a:r>
+              <a:t>Explain the 5 tables: Vehicle lookup master, Questions dynamic config, Summary header, Response transactional lines, and Media metadata.</a:t>
+            </a:r>
+          </a:p>
+          <a:p>
+            <a:r>
+              <a:t>Detail how the Questions table keeps the app data-driven: adding new questions doesn't require code updates, eliminating future technical debt.</a:t>
+            </a:r>
+          </a:p>
+          <a:p>
+            <a:r>
+              <a:t>Discuss security: 'Basic User - MWPSOL-141' custom role cloned to restrict Delete/Share, mapped to AD groups, and released via staged rings (0 to 4).</a:t>
+            </a:r>
+          </a:p>
+        </p:txBody>
+      </p:sp>
+      <p:sp>
+        <p:nvSpPr>
+          <p:cNvPr id="4" name="Slide Number Placeholder 3"/>
+          <p:cNvSpPr>
+            <a:spLocks noGrp="1"/>
+          </p:cNvSpPr>
+          <p:nvPr>
+            <p:ph type="sldNum" sz="quarter" idx="5"/>
+          </p:nvPr>
+        </p:nvSpPr>
+        <p:spPr/>
+      </p:sp>
+    </p:spTree>
+  </p:cSld>
+  <p:clrMapOvr>
+    <a:masterClrMapping/>
+  </p:clrMapOvr>
+</p:notes>
+</file>
+
+<file path=ppt/notesSlides/notesSlide7.xml><?xml version="1.0" encoding="utf-8"?>
+<p:notes xmlns:a="http://schemas.openxmlformats.org/drawingml/2006/main" xmlns:r="http://schemas.openxmlformats.org/officeDocument/2006/relationships" xmlns:p="http://schemas.openxmlformats.org/presentationml/2006/main">
+  <p:cSld>
+    <p:spTree>
+      <p:nvGrpSpPr>
+        <p:cNvPr id="1" name=""/>
+        <p:cNvGrpSpPr/>
+        <p:nvPr/>
+      </p:nvGrpSpPr>
+      <p:grpSpPr>
+        <a:xfrm>
+          <a:off x="0" y="0"/>
+          <a:ext cx="0" cy="0"/>
+          <a:chOff x="0" y="0"/>
+          <a:chExt cx="0" cy="0"/>
+        </a:xfrm>
+      </p:grpSpPr>
+      <p:sp>
+        <p:nvSpPr>
+          <p:cNvPr id="2" name="Slide Image Placeholder 1"/>
+          <p:cNvSpPr>
+            <a:spLocks noGrp="1" noRot="1" noChangeAspect="1"/>
+          </p:cNvSpPr>
+          <p:nvPr>
+            <p:ph type="sldImg" idx="2"/>
+          </p:nvPr>
+        </p:nvSpPr>
+        <p:spPr/>
+      </p:sp>
+      <p:sp>
+        <p:nvSpPr>
+          <p:cNvPr id="3" name="Notes Placeholder 2"/>
+          <p:cNvSpPr>
+            <a:spLocks noGrp="1"/>
+          </p:cNvSpPr>
+          <p:nvPr>
+            <p:ph type="body" sz="quarter" idx="3"/>
+          </p:nvPr>
+        </p:nvSpPr>
+        <p:spPr/>
+        <p:txBody>
+          <a:bodyPr/>
+          <a:lstStyle/>
+          <a:p>
+            <a:r>
+              <a:rPr lang="en-AU" sz="1200" kern="1200" dirty="0">
+                <a:solidFill>
+                  <a:schemeClr val="tx1"/>
+                </a:solidFill>
+                <a:effectLst/>
+                <a:latin typeface="+mn-lt"/>
+                <a:ea typeface="+mn-ea"/>
+                <a:cs typeface="+mn-cs"/>
+              </a:rPr>
+              <a:t>The result was a successful launch on June 3, 2024, saving the business </a:t>
+            </a:r>
+            <a:r>
+              <a:rPr lang="en-AU" sz="1200" b="1" kern="1200" dirty="0">
+                <a:solidFill>
+                  <a:schemeClr val="tx1"/>
+                </a:solidFill>
+                <a:effectLst/>
+                <a:latin typeface="+mn-lt"/>
+                <a:ea typeface="+mn-ea"/>
+                <a:cs typeface="+mn-cs"/>
+              </a:rPr>
+              <a:t>$500,000 annually</a:t>
+            </a:r>
+            <a:r>
+              <a:rPr lang="en-AU" sz="1200" kern="1200" dirty="0">
+                <a:solidFill>
+                  <a:schemeClr val="tx1"/>
+                </a:solidFill>
+                <a:effectLst/>
+                <a:latin typeface="+mn-lt"/>
+                <a:ea typeface="+mn-ea"/>
+                <a:cs typeface="+mn-cs"/>
+              </a:rPr>
+              <a:t> and  It directly </a:t>
+            </a:r>
+            <a:r>
+              <a:rPr lang="en-AU" sz="1200" b="1" kern="1200" dirty="0">
+                <a:solidFill>
+                  <a:schemeClr val="tx1"/>
+                </a:solidFill>
+                <a:effectLst/>
+                <a:latin typeface="+mn-lt"/>
+                <a:ea typeface="+mn-ea"/>
+                <a:cs typeface="+mn-cs"/>
+              </a:rPr>
+              <a:t>saved Breakdown Patrols 2-3 minutes per job</a:t>
+            </a:r>
+            <a:r>
+              <a:rPr lang="en-AU" sz="1200" kern="1200" dirty="0">
+                <a:solidFill>
+                  <a:schemeClr val="tx1"/>
+                </a:solidFill>
+                <a:effectLst/>
+                <a:latin typeface="+mn-lt"/>
+                <a:ea typeface="+mn-ea"/>
+                <a:cs typeface="+mn-cs"/>
+              </a:rPr>
+              <a:t>, which, based on 200,000 jobs annually, translates to an estimated of </a:t>
+            </a:r>
+            <a:r>
+              <a:rPr lang="en-AU" sz="1200" b="1" kern="1200" dirty="0">
+                <a:solidFill>
+                  <a:schemeClr val="tx1"/>
+                </a:solidFill>
+                <a:effectLst/>
+                <a:latin typeface="+mn-lt"/>
+                <a:ea typeface="+mn-ea"/>
+                <a:cs typeface="+mn-cs"/>
+              </a:rPr>
+              <a:t>total saved time of *416 days annually.</a:t>
+            </a:r>
+          </a:p>
+          <a:p>
+            <a:endParaRPr lang="en-AU" sz="1200" kern="1200" dirty="0">
+              <a:solidFill>
+                <a:schemeClr val="tx1"/>
+              </a:solidFill>
+              <a:effectLst/>
+              <a:latin typeface="+mn-lt"/>
+              <a:ea typeface="+mn-ea"/>
+              <a:cs typeface="+mn-cs"/>
+            </a:endParaRPr>
+          </a:p>
+          <a:p>
+            <a:r>
+              <a:rPr lang="en-AU" sz="1200" b="1" kern="1200" dirty="0">
+                <a:solidFill>
+                  <a:schemeClr val="tx1"/>
+                </a:solidFill>
+                <a:effectLst/>
+                <a:latin typeface="+mn-lt"/>
+                <a:ea typeface="+mn-ea"/>
+                <a:cs typeface="+mn-cs"/>
+              </a:rPr>
+              <a:t>*Total Time Saved (Annual)</a:t>
+            </a:r>
+            <a:endParaRPr lang="en-AU" sz="1200" kern="1200" dirty="0">
+              <a:solidFill>
+                <a:schemeClr val="tx1"/>
+              </a:solidFill>
+              <a:effectLst/>
+              <a:latin typeface="+mn-lt"/>
+              <a:ea typeface="+mn-ea"/>
+              <a:cs typeface="+mn-cs"/>
+            </a:endParaRPr>
+          </a:p>
+          <a:p>
+            <a:pPr lvl="0" rtl="0" fontAlgn="ctr"/>
+            <a:r>
+              <a:rPr lang="en-AU" sz="1200" b="1" kern="1200" dirty="0">
+                <a:solidFill>
+                  <a:schemeClr val="tx1"/>
+                </a:solidFill>
+                <a:effectLst/>
+                <a:latin typeface="+mn-lt"/>
+                <a:ea typeface="+mn-ea"/>
+                <a:cs typeface="+mn-cs"/>
+              </a:rPr>
+              <a:t>-Low Estimate (2 mins):</a:t>
+            </a:r>
+            <a:r>
+              <a:rPr lang="en-AU" sz="1200" kern="1200" dirty="0">
+                <a:solidFill>
+                  <a:schemeClr val="tx1"/>
+                </a:solidFill>
+                <a:effectLst/>
+                <a:latin typeface="+mn-lt"/>
+                <a:ea typeface="+mn-ea"/>
+                <a:cs typeface="+mn-cs"/>
+              </a:rPr>
+              <a:t> 6,666 hours (approx. </a:t>
+            </a:r>
+            <a:r>
+              <a:rPr lang="en-AU" sz="1200" b="1" kern="1200" dirty="0">
+                <a:solidFill>
+                  <a:schemeClr val="tx1"/>
+                </a:solidFill>
+                <a:effectLst/>
+                <a:latin typeface="+mn-lt"/>
+                <a:ea typeface="+mn-ea"/>
+                <a:cs typeface="+mn-cs"/>
+              </a:rPr>
+              <a:t>277 days</a:t>
+            </a:r>
+            <a:r>
+              <a:rPr lang="en-AU" sz="1200" kern="1200" dirty="0">
+                <a:solidFill>
+                  <a:schemeClr val="tx1"/>
+                </a:solidFill>
+                <a:effectLst/>
+                <a:latin typeface="+mn-lt"/>
+                <a:ea typeface="+mn-ea"/>
+                <a:cs typeface="+mn-cs"/>
+              </a:rPr>
+              <a:t>)</a:t>
+            </a:r>
+          </a:p>
+          <a:p>
+            <a:pPr lvl="0" rtl="0" fontAlgn="ctr"/>
+            <a:r>
+              <a:rPr lang="en-AU" sz="1200" b="1" kern="1200" dirty="0">
+                <a:solidFill>
+                  <a:schemeClr val="tx1"/>
+                </a:solidFill>
+                <a:effectLst/>
+                <a:latin typeface="+mn-lt"/>
+                <a:ea typeface="+mn-ea"/>
+                <a:cs typeface="+mn-cs"/>
+              </a:rPr>
+              <a:t>-High Estimate (3 mins):</a:t>
+            </a:r>
+            <a:r>
+              <a:rPr lang="en-AU" sz="1200" kern="1200" dirty="0">
+                <a:solidFill>
+                  <a:schemeClr val="tx1"/>
+                </a:solidFill>
+                <a:effectLst/>
+                <a:latin typeface="+mn-lt"/>
+                <a:ea typeface="+mn-ea"/>
+                <a:cs typeface="+mn-cs"/>
+              </a:rPr>
+              <a:t> 10,000 hours (approx. </a:t>
+            </a:r>
+            <a:r>
+              <a:rPr lang="en-AU" sz="1200" b="1" kern="1200" dirty="0">
+                <a:solidFill>
+                  <a:schemeClr val="tx1"/>
+                </a:solidFill>
+                <a:effectLst/>
+                <a:latin typeface="+mn-lt"/>
+                <a:ea typeface="+mn-ea"/>
+                <a:cs typeface="+mn-cs"/>
+              </a:rPr>
+              <a:t>416 days</a:t>
+            </a:r>
+            <a:r>
+              <a:rPr lang="en-AU" sz="1200" kern="1200" dirty="0">
+                <a:solidFill>
+                  <a:schemeClr val="tx1"/>
+                </a:solidFill>
+                <a:effectLst/>
+                <a:latin typeface="+mn-lt"/>
+                <a:ea typeface="+mn-ea"/>
+                <a:cs typeface="+mn-cs"/>
+              </a:rPr>
+              <a:t>)</a:t>
+            </a:r>
+          </a:p>
+          <a:p>
+            <a:pPr lvl="0" rtl="0" fontAlgn="ctr"/>
+            <a:r>
+              <a:rPr lang="en-AU" sz="1200" kern="1200" dirty="0">
+                <a:solidFill>
+                  <a:schemeClr val="tx1"/>
+                </a:solidFill>
+                <a:effectLst/>
+                <a:latin typeface="+mn-lt"/>
+                <a:ea typeface="+mn-ea"/>
+                <a:cs typeface="+mn-cs"/>
+              </a:rPr>
+              <a:t>-100% reduction in manual data entry errors</a:t>
+            </a:r>
+          </a:p>
+          <a:p>
+            <a:r>
+              <a:rPr lang="en-AU" sz="1200" kern="1200" dirty="0">
+                <a:solidFill>
+                  <a:schemeClr val="tx1"/>
+                </a:solidFill>
+                <a:effectLst/>
+                <a:latin typeface="+mn-lt"/>
+                <a:ea typeface="+mn-ea"/>
+                <a:cs typeface="+mn-cs"/>
+              </a:rPr>
+              <a:t> </a:t>
+            </a:r>
+          </a:p>
+          <a:p>
+            <a:r>
+              <a:rPr lang="en-AU" sz="1200" kern="1200" dirty="0">
+                <a:solidFill>
+                  <a:schemeClr val="tx1"/>
+                </a:solidFill>
+                <a:effectLst/>
+                <a:latin typeface="+mn-lt"/>
+                <a:ea typeface="+mn-ea"/>
+                <a:cs typeface="+mn-cs"/>
+              </a:rPr>
+              <a:t>This project demonstrates exactly how I work: I don't just build apps; I </a:t>
+            </a:r>
+            <a:r>
+              <a:rPr lang="en-AU" sz="1200" kern="1200" dirty="0" err="1">
+                <a:solidFill>
+                  <a:schemeClr val="tx1"/>
+                </a:solidFill>
+                <a:effectLst/>
+                <a:latin typeface="+mn-lt"/>
+                <a:ea typeface="+mn-ea"/>
+                <a:cs typeface="+mn-cs"/>
+              </a:rPr>
+              <a:t>analyze</a:t>
+            </a:r>
+            <a:r>
+              <a:rPr lang="en-AU" sz="1200" kern="1200" dirty="0">
+                <a:solidFill>
+                  <a:schemeClr val="tx1"/>
+                </a:solidFill>
+                <a:effectLst/>
+                <a:latin typeface="+mn-lt"/>
+                <a:ea typeface="+mn-ea"/>
+                <a:cs typeface="+mn-cs"/>
+              </a:rPr>
+              <a:t> the requirements, weigh the technical trade-offs (like deferring the API for an MVP)</a:t>
+            </a:r>
+          </a:p>
+          <a:p>
+            <a:r>
+              <a:rPr lang="en-AU" sz="1200" kern="1200" dirty="0">
+                <a:solidFill>
+                  <a:schemeClr val="tx1"/>
+                </a:solidFill>
+                <a:effectLst/>
+                <a:latin typeface="+mn-lt"/>
+                <a:ea typeface="+mn-ea"/>
+                <a:cs typeface="+mn-cs"/>
+              </a:rPr>
+              <a:t> </a:t>
+            </a:r>
+          </a:p>
+          <a:p>
+            <a:r>
+              <a:rPr lang="en-AU" sz="1200" kern="1200" dirty="0">
+                <a:solidFill>
+                  <a:schemeClr val="tx1"/>
+                </a:solidFill>
+                <a:effectLst/>
+                <a:latin typeface="+mn-lt"/>
+                <a:ea typeface="+mn-ea"/>
+                <a:cs typeface="+mn-cs"/>
+              </a:rPr>
+              <a:t>I don't just write code; I </a:t>
+            </a:r>
+            <a:r>
+              <a:rPr lang="en-AU" sz="1200" b="1" kern="1200" dirty="0" err="1">
+                <a:solidFill>
+                  <a:schemeClr val="tx1"/>
+                </a:solidFill>
+                <a:effectLst/>
+                <a:latin typeface="+mn-lt"/>
+                <a:ea typeface="+mn-ea"/>
+                <a:cs typeface="+mn-cs"/>
+              </a:rPr>
+              <a:t>solutionize</a:t>
+            </a:r>
+            <a:r>
+              <a:rPr lang="en-AU" sz="1200" kern="1200" dirty="0">
+                <a:solidFill>
+                  <a:schemeClr val="tx1"/>
+                </a:solidFill>
+                <a:effectLst/>
+                <a:latin typeface="+mn-lt"/>
+                <a:ea typeface="+mn-ea"/>
+                <a:cs typeface="+mn-cs"/>
+              </a:rPr>
+              <a:t>. I can translate complex council requirements into reusable technical designs, manage the Azure DevOps pipeline, and write the .NET/React logic needed to extend Dataverse beyond its standard limits. I’m ready to help you scale the CouncilFirst platform with that same level of rigor."</a:t>
+            </a:r>
+          </a:p>
+          <a:p>
+            <a:endParaRPr dirty="0"/>
           </a:p>
         </p:txBody>
       </p:sp>
@@ -1485,7 +2522,7 @@
           <a:p>
             <a:fld id="{5BCAD085-E8A6-8845-BD4E-CB4CCA059FC4}" type="datetimeFigureOut">
               <a:rPr lang="en-US" smtClean="0"/>
-              <a:t>9/1/2026</a:t>
+              <a:t>9/2/2026</a:t>
             </a:fld>
             <a:endParaRPr lang="en-US"/>
           </a:p>
@@ -1653,7 +2690,7 @@
           <a:p>
             <a:fld id="{5BCAD085-E8A6-8845-BD4E-CB4CCA059FC4}" type="datetimeFigureOut">
               <a:rPr lang="en-US" smtClean="0"/>
-              <a:t>9/1/2026</a:t>
+              <a:t>9/2/2026</a:t>
             </a:fld>
             <a:endParaRPr lang="en-US"/>
           </a:p>
@@ -1831,7 +2868,7 @@
           <a:p>
             <a:fld id="{5BCAD085-E8A6-8845-BD4E-CB4CCA059FC4}" type="datetimeFigureOut">
               <a:rPr lang="en-US" smtClean="0"/>
-              <a:t>9/1/2026</a:t>
+              <a:t>9/2/2026</a:t>
             </a:fld>
             <a:endParaRPr lang="en-US"/>
           </a:p>
@@ -1999,7 +3036,7 @@
           <a:p>
             <a:fld id="{5BCAD085-E8A6-8845-BD4E-CB4CCA059FC4}" type="datetimeFigureOut">
               <a:rPr lang="en-US" smtClean="0"/>
-              <a:t>9/1/2026</a:t>
+              <a:t>9/2/2026</a:t>
             </a:fld>
             <a:endParaRPr lang="en-US"/>
           </a:p>
@@ -2244,7 +3281,7 @@
           <a:p>
             <a:fld id="{5BCAD085-E8A6-8845-BD4E-CB4CCA059FC4}" type="datetimeFigureOut">
               <a:rPr lang="en-US" smtClean="0"/>
-              <a:t>9/1/2026</a:t>
+              <a:t>9/2/2026</a:t>
             </a:fld>
             <a:endParaRPr lang="en-US"/>
           </a:p>
@@ -2529,7 +3566,7 @@
           <a:p>
             <a:fld id="{5BCAD085-E8A6-8845-BD4E-CB4CCA059FC4}" type="datetimeFigureOut">
               <a:rPr lang="en-US" smtClean="0"/>
-              <a:t>9/1/2026</a:t>
+              <a:t>9/2/2026</a:t>
             </a:fld>
             <a:endParaRPr lang="en-US"/>
           </a:p>
@@ -2948,7 +3985,7 @@
           <a:p>
             <a:fld id="{5BCAD085-E8A6-8845-BD4E-CB4CCA059FC4}" type="datetimeFigureOut">
               <a:rPr lang="en-US" smtClean="0"/>
-              <a:t>9/1/2026</a:t>
+              <a:t>9/2/2026</a:t>
             </a:fld>
             <a:endParaRPr lang="en-US"/>
           </a:p>
@@ -3065,7 +4102,7 @@
           <a:p>
             <a:fld id="{5BCAD085-E8A6-8845-BD4E-CB4CCA059FC4}" type="datetimeFigureOut">
               <a:rPr lang="en-US" smtClean="0"/>
-              <a:t>9/1/2026</a:t>
+              <a:t>9/2/2026</a:t>
             </a:fld>
             <a:endParaRPr lang="en-US"/>
           </a:p>
@@ -3160,7 +4197,7 @@
           <a:p>
             <a:fld id="{5BCAD085-E8A6-8845-BD4E-CB4CCA059FC4}" type="datetimeFigureOut">
               <a:rPr lang="en-US" smtClean="0"/>
-              <a:t>9/1/2026</a:t>
+              <a:t>9/2/2026</a:t>
             </a:fld>
             <a:endParaRPr lang="en-US"/>
           </a:p>
@@ -3435,7 +4472,7 @@
           <a:p>
             <a:fld id="{5BCAD085-E8A6-8845-BD4E-CB4CCA059FC4}" type="datetimeFigureOut">
               <a:rPr lang="en-US" smtClean="0"/>
-              <a:t>9/1/2026</a:t>
+              <a:t>9/2/2026</a:t>
             </a:fld>
             <a:endParaRPr lang="en-US"/>
           </a:p>
@@ -3687,7 +4724,7 @@
           <a:p>
             <a:fld id="{5BCAD085-E8A6-8845-BD4E-CB4CCA059FC4}" type="datetimeFigureOut">
               <a:rPr lang="en-US" smtClean="0"/>
-              <a:t>9/1/2026</a:t>
+              <a:t>9/2/2026</a:t>
             </a:fld>
             <a:endParaRPr lang="en-US"/>
           </a:p>
@@ -3898,7 +4935,7 @@
           <a:p>
             <a:fld id="{5BCAD085-E8A6-8845-BD4E-CB4CCA059FC4}" type="datetimeFigureOut">
               <a:rPr lang="en-US" smtClean="0"/>
-              <a:t>9/1/2026</a:t>
+              <a:t>9/2/2026</a:t>
             </a:fld>
             <a:endParaRPr lang="en-US"/>
           </a:p>
@@ -4281,466 +5318,186 @@
           <a:chExt cx="0" cy="0"/>
         </a:xfrm>
       </p:grpSpPr>
-      <p:sp>
-        <p:nvSpPr>
-          <p:cNvPr id="2" name="TextBox 1"/>
-          <p:cNvSpPr txBox="1"/>
+      <p:pic>
+        <p:nvPicPr>
+          <p:cNvPr id="9" name="Picture 8">
+            <a:extLst>
+              <a:ext uri="{FF2B5EF4-FFF2-40B4-BE49-F238E27FC236}">
+                <a16:creationId xmlns:a16="http://schemas.microsoft.com/office/drawing/2014/main" id="{10C7B294-5074-818B-89E0-7CDD78528C22}"/>
+              </a:ext>
+            </a:extLst>
+          </p:cNvPr>
+          <p:cNvPicPr>
+            <a:picLocks noChangeAspect="1"/>
+          </p:cNvPicPr>
           <p:nvPr/>
-        </p:nvSpPr>
+        </p:nvPicPr>
+        <p:blipFill>
+          <a:blip r:embed="rId3"/>
+          <a:stretch>
+            <a:fillRect/>
+          </a:stretch>
+        </p:blipFill>
         <p:spPr>
           <a:xfrm>
-            <a:off x="457200" y="1097280"/>
-            <a:ext cx="11277295" cy="2011680"/>
+            <a:off x="10579758" y="214105"/>
+            <a:ext cx="1131570" cy="1088600"/>
           </a:xfrm>
           <a:prstGeom prst="rect">
             <a:avLst/>
           </a:prstGeom>
-          <a:noFill/>
         </p:spPr>
-        <p:txBody>
-          <a:bodyPr wrap="square" lIns="0" tIns="0" rIns="0" bIns="0">
-            <a:spAutoFit/>
-          </a:bodyPr>
-          <a:lstStyle/>
-          <a:p>
-            <a:pPr>
-              <a:spcAft>
-                <a:spcPts val="600"/>
-              </a:spcAft>
-              <a:defRPr sz="3800" b="1">
-                <a:solidFill>
-                  <a:srgbClr val="FAF9F6"/>
-                </a:solidFill>
-                <a:latin typeface="Georgia"/>
-              </a:defRPr>
-            </a:pPr>
-            <a:r>
-              <a:t>Fleet Mobility &amp; Relational Data Transformation</a:t>
-            </a:r>
-          </a:p>
-          <a:p>
-            <a:pPr>
-              <a:defRPr sz="2000">
-                <a:solidFill>
-                  <a:srgbClr val="00C49F"/>
-                </a:solidFill>
-                <a:latin typeface="Calibri"/>
-              </a:defRPr>
-            </a:pPr>
-            <a:r>
-              <a:t>The Vehicle Inspection Application (VIA) Case Study</a:t>
-            </a:r>
-          </a:p>
-        </p:txBody>
-      </p:sp>
-      <p:sp>
-        <p:nvSpPr>
-          <p:cNvPr id="3" name="Rounded Rectangle 2"/>
-          <p:cNvSpPr/>
+      </p:pic>
+      <p:pic>
+        <p:nvPicPr>
+          <p:cNvPr id="11" name="Picture 10">
+            <a:extLst>
+              <a:ext uri="{FF2B5EF4-FFF2-40B4-BE49-F238E27FC236}">
+                <a16:creationId xmlns:a16="http://schemas.microsoft.com/office/drawing/2014/main" id="{AF8FC4E1-21C9-4DB7-987C-7C3F30857B54}"/>
+              </a:ext>
+            </a:extLst>
+          </p:cNvPr>
+          <p:cNvPicPr>
+            <a:picLocks noChangeAspect="1"/>
+          </p:cNvPicPr>
           <p:nvPr/>
-        </p:nvSpPr>
+        </p:nvPicPr>
+        <p:blipFill>
+          <a:blip r:embed="rId4"/>
+          <a:stretch>
+            <a:fillRect/>
+          </a:stretch>
+        </p:blipFill>
         <p:spPr>
           <a:xfrm>
-            <a:off x="457200" y="3474720"/>
-            <a:ext cx="3474720" cy="2194560"/>
+            <a:off x="0" y="8096"/>
+            <a:ext cx="9836278" cy="1744742"/>
           </a:xfrm>
-          <a:prstGeom prst="roundRect">
+          <a:prstGeom prst="rect">
             <a:avLst/>
           </a:prstGeom>
-          <a:solidFill>
-            <a:srgbClr val="1B4965"/>
-          </a:solidFill>
-          <a:ln>
-            <a:noFill/>
-          </a:ln>
         </p:spPr>
-        <p:style>
-          <a:lnRef idx="1">
-            <a:schemeClr val="accent1"/>
-          </a:lnRef>
-          <a:fillRef idx="3">
-            <a:schemeClr val="accent1"/>
-          </a:fillRef>
-          <a:effectRef idx="2">
-            <a:schemeClr val="accent1"/>
-          </a:effectRef>
-          <a:fontRef idx="minor">
-            <a:schemeClr val="lt1"/>
-          </a:fontRef>
-        </p:style>
-        <p:txBody>
-          <a:bodyPr wrap="square" lIns="182880" tIns="182880" rIns="182880" bIns="182880" rtlCol="0" anchor="ctr"/>
-          <a:lstStyle/>
-          <a:p>
-            <a:pPr algn="ctr">
-              <a:spcAft>
-                <a:spcPts val="400"/>
-              </a:spcAft>
-              <a:defRPr sz="1100" b="1">
-                <a:solidFill>
-                  <a:srgbClr val="00C49F"/>
-                </a:solidFill>
-                <a:latin typeface="Calibri"/>
-              </a:defRPr>
-            </a:pPr>
-            <a:r>
-              <a:t>LEAD SPECIALIST</a:t>
-            </a:r>
-          </a:p>
-          <a:p>
-            <a:pPr>
-              <a:spcAft>
-                <a:spcPts val="800"/>
-              </a:spcAft>
-              <a:defRPr sz="1800" b="1">
-                <a:solidFill>
-                  <a:srgbClr val="FAF9F6"/>
-                </a:solidFill>
-                <a:latin typeface="Georgia"/>
-              </a:defRPr>
-            </a:pPr>
-            <a:r>
-              <a:t>David Liong</a:t>
-            </a:r>
-          </a:p>
-          <a:p>
-            <a:pPr>
-              <a:spcAft>
-                <a:spcPts val="200"/>
-              </a:spcAft>
-              <a:defRPr sz="1100">
-                <a:solidFill>
-                  <a:srgbClr val="FAF9F6"/>
-                </a:solidFill>
-                <a:latin typeface="Calibri"/>
-              </a:defRPr>
-            </a:pPr>
-            <a:r>
-              <a:t>• Professional Scrum Master (PSM I)</a:t>
-            </a:r>
-          </a:p>
-          <a:p>
-            <a:pPr>
-              <a:spcAft>
-                <a:spcPts val="200"/>
-              </a:spcAft>
-              <a:defRPr sz="1100">
-                <a:solidFill>
-                  <a:srgbClr val="FAF9F6"/>
-                </a:solidFill>
-                <a:latin typeface="Calibri"/>
-              </a:defRPr>
-            </a:pPr>
-            <a:r>
-              <a:t>• Power Platform Developer Focus</a:t>
-            </a:r>
-          </a:p>
-          <a:p>
-            <a:pPr>
-              <a:spcAft>
-                <a:spcPts val="200"/>
-              </a:spcAft>
-              <a:defRPr sz="1100">
-                <a:solidFill>
-                  <a:srgbClr val="FAF9F6"/>
-                </a:solidFill>
-                <a:latin typeface="Calibri"/>
-              </a:defRPr>
-            </a:pPr>
-            <a:r>
-              <a:t>• Solution Architect PL-600 Focus</a:t>
-            </a:r>
-          </a:p>
-          <a:p>
-            <a:pPr>
-              <a:spcAft>
-                <a:spcPts val="200"/>
-              </a:spcAft>
-              <a:defRPr sz="1100">
-                <a:solidFill>
-                  <a:srgbClr val="FAF9F6"/>
-                </a:solidFill>
-                <a:latin typeface="Calibri"/>
-              </a:defRPr>
-            </a:pPr>
-            <a:r>
-              <a:t>• Experienced Technical BA &amp; Lead</a:t>
-            </a:r>
-          </a:p>
-        </p:txBody>
-      </p:sp>
-      <p:sp>
-        <p:nvSpPr>
-          <p:cNvPr id="4" name="Rounded Rectangle 3"/>
-          <p:cNvSpPr/>
+      </p:pic>
+      <p:pic>
+        <p:nvPicPr>
+          <p:cNvPr id="13" name="Picture 12">
+            <a:extLst>
+              <a:ext uri="{FF2B5EF4-FFF2-40B4-BE49-F238E27FC236}">
+                <a16:creationId xmlns:a16="http://schemas.microsoft.com/office/drawing/2014/main" id="{99DB093C-E585-B6C0-EE0B-4724060A45F9}"/>
+              </a:ext>
+            </a:extLst>
+          </p:cNvPr>
+          <p:cNvPicPr>
+            <a:picLocks noChangeAspect="1"/>
+          </p:cNvPicPr>
           <p:nvPr/>
-        </p:nvSpPr>
+        </p:nvPicPr>
+        <p:blipFill>
+          <a:blip r:embed="rId5"/>
+          <a:stretch>
+            <a:fillRect/>
+          </a:stretch>
+        </p:blipFill>
         <p:spPr>
           <a:xfrm>
-            <a:off x="4297680" y="3474720"/>
-            <a:ext cx="3474720" cy="2194560"/>
+            <a:off x="1" y="1773962"/>
+            <a:ext cx="12192000" cy="1674241"/>
           </a:xfrm>
-          <a:prstGeom prst="roundRect">
+          <a:prstGeom prst="rect">
             <a:avLst/>
           </a:prstGeom>
-          <a:solidFill>
-            <a:srgbClr val="1B4965"/>
-          </a:solidFill>
-          <a:ln>
-            <a:noFill/>
-          </a:ln>
         </p:spPr>
-        <p:style>
-          <a:lnRef idx="1">
-            <a:schemeClr val="accent1"/>
-          </a:lnRef>
-          <a:fillRef idx="3">
-            <a:schemeClr val="accent1"/>
-          </a:fillRef>
-          <a:effectRef idx="2">
-            <a:schemeClr val="accent1"/>
-          </a:effectRef>
-          <a:fontRef idx="minor">
-            <a:schemeClr val="lt1"/>
-          </a:fontRef>
-        </p:style>
-        <p:txBody>
-          <a:bodyPr wrap="square" lIns="182880" tIns="182880" rIns="182880" bIns="182880" rtlCol="0" anchor="ctr"/>
-          <a:lstStyle/>
-          <a:p>
-            <a:pPr algn="ctr">
-              <a:spcAft>
-                <a:spcPts val="400"/>
-              </a:spcAft>
-              <a:defRPr sz="1100" b="1">
-                <a:solidFill>
-                  <a:srgbClr val="00C49F"/>
-                </a:solidFill>
-                <a:latin typeface="Calibri"/>
-              </a:defRPr>
-            </a:pPr>
-            <a:r>
-              <a:t>TECH STACK</a:t>
-            </a:r>
-          </a:p>
-          <a:p>
-            <a:pPr>
-              <a:spcAft>
-                <a:spcPts val="800"/>
-              </a:spcAft>
-              <a:defRPr sz="1800" b="1">
-                <a:solidFill>
-                  <a:srgbClr val="FAF9F6"/>
-                </a:solidFill>
-                <a:latin typeface="Georgia"/>
-              </a:defRPr>
-            </a:pPr>
-            <a:r>
-              <a:t>Power Platform Core</a:t>
-            </a:r>
-          </a:p>
-          <a:p>
-            <a:pPr>
-              <a:spcAft>
-                <a:spcPts val="200"/>
-              </a:spcAft>
-              <a:defRPr sz="1100">
-                <a:solidFill>
-                  <a:srgbClr val="FAF9F6"/>
-                </a:solidFill>
-                <a:latin typeface="Calibri"/>
-              </a:defRPr>
-            </a:pPr>
-            <a:r>
-              <a:t>• Microsoft Dataverse (3NF Schema)</a:t>
-            </a:r>
-          </a:p>
-          <a:p>
-            <a:pPr>
-              <a:spcAft>
-                <a:spcPts val="200"/>
-              </a:spcAft>
-              <a:defRPr sz="1100">
-                <a:solidFill>
-                  <a:srgbClr val="FAF9F6"/>
-                </a:solidFill>
-                <a:latin typeface="Calibri"/>
-              </a:defRPr>
-            </a:pPr>
-            <a:r>
-              <a:t>• Power Apps (Canvas &amp; Model-Driven)</a:t>
-            </a:r>
-          </a:p>
-          <a:p>
-            <a:pPr>
-              <a:spcAft>
-                <a:spcPts val="200"/>
-              </a:spcAft>
-              <a:defRPr sz="1100">
-                <a:solidFill>
-                  <a:srgbClr val="FAF9F6"/>
-                </a:solidFill>
-                <a:latin typeface="Calibri"/>
-              </a:defRPr>
-            </a:pPr>
-            <a:r>
-              <a:t>• Power Automate Flow Orchestration</a:t>
-            </a:r>
-          </a:p>
-          <a:p>
-            <a:pPr>
-              <a:spcAft>
-                <a:spcPts val="200"/>
-              </a:spcAft>
-              <a:defRPr sz="1100">
-                <a:solidFill>
-                  <a:srgbClr val="FAF9F6"/>
-                </a:solidFill>
-                <a:latin typeface="Calibri"/>
-              </a:defRPr>
-            </a:pPr>
-            <a:r>
-              <a:t>• SharePoint Online Document Library</a:t>
-            </a:r>
-          </a:p>
-        </p:txBody>
-      </p:sp>
-      <p:sp>
-        <p:nvSpPr>
-          <p:cNvPr id="5" name="Rounded Rectangle 4"/>
-          <p:cNvSpPr/>
+      </p:pic>
+      <p:pic>
+        <p:nvPicPr>
+          <p:cNvPr id="19" name="Picture 18">
+            <a:extLst>
+              <a:ext uri="{FF2B5EF4-FFF2-40B4-BE49-F238E27FC236}">
+                <a16:creationId xmlns:a16="http://schemas.microsoft.com/office/drawing/2014/main" id="{DC344BD4-0ABB-1393-23FA-4FEC0819A704}"/>
+              </a:ext>
+            </a:extLst>
+          </p:cNvPr>
+          <p:cNvPicPr>
+            <a:picLocks noChangeAspect="1"/>
+          </p:cNvPicPr>
           <p:nvPr/>
-        </p:nvSpPr>
+        </p:nvPicPr>
+        <p:blipFill>
+          <a:blip r:embed="rId6"/>
+          <a:stretch>
+            <a:fillRect/>
+          </a:stretch>
+        </p:blipFill>
         <p:spPr>
           <a:xfrm>
-            <a:off x="8138160" y="3474720"/>
-            <a:ext cx="3474720" cy="2194560"/>
+            <a:off x="564517" y="3919460"/>
+            <a:ext cx="2804382" cy="2314353"/>
           </a:xfrm>
-          <a:prstGeom prst="roundRect">
+          <a:prstGeom prst="rect">
             <a:avLst/>
           </a:prstGeom>
-          <a:solidFill>
-            <a:srgbClr val="1B4965"/>
-          </a:solidFill>
-          <a:ln>
-            <a:noFill/>
-          </a:ln>
         </p:spPr>
-        <p:style>
-          <a:lnRef idx="1">
-            <a:schemeClr val="accent1"/>
-          </a:lnRef>
-          <a:fillRef idx="3">
-            <a:schemeClr val="accent1"/>
-          </a:fillRef>
-          <a:effectRef idx="2">
-            <a:schemeClr val="accent1"/>
-          </a:effectRef>
-          <a:fontRef idx="minor">
-            <a:schemeClr val="lt1"/>
-          </a:fontRef>
-        </p:style>
-        <p:txBody>
-          <a:bodyPr wrap="square" lIns="182880" tIns="182880" rIns="182880" bIns="182880" rtlCol="0" anchor="ctr"/>
-          <a:lstStyle/>
-          <a:p>
-            <a:pPr algn="ctr">
-              <a:spcAft>
-                <a:spcPts val="400"/>
-              </a:spcAft>
-              <a:defRPr sz="1100" b="1">
-                <a:solidFill>
-                  <a:srgbClr val="00C49F"/>
-                </a:solidFill>
-                <a:latin typeface="Calibri"/>
-              </a:defRPr>
-            </a:pPr>
-            <a:r>
-              <a:t>CLIENT CONTEXT</a:t>
-            </a:r>
-          </a:p>
-          <a:p>
-            <a:pPr>
-              <a:spcAft>
-                <a:spcPts val="800"/>
-              </a:spcAft>
-              <a:defRPr sz="1800" b="1">
-                <a:solidFill>
-                  <a:srgbClr val="FAF9F6"/>
-                </a:solidFill>
-                <a:latin typeface="Georgia"/>
-              </a:defRPr>
-            </a:pPr>
-            <a:r>
-              <a:t>RAC Motoring Services</a:t>
-            </a:r>
-          </a:p>
-          <a:p>
-            <a:pPr>
-              <a:spcAft>
-                <a:spcPts val="200"/>
-              </a:spcAft>
-              <a:defRPr sz="1100">
-                <a:solidFill>
-                  <a:srgbClr val="FAF9F6"/>
-                </a:solidFill>
-                <a:latin typeface="Calibri"/>
-              </a:defRPr>
-            </a:pPr>
-            <a:r>
-              <a:t>• Sector: Automotive &amp; Roadside</a:t>
-            </a:r>
-          </a:p>
-          <a:p>
-            <a:pPr>
-              <a:spcAft>
-                <a:spcPts val="200"/>
-              </a:spcAft>
-              <a:defRPr sz="1100">
-                <a:solidFill>
-                  <a:srgbClr val="FAF9F6"/>
-                </a:solidFill>
-                <a:latin typeface="Calibri"/>
-              </a:defRPr>
-            </a:pPr>
-            <a:r>
-              <a:t>• Scope: 200,000 annual inspections</a:t>
-            </a:r>
-          </a:p>
-          <a:p>
-            <a:pPr>
-              <a:spcAft>
-                <a:spcPts val="200"/>
-              </a:spcAft>
-              <a:defRPr sz="1100">
-                <a:solidFill>
-                  <a:srgbClr val="FAF9F6"/>
-                </a:solidFill>
-                <a:latin typeface="Calibri"/>
-              </a:defRPr>
-            </a:pPr>
-            <a:r>
-              <a:t>• Goal: Process digitisation</a:t>
-            </a:r>
-          </a:p>
-          <a:p>
-            <a:pPr>
-              <a:spcAft>
-                <a:spcPts val="200"/>
-              </a:spcAft>
-              <a:defRPr sz="1100">
-                <a:solidFill>
-                  <a:srgbClr val="FAF9F6"/>
-                </a:solidFill>
-                <a:latin typeface="Calibri"/>
-              </a:defRPr>
-            </a:pPr>
-            <a:r>
-              <a:t>• Impact: Zero-downtime go-live</a:t>
-            </a:r>
-          </a:p>
-        </p:txBody>
-      </p:sp>
+      </p:pic>
+      <p:pic>
+        <p:nvPicPr>
+          <p:cNvPr id="21" name="Picture 20">
+            <a:extLst>
+              <a:ext uri="{FF2B5EF4-FFF2-40B4-BE49-F238E27FC236}">
+                <a16:creationId xmlns:a16="http://schemas.microsoft.com/office/drawing/2014/main" id="{85EC62FA-EF2B-660B-F3DC-A036E543F366}"/>
+              </a:ext>
+            </a:extLst>
+          </p:cNvPr>
+          <p:cNvPicPr>
+            <a:picLocks noChangeAspect="1"/>
+          </p:cNvPicPr>
+          <p:nvPr/>
+        </p:nvPicPr>
+        <p:blipFill>
+          <a:blip r:embed="rId7"/>
+          <a:stretch>
+            <a:fillRect/>
+          </a:stretch>
+        </p:blipFill>
+        <p:spPr>
+          <a:xfrm>
+            <a:off x="8422631" y="3919460"/>
+            <a:ext cx="3407420" cy="2323241"/>
+          </a:xfrm>
+          <a:prstGeom prst="rect">
+            <a:avLst/>
+          </a:prstGeom>
+        </p:spPr>
+      </p:pic>
+      <p:pic>
+        <p:nvPicPr>
+          <p:cNvPr id="23" name="Picture 22">
+            <a:extLst>
+              <a:ext uri="{FF2B5EF4-FFF2-40B4-BE49-F238E27FC236}">
+                <a16:creationId xmlns:a16="http://schemas.microsoft.com/office/drawing/2014/main" id="{E6E100F5-AC97-66C9-608D-EC856312B97D}"/>
+              </a:ext>
+            </a:extLst>
+          </p:cNvPr>
+          <p:cNvPicPr>
+            <a:picLocks noChangeAspect="1"/>
+          </p:cNvPicPr>
+          <p:nvPr/>
+        </p:nvPicPr>
+        <p:blipFill>
+          <a:blip r:embed="rId8"/>
+          <a:stretch>
+            <a:fillRect/>
+          </a:stretch>
+        </p:blipFill>
+        <p:spPr>
+          <a:xfrm>
+            <a:off x="4271526" y="4662240"/>
+            <a:ext cx="3248478" cy="828791"/>
+          </a:xfrm>
+          <a:prstGeom prst="rect">
+            <a:avLst/>
+          </a:prstGeom>
+        </p:spPr>
+      </p:pic>
     </p:spTree>
   </p:cSld>
   <p:clrMapOvr>
@@ -4776,6 +5533,67 @@
       </p:grpSpPr>
       <p:sp>
         <p:nvSpPr>
+          <p:cNvPr id="10" name="Shape 0">
+            <a:extLst>
+              <a:ext uri="{FF2B5EF4-FFF2-40B4-BE49-F238E27FC236}">
+                <a16:creationId xmlns:a16="http://schemas.microsoft.com/office/drawing/2014/main" id="{F294C21C-C30D-1A3D-B758-7735E7AF0043}"/>
+              </a:ext>
+            </a:extLst>
+          </p:cNvPr>
+          <p:cNvSpPr/>
+          <p:nvPr/>
+        </p:nvSpPr>
+        <p:spPr>
+          <a:xfrm>
+            <a:off x="0" y="360"/>
+            <a:ext cx="12192000" cy="6857640"/>
+          </a:xfrm>
+          <a:prstGeom prst="rect">
+            <a:avLst/>
+          </a:prstGeom>
+          <a:solidFill>
+            <a:srgbClr val="071B33"/>
+          </a:solidFill>
+          <a:ln w="12700">
+            <a:solidFill>
+              <a:srgbClr val="333333">
+                <a:alpha val="0"/>
+              </a:srgbClr>
+            </a:solidFill>
+            <a:round/>
+          </a:ln>
+        </p:spPr>
+        <p:style>
+          <a:lnRef idx="0">
+            <a:scrgbClr r="0" g="0" b="0"/>
+          </a:lnRef>
+          <a:fillRef idx="0">
+            <a:scrgbClr r="0" g="0" b="0"/>
+          </a:fillRef>
+          <a:effectRef idx="0">
+            <a:scrgbClr r="0" g="0" b="0"/>
+          </a:effectRef>
+          <a:fontRef idx="minor"/>
+        </p:style>
+        <p:txBody>
+          <a:bodyPr lIns="90000" tIns="45000" rIns="90000" bIns="45000" anchor="t">
+            <a:noAutofit/>
+          </a:bodyPr>
+          <a:lstStyle/>
+          <a:p>
+            <a:endParaRPr lang="en-US" sz="1800" b="0" u="none" strike="noStrike">
+              <a:solidFill>
+                <a:srgbClr val="FFFFFF"/>
+              </a:solidFill>
+              <a:effectLst/>
+              <a:uFillTx/>
+              <a:latin typeface="Arial"/>
+            </a:endParaRPr>
+          </a:p>
+        </p:txBody>
+      </p:sp>
+      <p:sp>
+        <p:nvSpPr>
           <p:cNvPr id="2" name="TextBox 1"/>
           <p:cNvSpPr txBox="1"/>
           <p:nvPr/>
@@ -4783,7 +5601,7 @@
         <p:spPr>
           <a:xfrm>
             <a:off x="457200" y="274320"/>
-            <a:ext cx="11277295" cy="640080"/>
+            <a:ext cx="11277295" cy="369332"/>
           </a:xfrm>
           <a:prstGeom prst="rect">
             <a:avLst/>
@@ -4805,6 +5623,11 @@
               </a:defRPr>
             </a:pPr>
             <a:r>
+              <a:rPr dirty="0">
+                <a:solidFill>
+                  <a:schemeClr val="bg1"/>
+                </a:solidFill>
+              </a:rPr>
               <a:t>Un-Governed Legacy Paper Workflows Constrained Growth</a:t>
             </a:r>
           </a:p>
@@ -4819,7 +5642,7 @@
         <p:spPr>
           <a:xfrm>
             <a:off x="457200" y="914400"/>
-            <a:ext cx="11277295" cy="365760"/>
+            <a:ext cx="11277295" cy="307777"/>
           </a:xfrm>
           <a:prstGeom prst="rect">
             <a:avLst/>
@@ -4841,6 +5664,19 @@
               </a:defRPr>
             </a:pPr>
             <a:r>
+              <a:rPr lang="en-AU" sz="2000" dirty="0">
+                <a:solidFill>
+                  <a:srgbClr val="F6C514"/>
+                </a:solidFill>
+              </a:rPr>
+              <a:t>Pillar 1: </a:t>
+            </a:r>
+            <a:r>
+              <a:rPr sz="2000" dirty="0">
+                <a:solidFill>
+                  <a:srgbClr val="F6C514"/>
+                </a:solidFill>
+              </a:rPr>
               <a:t>THE EXECUTIVE CHALLENGE (THE PROBLEM)</a:t>
             </a:r>
           </a:p>
@@ -4861,7 +5697,7 @@
             <a:avLst/>
           </a:prstGeom>
           <a:solidFill>
-            <a:srgbClr val="00C49F"/>
+            <a:srgbClr val="F6C514"/>
           </a:solidFill>
           <a:ln>
             <a:noFill/>
@@ -4898,14 +5734,14 @@
         </p:nvSpPr>
         <p:spPr>
           <a:xfrm>
-            <a:off x="457200" y="1920240"/>
-            <a:ext cx="4114800" cy="4114800"/>
+            <a:off x="335280" y="1637863"/>
+            <a:ext cx="3219450" cy="3802817"/>
           </a:xfrm>
           <a:prstGeom prst="rect">
             <a:avLst/>
           </a:prstGeom>
           <a:solidFill>
-            <a:srgbClr val="0A192F"/>
+            <a:srgbClr val="0D2B49"/>
           </a:solidFill>
           <a:ln>
             <a:noFill/>
@@ -4929,22 +5765,6 @@
           <a:bodyPr wrap="square" lIns="365760" tIns="365760" rIns="365760" bIns="365760" rtlCol="0" anchor="ctr"/>
           <a:lstStyle/>
           <a:p>
-            <a:pPr algn="ctr">
-              <a:spcAft>
-                <a:spcPts val="1400"/>
-              </a:spcAft>
-              <a:defRPr sz="1200" b="1">
-                <a:solidFill>
-                  <a:srgbClr val="00C49F"/>
-                </a:solidFill>
-                <a:latin typeface="Calibri"/>
-              </a:defRPr>
-            </a:pPr>
-            <a:r>
-              <a:t>BUSINESS RISK</a:t>
-            </a:r>
-          </a:p>
-          <a:p>
             <a:pPr>
               <a:spcAft>
                 <a:spcPts val="1400"/>
@@ -4957,8 +5777,18 @@
               </a:defRPr>
             </a:pPr>
             <a:r>
-              <a:t>Operational Leakage</a:t>
-            </a:r>
+              <a:rPr lang="en-AU" dirty="0">
+                <a:solidFill>
+                  <a:srgbClr val="F6C514"/>
+                </a:solidFill>
+              </a:rPr>
+              <a:t>Executive Impact</a:t>
+            </a:r>
+            <a:endParaRPr dirty="0">
+              <a:solidFill>
+                <a:srgbClr val="F6C514"/>
+              </a:solidFill>
+            </a:endParaRPr>
           </a:p>
           <a:p>
             <a:pPr>
@@ -4970,7 +5800,24 @@
               </a:defRPr>
             </a:pPr>
             <a:r>
-              <a:t>RAC's mobile patrols were bound to a slow, physical paper workflow for inspections. The lack of standard automation and real-time validation meant that simple transcription took up valuable frontline capacity, exposing the organization to operational friction and compliance threats.</a:t>
+              <a:rPr sz="1600" dirty="0"/>
+              <a:t>RAC's mobile patrols </a:t>
+            </a:r>
+            <a:r>
+              <a:rPr lang="en-AU" sz="1600" dirty="0"/>
+              <a:t>and auto mechanics </a:t>
+            </a:r>
+            <a:r>
+              <a:rPr sz="1600" dirty="0"/>
+              <a:t>were bound to a slow, physical paper workflow for </a:t>
+            </a:r>
+            <a:r>
+              <a:rPr lang="en-AU" sz="1600" dirty="0"/>
+              <a:t>car </a:t>
+            </a:r>
+            <a:r>
+              <a:rPr sz="1600" dirty="0"/>
+              <a:t>inspections. The lack of standard automation and real-time validation meant that simple transcription took up valuable frontline capacity, exposing the organization to operational friction and compliance threats.</a:t>
             </a:r>
           </a:p>
         </p:txBody>
@@ -4983,8 +5830,8 @@
         </p:nvSpPr>
         <p:spPr>
           <a:xfrm>
-            <a:off x="4937760" y="1920240"/>
-            <a:ext cx="6766560" cy="1188720"/>
+            <a:off x="3623310" y="1626433"/>
+            <a:ext cx="6528983" cy="1188720"/>
           </a:xfrm>
           <a:prstGeom prst="roundRect">
             <a:avLst/>
@@ -5026,7 +5873,11 @@
               </a:defRPr>
             </a:pPr>
             <a:r>
-              <a:rPr dirty="0"/>
+              <a:rPr sz="1400" dirty="0">
+                <a:solidFill>
+                  <a:srgbClr val="FF0000"/>
+                </a:solidFill>
+              </a:rPr>
               <a:t>OPERATIONAL INEFFICIENCY</a:t>
             </a:r>
           </a:p>
@@ -5057,7 +5908,7 @@
               </a:defRPr>
             </a:pPr>
             <a:r>
-              <a:rPr dirty="0"/>
+              <a:rPr sz="1400" dirty="0"/>
               <a:t>Manual transcription of complex VIN and Engine numbers consumed 2 to 3 minutes of frontline patrol time per job across 200,000 annual runs.</a:t>
             </a:r>
           </a:p>
@@ -5071,8 +5922,8 @@
         </p:nvSpPr>
         <p:spPr>
           <a:xfrm>
-            <a:off x="4937760" y="3383280"/>
-            <a:ext cx="6766560" cy="1188720"/>
+            <a:off x="3634740" y="2950626"/>
+            <a:ext cx="6528983" cy="1188720"/>
           </a:xfrm>
           <a:prstGeom prst="roundRect">
             <a:avLst/>
@@ -5114,6 +5965,11 @@
               </a:defRPr>
             </a:pPr>
             <a:r>
+              <a:rPr sz="1400" dirty="0">
+                <a:solidFill>
+                  <a:srgbClr val="FF0000"/>
+                </a:solidFill>
+              </a:rPr>
               <a:t>COMPLIANCE &amp; SECURITY THREAT</a:t>
             </a:r>
           </a:p>
@@ -5130,6 +5986,7 @@
               </a:defRPr>
             </a:pPr>
             <a:r>
+              <a:rPr dirty="0"/>
               <a:t>Field Exposure of Sensitive PII</a:t>
             </a:r>
           </a:p>
@@ -5143,6 +6000,7 @@
               </a:defRPr>
             </a:pPr>
             <a:r>
+              <a:rPr sz="1400" dirty="0"/>
               <a:t>Physical paper logs with customer and vehicle details remained in roadside vans without obfuscation, creating serious data sovereignty and security risks.</a:t>
             </a:r>
           </a:p>
@@ -5156,8 +6014,8 @@
         </p:nvSpPr>
         <p:spPr>
           <a:xfrm>
-            <a:off x="4937760" y="4846320"/>
-            <a:ext cx="6766560" cy="1188720"/>
+            <a:off x="3661410" y="4274819"/>
+            <a:ext cx="6528983" cy="1188720"/>
           </a:xfrm>
           <a:prstGeom prst="roundRect">
             <a:avLst/>
@@ -5199,6 +6057,11 @@
               </a:defRPr>
             </a:pPr>
             <a:r>
+              <a:rPr sz="1600" dirty="0">
+                <a:solidFill>
+                  <a:srgbClr val="FF0000"/>
+                </a:solidFill>
+              </a:rPr>
               <a:t>SYSTEM ISOLATION</a:t>
             </a:r>
           </a:p>
@@ -5215,6 +6078,7 @@
               </a:defRPr>
             </a:pPr>
             <a:r>
+              <a:rPr dirty="0"/>
               <a:t>Siloed Data &amp; Zero Analytics</a:t>
             </a:r>
           </a:p>
@@ -5228,11 +6092,321 @@
               </a:defRPr>
             </a:pPr>
             <a:r>
+              <a:rPr sz="1400" dirty="0"/>
               <a:t>Data was physically trapped on paper, preventing any real-time tracking, compliance auditing, automated notifications, or Power BI reporting.</a:t>
             </a:r>
           </a:p>
         </p:txBody>
       </p:sp>
+      <p:sp>
+        <p:nvSpPr>
+          <p:cNvPr id="12" name="Rounded Rectangle 7">
+            <a:extLst>
+              <a:ext uri="{FF2B5EF4-FFF2-40B4-BE49-F238E27FC236}">
+                <a16:creationId xmlns:a16="http://schemas.microsoft.com/office/drawing/2014/main" id="{A22327DA-C0DC-D288-0D44-90F02F896CF8}"/>
+              </a:ext>
+            </a:extLst>
+          </p:cNvPr>
+          <p:cNvSpPr/>
+          <p:nvPr/>
+        </p:nvSpPr>
+        <p:spPr>
+          <a:xfrm>
+            <a:off x="3615690" y="5577480"/>
+            <a:ext cx="6574703" cy="1188720"/>
+          </a:xfrm>
+          <a:prstGeom prst="roundRect">
+            <a:avLst/>
+          </a:prstGeom>
+          <a:solidFill>
+            <a:srgbClr val="FFFFFF"/>
+          </a:solidFill>
+          <a:ln>
+            <a:noFill/>
+          </a:ln>
+        </p:spPr>
+        <p:style>
+          <a:lnRef idx="1">
+            <a:schemeClr val="accent1"/>
+          </a:lnRef>
+          <a:fillRef idx="3">
+            <a:schemeClr val="accent1"/>
+          </a:fillRef>
+          <a:effectRef idx="2">
+            <a:schemeClr val="accent1"/>
+          </a:effectRef>
+          <a:fontRef idx="minor">
+            <a:schemeClr val="lt1"/>
+          </a:fontRef>
+        </p:style>
+        <p:txBody>
+          <a:bodyPr wrap="square" lIns="137160" tIns="137160" rIns="137160" bIns="137160" rtlCol="0" anchor="ctr"/>
+          <a:lstStyle/>
+          <a:p>
+            <a:pPr algn="ctr">
+              <a:spcAft>
+                <a:spcPts val="200"/>
+              </a:spcAft>
+              <a:defRPr sz="1100" b="1">
+                <a:solidFill>
+                  <a:srgbClr val="64748B"/>
+                </a:solidFill>
+                <a:latin typeface="Calibri"/>
+              </a:defRPr>
+            </a:pPr>
+            <a:r>
+              <a:rPr lang="en-AU" sz="1600" dirty="0">
+                <a:solidFill>
+                  <a:srgbClr val="FF0000"/>
+                </a:solidFill>
+              </a:rPr>
+              <a:t>BUSINESS RISK</a:t>
+            </a:r>
+            <a:endParaRPr sz="1600" dirty="0">
+              <a:solidFill>
+                <a:srgbClr val="FF0000"/>
+              </a:solidFill>
+            </a:endParaRPr>
+          </a:p>
+          <a:p>
+            <a:pPr>
+              <a:spcAft>
+                <a:spcPts val="400"/>
+              </a:spcAft>
+              <a:defRPr sz="1600" b="1">
+                <a:solidFill>
+                  <a:srgbClr val="0A192F"/>
+                </a:solidFill>
+                <a:latin typeface="Georgia"/>
+              </a:defRPr>
+            </a:pPr>
+            <a:r>
+              <a:rPr lang="en-AU" dirty="0"/>
+              <a:t>Operational Leakage</a:t>
+            </a:r>
+            <a:endParaRPr dirty="0"/>
+          </a:p>
+          <a:p>
+            <a:pPr>
+              <a:defRPr sz="1100">
+                <a:solidFill>
+                  <a:srgbClr val="0A192F"/>
+                </a:solidFill>
+                <a:latin typeface="Calibri"/>
+              </a:defRPr>
+            </a:pPr>
+            <a:r>
+              <a:rPr lang="en-US" sz="1400" dirty="0">
+                <a:solidFill>
+                  <a:srgbClr val="1D2D3F"/>
+                </a:solidFill>
+                <a:latin typeface="+mj-lt"/>
+              </a:rPr>
+              <a:t>Mobile patrols were bound to slow physical forms without standard automation or real-time validation.</a:t>
+            </a:r>
+            <a:endParaRPr lang="en-US" sz="1400" dirty="0">
+              <a:solidFill>
+                <a:srgbClr val="000000"/>
+              </a:solidFill>
+              <a:latin typeface="+mj-lt"/>
+            </a:endParaRPr>
+          </a:p>
+          <a:p>
+            <a:pPr>
+              <a:defRPr sz="1100">
+                <a:solidFill>
+                  <a:srgbClr val="0A192F"/>
+                </a:solidFill>
+                <a:latin typeface="Calibri"/>
+              </a:defRPr>
+            </a:pPr>
+            <a:r>
+              <a:rPr sz="1400" dirty="0"/>
+              <a:t>.</a:t>
+            </a:r>
+          </a:p>
+        </p:txBody>
+      </p:sp>
+      <p:pic>
+        <p:nvPicPr>
+          <p:cNvPr id="14" name="Picture 13">
+            <a:extLst>
+              <a:ext uri="{FF2B5EF4-FFF2-40B4-BE49-F238E27FC236}">
+                <a16:creationId xmlns:a16="http://schemas.microsoft.com/office/drawing/2014/main" id="{9CC314C3-0293-2A49-D778-6C1E00EF94C7}"/>
+              </a:ext>
+            </a:extLst>
+          </p:cNvPr>
+          <p:cNvPicPr>
+            <a:picLocks noChangeAspect="1"/>
+          </p:cNvPicPr>
+          <p:nvPr/>
+        </p:nvPicPr>
+        <p:blipFill>
+          <a:blip r:embed="rId3"/>
+          <a:stretch>
+            <a:fillRect/>
+          </a:stretch>
+        </p:blipFill>
+        <p:spPr>
+          <a:xfrm>
+            <a:off x="10266593" y="1637863"/>
+            <a:ext cx="1704427" cy="2924619"/>
+          </a:xfrm>
+          <a:prstGeom prst="rect">
+            <a:avLst/>
+          </a:prstGeom>
+        </p:spPr>
+      </p:pic>
+      <p:pic>
+        <p:nvPicPr>
+          <p:cNvPr id="18" name="Picture 17">
+            <a:extLst>
+              <a:ext uri="{FF2B5EF4-FFF2-40B4-BE49-F238E27FC236}">
+                <a16:creationId xmlns:a16="http://schemas.microsoft.com/office/drawing/2014/main" id="{D3734DBD-CCE0-8645-B7CA-DE3E04DD77B6}"/>
+              </a:ext>
+            </a:extLst>
+          </p:cNvPr>
+          <p:cNvPicPr>
+            <a:picLocks noChangeAspect="1"/>
+          </p:cNvPicPr>
+          <p:nvPr/>
+        </p:nvPicPr>
+        <p:blipFill>
+          <a:blip r:embed="rId4"/>
+          <a:stretch>
+            <a:fillRect/>
+          </a:stretch>
+        </p:blipFill>
+        <p:spPr>
+          <a:xfrm>
+            <a:off x="9527932" y="5628839"/>
+            <a:ext cx="451921" cy="451921"/>
+          </a:xfrm>
+          <a:prstGeom prst="rect">
+            <a:avLst/>
+          </a:prstGeom>
+        </p:spPr>
+      </p:pic>
+      <p:pic>
+        <p:nvPicPr>
+          <p:cNvPr id="20" name="Picture 19">
+            <a:extLst>
+              <a:ext uri="{FF2B5EF4-FFF2-40B4-BE49-F238E27FC236}">
+                <a16:creationId xmlns:a16="http://schemas.microsoft.com/office/drawing/2014/main" id="{346668EA-D1CE-E507-677D-A59859D76760}"/>
+              </a:ext>
+            </a:extLst>
+          </p:cNvPr>
+          <p:cNvPicPr>
+            <a:picLocks noChangeAspect="1"/>
+          </p:cNvPicPr>
+          <p:nvPr/>
+        </p:nvPicPr>
+        <p:blipFill>
+          <a:blip r:embed="rId5"/>
+          <a:stretch>
+            <a:fillRect/>
+          </a:stretch>
+        </p:blipFill>
+        <p:spPr>
+          <a:xfrm>
+            <a:off x="9579268" y="1688559"/>
+            <a:ext cx="454877" cy="463000"/>
+          </a:xfrm>
+          <a:prstGeom prst="rect">
+            <a:avLst/>
+          </a:prstGeom>
+        </p:spPr>
+      </p:pic>
+      <p:pic>
+        <p:nvPicPr>
+          <p:cNvPr id="22" name="Picture 21">
+            <a:extLst>
+              <a:ext uri="{FF2B5EF4-FFF2-40B4-BE49-F238E27FC236}">
+                <a16:creationId xmlns:a16="http://schemas.microsoft.com/office/drawing/2014/main" id="{F63C6A99-067B-E31F-4FBD-DECD322BC74D}"/>
+              </a:ext>
+            </a:extLst>
+          </p:cNvPr>
+          <p:cNvPicPr>
+            <a:picLocks noChangeAspect="1"/>
+          </p:cNvPicPr>
+          <p:nvPr/>
+        </p:nvPicPr>
+        <p:blipFill>
+          <a:blip r:embed="rId6"/>
+          <a:stretch>
+            <a:fillRect/>
+          </a:stretch>
+        </p:blipFill>
+        <p:spPr>
+          <a:xfrm>
+            <a:off x="9463522" y="2976626"/>
+            <a:ext cx="543001" cy="533474"/>
+          </a:xfrm>
+          <a:prstGeom prst="rect">
+            <a:avLst/>
+          </a:prstGeom>
+        </p:spPr>
+      </p:pic>
+      <p:pic>
+        <p:nvPicPr>
+          <p:cNvPr id="26" name="Picture 25">
+            <a:extLst>
+              <a:ext uri="{FF2B5EF4-FFF2-40B4-BE49-F238E27FC236}">
+                <a16:creationId xmlns:a16="http://schemas.microsoft.com/office/drawing/2014/main" id="{F4979133-E0B9-7D34-7B37-4ECED66A0F4C}"/>
+              </a:ext>
+            </a:extLst>
+          </p:cNvPr>
+          <p:cNvPicPr>
+            <a:picLocks noChangeAspect="1"/>
+          </p:cNvPicPr>
+          <p:nvPr/>
+        </p:nvPicPr>
+        <p:blipFill>
+          <a:blip r:embed="rId7"/>
+          <a:stretch>
+            <a:fillRect/>
+          </a:stretch>
+        </p:blipFill>
+        <p:spPr>
+          <a:xfrm>
+            <a:off x="9463522" y="4337529"/>
+            <a:ext cx="543001" cy="571580"/>
+          </a:xfrm>
+          <a:prstGeom prst="rect">
+            <a:avLst/>
+          </a:prstGeom>
+        </p:spPr>
+      </p:pic>
+      <p:pic>
+        <p:nvPicPr>
+          <p:cNvPr id="28" name="Picture 27">
+            <a:extLst>
+              <a:ext uri="{FF2B5EF4-FFF2-40B4-BE49-F238E27FC236}">
+                <a16:creationId xmlns:a16="http://schemas.microsoft.com/office/drawing/2014/main" id="{9BF9A494-5F00-A02E-B543-7C2A7EE9DF40}"/>
+              </a:ext>
+            </a:extLst>
+          </p:cNvPr>
+          <p:cNvPicPr>
+            <a:picLocks noChangeAspect="1"/>
+          </p:cNvPicPr>
+          <p:nvPr/>
+        </p:nvPicPr>
+        <p:blipFill>
+          <a:blip r:embed="rId8"/>
+          <a:stretch>
+            <a:fillRect/>
+          </a:stretch>
+        </p:blipFill>
+        <p:spPr>
+          <a:xfrm>
+            <a:off x="1511557" y="5486400"/>
+            <a:ext cx="866896" cy="1152686"/>
+          </a:xfrm>
+          <a:prstGeom prst="rect">
+            <a:avLst/>
+          </a:prstGeom>
+        </p:spPr>
+      </p:pic>
     </p:spTree>
   </p:cSld>
   <p:clrMapOvr>
@@ -5242,6 +6416,1640 @@
 </file>
 
 <file path=ppt/slides/slide3.xml><?xml version="1.0" encoding="utf-8"?>
+<p:sld xmlns:a="http://schemas.openxmlformats.org/drawingml/2006/main" xmlns:r="http://schemas.openxmlformats.org/officeDocument/2006/relationships" xmlns:p="http://schemas.openxmlformats.org/presentationml/2006/main">
+  <p:cSld>
+    <p:bg>
+      <p:bgPr>
+        <a:solidFill>
+          <a:srgbClr val="F5F6F8"/>
+        </a:solidFill>
+        <a:effectLst/>
+      </p:bgPr>
+    </p:bg>
+    <p:spTree>
+      <p:nvGrpSpPr>
+        <p:cNvPr id="1" name=""/>
+        <p:cNvGrpSpPr/>
+        <p:nvPr/>
+      </p:nvGrpSpPr>
+      <p:grpSpPr>
+        <a:xfrm>
+          <a:off x="0" y="0"/>
+          <a:ext cx="0" cy="0"/>
+          <a:chOff x="0" y="0"/>
+          <a:chExt cx="0" cy="0"/>
+        </a:xfrm>
+      </p:grpSpPr>
+      <p:sp>
+        <p:nvSpPr>
+          <p:cNvPr id="9" name="Shape 0">
+            <a:extLst>
+              <a:ext uri="{FF2B5EF4-FFF2-40B4-BE49-F238E27FC236}">
+                <a16:creationId xmlns:a16="http://schemas.microsoft.com/office/drawing/2014/main" id="{CA3D628F-8E38-48B5-BF86-50E33AF7A273}"/>
+              </a:ext>
+            </a:extLst>
+          </p:cNvPr>
+          <p:cNvSpPr/>
+          <p:nvPr/>
+        </p:nvSpPr>
+        <p:spPr>
+          <a:xfrm>
+            <a:off x="0" y="0"/>
+            <a:ext cx="12192000" cy="6892290"/>
+          </a:xfrm>
+          <a:prstGeom prst="rect">
+            <a:avLst/>
+          </a:prstGeom>
+          <a:solidFill>
+            <a:srgbClr val="071B33"/>
+          </a:solidFill>
+          <a:ln w="12700">
+            <a:solidFill>
+              <a:srgbClr val="333333">
+                <a:alpha val="0"/>
+              </a:srgbClr>
+            </a:solidFill>
+            <a:round/>
+          </a:ln>
+        </p:spPr>
+        <p:style>
+          <a:lnRef idx="0">
+            <a:scrgbClr r="0" g="0" b="0"/>
+          </a:lnRef>
+          <a:fillRef idx="0">
+            <a:scrgbClr r="0" g="0" b="0"/>
+          </a:fillRef>
+          <a:effectRef idx="0">
+            <a:scrgbClr r="0" g="0" b="0"/>
+          </a:effectRef>
+          <a:fontRef idx="minor"/>
+        </p:style>
+        <p:txBody>
+          <a:bodyPr lIns="90000" tIns="45000" rIns="90000" bIns="45000" anchor="t">
+            <a:noAutofit/>
+          </a:bodyPr>
+          <a:lstStyle/>
+          <a:p>
+            <a:endParaRPr lang="en-US" sz="1800" b="0" u="none" strike="noStrike">
+              <a:solidFill>
+                <a:srgbClr val="FFFFFF"/>
+              </a:solidFill>
+              <a:effectLst/>
+              <a:uFillTx/>
+              <a:latin typeface="Arial"/>
+            </a:endParaRPr>
+          </a:p>
+        </p:txBody>
+      </p:sp>
+      <p:sp>
+        <p:nvSpPr>
+          <p:cNvPr id="2" name="TextBox 1"/>
+          <p:cNvSpPr txBox="1"/>
+          <p:nvPr/>
+        </p:nvSpPr>
+        <p:spPr>
+          <a:xfrm>
+            <a:off x="457200" y="274320"/>
+            <a:ext cx="11277295" cy="369332"/>
+          </a:xfrm>
+          <a:prstGeom prst="rect">
+            <a:avLst/>
+          </a:prstGeom>
+          <a:noFill/>
+        </p:spPr>
+        <p:txBody>
+          <a:bodyPr wrap="square" lIns="0" tIns="0" rIns="0" bIns="0">
+            <a:spAutoFit/>
+          </a:bodyPr>
+          <a:lstStyle/>
+          <a:p>
+            <a:pPr>
+              <a:defRPr sz="2400" b="1">
+                <a:solidFill>
+                  <a:srgbClr val="0A192F"/>
+                </a:solidFill>
+                <a:latin typeface="Georgia"/>
+              </a:defRPr>
+            </a:pPr>
+            <a:r>
+              <a:rPr dirty="0">
+                <a:solidFill>
+                  <a:schemeClr val="bg1"/>
+                </a:solidFill>
+              </a:rPr>
+              <a:t>Structured </a:t>
+            </a:r>
+            <a:r>
+              <a:rPr lang="en-AU" dirty="0">
+                <a:solidFill>
+                  <a:schemeClr val="bg1"/>
+                </a:solidFill>
+              </a:rPr>
+              <a:t>Agile</a:t>
+            </a:r>
+            <a:r>
+              <a:rPr dirty="0">
+                <a:solidFill>
+                  <a:schemeClr val="bg1"/>
+                </a:solidFill>
+              </a:rPr>
+              <a:t> Lifecycle Delivery </a:t>
+            </a:r>
+            <a:r>
+              <a:rPr lang="en-AU" dirty="0">
+                <a:solidFill>
+                  <a:schemeClr val="bg1"/>
+                </a:solidFill>
+              </a:rPr>
+              <a:t>&amp; </a:t>
+            </a:r>
+            <a:r>
+              <a:rPr dirty="0">
+                <a:solidFill>
+                  <a:schemeClr val="bg1"/>
+                </a:solidFill>
+              </a:rPr>
+              <a:t>Mitigated Risks</a:t>
+            </a:r>
+          </a:p>
+        </p:txBody>
+      </p:sp>
+      <p:sp>
+        <p:nvSpPr>
+          <p:cNvPr id="3" name="TextBox 2"/>
+          <p:cNvSpPr txBox="1"/>
+          <p:nvPr/>
+        </p:nvSpPr>
+        <p:spPr>
+          <a:xfrm>
+            <a:off x="457200" y="914400"/>
+            <a:ext cx="11277295" cy="307777"/>
+          </a:xfrm>
+          <a:prstGeom prst="rect">
+            <a:avLst/>
+          </a:prstGeom>
+          <a:noFill/>
+        </p:spPr>
+        <p:txBody>
+          <a:bodyPr wrap="square" lIns="0" tIns="0" rIns="0" bIns="0">
+            <a:spAutoFit/>
+          </a:bodyPr>
+          <a:lstStyle/>
+          <a:p>
+            <a:pPr>
+              <a:defRPr sz="1200" b="1">
+                <a:solidFill>
+                  <a:srgbClr val="00C49F"/>
+                </a:solidFill>
+                <a:latin typeface="Calibri"/>
+              </a:defRPr>
+            </a:pPr>
+            <a:r>
+              <a:rPr lang="en-AU" sz="2000" dirty="0">
+                <a:solidFill>
+                  <a:srgbClr val="FFC000"/>
+                </a:solidFill>
+              </a:rPr>
+              <a:t>Pillar 2: </a:t>
+            </a:r>
+            <a:r>
+              <a:rPr sz="2000" dirty="0">
+                <a:solidFill>
+                  <a:srgbClr val="FFC000"/>
+                </a:solidFill>
+              </a:rPr>
+              <a:t>THE ENGINEERING CRAFT (SKILLS &amp; METHODOLOGY)</a:t>
+            </a:r>
+          </a:p>
+        </p:txBody>
+      </p:sp>
+      <p:sp>
+        <p:nvSpPr>
+          <p:cNvPr id="4" name="Rectangle 3"/>
+          <p:cNvSpPr/>
+          <p:nvPr/>
+        </p:nvSpPr>
+        <p:spPr>
+          <a:xfrm>
+            <a:off x="457200" y="1371600"/>
+            <a:ext cx="11277295" cy="25400"/>
+          </a:xfrm>
+          <a:prstGeom prst="rect">
+            <a:avLst/>
+          </a:prstGeom>
+          <a:solidFill>
+            <a:srgbClr val="F6C514"/>
+          </a:solidFill>
+          <a:ln>
+            <a:noFill/>
+          </a:ln>
+        </p:spPr>
+        <p:style>
+          <a:lnRef idx="1">
+            <a:schemeClr val="accent1"/>
+          </a:lnRef>
+          <a:fillRef idx="3">
+            <a:schemeClr val="accent1"/>
+          </a:fillRef>
+          <a:effectRef idx="2">
+            <a:schemeClr val="accent1"/>
+          </a:effectRef>
+          <a:fontRef idx="minor">
+            <a:schemeClr val="lt1"/>
+          </a:fontRef>
+        </p:style>
+        <p:txBody>
+          <a:bodyPr rtlCol="0" anchor="ctr"/>
+          <a:lstStyle/>
+          <a:p>
+            <a:pPr algn="ctr"/>
+            <a:endParaRPr/>
+          </a:p>
+        </p:txBody>
+      </p:sp>
+      <p:sp>
+        <p:nvSpPr>
+          <p:cNvPr id="5" name="Rounded Rectangle 4"/>
+          <p:cNvSpPr/>
+          <p:nvPr/>
+        </p:nvSpPr>
+        <p:spPr>
+          <a:xfrm>
+            <a:off x="457200" y="2000250"/>
+            <a:ext cx="3474720" cy="4486910"/>
+          </a:xfrm>
+          <a:prstGeom prst="roundRect">
+            <a:avLst/>
+          </a:prstGeom>
+          <a:solidFill>
+            <a:srgbClr val="FFFFFF"/>
+          </a:solidFill>
+          <a:ln>
+            <a:noFill/>
+          </a:ln>
+        </p:spPr>
+        <p:style>
+          <a:lnRef idx="1">
+            <a:schemeClr val="accent1"/>
+          </a:lnRef>
+          <a:fillRef idx="3">
+            <a:schemeClr val="accent1"/>
+          </a:fillRef>
+          <a:effectRef idx="2">
+            <a:schemeClr val="accent1"/>
+          </a:effectRef>
+          <a:fontRef idx="minor">
+            <a:schemeClr val="lt1"/>
+          </a:fontRef>
+        </p:style>
+        <p:txBody>
+          <a:bodyPr wrap="square" lIns="228600" tIns="228600" rIns="228600" bIns="228600" rtlCol="0" anchor="ctr"/>
+          <a:lstStyle/>
+          <a:p>
+            <a:pPr algn="ctr">
+              <a:spcAft>
+                <a:spcPts val="600"/>
+              </a:spcAft>
+              <a:defRPr sz="1100" b="1">
+                <a:solidFill>
+                  <a:srgbClr val="00C49F"/>
+                </a:solidFill>
+                <a:latin typeface="Calibri"/>
+              </a:defRPr>
+            </a:pPr>
+            <a:r>
+              <a:rPr sz="1400" dirty="0"/>
+              <a:t>1. ANALYSING REQUIREMENTS</a:t>
+            </a:r>
+          </a:p>
+          <a:p>
+            <a:pPr>
+              <a:spcAft>
+                <a:spcPts val="1200"/>
+              </a:spcAft>
+              <a:defRPr sz="1500" b="1">
+                <a:solidFill>
+                  <a:srgbClr val="0A192F"/>
+                </a:solidFill>
+                <a:latin typeface="Georgia"/>
+              </a:defRPr>
+            </a:pPr>
+            <a:r>
+              <a:rPr sz="1400" dirty="0">
+                <a:solidFill>
+                  <a:srgbClr val="0D2B49"/>
+                </a:solidFill>
+              </a:rPr>
+              <a:t>Stakeholder Workshop &amp; SID Elicitation</a:t>
+            </a:r>
+          </a:p>
+          <a:p>
+            <a:pPr>
+              <a:spcAft>
+                <a:spcPts val="600"/>
+              </a:spcAft>
+              <a:defRPr sz="1100">
+                <a:solidFill>
+                  <a:srgbClr val="64748B"/>
+                </a:solidFill>
+                <a:latin typeface="Calibri"/>
+              </a:defRPr>
+            </a:pPr>
+            <a:r>
+              <a:rPr sz="1400" dirty="0"/>
+              <a:t>• Facilitated inception workshops directly with frontline patrols to map operational workflows.</a:t>
+            </a:r>
+          </a:p>
+          <a:p>
+            <a:pPr>
+              <a:spcAft>
+                <a:spcPts val="600"/>
+              </a:spcAft>
+              <a:defRPr sz="1100">
+                <a:solidFill>
+                  <a:srgbClr val="64748B"/>
+                </a:solidFill>
+                <a:latin typeface="Calibri"/>
+              </a:defRPr>
+            </a:pPr>
+            <a:r>
+              <a:rPr sz="1400" dirty="0"/>
+              <a:t>• Translated fluid business 'pain' into structured technical and functional requirements.</a:t>
+            </a:r>
+          </a:p>
+          <a:p>
+            <a:pPr>
+              <a:spcAft>
+                <a:spcPts val="600"/>
+              </a:spcAft>
+              <a:defRPr sz="1100">
+                <a:solidFill>
+                  <a:srgbClr val="64748B"/>
+                </a:solidFill>
+                <a:latin typeface="Calibri"/>
+              </a:defRPr>
+            </a:pPr>
+            <a:r>
+              <a:rPr sz="1400" dirty="0"/>
+              <a:t>• Authored comprehensive Solution Intent Documents (SIDs) as the single source of truth.</a:t>
+            </a:r>
+          </a:p>
+          <a:p>
+            <a:pPr>
+              <a:spcAft>
+                <a:spcPts val="600"/>
+              </a:spcAft>
+              <a:defRPr sz="1100">
+                <a:solidFill>
+                  <a:srgbClr val="64748B"/>
+                </a:solidFill>
+                <a:latin typeface="Calibri"/>
+              </a:defRPr>
+            </a:pPr>
+            <a:r>
+              <a:rPr sz="1400" dirty="0"/>
+              <a:t>• Managed technical trade-offs, prioritizing immediate MVP features over long-term API extensions.</a:t>
+            </a:r>
+          </a:p>
+        </p:txBody>
+      </p:sp>
+      <p:sp>
+        <p:nvSpPr>
+          <p:cNvPr id="6" name="Rounded Rectangle 5"/>
+          <p:cNvSpPr/>
+          <p:nvPr/>
+        </p:nvSpPr>
+        <p:spPr>
+          <a:xfrm>
+            <a:off x="4297680" y="2000250"/>
+            <a:ext cx="3474720" cy="4512310"/>
+          </a:xfrm>
+          <a:prstGeom prst="roundRect">
+            <a:avLst/>
+          </a:prstGeom>
+          <a:solidFill>
+            <a:srgbClr val="FFFFFF"/>
+          </a:solidFill>
+          <a:ln>
+            <a:noFill/>
+          </a:ln>
+        </p:spPr>
+        <p:style>
+          <a:lnRef idx="1">
+            <a:schemeClr val="accent1"/>
+          </a:lnRef>
+          <a:fillRef idx="3">
+            <a:schemeClr val="accent1"/>
+          </a:fillRef>
+          <a:effectRef idx="2">
+            <a:schemeClr val="accent1"/>
+          </a:effectRef>
+          <a:fontRef idx="minor">
+            <a:schemeClr val="lt1"/>
+          </a:fontRef>
+        </p:style>
+        <p:txBody>
+          <a:bodyPr wrap="square" lIns="228600" tIns="228600" rIns="228600" bIns="228600" rtlCol="0" anchor="ctr"/>
+          <a:lstStyle/>
+          <a:p>
+            <a:pPr algn="ctr">
+              <a:spcAft>
+                <a:spcPts val="600"/>
+              </a:spcAft>
+              <a:defRPr sz="1100" b="1">
+                <a:solidFill>
+                  <a:srgbClr val="00C49F"/>
+                </a:solidFill>
+                <a:latin typeface="Calibri"/>
+              </a:defRPr>
+            </a:pPr>
+            <a:r>
+              <a:rPr sz="1400" dirty="0"/>
+              <a:t>2. SCRUM LEADERSHIP &amp; QA</a:t>
+            </a:r>
+          </a:p>
+          <a:p>
+            <a:pPr>
+              <a:spcAft>
+                <a:spcPts val="1200"/>
+              </a:spcAft>
+              <a:defRPr sz="1500" b="1">
+                <a:solidFill>
+                  <a:srgbClr val="0A192F"/>
+                </a:solidFill>
+                <a:latin typeface="Georgia"/>
+              </a:defRPr>
+            </a:pPr>
+            <a:r>
+              <a:rPr sz="1400" dirty="0"/>
+              <a:t>Agile Execution &amp; Zephyr Testing</a:t>
+            </a:r>
+          </a:p>
+          <a:p>
+            <a:pPr>
+              <a:spcAft>
+                <a:spcPts val="600"/>
+              </a:spcAft>
+              <a:defRPr sz="1100">
+                <a:solidFill>
+                  <a:srgbClr val="64748B"/>
+                </a:solidFill>
+                <a:latin typeface="Calibri"/>
+              </a:defRPr>
+            </a:pPr>
+            <a:r>
+              <a:rPr sz="1400" dirty="0"/>
+              <a:t>• Operated as Scrum Master (PSM I), facilitating retrospectives, daily scrums, and backlog grooming.</a:t>
+            </a:r>
+          </a:p>
+          <a:p>
+            <a:pPr>
+              <a:spcAft>
+                <a:spcPts val="600"/>
+              </a:spcAft>
+              <a:defRPr sz="1100">
+                <a:solidFill>
+                  <a:srgbClr val="64748B"/>
+                </a:solidFill>
+                <a:latin typeface="Calibri"/>
+              </a:defRPr>
+            </a:pPr>
+            <a:r>
+              <a:rPr sz="1400" dirty="0"/>
+              <a:t>• </a:t>
+            </a:r>
+            <a:r>
+              <a:rPr lang="en-AU" sz="1400" dirty="0"/>
+              <a:t>Developed and designed a </a:t>
+            </a:r>
+            <a:r>
+              <a:rPr lang="en-AU" sz="1400" b="1" dirty="0"/>
+              <a:t>mobile response canvas app</a:t>
+            </a:r>
+            <a:r>
+              <a:rPr sz="1400" dirty="0"/>
+              <a:t> and coordinated peer reviews with secondary developers.</a:t>
+            </a:r>
+          </a:p>
+          <a:p>
+            <a:pPr>
+              <a:spcAft>
+                <a:spcPts val="600"/>
+              </a:spcAft>
+              <a:defRPr sz="1100">
+                <a:solidFill>
+                  <a:srgbClr val="64748B"/>
+                </a:solidFill>
+                <a:latin typeface="Calibri"/>
+              </a:defRPr>
+            </a:pPr>
+            <a:r>
+              <a:rPr sz="1400" dirty="0"/>
+              <a:t>• Authored QA checklists and test scripts managed in the Zephyr Scale tool</a:t>
+            </a:r>
+            <a:r>
+              <a:rPr lang="en-AU" sz="1400" dirty="0"/>
+              <a:t> for automated testing</a:t>
+            </a:r>
+            <a:r>
+              <a:rPr sz="1400" dirty="0"/>
+              <a:t>.</a:t>
+            </a:r>
+          </a:p>
+          <a:p>
+            <a:pPr>
+              <a:spcAft>
+                <a:spcPts val="600"/>
+              </a:spcAft>
+              <a:defRPr sz="1100">
+                <a:solidFill>
+                  <a:srgbClr val="64748B"/>
+                </a:solidFill>
+                <a:latin typeface="Calibri"/>
+              </a:defRPr>
+            </a:pPr>
+            <a:r>
+              <a:rPr sz="1400" dirty="0"/>
+              <a:t>• </a:t>
+            </a:r>
+            <a:r>
+              <a:rPr lang="en-AU" sz="1400" dirty="0"/>
+              <a:t>Fix bug </a:t>
+            </a:r>
+            <a:r>
+              <a:rPr sz="1400" dirty="0"/>
+              <a:t>and </a:t>
+            </a:r>
+            <a:r>
+              <a:rPr lang="en-AU" sz="1400" dirty="0"/>
+              <a:t>deploy solutions to coordinate </a:t>
+            </a:r>
+            <a:r>
+              <a:rPr sz="1400" dirty="0"/>
+              <a:t>UAT</a:t>
+            </a:r>
+            <a:r>
+              <a:rPr lang="en-AU" sz="1400" dirty="0"/>
+              <a:t> testing by end-users to sign-off for production release. </a:t>
+            </a:r>
+            <a:endParaRPr sz="1400" dirty="0"/>
+          </a:p>
+        </p:txBody>
+      </p:sp>
+      <p:sp>
+        <p:nvSpPr>
+          <p:cNvPr id="7" name="Rounded Rectangle 6"/>
+          <p:cNvSpPr/>
+          <p:nvPr/>
+        </p:nvSpPr>
+        <p:spPr>
+          <a:xfrm>
+            <a:off x="8138160" y="2000250"/>
+            <a:ext cx="3474720" cy="4512310"/>
+          </a:xfrm>
+          <a:prstGeom prst="roundRect">
+            <a:avLst/>
+          </a:prstGeom>
+          <a:solidFill>
+            <a:srgbClr val="FFFFFF"/>
+          </a:solidFill>
+          <a:ln>
+            <a:noFill/>
+          </a:ln>
+        </p:spPr>
+        <p:style>
+          <a:lnRef idx="1">
+            <a:schemeClr val="accent1"/>
+          </a:lnRef>
+          <a:fillRef idx="3">
+            <a:schemeClr val="accent1"/>
+          </a:fillRef>
+          <a:effectRef idx="2">
+            <a:schemeClr val="accent1"/>
+          </a:effectRef>
+          <a:fontRef idx="minor">
+            <a:schemeClr val="lt1"/>
+          </a:fontRef>
+        </p:style>
+        <p:txBody>
+          <a:bodyPr wrap="square" lIns="228600" tIns="228600" rIns="228600" bIns="228600" rtlCol="0" anchor="ctr"/>
+          <a:lstStyle/>
+          <a:p>
+            <a:pPr algn="ctr">
+              <a:spcAft>
+                <a:spcPts val="600"/>
+              </a:spcAft>
+              <a:defRPr sz="1100" b="1">
+                <a:solidFill>
+                  <a:srgbClr val="00C49F"/>
+                </a:solidFill>
+                <a:latin typeface="Calibri"/>
+              </a:defRPr>
+            </a:pPr>
+            <a:r>
+              <a:rPr sz="1400" dirty="0"/>
+              <a:t>3. ALM</a:t>
+            </a:r>
+            <a:r>
+              <a:rPr lang="en-AU" sz="1400" dirty="0"/>
+              <a:t> </a:t>
+            </a:r>
+            <a:r>
+              <a:rPr sz="1400" dirty="0"/>
+              <a:t> DEPLOYMENT </a:t>
+            </a:r>
+            <a:r>
+              <a:rPr lang="en-AU" sz="1400" dirty="0"/>
+              <a:t>&amp; POST SUPPORT</a:t>
+            </a:r>
+            <a:endParaRPr sz="1400" dirty="0"/>
+          </a:p>
+          <a:p>
+            <a:pPr>
+              <a:spcAft>
+                <a:spcPts val="1200"/>
+              </a:spcAft>
+              <a:defRPr sz="1500" b="1">
+                <a:solidFill>
+                  <a:srgbClr val="0A192F"/>
+                </a:solidFill>
+                <a:latin typeface="Georgia"/>
+              </a:defRPr>
+            </a:pPr>
+            <a:r>
+              <a:rPr sz="1400" dirty="0"/>
+              <a:t>Environment Staging &amp; Helpdesk Handover</a:t>
+            </a:r>
+          </a:p>
+          <a:p>
+            <a:pPr>
+              <a:spcAft>
+                <a:spcPts val="600"/>
+              </a:spcAft>
+              <a:defRPr sz="1100">
+                <a:solidFill>
+                  <a:srgbClr val="64748B"/>
+                </a:solidFill>
+                <a:latin typeface="Calibri"/>
+              </a:defRPr>
+            </a:pPr>
+            <a:r>
+              <a:rPr sz="1400" dirty="0"/>
+              <a:t>• </a:t>
+            </a:r>
+            <a:r>
+              <a:rPr lang="en-AU" sz="1400" dirty="0"/>
+              <a:t>Published user manual documentations and conducted end-user training.</a:t>
+            </a:r>
+            <a:endParaRPr sz="1400" dirty="0"/>
+          </a:p>
+          <a:p>
+            <a:pPr>
+              <a:spcAft>
+                <a:spcPts val="600"/>
+              </a:spcAft>
+              <a:defRPr sz="1100">
+                <a:solidFill>
+                  <a:srgbClr val="64748B"/>
+                </a:solidFill>
+                <a:latin typeface="Calibri"/>
+              </a:defRPr>
+            </a:pPr>
+            <a:r>
+              <a:rPr sz="1400" dirty="0"/>
+              <a:t>• Created deployment guides to manage environment transition.</a:t>
+            </a:r>
+          </a:p>
+          <a:p>
+            <a:pPr>
+              <a:spcAft>
+                <a:spcPts val="600"/>
+              </a:spcAft>
+              <a:defRPr sz="1100">
+                <a:solidFill>
+                  <a:srgbClr val="64748B"/>
+                </a:solidFill>
+                <a:latin typeface="Calibri"/>
+              </a:defRPr>
+            </a:pPr>
+            <a:r>
+              <a:rPr sz="1400" dirty="0"/>
+              <a:t>• Produced approved Service Definition and Transition checklists for BAU operations.</a:t>
+            </a:r>
+          </a:p>
+          <a:p>
+            <a:pPr>
+              <a:spcAft>
+                <a:spcPts val="600"/>
+              </a:spcAft>
+              <a:defRPr sz="1100">
+                <a:solidFill>
+                  <a:srgbClr val="64748B"/>
+                </a:solidFill>
+                <a:latin typeface="Calibri"/>
+              </a:defRPr>
+            </a:pPr>
+            <a:r>
+              <a:rPr sz="1400" dirty="0"/>
+              <a:t>• Conducted hand over Level 1 support to the Helpdesk team.</a:t>
+            </a:r>
+          </a:p>
+        </p:txBody>
+      </p:sp>
+      <p:pic>
+        <p:nvPicPr>
+          <p:cNvPr id="11" name="Picture 10">
+            <a:extLst>
+              <a:ext uri="{FF2B5EF4-FFF2-40B4-BE49-F238E27FC236}">
+                <a16:creationId xmlns:a16="http://schemas.microsoft.com/office/drawing/2014/main" id="{BF7F87CD-7F16-832F-D3E6-1BC6AE604FFA}"/>
+              </a:ext>
+            </a:extLst>
+          </p:cNvPr>
+          <p:cNvPicPr>
+            <a:picLocks noChangeAspect="1"/>
+          </p:cNvPicPr>
+          <p:nvPr/>
+        </p:nvPicPr>
+        <p:blipFill>
+          <a:blip r:embed="rId3"/>
+          <a:stretch>
+            <a:fillRect/>
+          </a:stretch>
+        </p:blipFill>
+        <p:spPr>
+          <a:xfrm>
+            <a:off x="2758203" y="1490041"/>
+            <a:ext cx="6411220" cy="371527"/>
+          </a:xfrm>
+          <a:prstGeom prst="rect">
+            <a:avLst/>
+          </a:prstGeom>
+        </p:spPr>
+      </p:pic>
+      <p:pic>
+        <p:nvPicPr>
+          <p:cNvPr id="15" name="Picture 14">
+            <a:extLst>
+              <a:ext uri="{FF2B5EF4-FFF2-40B4-BE49-F238E27FC236}">
+                <a16:creationId xmlns:a16="http://schemas.microsoft.com/office/drawing/2014/main" id="{F6974511-EFA4-2CC9-F60F-654D1EDB6D5E}"/>
+              </a:ext>
+            </a:extLst>
+          </p:cNvPr>
+          <p:cNvPicPr>
+            <a:picLocks noChangeAspect="1"/>
+          </p:cNvPicPr>
+          <p:nvPr/>
+        </p:nvPicPr>
+        <p:blipFill>
+          <a:blip r:embed="rId4"/>
+          <a:stretch>
+            <a:fillRect/>
+          </a:stretch>
+        </p:blipFill>
+        <p:spPr>
+          <a:xfrm>
+            <a:off x="457200" y="1987298"/>
+            <a:ext cx="561011" cy="611502"/>
+          </a:xfrm>
+          <a:prstGeom prst="rect">
+            <a:avLst/>
+          </a:prstGeom>
+        </p:spPr>
+      </p:pic>
+      <p:pic>
+        <p:nvPicPr>
+          <p:cNvPr id="17" name="Picture 16">
+            <a:extLst>
+              <a:ext uri="{FF2B5EF4-FFF2-40B4-BE49-F238E27FC236}">
+                <a16:creationId xmlns:a16="http://schemas.microsoft.com/office/drawing/2014/main" id="{0B649606-F552-02EE-EF6E-E07290DEB560}"/>
+              </a:ext>
+            </a:extLst>
+          </p:cNvPr>
+          <p:cNvPicPr>
+            <a:picLocks noChangeAspect="1"/>
+          </p:cNvPicPr>
+          <p:nvPr/>
+        </p:nvPicPr>
+        <p:blipFill>
+          <a:blip r:embed="rId5"/>
+          <a:stretch>
+            <a:fillRect/>
+          </a:stretch>
+        </p:blipFill>
+        <p:spPr>
+          <a:xfrm>
+            <a:off x="4286250" y="1998728"/>
+            <a:ext cx="540795" cy="573904"/>
+          </a:xfrm>
+          <a:prstGeom prst="rect">
+            <a:avLst/>
+          </a:prstGeom>
+        </p:spPr>
+      </p:pic>
+      <p:pic>
+        <p:nvPicPr>
+          <p:cNvPr id="22" name="Picture 21">
+            <a:extLst>
+              <a:ext uri="{FF2B5EF4-FFF2-40B4-BE49-F238E27FC236}">
+                <a16:creationId xmlns:a16="http://schemas.microsoft.com/office/drawing/2014/main" id="{7720BA80-9E96-A856-E705-A49B56CDFFAC}"/>
+              </a:ext>
+            </a:extLst>
+          </p:cNvPr>
+          <p:cNvPicPr>
+            <a:picLocks noChangeAspect="1"/>
+          </p:cNvPicPr>
+          <p:nvPr/>
+        </p:nvPicPr>
+        <p:blipFill>
+          <a:blip r:embed="rId6"/>
+          <a:stretch>
+            <a:fillRect/>
+          </a:stretch>
+        </p:blipFill>
+        <p:spPr>
+          <a:xfrm>
+            <a:off x="8106514" y="1987298"/>
+            <a:ext cx="540795" cy="514796"/>
+          </a:xfrm>
+          <a:prstGeom prst="rect">
+            <a:avLst/>
+          </a:prstGeom>
+        </p:spPr>
+      </p:pic>
+      <p:pic>
+        <p:nvPicPr>
+          <p:cNvPr id="26" name="Picture 25">
+            <a:extLst>
+              <a:ext uri="{FF2B5EF4-FFF2-40B4-BE49-F238E27FC236}">
+                <a16:creationId xmlns:a16="http://schemas.microsoft.com/office/drawing/2014/main" id="{787B4DF9-BBDA-9BC3-DDC9-42D44AEECA3E}"/>
+              </a:ext>
+            </a:extLst>
+          </p:cNvPr>
+          <p:cNvPicPr>
+            <a:picLocks noChangeAspect="1"/>
+          </p:cNvPicPr>
+          <p:nvPr/>
+        </p:nvPicPr>
+        <p:blipFill>
+          <a:blip r:embed="rId7"/>
+          <a:stretch>
+            <a:fillRect/>
+          </a:stretch>
+        </p:blipFill>
+        <p:spPr>
+          <a:xfrm>
+            <a:off x="9019427" y="311150"/>
+            <a:ext cx="3172268" cy="847843"/>
+          </a:xfrm>
+          <a:prstGeom prst="rect">
+            <a:avLst/>
+          </a:prstGeom>
+        </p:spPr>
+      </p:pic>
+    </p:spTree>
+  </p:cSld>
+  <p:clrMapOvr>
+    <a:masterClrMapping/>
+  </p:clrMapOvr>
+</p:sld>
+</file>
+
+<file path=ppt/slides/slide4.xml><?xml version="1.0" encoding="utf-8"?>
+<p:sld xmlns:a="http://schemas.openxmlformats.org/drawingml/2006/main" xmlns:r="http://schemas.openxmlformats.org/officeDocument/2006/relationships" xmlns:p="http://schemas.openxmlformats.org/presentationml/2006/main">
+  <p:cSld>
+    <p:bg>
+      <p:bgPr>
+        <a:solidFill>
+          <a:srgbClr val="F5F6F8"/>
+        </a:solidFill>
+        <a:effectLst/>
+      </p:bgPr>
+    </p:bg>
+    <p:spTree>
+      <p:nvGrpSpPr>
+        <p:cNvPr id="1" name="">
+          <a:extLst>
+            <a:ext uri="{FF2B5EF4-FFF2-40B4-BE49-F238E27FC236}">
+              <a16:creationId xmlns:a16="http://schemas.microsoft.com/office/drawing/2014/main" id="{3D0FD491-4A7B-EE13-C479-4895E530948B}"/>
+            </a:ext>
+          </a:extLst>
+        </p:cNvPr>
+        <p:cNvGrpSpPr/>
+        <p:nvPr/>
+      </p:nvGrpSpPr>
+      <p:grpSpPr>
+        <a:xfrm>
+          <a:off x="0" y="0"/>
+          <a:ext cx="0" cy="0"/>
+          <a:chOff x="0" y="0"/>
+          <a:chExt cx="0" cy="0"/>
+        </a:xfrm>
+      </p:grpSpPr>
+      <p:sp>
+        <p:nvSpPr>
+          <p:cNvPr id="8" name="Shape 0">
+            <a:extLst>
+              <a:ext uri="{FF2B5EF4-FFF2-40B4-BE49-F238E27FC236}">
+                <a16:creationId xmlns:a16="http://schemas.microsoft.com/office/drawing/2014/main" id="{71D6A1E1-5686-A873-1097-08FD5190D23D}"/>
+              </a:ext>
+            </a:extLst>
+          </p:cNvPr>
+          <p:cNvSpPr/>
+          <p:nvPr/>
+        </p:nvSpPr>
+        <p:spPr>
+          <a:xfrm>
+            <a:off x="0" y="0"/>
+            <a:ext cx="12192000" cy="6892290"/>
+          </a:xfrm>
+          <a:prstGeom prst="rect">
+            <a:avLst/>
+          </a:prstGeom>
+          <a:solidFill>
+            <a:srgbClr val="071B33"/>
+          </a:solidFill>
+          <a:ln w="12700">
+            <a:solidFill>
+              <a:srgbClr val="333333">
+                <a:alpha val="0"/>
+              </a:srgbClr>
+            </a:solidFill>
+            <a:round/>
+          </a:ln>
+        </p:spPr>
+        <p:style>
+          <a:lnRef idx="0">
+            <a:scrgbClr r="0" g="0" b="0"/>
+          </a:lnRef>
+          <a:fillRef idx="0">
+            <a:scrgbClr r="0" g="0" b="0"/>
+          </a:fillRef>
+          <a:effectRef idx="0">
+            <a:scrgbClr r="0" g="0" b="0"/>
+          </a:effectRef>
+          <a:fontRef idx="minor"/>
+        </p:style>
+        <p:txBody>
+          <a:bodyPr lIns="90000" tIns="45000" rIns="90000" bIns="45000" anchor="t">
+            <a:noAutofit/>
+          </a:bodyPr>
+          <a:lstStyle/>
+          <a:p>
+            <a:endParaRPr lang="en-US" sz="1800" b="0" u="none" strike="noStrike">
+              <a:solidFill>
+                <a:srgbClr val="FFFFFF"/>
+              </a:solidFill>
+              <a:effectLst/>
+              <a:uFillTx/>
+              <a:latin typeface="Arial"/>
+            </a:endParaRPr>
+          </a:p>
+        </p:txBody>
+      </p:sp>
+      <p:sp>
+        <p:nvSpPr>
+          <p:cNvPr id="2" name="TextBox 1">
+            <a:extLst>
+              <a:ext uri="{FF2B5EF4-FFF2-40B4-BE49-F238E27FC236}">
+                <a16:creationId xmlns:a16="http://schemas.microsoft.com/office/drawing/2014/main" id="{F4EF0F4C-BF6C-AEE9-1163-8EC4AF32ED8B}"/>
+              </a:ext>
+            </a:extLst>
+          </p:cNvPr>
+          <p:cNvSpPr txBox="1"/>
+          <p:nvPr/>
+        </p:nvSpPr>
+        <p:spPr>
+          <a:xfrm>
+            <a:off x="457200" y="274320"/>
+            <a:ext cx="11277295" cy="369332"/>
+          </a:xfrm>
+          <a:prstGeom prst="rect">
+            <a:avLst/>
+          </a:prstGeom>
+          <a:noFill/>
+        </p:spPr>
+        <p:txBody>
+          <a:bodyPr wrap="square" lIns="0" tIns="0" rIns="0" bIns="0">
+            <a:spAutoFit/>
+          </a:bodyPr>
+          <a:lstStyle/>
+          <a:p>
+            <a:pPr>
+              <a:defRPr sz="2400" b="1">
+                <a:solidFill>
+                  <a:srgbClr val="0A192F"/>
+                </a:solidFill>
+                <a:latin typeface="Georgia"/>
+              </a:defRPr>
+            </a:pPr>
+            <a:r>
+              <a:rPr lang="en-AU" dirty="0">
+                <a:solidFill>
+                  <a:schemeClr val="bg1"/>
+                </a:solidFill>
+              </a:rPr>
+              <a:t>Dataverse Normalisation Strategy</a:t>
+            </a:r>
+            <a:endParaRPr dirty="0">
+              <a:solidFill>
+                <a:schemeClr val="bg1"/>
+              </a:solidFill>
+            </a:endParaRPr>
+          </a:p>
+        </p:txBody>
+      </p:sp>
+      <p:sp>
+        <p:nvSpPr>
+          <p:cNvPr id="3" name="TextBox 2">
+            <a:extLst>
+              <a:ext uri="{FF2B5EF4-FFF2-40B4-BE49-F238E27FC236}">
+                <a16:creationId xmlns:a16="http://schemas.microsoft.com/office/drawing/2014/main" id="{651E535C-742C-1B49-201C-81BBBB8B4DA4}"/>
+              </a:ext>
+            </a:extLst>
+          </p:cNvPr>
+          <p:cNvSpPr txBox="1"/>
+          <p:nvPr/>
+        </p:nvSpPr>
+        <p:spPr>
+          <a:xfrm>
+            <a:off x="457201" y="914400"/>
+            <a:ext cx="6343650" cy="307777"/>
+          </a:xfrm>
+          <a:prstGeom prst="rect">
+            <a:avLst/>
+          </a:prstGeom>
+          <a:noFill/>
+        </p:spPr>
+        <p:txBody>
+          <a:bodyPr wrap="square" lIns="0" tIns="0" rIns="0" bIns="0">
+            <a:spAutoFit/>
+          </a:bodyPr>
+          <a:lstStyle/>
+          <a:p>
+            <a:pPr>
+              <a:defRPr sz="1200" b="1">
+                <a:solidFill>
+                  <a:srgbClr val="00C49F"/>
+                </a:solidFill>
+                <a:latin typeface="Calibri"/>
+              </a:defRPr>
+            </a:pPr>
+            <a:r>
+              <a:rPr lang="en-AU" sz="2000" dirty="0">
+                <a:solidFill>
+                  <a:srgbClr val="F6C514"/>
+                </a:solidFill>
+              </a:rPr>
+              <a:t>Pillar 3: </a:t>
+            </a:r>
+            <a:r>
+              <a:rPr sz="2000" dirty="0">
+                <a:solidFill>
+                  <a:srgbClr val="F6C514"/>
+                </a:solidFill>
+              </a:rPr>
+              <a:t>THE ARCHITECTURAL BLUEPRINT (THE SOLUTION)</a:t>
+            </a:r>
+          </a:p>
+        </p:txBody>
+      </p:sp>
+      <p:sp>
+        <p:nvSpPr>
+          <p:cNvPr id="4" name="Rectangle 3">
+            <a:extLst>
+              <a:ext uri="{FF2B5EF4-FFF2-40B4-BE49-F238E27FC236}">
+                <a16:creationId xmlns:a16="http://schemas.microsoft.com/office/drawing/2014/main" id="{40BE3687-747C-9581-BAEB-6949EB403C14}"/>
+              </a:ext>
+            </a:extLst>
+          </p:cNvPr>
+          <p:cNvSpPr/>
+          <p:nvPr/>
+        </p:nvSpPr>
+        <p:spPr>
+          <a:xfrm>
+            <a:off x="457200" y="1417320"/>
+            <a:ext cx="11277295" cy="25400"/>
+          </a:xfrm>
+          <a:prstGeom prst="rect">
+            <a:avLst/>
+          </a:prstGeom>
+          <a:solidFill>
+            <a:srgbClr val="F6C514"/>
+          </a:solidFill>
+          <a:ln>
+            <a:noFill/>
+          </a:ln>
+        </p:spPr>
+        <p:style>
+          <a:lnRef idx="1">
+            <a:schemeClr val="accent1"/>
+          </a:lnRef>
+          <a:fillRef idx="3">
+            <a:schemeClr val="accent1"/>
+          </a:fillRef>
+          <a:effectRef idx="2">
+            <a:schemeClr val="accent1"/>
+          </a:effectRef>
+          <a:fontRef idx="minor">
+            <a:schemeClr val="lt1"/>
+          </a:fontRef>
+        </p:style>
+        <p:txBody>
+          <a:bodyPr rtlCol="0" anchor="ctr"/>
+          <a:lstStyle/>
+          <a:p>
+            <a:pPr algn="ctr"/>
+            <a:endParaRPr/>
+          </a:p>
+        </p:txBody>
+      </p:sp>
+      <p:sp>
+        <p:nvSpPr>
+          <p:cNvPr id="6" name="Rounded Rectangle 5">
+            <a:extLst>
+              <a:ext uri="{FF2B5EF4-FFF2-40B4-BE49-F238E27FC236}">
+                <a16:creationId xmlns:a16="http://schemas.microsoft.com/office/drawing/2014/main" id="{1AA18BDF-6285-8BE5-C3D6-D7291B172C29}"/>
+              </a:ext>
+            </a:extLst>
+          </p:cNvPr>
+          <p:cNvSpPr/>
+          <p:nvPr/>
+        </p:nvSpPr>
+        <p:spPr>
+          <a:xfrm>
+            <a:off x="5923870" y="2664256"/>
+            <a:ext cx="6007913" cy="4188562"/>
+          </a:xfrm>
+          <a:prstGeom prst="roundRect">
+            <a:avLst/>
+          </a:prstGeom>
+          <a:solidFill>
+            <a:srgbClr val="0A192F"/>
+          </a:solidFill>
+          <a:ln>
+            <a:noFill/>
+          </a:ln>
+        </p:spPr>
+        <p:style>
+          <a:lnRef idx="1">
+            <a:schemeClr val="accent1"/>
+          </a:lnRef>
+          <a:fillRef idx="3">
+            <a:schemeClr val="accent1"/>
+          </a:fillRef>
+          <a:effectRef idx="2">
+            <a:schemeClr val="accent1"/>
+          </a:effectRef>
+          <a:fontRef idx="minor">
+            <a:schemeClr val="lt1"/>
+          </a:fontRef>
+        </p:style>
+        <p:txBody>
+          <a:bodyPr wrap="square" lIns="228600" tIns="228600" rIns="228600" bIns="228600" rtlCol="0" anchor="ctr"/>
+          <a:lstStyle/>
+          <a:p>
+            <a:pPr algn="ctr">
+              <a:spcAft>
+                <a:spcPts val="800"/>
+              </a:spcAft>
+              <a:defRPr sz="1200" b="1">
+                <a:solidFill>
+                  <a:srgbClr val="00C49F"/>
+                </a:solidFill>
+                <a:latin typeface="Calibri"/>
+              </a:defRPr>
+            </a:pPr>
+            <a:r>
+              <a:rPr sz="1400" dirty="0">
+                <a:solidFill>
+                  <a:srgbClr val="F6C514"/>
+                </a:solidFill>
+              </a:rPr>
+              <a:t>PLATFORM GOVERNANCE &amp; SECURITY</a:t>
+            </a:r>
+          </a:p>
+          <a:p>
+            <a:pPr>
+              <a:spcAft>
+                <a:spcPts val="1000"/>
+              </a:spcAft>
+              <a:defRPr sz="2000" b="1">
+                <a:solidFill>
+                  <a:srgbClr val="FAF9F6"/>
+                </a:solidFill>
+                <a:latin typeface="Georgia"/>
+              </a:defRPr>
+            </a:pPr>
+            <a:r>
+              <a:rPr sz="1400" dirty="0"/>
+              <a:t>Hardened Security Staging</a:t>
+            </a:r>
+          </a:p>
+          <a:p>
+            <a:pPr>
+              <a:spcBef>
+                <a:spcPts val="300"/>
+              </a:spcBef>
+              <a:defRPr sz="1100" b="1">
+                <a:solidFill>
+                  <a:srgbClr val="FAF9F6"/>
+                </a:solidFill>
+                <a:latin typeface="Calibri"/>
+              </a:defRPr>
+            </a:pPr>
+            <a:r>
+              <a:rPr sz="1200" dirty="0">
+                <a:solidFill>
+                  <a:srgbClr val="F6C514"/>
+                </a:solidFill>
+              </a:rPr>
+              <a:t>Custom Dataverse Role (Basic User - MWPSOL-141):</a:t>
+            </a:r>
+          </a:p>
+          <a:p>
+            <a:r>
+              <a:rPr lang="en-AU" sz="1400" dirty="0">
+                <a:solidFill>
+                  <a:schemeClr val="bg1"/>
+                </a:solidFill>
+              </a:rPr>
+              <a:t>Followed a </a:t>
+            </a:r>
+            <a:r>
+              <a:rPr lang="en-AU" sz="1400" b="1" dirty="0">
+                <a:solidFill>
+                  <a:schemeClr val="bg1"/>
+                </a:solidFill>
+              </a:rPr>
+              <a:t>'Least Privilege' model -</a:t>
+            </a:r>
+            <a:r>
+              <a:rPr lang="en-AU" sz="1400" dirty="0">
+                <a:solidFill>
+                  <a:schemeClr val="bg1"/>
+                </a:solidFill>
+              </a:rPr>
+              <a:t>  Created a custom role called </a:t>
+            </a:r>
+            <a:r>
+              <a:rPr lang="en-AU" sz="1400" b="1" dirty="0">
+                <a:solidFill>
+                  <a:schemeClr val="bg1"/>
+                </a:solidFill>
+              </a:rPr>
+              <a:t>'Basic User - MWPSOL-141'</a:t>
+            </a:r>
+            <a:r>
+              <a:rPr lang="en-AU" sz="1400" dirty="0">
+                <a:solidFill>
+                  <a:schemeClr val="bg1"/>
+                </a:solidFill>
+              </a:rPr>
+              <a:t> by cloning the standard base role and hardening it. This restricted the </a:t>
+            </a:r>
+            <a:r>
+              <a:rPr lang="en-AU" sz="1400" b="1" dirty="0">
+                <a:solidFill>
+                  <a:schemeClr val="bg1"/>
+                </a:solidFill>
+              </a:rPr>
+              <a:t>Delete</a:t>
+            </a:r>
+            <a:r>
+              <a:rPr lang="en-AU" sz="1400" dirty="0">
+                <a:solidFill>
+                  <a:schemeClr val="bg1"/>
+                </a:solidFill>
+              </a:rPr>
+              <a:t> and </a:t>
+            </a:r>
+            <a:r>
+              <a:rPr lang="en-AU" sz="1400" b="1" dirty="0">
+                <a:solidFill>
+                  <a:schemeClr val="bg1"/>
+                </a:solidFill>
+              </a:rPr>
+              <a:t>Share</a:t>
+            </a:r>
+            <a:r>
+              <a:rPr lang="en-AU" sz="1400" dirty="0">
+                <a:solidFill>
+                  <a:schemeClr val="bg1"/>
+                </a:solidFill>
+              </a:rPr>
+              <a:t> permissions on the Inspection tables to protect PII.  This ensured that only members of the verified AD Security Group could interact with the data, which is the same level of compliance rigor I’d apply to the client's SaaS environment.</a:t>
+            </a:r>
+          </a:p>
+          <a:p>
+            <a:endParaRPr lang="en-AU" sz="1200" dirty="0"/>
+          </a:p>
+          <a:p>
+            <a:pPr>
+              <a:spcBef>
+                <a:spcPts val="300"/>
+              </a:spcBef>
+              <a:defRPr sz="1100" b="1">
+                <a:solidFill>
+                  <a:srgbClr val="FAF9F6"/>
+                </a:solidFill>
+                <a:latin typeface="Calibri"/>
+              </a:defRPr>
+            </a:pPr>
+            <a:r>
+              <a:rPr lang="en-AU" sz="1200" b="1" dirty="0">
+                <a:solidFill>
+                  <a:srgbClr val="F6C514"/>
+                </a:solidFill>
+              </a:rPr>
+              <a:t>Question &amp; Inspection Summary Table</a:t>
+            </a:r>
+            <a:r>
+              <a:rPr sz="1200" dirty="0">
+                <a:solidFill>
+                  <a:srgbClr val="F6C514"/>
+                </a:solidFill>
+              </a:rPr>
+              <a:t>:</a:t>
+            </a:r>
+          </a:p>
+          <a:p>
+            <a:pPr>
+              <a:spcAft>
+                <a:spcPts val="600"/>
+              </a:spcAft>
+              <a:defRPr sz="1050">
+                <a:solidFill>
+                  <a:srgbClr val="00C49F"/>
+                </a:solidFill>
+                <a:latin typeface="Calibri"/>
+              </a:defRPr>
+            </a:pPr>
+            <a:r>
+              <a:rPr lang="en-AU" sz="1400" dirty="0">
+                <a:solidFill>
+                  <a:schemeClr val="bg1"/>
+                </a:solidFill>
+              </a:rPr>
+              <a:t>Granted </a:t>
+            </a:r>
+            <a:r>
+              <a:rPr lang="en-AU" sz="1400" b="1" dirty="0">
+                <a:solidFill>
+                  <a:schemeClr val="bg1"/>
+                </a:solidFill>
+              </a:rPr>
+              <a:t>User-level </a:t>
+            </a:r>
+            <a:r>
+              <a:rPr lang="en-AU" sz="1400" dirty="0">
+                <a:solidFill>
+                  <a:schemeClr val="bg1"/>
+                </a:solidFill>
+              </a:rPr>
+              <a:t>access of </a:t>
+            </a:r>
+            <a:r>
+              <a:rPr lang="en-AU" sz="1400" b="1" dirty="0">
+                <a:solidFill>
+                  <a:schemeClr val="bg1"/>
+                </a:solidFill>
+              </a:rPr>
+              <a:t>Create &amp; write for users who own the records they create are assigned to the basic user security role</a:t>
+            </a:r>
+            <a:r>
+              <a:rPr lang="en-AU" sz="1400" dirty="0">
+                <a:solidFill>
+                  <a:schemeClr val="bg1"/>
+                </a:solidFill>
+              </a:rPr>
+              <a:t>. The organisation (every other user else in the basic user security role) will have read access to every record, but no one is allowed to delete the records. This ensured that a patrol member could create and edit their own inspections but couldn't necessarily delete records or view inspections from unrelated departments.</a:t>
+            </a:r>
+          </a:p>
+          <a:p>
+            <a:pPr>
+              <a:spcAft>
+                <a:spcPts val="600"/>
+              </a:spcAft>
+              <a:defRPr sz="1050">
+                <a:solidFill>
+                  <a:srgbClr val="00C49F"/>
+                </a:solidFill>
+                <a:latin typeface="Calibri"/>
+              </a:defRPr>
+            </a:pPr>
+            <a:endParaRPr sz="1200" dirty="0"/>
+          </a:p>
+        </p:txBody>
+      </p:sp>
+      <p:sp>
+        <p:nvSpPr>
+          <p:cNvPr id="9" name="Rounded Rectangle 5">
+            <a:extLst>
+              <a:ext uri="{FF2B5EF4-FFF2-40B4-BE49-F238E27FC236}">
+                <a16:creationId xmlns:a16="http://schemas.microsoft.com/office/drawing/2014/main" id="{1F453000-5B3E-A8DE-8BF0-22B35C548753}"/>
+              </a:ext>
+            </a:extLst>
+          </p:cNvPr>
+          <p:cNvSpPr/>
+          <p:nvPr/>
+        </p:nvSpPr>
+        <p:spPr>
+          <a:xfrm>
+            <a:off x="405619" y="1579880"/>
+            <a:ext cx="11328875" cy="853440"/>
+          </a:xfrm>
+          <a:prstGeom prst="roundRect">
+            <a:avLst/>
+          </a:prstGeom>
+          <a:solidFill>
+            <a:srgbClr val="FFFFFF"/>
+          </a:solidFill>
+          <a:ln>
+            <a:noFill/>
+          </a:ln>
+        </p:spPr>
+        <p:style>
+          <a:lnRef idx="1">
+            <a:schemeClr val="accent1"/>
+          </a:lnRef>
+          <a:fillRef idx="3">
+            <a:schemeClr val="accent1"/>
+          </a:fillRef>
+          <a:effectRef idx="2">
+            <a:schemeClr val="accent1"/>
+          </a:effectRef>
+          <a:fontRef idx="minor">
+            <a:schemeClr val="lt1"/>
+          </a:fontRef>
+        </p:style>
+        <p:txBody>
+          <a:bodyPr wrap="square" lIns="137160" tIns="137160" rIns="137160" bIns="137160" rtlCol="0" anchor="ctr"/>
+          <a:lstStyle/>
+          <a:p>
+            <a:pPr>
+              <a:defRPr sz="1100">
+                <a:solidFill>
+                  <a:srgbClr val="0A192F"/>
+                </a:solidFill>
+                <a:latin typeface="Calibri"/>
+              </a:defRPr>
+            </a:pPr>
+            <a:r>
+              <a:rPr lang="en-AU" sz="1400" dirty="0"/>
+              <a:t>Architect the VIA project using this *normalised 5 </a:t>
+            </a:r>
+            <a:r>
+              <a:rPr lang="en-AU" sz="1400" b="1" dirty="0"/>
+              <a:t>Dataverse tables</a:t>
+            </a:r>
+            <a:r>
+              <a:rPr lang="en-AU" sz="1400" dirty="0"/>
+              <a:t> relational model to </a:t>
+            </a:r>
+            <a:r>
+              <a:rPr lang="en-AU" sz="1400" b="1" dirty="0"/>
+              <a:t>ensure the VIA product could scale to 200,000+ records without performance degradation</a:t>
+            </a:r>
+            <a:r>
+              <a:rPr lang="en-AU" sz="1400" dirty="0"/>
+              <a:t>. By separating </a:t>
+            </a:r>
+            <a:r>
+              <a:rPr lang="en-AU" sz="1400" b="1" dirty="0"/>
+              <a:t>Questions</a:t>
+            </a:r>
+            <a:r>
+              <a:rPr lang="en-AU" sz="1400" dirty="0"/>
+              <a:t> from </a:t>
+            </a:r>
+            <a:r>
+              <a:rPr lang="en-AU" sz="1400" b="1" dirty="0"/>
+              <a:t>Responses table</a:t>
+            </a:r>
+            <a:r>
+              <a:rPr lang="en-AU" sz="1400" dirty="0"/>
+              <a:t>, David made the system 'Future-Proof.' If a user needs to add a new checklist question tomorrow, they don't need a developer to change the UI; they just add a row to the </a:t>
+            </a:r>
+            <a:r>
+              <a:rPr lang="en-AU" sz="1400" b="1" dirty="0"/>
+              <a:t>Questions Table</a:t>
+            </a:r>
+            <a:r>
+              <a:rPr lang="en-AU" sz="1400" dirty="0"/>
+              <a:t>. This reduces technical debt and ensures the </a:t>
+            </a:r>
+            <a:r>
+              <a:rPr lang="en-AU" sz="1400" b="1" dirty="0"/>
+              <a:t>new question added in question table is auto populated into the canvas app.</a:t>
+            </a:r>
+            <a:endParaRPr sz="1400" dirty="0"/>
+          </a:p>
+        </p:txBody>
+      </p:sp>
+      <p:pic>
+        <p:nvPicPr>
+          <p:cNvPr id="11" name="Picture 10">
+            <a:extLst>
+              <a:ext uri="{FF2B5EF4-FFF2-40B4-BE49-F238E27FC236}">
+                <a16:creationId xmlns:a16="http://schemas.microsoft.com/office/drawing/2014/main" id="{44D10047-5C74-D309-97E1-F10F58E1E326}"/>
+              </a:ext>
+            </a:extLst>
+          </p:cNvPr>
+          <p:cNvPicPr>
+            <a:picLocks noChangeAspect="1"/>
+          </p:cNvPicPr>
+          <p:nvPr/>
+        </p:nvPicPr>
+        <p:blipFill>
+          <a:blip r:embed="rId3"/>
+          <a:stretch>
+            <a:fillRect/>
+          </a:stretch>
+        </p:blipFill>
+        <p:spPr>
+          <a:xfrm>
+            <a:off x="405619" y="2544978"/>
+            <a:ext cx="5518251" cy="3890112"/>
+          </a:xfrm>
+          <a:prstGeom prst="rect">
+            <a:avLst/>
+          </a:prstGeom>
+        </p:spPr>
+      </p:pic>
+      <p:pic>
+        <p:nvPicPr>
+          <p:cNvPr id="15" name="Picture 14">
+            <a:extLst>
+              <a:ext uri="{FF2B5EF4-FFF2-40B4-BE49-F238E27FC236}">
+                <a16:creationId xmlns:a16="http://schemas.microsoft.com/office/drawing/2014/main" id="{21668FF9-8B14-80F1-9EE9-0E63FFFAB4BC}"/>
+              </a:ext>
+            </a:extLst>
+          </p:cNvPr>
+          <p:cNvPicPr>
+            <a:picLocks noChangeAspect="1"/>
+          </p:cNvPicPr>
+          <p:nvPr/>
+        </p:nvPicPr>
+        <p:blipFill>
+          <a:blip r:embed="rId4"/>
+          <a:stretch>
+            <a:fillRect/>
+          </a:stretch>
+        </p:blipFill>
+        <p:spPr>
+          <a:xfrm>
+            <a:off x="405619" y="6407158"/>
+            <a:ext cx="5518250" cy="513064"/>
+          </a:xfrm>
+          <a:prstGeom prst="rect">
+            <a:avLst/>
+          </a:prstGeom>
+        </p:spPr>
+      </p:pic>
+      <p:pic>
+        <p:nvPicPr>
+          <p:cNvPr id="19" name="Picture 18">
+            <a:extLst>
+              <a:ext uri="{FF2B5EF4-FFF2-40B4-BE49-F238E27FC236}">
+                <a16:creationId xmlns:a16="http://schemas.microsoft.com/office/drawing/2014/main" id="{912D9820-06AE-7A60-3533-4084F82693F6}"/>
+              </a:ext>
+            </a:extLst>
+          </p:cNvPr>
+          <p:cNvPicPr>
+            <a:picLocks noChangeAspect="1"/>
+          </p:cNvPicPr>
+          <p:nvPr/>
+        </p:nvPicPr>
+        <p:blipFill>
+          <a:blip r:embed="rId5"/>
+          <a:stretch>
+            <a:fillRect/>
+          </a:stretch>
+        </p:blipFill>
+        <p:spPr>
+          <a:xfrm>
+            <a:off x="8096830" y="274321"/>
+            <a:ext cx="3637665" cy="1006854"/>
+          </a:xfrm>
+          <a:prstGeom prst="rect">
+            <a:avLst/>
+          </a:prstGeom>
+        </p:spPr>
+      </p:pic>
+    </p:spTree>
+    <p:extLst>
+      <p:ext uri="{BB962C8B-B14F-4D97-AF65-F5344CB8AC3E}">
+        <p14:creationId xmlns:p14="http://schemas.microsoft.com/office/powerpoint/2010/main" val="1072702992"/>
+      </p:ext>
+    </p:extLst>
+  </p:cSld>
+  <p:clrMapOvr>
+    <a:masterClrMapping/>
+  </p:clrMapOvr>
+</p:sld>
+</file>
+
+<file path=ppt/slides/slide5.xml><?xml version="1.0" encoding="utf-8"?>
 <p:sld xmlns:a="http://schemas.openxmlformats.org/drawingml/2006/main" xmlns:r="http://schemas.openxmlformats.org/officeDocument/2006/relationships" xmlns:p="http://schemas.openxmlformats.org/presentationml/2006/main">
   <p:cSld>
     <p:bg>
@@ -5274,6 +8082,67 @@
       </p:grpSpPr>
       <p:sp>
         <p:nvSpPr>
+          <p:cNvPr id="7" name="Shape 0">
+            <a:extLst>
+              <a:ext uri="{FF2B5EF4-FFF2-40B4-BE49-F238E27FC236}">
+                <a16:creationId xmlns:a16="http://schemas.microsoft.com/office/drawing/2014/main" id="{CDAFD631-42A2-34AC-0485-82A40710B0D8}"/>
+              </a:ext>
+            </a:extLst>
+          </p:cNvPr>
+          <p:cNvSpPr/>
+          <p:nvPr/>
+        </p:nvSpPr>
+        <p:spPr>
+          <a:xfrm>
+            <a:off x="0" y="0"/>
+            <a:ext cx="12192000" cy="6892290"/>
+          </a:xfrm>
+          <a:prstGeom prst="rect">
+            <a:avLst/>
+          </a:prstGeom>
+          <a:solidFill>
+            <a:srgbClr val="071B33"/>
+          </a:solidFill>
+          <a:ln w="12700">
+            <a:solidFill>
+              <a:srgbClr val="333333">
+                <a:alpha val="0"/>
+              </a:srgbClr>
+            </a:solidFill>
+            <a:round/>
+          </a:ln>
+        </p:spPr>
+        <p:style>
+          <a:lnRef idx="0">
+            <a:scrgbClr r="0" g="0" b="0"/>
+          </a:lnRef>
+          <a:fillRef idx="0">
+            <a:scrgbClr r="0" g="0" b="0"/>
+          </a:fillRef>
+          <a:effectRef idx="0">
+            <a:scrgbClr r="0" g="0" b="0"/>
+          </a:effectRef>
+          <a:fontRef idx="minor"/>
+        </p:style>
+        <p:txBody>
+          <a:bodyPr lIns="90000" tIns="45000" rIns="90000" bIns="45000" anchor="t">
+            <a:noAutofit/>
+          </a:bodyPr>
+          <a:lstStyle/>
+          <a:p>
+            <a:endParaRPr lang="en-US" sz="1800" b="0" u="none" strike="noStrike">
+              <a:solidFill>
+                <a:srgbClr val="FFFFFF"/>
+              </a:solidFill>
+              <a:effectLst/>
+              <a:uFillTx/>
+              <a:latin typeface="Arial"/>
+            </a:endParaRPr>
+          </a:p>
+        </p:txBody>
+      </p:sp>
+      <p:sp>
+        <p:nvSpPr>
           <p:cNvPr id="2" name="TextBox 1">
             <a:extLst>
               <a:ext uri="{FF2B5EF4-FFF2-40B4-BE49-F238E27FC236}">
@@ -5309,10 +8178,18 @@
               </a:defRPr>
             </a:pPr>
             <a:r>
-              <a:rPr lang="en-AU" dirty="0"/>
+              <a:rPr lang="en-AU" dirty="0">
+                <a:solidFill>
+                  <a:schemeClr val="bg1"/>
+                </a:solidFill>
+              </a:rPr>
               <a:t>Dataverse Normalisation Strategy</a:t>
             </a:r>
-            <a:endParaRPr dirty="0"/>
+            <a:endParaRPr dirty="0">
+              <a:solidFill>
+                <a:schemeClr val="bg1"/>
+              </a:solidFill>
+            </a:endParaRPr>
           </a:p>
         </p:txBody>
       </p:sp>
@@ -5331,7 +8208,7 @@
         <p:spPr>
           <a:xfrm>
             <a:off x="457200" y="914400"/>
-            <a:ext cx="11277295" cy="246221"/>
+            <a:ext cx="11277295" cy="307777"/>
           </a:xfrm>
           <a:prstGeom prst="rect">
             <a:avLst/>
@@ -5353,7 +8230,19 @@
               </a:defRPr>
             </a:pPr>
             <a:r>
-              <a:rPr sz="1600" dirty="0"/>
+              <a:rPr lang="en-AU" sz="2000" dirty="0">
+                <a:solidFill>
+                  <a:srgbClr val="F6C514"/>
+                </a:solidFill>
+              </a:rPr>
+              <a:t>Pillar 3.1 : </a:t>
+            </a:r>
+            <a:r>
+              <a:rPr sz="2000" dirty="0">
+                <a:solidFill>
+                  <a:srgbClr val="F6C514"/>
+                </a:solidFill>
+              </a:rPr>
               <a:t>THE ARCHITECTURAL BLUEPRINT (THE SOLUTION)</a:t>
             </a:r>
           </a:p>
@@ -5380,7 +8269,7 @@
             <a:avLst/>
           </a:prstGeom>
           <a:solidFill>
-            <a:srgbClr val="00C49F"/>
+            <a:srgbClr val="F6C514"/>
           </a:solidFill>
           <a:ln>
             <a:noFill/>
@@ -5411,269 +8300,6 @@
       </p:sp>
       <p:sp>
         <p:nvSpPr>
-          <p:cNvPr id="5" name="Rounded Rectangle 4">
-            <a:extLst>
-              <a:ext uri="{FF2B5EF4-FFF2-40B4-BE49-F238E27FC236}">
-                <a16:creationId xmlns:a16="http://schemas.microsoft.com/office/drawing/2014/main" id="{8C535C8D-9B6E-CE89-CE9B-E13CC8111EBD}"/>
-              </a:ext>
-            </a:extLst>
-          </p:cNvPr>
-          <p:cNvSpPr/>
-          <p:nvPr/>
-        </p:nvSpPr>
-        <p:spPr>
-          <a:xfrm>
-            <a:off x="457200" y="2596896"/>
-            <a:ext cx="5486400" cy="4114800"/>
-          </a:xfrm>
-          <a:prstGeom prst="roundRect">
-            <a:avLst/>
-          </a:prstGeom>
-          <a:solidFill>
-            <a:srgbClr val="FFFFFF"/>
-          </a:solidFill>
-          <a:ln>
-            <a:noFill/>
-          </a:ln>
-        </p:spPr>
-        <p:style>
-          <a:lnRef idx="1">
-            <a:schemeClr val="accent1"/>
-          </a:lnRef>
-          <a:fillRef idx="3">
-            <a:schemeClr val="accent1"/>
-          </a:fillRef>
-          <a:effectRef idx="2">
-            <a:schemeClr val="accent1"/>
-          </a:effectRef>
-          <a:fontRef idx="minor">
-            <a:schemeClr val="lt1"/>
-          </a:fontRef>
-        </p:style>
-        <p:txBody>
-          <a:bodyPr wrap="square" lIns="228600" tIns="228600" rIns="228600" bIns="228600" rtlCol="0" anchor="ctr"/>
-          <a:lstStyle/>
-          <a:p>
-            <a:pPr algn="ctr">
-              <a:spcAft>
-                <a:spcPts val="800"/>
-              </a:spcAft>
-              <a:defRPr sz="1200" b="1">
-                <a:solidFill>
-                  <a:srgbClr val="00C49F"/>
-                </a:solidFill>
-                <a:latin typeface="Calibri"/>
-              </a:defRPr>
-            </a:pPr>
-            <a:r>
-              <a:rPr lang="en-AU" dirty="0"/>
-              <a:t>*Third Normal Form (3NF) Strategy</a:t>
-            </a:r>
-            <a:endParaRPr dirty="0"/>
-          </a:p>
-          <a:p>
-            <a:pPr>
-              <a:spcBef>
-                <a:spcPts val="300"/>
-              </a:spcBef>
-              <a:defRPr sz="1100" b="1">
-                <a:solidFill>
-                  <a:srgbClr val="0A192F"/>
-                </a:solidFill>
-                <a:latin typeface="Calibri"/>
-              </a:defRPr>
-            </a:pPr>
-            <a:r>
-              <a:rPr lang="en-AU" sz="1100" b="1" dirty="0"/>
-              <a:t>David applied Third Normal Form (3NF) to ensure the VIA product could scale to 200,000+ records without performance degradation:</a:t>
-            </a:r>
-          </a:p>
-          <a:p>
-            <a:pPr>
-              <a:spcBef>
-                <a:spcPts val="300"/>
-              </a:spcBef>
-              <a:defRPr sz="1100" b="1">
-                <a:solidFill>
-                  <a:srgbClr val="0A192F"/>
-                </a:solidFill>
-                <a:latin typeface="Calibri"/>
-              </a:defRPr>
-            </a:pPr>
-            <a:endParaRPr lang="en-AU" dirty="0"/>
-          </a:p>
-          <a:p>
-            <a:pPr>
-              <a:spcBef>
-                <a:spcPts val="300"/>
-              </a:spcBef>
-              <a:defRPr sz="1100" b="1">
-                <a:solidFill>
-                  <a:srgbClr val="0A192F"/>
-                </a:solidFill>
-                <a:latin typeface="Calibri"/>
-              </a:defRPr>
-            </a:pPr>
-            <a:r>
-              <a:rPr lang="en-AU" sz="1100" b="1" dirty="0"/>
-              <a:t>1NF (Eliminating Duplicates):</a:t>
-            </a:r>
-            <a:endParaRPr dirty="0"/>
-          </a:p>
-          <a:p>
-            <a:pPr>
-              <a:spcAft>
-                <a:spcPts val="400"/>
-              </a:spcAft>
-              <a:defRPr sz="1050">
-                <a:solidFill>
-                  <a:srgbClr val="64748B"/>
-                </a:solidFill>
-                <a:latin typeface="Calibri"/>
-              </a:defRPr>
-            </a:pPr>
-            <a:r>
-              <a:rPr lang="en-AU" sz="1050" dirty="0"/>
-              <a:t>Instead of having 40 columns in the Summary table for 40 questions, David created the </a:t>
-            </a:r>
-            <a:r>
-              <a:rPr lang="en-AU" sz="1050" b="1" dirty="0"/>
-              <a:t>Response Table</a:t>
-            </a:r>
-            <a:r>
-              <a:rPr lang="en-AU" sz="1050" dirty="0"/>
-              <a:t>. This allows for an infinite number of questions per inspection without changing the data schema</a:t>
-            </a:r>
-            <a:r>
-              <a:rPr dirty="0"/>
-              <a:t>.</a:t>
-            </a:r>
-          </a:p>
-          <a:p>
-            <a:pPr>
-              <a:spcBef>
-                <a:spcPts val="300"/>
-              </a:spcBef>
-              <a:defRPr sz="1100" b="1">
-                <a:solidFill>
-                  <a:srgbClr val="0A192F"/>
-                </a:solidFill>
-                <a:latin typeface="Calibri"/>
-              </a:defRPr>
-            </a:pPr>
-            <a:r>
-              <a:rPr lang="en-AU" sz="1100" b="1" dirty="0"/>
-              <a:t>2NF (Removing Redundancy)</a:t>
-            </a:r>
-            <a:r>
-              <a:rPr dirty="0"/>
-              <a:t>:</a:t>
-            </a:r>
-          </a:p>
-          <a:p>
-            <a:pPr>
-              <a:spcAft>
-                <a:spcPts val="400"/>
-              </a:spcAft>
-              <a:defRPr sz="1050">
-                <a:solidFill>
-                  <a:srgbClr val="64748B"/>
-                </a:solidFill>
-                <a:latin typeface="Calibri"/>
-              </a:defRPr>
-            </a:pPr>
-            <a:r>
-              <a:rPr lang="en-AU" sz="1050" dirty="0"/>
-              <a:t>All vehicle details (Model, Make) live in the </a:t>
-            </a:r>
-            <a:r>
-              <a:rPr lang="en-AU" sz="1050" b="1" dirty="0"/>
-              <a:t>Vehicle look up Table</a:t>
-            </a:r>
-            <a:r>
-              <a:rPr lang="en-AU" sz="1050" dirty="0"/>
-              <a:t>. The Summary table only stores a </a:t>
-            </a:r>
-            <a:r>
-              <a:rPr lang="en-AU" sz="1050" dirty="0" err="1"/>
-              <a:t>Vehicle_ID</a:t>
-            </a:r>
-            <a:r>
-              <a:rPr lang="en-AU" sz="1050" dirty="0"/>
-              <a:t> foreign key. This ensures that if a make is corrected, it updates across all historical records automatically.</a:t>
-            </a:r>
-            <a:endParaRPr dirty="0"/>
-          </a:p>
-          <a:p>
-            <a:pPr>
-              <a:spcBef>
-                <a:spcPts val="300"/>
-              </a:spcBef>
-              <a:defRPr sz="1100" b="1">
-                <a:solidFill>
-                  <a:srgbClr val="0A192F"/>
-                </a:solidFill>
-                <a:latin typeface="Calibri"/>
-              </a:defRPr>
-            </a:pPr>
-            <a:r>
-              <a:rPr lang="en-AU" sz="1100" b="1" dirty="0"/>
-              <a:t>3NF (Transitive Dependencies)</a:t>
-            </a:r>
-            <a:r>
-              <a:rPr dirty="0"/>
-              <a:t>:</a:t>
-            </a:r>
-          </a:p>
-          <a:p>
-            <a:pPr>
-              <a:spcAft>
-                <a:spcPts val="400"/>
-              </a:spcAft>
-              <a:defRPr sz="1050">
-                <a:solidFill>
-                  <a:srgbClr val="64748B"/>
-                </a:solidFill>
-                <a:latin typeface="Calibri"/>
-              </a:defRPr>
-            </a:pPr>
-            <a:r>
-              <a:rPr lang="en-AU" sz="1050" dirty="0"/>
-              <a:t>ensured the Summary table only stores data directly related to the </a:t>
-            </a:r>
-            <a:r>
-              <a:rPr lang="en-AU" sz="1050" i="1" dirty="0"/>
-              <a:t>event</a:t>
-            </a:r>
-            <a:r>
-              <a:rPr lang="en-AU" sz="1050" dirty="0"/>
-              <a:t> (like the timestamp). Data related to the </a:t>
-            </a:r>
-            <a:r>
-              <a:rPr lang="en-AU" sz="1050" i="1" dirty="0"/>
-              <a:t>Inspector</a:t>
-            </a:r>
-            <a:r>
-              <a:rPr lang="en-AU" sz="1050" dirty="0"/>
-              <a:t> (like their user’s name) is looked up via the </a:t>
-            </a:r>
-            <a:r>
-              <a:rPr lang="en-AU" sz="1050" dirty="0" err="1"/>
-              <a:t>SystemUser</a:t>
-            </a:r>
-            <a:r>
-              <a:rPr lang="en-AU" sz="1050" dirty="0"/>
-              <a:t> table to prevent data drift</a:t>
-            </a:r>
-            <a:r>
-              <a:rPr dirty="0"/>
-              <a:t>.</a:t>
-            </a:r>
-          </a:p>
-        </p:txBody>
-      </p:sp>
-      <p:sp>
-        <p:nvSpPr>
           <p:cNvPr id="6" name="Rounded Rectangle 5">
             <a:extLst>
               <a:ext uri="{FF2B5EF4-FFF2-40B4-BE49-F238E27FC236}">
@@ -5686,8 +8312,8 @@
         </p:nvSpPr>
         <p:spPr>
           <a:xfrm>
-            <a:off x="6184087" y="2560320"/>
-            <a:ext cx="5486400" cy="4114800"/>
+            <a:off x="165507" y="1492925"/>
+            <a:ext cx="4584294" cy="3396575"/>
           </a:xfrm>
           <a:prstGeom prst="roundRect">
             <a:avLst/>
@@ -5729,7 +8355,11 @@
               </a:defRPr>
             </a:pPr>
             <a:r>
-              <a:rPr dirty="0"/>
+              <a:rPr sz="1600" dirty="0">
+                <a:solidFill>
+                  <a:schemeClr val="bg1"/>
+                </a:solidFill>
+              </a:rPr>
               <a:t>PLATFORM GOVERNANCE &amp; SECURITY</a:t>
             </a:r>
           </a:p>
@@ -5746,7 +8376,11 @@
               </a:defRPr>
             </a:pPr>
             <a:r>
-              <a:rPr dirty="0"/>
+              <a:rPr sz="1600" dirty="0">
+                <a:solidFill>
+                  <a:srgbClr val="F6C514"/>
+                </a:solidFill>
+              </a:rPr>
               <a:t>Hardened Security Staging</a:t>
             </a:r>
           </a:p>
@@ -5763,86 +8397,60 @@
               </a:defRPr>
             </a:pPr>
             <a:r>
-              <a:rPr dirty="0"/>
-              <a:t>Custom Dataverse Role (Basic User - MWPSOL-141):</a:t>
-            </a:r>
-          </a:p>
-          <a:p>
-            <a:r>
-              <a:rPr lang="en-AU" sz="1050" dirty="0">
-                <a:solidFill>
-                  <a:srgbClr val="00C49F"/>
-                </a:solidFill>
-              </a:rPr>
-              <a:t>Followed a </a:t>
-            </a:r>
-            <a:r>
-              <a:rPr lang="en-AU" sz="1050" b="1" dirty="0">
-                <a:solidFill>
-                  <a:srgbClr val="00C49F"/>
-                </a:solidFill>
-              </a:rPr>
-              <a:t>'Least Privilege' model -</a:t>
-            </a:r>
-            <a:r>
-              <a:rPr lang="en-AU" sz="1050" dirty="0">
-                <a:solidFill>
-                  <a:srgbClr val="00C49F"/>
-                </a:solidFill>
-              </a:rPr>
-              <a:t>  Created a custom role called </a:t>
-            </a:r>
-            <a:r>
-              <a:rPr lang="en-AU" sz="1050" b="1" dirty="0">
-                <a:solidFill>
-                  <a:srgbClr val="00C49F"/>
-                </a:solidFill>
-              </a:rPr>
-              <a:t>'Basic User - MWPSOL-141'</a:t>
-            </a:r>
-            <a:r>
-              <a:rPr lang="en-AU" sz="1050" dirty="0">
-                <a:solidFill>
-                  <a:srgbClr val="00C49F"/>
-                </a:solidFill>
-              </a:rPr>
-              <a:t> by cloning the standard base role and hardening it. This restricted the </a:t>
-            </a:r>
-            <a:r>
-              <a:rPr lang="en-AU" sz="1050" b="1" dirty="0">
-                <a:solidFill>
-                  <a:srgbClr val="00C49F"/>
-                </a:solidFill>
-              </a:rPr>
-              <a:t>Delete</a:t>
-            </a:r>
-            <a:r>
-              <a:rPr lang="en-AU" sz="1050" dirty="0">
-                <a:solidFill>
-                  <a:srgbClr val="00C49F"/>
-                </a:solidFill>
-              </a:rPr>
-              <a:t> and </a:t>
-            </a:r>
-            <a:r>
-              <a:rPr lang="en-AU" sz="1050" b="1" dirty="0">
-                <a:solidFill>
-                  <a:srgbClr val="00C49F"/>
-                </a:solidFill>
-              </a:rPr>
-              <a:t>Share</a:t>
-            </a:r>
-            <a:r>
-              <a:rPr lang="en-AU" sz="1050" dirty="0">
-                <a:solidFill>
-                  <a:srgbClr val="00C49F"/>
-                </a:solidFill>
-              </a:rPr>
-              <a:t> permissions on the Inspection tables to protect PII.  This ensured that only members of the verified AD Security Group could interact with the data, which is the same level of compliance rigor I’d apply to the client's SaaS environment.</a:t>
-            </a:r>
-          </a:p>
-          <a:p>
-            <a:endParaRPr lang="en-AU" sz="1000" dirty="0"/>
+              <a:rPr lang="en-AU" sz="1400" dirty="0">
+                <a:solidFill>
+                  <a:srgbClr val="F6C514"/>
+                </a:solidFill>
+              </a:rPr>
+              <a:t>Response Table:</a:t>
+            </a:r>
+            <a:endParaRPr sz="1400" dirty="0">
+              <a:solidFill>
+                <a:srgbClr val="F6C514"/>
+              </a:solidFill>
+            </a:endParaRPr>
+          </a:p>
+          <a:p>
+            <a:r>
+              <a:rPr lang="en-AU" sz="1400" dirty="0">
+                <a:solidFill>
+                  <a:schemeClr val="bg1"/>
+                </a:solidFill>
+              </a:rPr>
+              <a:t>Grant </a:t>
+            </a:r>
+            <a:r>
+              <a:rPr lang="en-AU" sz="1400" b="1" dirty="0">
+                <a:solidFill>
+                  <a:schemeClr val="bg1"/>
+                </a:solidFill>
+              </a:rPr>
+              <a:t>User-level </a:t>
+            </a:r>
+            <a:r>
+              <a:rPr lang="en-AU" sz="1400" dirty="0">
+                <a:solidFill>
+                  <a:schemeClr val="bg1"/>
+                </a:solidFill>
+              </a:rPr>
+              <a:t>access of </a:t>
+            </a:r>
+            <a:r>
+              <a:rPr lang="en-AU" sz="1400" b="1" dirty="0">
+                <a:solidFill>
+                  <a:schemeClr val="bg1"/>
+                </a:solidFill>
+              </a:rPr>
+              <a:t>Create for users who own the records they create. </a:t>
+            </a:r>
+            <a:r>
+              <a:rPr lang="en-AU" sz="1400" dirty="0">
+                <a:solidFill>
+                  <a:schemeClr val="bg1"/>
+                </a:solidFill>
+              </a:rPr>
+              <a:t>However, every other user can read any response records and continue to update a record to continue from where the last person had saved it.</a:t>
+            </a:r>
           </a:p>
           <a:p>
             <a:pPr>
@@ -5856,9 +8464,35 @@
                 <a:latin typeface="Calibri"/>
               </a:defRPr>
             </a:pPr>
-            <a:r>
-              <a:rPr dirty="0"/>
-              <a:t>Container Access &amp; Entra ID Security Groups:</a:t>
+            <a:endParaRPr lang="en-AU" sz="1400" b="1" dirty="0"/>
+          </a:p>
+          <a:p>
+            <a:pPr>
+              <a:spcBef>
+                <a:spcPts val="300"/>
+              </a:spcBef>
+              <a:defRPr sz="1100" b="1">
+                <a:solidFill>
+                  <a:srgbClr val="FAF9F6"/>
+                </a:solidFill>
+                <a:latin typeface="Calibri"/>
+              </a:defRPr>
+            </a:pPr>
+            <a:r>
+              <a:rPr lang="en-AU" sz="1400" b="1" dirty="0">
+                <a:solidFill>
+                  <a:srgbClr val="F6C514"/>
+                </a:solidFill>
+              </a:rPr>
+              <a:t>Photo Table</a:t>
+            </a:r>
+            <a:r>
+              <a:rPr sz="1400" dirty="0">
+                <a:solidFill>
+                  <a:srgbClr val="F6C514"/>
+                </a:solidFill>
+              </a:rPr>
+              <a:t>:</a:t>
             </a:r>
           </a:p>
           <a:p>
@@ -5874,81 +8508,89 @@
               </a:defRPr>
             </a:pPr>
             <a:r>
-              <a:rPr dirty="0"/>
-              <a:t>Mapped the custom Dataverse security profiles strictly to Active Directory (Entra ID) Security Groups to manage secure user entry automatically.</a:t>
-            </a:r>
-          </a:p>
-          <a:p>
-            <a:pPr>
-              <a:spcBef>
-                <a:spcPts val="300"/>
-              </a:spcBef>
-              <a:defRPr sz="1100" b="1">
-                <a:solidFill>
-                  <a:srgbClr val="FAF9F6"/>
-                </a:solidFill>
-                <a:latin typeface="Calibri"/>
-              </a:defRPr>
-            </a:pPr>
-            <a:r>
-              <a:rPr dirty="0"/>
-              <a:t>Controlled Release Rings:</a:t>
-            </a:r>
-          </a:p>
-          <a:p>
-            <a:pPr>
-              <a:spcAft>
-                <a:spcPts val="600"/>
-              </a:spcAft>
-              <a:defRPr sz="1050">
-                <a:solidFill>
-                  <a:srgbClr val="00C49F"/>
-                </a:solidFill>
-                <a:latin typeface="Calibri"/>
-              </a:defRPr>
-            </a:pPr>
-            <a:r>
-              <a:rPr dirty="0"/>
-              <a:t>Configured staged deployment via Active Directory release groups (Rings 0 through 4) to manage change rollout and mitigate production risk.</a:t>
-            </a:r>
-            <a:endParaRPr lang="en-AU" dirty="0"/>
-          </a:p>
-          <a:p>
-            <a:pPr>
-              <a:spcAft>
-                <a:spcPts val="600"/>
-              </a:spcAft>
-              <a:defRPr sz="1050">
-                <a:solidFill>
-                  <a:srgbClr val="00C49F"/>
-                </a:solidFill>
-                <a:latin typeface="Calibri"/>
-              </a:defRPr>
-            </a:pPr>
-            <a:endParaRPr lang="en-AU" dirty="0"/>
-          </a:p>
-          <a:p>
-            <a:pPr>
-              <a:spcAft>
-                <a:spcPts val="600"/>
-              </a:spcAft>
-              <a:defRPr sz="1050">
-                <a:solidFill>
-                  <a:srgbClr val="00C49F"/>
-                </a:solidFill>
-                <a:latin typeface="Calibri"/>
-              </a:defRPr>
-            </a:pPr>
-            <a:endParaRPr dirty="0"/>
-          </a:p>
-        </p:txBody>
-      </p:sp>
-      <p:sp>
-        <p:nvSpPr>
-          <p:cNvPr id="9" name="Rounded Rectangle 5">
+              <a:rPr lang="en-AU" sz="1400" dirty="0">
+                <a:solidFill>
+                  <a:schemeClr val="bg1"/>
+                </a:solidFill>
+              </a:rPr>
+              <a:t> Grant </a:t>
+            </a:r>
+            <a:r>
+              <a:rPr lang="en-AU" sz="1400" b="1" dirty="0">
+                <a:solidFill>
+                  <a:schemeClr val="bg1"/>
+                </a:solidFill>
+              </a:rPr>
+              <a:t>User-level </a:t>
+            </a:r>
+            <a:r>
+              <a:rPr lang="en-AU" sz="1400" dirty="0">
+                <a:solidFill>
+                  <a:schemeClr val="bg1"/>
+                </a:solidFill>
+              </a:rPr>
+              <a:t>access for </a:t>
+            </a:r>
+            <a:r>
+              <a:rPr lang="en-AU" sz="1400" b="1" dirty="0">
+                <a:solidFill>
+                  <a:schemeClr val="bg1"/>
+                </a:solidFill>
+              </a:rPr>
+              <a:t>Create for users who own the records they create.</a:t>
+            </a:r>
+            <a:r>
+              <a:rPr lang="en-AU" sz="1400" dirty="0">
+                <a:solidFill>
+                  <a:schemeClr val="bg1"/>
+                </a:solidFill>
+              </a:rPr>
+              <a:t> Admin (organisation) has full visibility to entire record to read, write and delete.</a:t>
+            </a:r>
+            <a:endParaRPr sz="1400" dirty="0">
+              <a:solidFill>
+                <a:schemeClr val="bg1"/>
+              </a:solidFill>
+            </a:endParaRPr>
+          </a:p>
+        </p:txBody>
+      </p:sp>
+      <p:pic>
+        <p:nvPicPr>
+          <p:cNvPr id="8" name="Picture 7">
             <a:extLst>
               <a:ext uri="{FF2B5EF4-FFF2-40B4-BE49-F238E27FC236}">
-                <a16:creationId xmlns:a16="http://schemas.microsoft.com/office/drawing/2014/main" id="{52281A89-4F83-68EC-AA2E-49511A6F7F27}"/>
+                <a16:creationId xmlns:a16="http://schemas.microsoft.com/office/drawing/2014/main" id="{10303F38-A2E4-56FA-23E9-52F15B93D388}"/>
+              </a:ext>
+            </a:extLst>
+          </p:cNvPr>
+          <p:cNvPicPr>
+            <a:picLocks noChangeAspect="1"/>
+          </p:cNvPicPr>
+          <p:nvPr/>
+        </p:nvPicPr>
+        <p:blipFill>
+          <a:blip r:embed="rId3"/>
+          <a:stretch>
+            <a:fillRect/>
+          </a:stretch>
+        </p:blipFill>
+        <p:spPr>
+          <a:xfrm>
+            <a:off x="5065984" y="1578865"/>
+            <a:ext cx="6960510" cy="4058122"/>
+          </a:xfrm>
+          <a:prstGeom prst="rect">
+            <a:avLst/>
+          </a:prstGeom>
+        </p:spPr>
+      </p:pic>
+      <p:sp>
+        <p:nvSpPr>
+          <p:cNvPr id="12" name="Rounded Rectangle 6">
+            <a:extLst>
+              <a:ext uri="{FF2B5EF4-FFF2-40B4-BE49-F238E27FC236}">
+                <a16:creationId xmlns:a16="http://schemas.microsoft.com/office/drawing/2014/main" id="{09EEF449-ED26-FE99-1231-3516C2B6B48B}"/>
               </a:ext>
             </a:extLst>
           </p:cNvPr>
@@ -5957,14 +8599,14 @@
         </p:nvSpPr>
         <p:spPr>
           <a:xfrm>
-            <a:off x="457200" y="1579880"/>
-            <a:ext cx="11277294" cy="853440"/>
+            <a:off x="183717" y="4971290"/>
+            <a:ext cx="4838701" cy="1798136"/>
           </a:xfrm>
           <a:prstGeom prst="roundRect">
             <a:avLst/>
           </a:prstGeom>
           <a:solidFill>
-            <a:srgbClr val="FFFFFF"/>
+            <a:srgbClr val="1B4965"/>
           </a:solidFill>
           <a:ln>
             <a:noFill/>
@@ -5985,89 +8627,104 @@
           </a:fontRef>
         </p:style>
         <p:txBody>
-          <a:bodyPr wrap="square" lIns="137160" tIns="137160" rIns="137160" bIns="137160" rtlCol="0" anchor="ctr"/>
+          <a:bodyPr wrap="square" lIns="228600" tIns="228600" rIns="228600" bIns="228600" rtlCol="0" anchor="ctr"/>
           <a:lstStyle/>
           <a:p>
-            <a:pPr>
-              <a:defRPr sz="1100">
-                <a:solidFill>
-                  <a:srgbClr val="0A192F"/>
+            <a:pPr algn="ctr">
+              <a:spcAft>
+                <a:spcPts val="1000"/>
+              </a:spcAft>
+              <a:defRPr sz="1100" b="1">
+                <a:solidFill>
+                  <a:srgbClr val="00C49F"/>
                 </a:solidFill>
                 <a:latin typeface="Calibri"/>
               </a:defRPr>
             </a:pPr>
             <a:r>
-              <a:rPr lang="en-AU" sz="1200" dirty="0"/>
-              <a:t>Architect the VIA project using this *normalised 5-table relational model because it mirrors how a professional SaaS product should behave. By separating </a:t>
-            </a:r>
-            <a:r>
-              <a:rPr lang="en-AU" sz="1200" b="1" dirty="0"/>
-              <a:t>Questions</a:t>
-            </a:r>
-            <a:r>
-              <a:rPr lang="en-AU" sz="1200" dirty="0"/>
-              <a:t> from </a:t>
-            </a:r>
-            <a:r>
-              <a:rPr lang="en-AU" sz="1200" b="1" dirty="0"/>
-              <a:t>Responses</a:t>
-            </a:r>
-            <a:r>
-              <a:rPr lang="en-AU" sz="1200" dirty="0"/>
-              <a:t>, David made the system 'Future-Proof.' If a user needs to add a new checklist question tomorrow, they don't need a developer to change the UI; they just add a row to the </a:t>
-            </a:r>
-            <a:r>
-              <a:rPr lang="en-AU" sz="1200" b="1" dirty="0"/>
-              <a:t>Questions Table</a:t>
-            </a:r>
-            <a:r>
-              <a:rPr lang="en-AU" sz="1200" dirty="0"/>
-              <a:t>. This reduces technical debt and ensures the </a:t>
-            </a:r>
-            <a:r>
-              <a:rPr lang="en-AU" sz="1200" b="1" dirty="0"/>
-              <a:t>new question added in question table is auto populated into the canvas app.</a:t>
-            </a:r>
-            <a:endParaRPr sz="1200" dirty="0"/>
-          </a:p>
-        </p:txBody>
-      </p:sp>
-    </p:spTree>
-    <p:extLst>
-      <p:ext uri="{BB962C8B-B14F-4D97-AF65-F5344CB8AC3E}">
-        <p14:creationId xmlns:p14="http://schemas.microsoft.com/office/powerpoint/2010/main" val="2376835019"/>
-      </p:ext>
-    </p:extLst>
-  </p:cSld>
-  <p:clrMapOvr>
-    <a:masterClrMapping/>
-  </p:clrMapOvr>
-</p:sld>
-</file>
-
-<file path=ppt/slides/slide4.xml><?xml version="1.0" encoding="utf-8"?>
-<p:sld xmlns:a="http://schemas.openxmlformats.org/drawingml/2006/main" xmlns:r="http://schemas.openxmlformats.org/officeDocument/2006/relationships" xmlns:p="http://schemas.openxmlformats.org/presentationml/2006/main">
-  <p:cSld>
-    <p:spTree>
-      <p:nvGrpSpPr>
-        <p:cNvPr id="1" name=""/>
-        <p:cNvGrpSpPr/>
-        <p:nvPr/>
-      </p:nvGrpSpPr>
-      <p:grpSpPr>
-        <a:xfrm>
-          <a:off x="0" y="0"/>
-          <a:ext cx="0" cy="0"/>
-          <a:chOff x="0" y="0"/>
-          <a:chExt cx="0" cy="0"/>
-        </a:xfrm>
-      </p:grpSpPr>
+              <a:rPr sz="1600" dirty="0">
+                <a:solidFill>
+                  <a:srgbClr val="F6C514"/>
+                </a:solidFill>
+              </a:rPr>
+              <a:t>PLATFORM COMPLIANCE SECURITY</a:t>
+            </a:r>
+          </a:p>
+          <a:p>
+            <a:pPr>
+              <a:spcAft>
+                <a:spcPts val="1400"/>
+              </a:spcAft>
+              <a:defRPr sz="3600" b="1">
+                <a:solidFill>
+                  <a:srgbClr val="FAF9F6"/>
+                </a:solidFill>
+                <a:latin typeface="Georgia"/>
+              </a:defRPr>
+            </a:pPr>
+            <a:r>
+              <a:rPr sz="2000" dirty="0"/>
+              <a:t>Zero </a:t>
+            </a:r>
+            <a:r>
+              <a:rPr lang="en-AU" sz="2000" dirty="0"/>
+              <a:t>Tech </a:t>
+            </a:r>
+            <a:r>
+              <a:rPr sz="2000" dirty="0"/>
+              <a:t>Debt</a:t>
+            </a:r>
+          </a:p>
+          <a:p>
+            <a:pPr>
+              <a:spcAft>
+                <a:spcPts val="600"/>
+              </a:spcAft>
+              <a:defRPr sz="1100">
+                <a:solidFill>
+                  <a:srgbClr val="FAF9F6"/>
+                </a:solidFill>
+                <a:latin typeface="Calibri"/>
+              </a:defRPr>
+            </a:pPr>
+            <a:r>
+              <a:rPr sz="1400" dirty="0"/>
+              <a:t>• Relational 5-table Dataverse schema successfully cleared all corporate security and compliance audits.</a:t>
+            </a:r>
+          </a:p>
+          <a:p>
+            <a:pPr>
+              <a:spcAft>
+                <a:spcPts val="600"/>
+              </a:spcAft>
+              <a:defRPr sz="1100">
+                <a:solidFill>
+                  <a:srgbClr val="FAF9F6"/>
+                </a:solidFill>
+                <a:latin typeface="Calibri"/>
+              </a:defRPr>
+            </a:pPr>
+            <a:r>
+              <a:rPr sz="1400" dirty="0"/>
+              <a:t>• Hardened security roles eliminated sensitive PII exposure </a:t>
+            </a:r>
+            <a:r>
+              <a:rPr lang="en-AU" sz="1400" dirty="0"/>
+              <a:t>&amp; protect sensitive data </a:t>
+            </a:r>
+            <a:r>
+              <a:rPr sz="1400" dirty="0"/>
+              <a:t>in the field.</a:t>
+            </a:r>
+          </a:p>
+        </p:txBody>
+      </p:sp>
       <p:pic>
         <p:nvPicPr>
-          <p:cNvPr id="3" name="Picture 2">
+          <p:cNvPr id="14" name="Picture 13">
             <a:extLst>
               <a:ext uri="{FF2B5EF4-FFF2-40B4-BE49-F238E27FC236}">
-                <a16:creationId xmlns:a16="http://schemas.microsoft.com/office/drawing/2014/main" id="{6F8BFC8C-F3AC-7AFB-B385-4D96D925BB73}"/>
+                <a16:creationId xmlns:a16="http://schemas.microsoft.com/office/drawing/2014/main" id="{07D77CB0-31E4-966F-66E6-3E2D41FCAC9B}"/>
               </a:ext>
             </a:extLst>
           </p:cNvPr>
@@ -6077,15 +8734,15 @@
           <p:nvPr/>
         </p:nvPicPr>
         <p:blipFill>
-          <a:blip r:embed="rId2"/>
+          <a:blip r:embed="rId4"/>
           <a:stretch>
             <a:fillRect/>
           </a:stretch>
         </p:blipFill>
         <p:spPr>
           <a:xfrm>
-            <a:off x="0" y="1124198"/>
-            <a:ext cx="12192000" cy="4609603"/>
+            <a:off x="6781800" y="274320"/>
+            <a:ext cx="5409895" cy="996983"/>
           </a:xfrm>
           <a:prstGeom prst="rect">
             <a:avLst/>
@@ -6095,432 +8752,9 @@
     </p:spTree>
     <p:extLst>
       <p:ext uri="{BB962C8B-B14F-4D97-AF65-F5344CB8AC3E}">
-        <p14:creationId xmlns:p14="http://schemas.microsoft.com/office/powerpoint/2010/main" val="3395104444"/>
+        <p14:creationId xmlns:p14="http://schemas.microsoft.com/office/powerpoint/2010/main" val="2376835019"/>
       </p:ext>
     </p:extLst>
-  </p:cSld>
-  <p:clrMapOvr>
-    <a:masterClrMapping/>
-  </p:clrMapOvr>
-</p:sld>
-</file>
-
-<file path=ppt/slides/slide5.xml><?xml version="1.0" encoding="utf-8"?>
-<p:sld xmlns:a="http://schemas.openxmlformats.org/drawingml/2006/main" xmlns:r="http://schemas.openxmlformats.org/officeDocument/2006/relationships" xmlns:p="http://schemas.openxmlformats.org/presentationml/2006/main">
-  <p:cSld>
-    <p:bg>
-      <p:bgPr>
-        <a:solidFill>
-          <a:srgbClr val="F5F6F8"/>
-        </a:solidFill>
-        <a:effectLst/>
-      </p:bgPr>
-    </p:bg>
-    <p:spTree>
-      <p:nvGrpSpPr>
-        <p:cNvPr id="1" name=""/>
-        <p:cNvGrpSpPr/>
-        <p:nvPr/>
-      </p:nvGrpSpPr>
-      <p:grpSpPr>
-        <a:xfrm>
-          <a:off x="0" y="0"/>
-          <a:ext cx="0" cy="0"/>
-          <a:chOff x="0" y="0"/>
-          <a:chExt cx="0" cy="0"/>
-        </a:xfrm>
-      </p:grpSpPr>
-      <p:sp>
-        <p:nvSpPr>
-          <p:cNvPr id="2" name="TextBox 1"/>
-          <p:cNvSpPr txBox="1"/>
-          <p:nvPr/>
-        </p:nvSpPr>
-        <p:spPr>
-          <a:xfrm>
-            <a:off x="457200" y="274320"/>
-            <a:ext cx="11277295" cy="640080"/>
-          </a:xfrm>
-          <a:prstGeom prst="rect">
-            <a:avLst/>
-          </a:prstGeom>
-          <a:noFill/>
-        </p:spPr>
-        <p:txBody>
-          <a:bodyPr wrap="square" lIns="0" tIns="0" rIns="0" bIns="0">
-            <a:spAutoFit/>
-          </a:bodyPr>
-          <a:lstStyle/>
-          <a:p>
-            <a:pPr>
-              <a:defRPr sz="2400" b="1">
-                <a:solidFill>
-                  <a:srgbClr val="0A192F"/>
-                </a:solidFill>
-                <a:latin typeface="Georgia"/>
-              </a:defRPr>
-            </a:pPr>
-            <a:r>
-              <a:t>Secure Relational 3NF Schema Replaced Flat-File Limits</a:t>
-            </a:r>
-          </a:p>
-        </p:txBody>
-      </p:sp>
-      <p:sp>
-        <p:nvSpPr>
-          <p:cNvPr id="3" name="TextBox 2"/>
-          <p:cNvSpPr txBox="1"/>
-          <p:nvPr/>
-        </p:nvSpPr>
-        <p:spPr>
-          <a:xfrm>
-            <a:off x="457200" y="914400"/>
-            <a:ext cx="11277295" cy="365760"/>
-          </a:xfrm>
-          <a:prstGeom prst="rect">
-            <a:avLst/>
-          </a:prstGeom>
-          <a:noFill/>
-        </p:spPr>
-        <p:txBody>
-          <a:bodyPr wrap="square" lIns="0" tIns="0" rIns="0" bIns="0">
-            <a:spAutoFit/>
-          </a:bodyPr>
-          <a:lstStyle/>
-          <a:p>
-            <a:pPr>
-              <a:defRPr sz="1200" b="1">
-                <a:solidFill>
-                  <a:srgbClr val="00C49F"/>
-                </a:solidFill>
-                <a:latin typeface="Calibri"/>
-              </a:defRPr>
-            </a:pPr>
-            <a:r>
-              <a:t>THE ARCHITECTURAL BLUEPRINT (THE SOLUTION)</a:t>
-            </a:r>
-          </a:p>
-        </p:txBody>
-      </p:sp>
-      <p:sp>
-        <p:nvSpPr>
-          <p:cNvPr id="4" name="Rectangle 3"/>
-          <p:cNvSpPr/>
-          <p:nvPr/>
-        </p:nvSpPr>
-        <p:spPr>
-          <a:xfrm>
-            <a:off x="457200" y="1417320"/>
-            <a:ext cx="11277295" cy="25400"/>
-          </a:xfrm>
-          <a:prstGeom prst="rect">
-            <a:avLst/>
-          </a:prstGeom>
-          <a:solidFill>
-            <a:srgbClr val="00C49F"/>
-          </a:solidFill>
-          <a:ln>
-            <a:noFill/>
-          </a:ln>
-        </p:spPr>
-        <p:style>
-          <a:lnRef idx="1">
-            <a:schemeClr val="accent1"/>
-          </a:lnRef>
-          <a:fillRef idx="3">
-            <a:schemeClr val="accent1"/>
-          </a:fillRef>
-          <a:effectRef idx="2">
-            <a:schemeClr val="accent1"/>
-          </a:effectRef>
-          <a:fontRef idx="minor">
-            <a:schemeClr val="lt1"/>
-          </a:fontRef>
-        </p:style>
-        <p:txBody>
-          <a:bodyPr rtlCol="0" anchor="ctr"/>
-          <a:lstStyle/>
-          <a:p>
-            <a:pPr algn="ctr"/>
-            <a:endParaRPr/>
-          </a:p>
-        </p:txBody>
-      </p:sp>
-      <p:sp>
-        <p:nvSpPr>
-          <p:cNvPr id="5" name="Rounded Rectangle 4"/>
-          <p:cNvSpPr/>
-          <p:nvPr/>
-        </p:nvSpPr>
-        <p:spPr>
-          <a:xfrm>
-            <a:off x="457200" y="1920240"/>
-            <a:ext cx="4901184" cy="4114800"/>
-          </a:xfrm>
-          <a:prstGeom prst="roundRect">
-            <a:avLst/>
-          </a:prstGeom>
-          <a:solidFill>
-            <a:srgbClr val="FFFFFF"/>
-          </a:solidFill>
-          <a:ln>
-            <a:noFill/>
-          </a:ln>
-        </p:spPr>
-        <p:style>
-          <a:lnRef idx="1">
-            <a:schemeClr val="accent1"/>
-          </a:lnRef>
-          <a:fillRef idx="3">
-            <a:schemeClr val="accent1"/>
-          </a:fillRef>
-          <a:effectRef idx="2">
-            <a:schemeClr val="accent1"/>
-          </a:effectRef>
-          <a:fontRef idx="minor">
-            <a:schemeClr val="lt1"/>
-          </a:fontRef>
-        </p:style>
-        <p:txBody>
-          <a:bodyPr wrap="square" lIns="228600" tIns="228600" rIns="228600" bIns="228600" rtlCol="0" anchor="ctr"/>
-          <a:lstStyle/>
-          <a:p>
-            <a:pPr algn="ctr">
-              <a:spcAft>
-                <a:spcPts val="800"/>
-              </a:spcAft>
-              <a:defRPr sz="1200" b="1">
-                <a:solidFill>
-                  <a:srgbClr val="00C49F"/>
-                </a:solidFill>
-                <a:latin typeface="Calibri"/>
-              </a:defRPr>
-            </a:pPr>
-            <a:r>
-              <a:rPr dirty="0"/>
-              <a:t>DATABASE NORMALISATION (3NF)</a:t>
-            </a:r>
-          </a:p>
-          <a:p>
-            <a:pPr>
-              <a:spcAft>
-                <a:spcPts val="1000"/>
-              </a:spcAft>
-              <a:defRPr sz="2000" b="1">
-                <a:solidFill>
-                  <a:srgbClr val="0A192F"/>
-                </a:solidFill>
-                <a:latin typeface="Georgia"/>
-              </a:defRPr>
-            </a:pPr>
-            <a:r>
-              <a:rPr dirty="0"/>
-              <a:t>Relational 5-Table Schema</a:t>
-            </a:r>
-          </a:p>
-          <a:p>
-            <a:pPr>
-              <a:spcBef>
-                <a:spcPts val="300"/>
-              </a:spcBef>
-              <a:defRPr sz="1100" b="1">
-                <a:solidFill>
-                  <a:srgbClr val="0A192F"/>
-                </a:solidFill>
-                <a:latin typeface="Calibri"/>
-              </a:defRPr>
-            </a:pPr>
-            <a:r>
-              <a:rPr dirty="0"/>
-              <a:t>Vehicle (Master Lookup):</a:t>
-            </a:r>
-          </a:p>
-          <a:p>
-            <a:pPr>
-              <a:spcAft>
-                <a:spcPts val="400"/>
-              </a:spcAft>
-              <a:defRPr sz="1050">
-                <a:solidFill>
-                  <a:srgbClr val="64748B"/>
-                </a:solidFill>
-                <a:latin typeface="Calibri"/>
-              </a:defRPr>
-            </a:pPr>
-            <a:r>
-              <a:rPr dirty="0"/>
-              <a:t>Stores persistent asset data (VIN, Rego, Make, Model) to eliminate repetitive typing.</a:t>
-            </a:r>
-          </a:p>
-          <a:p>
-            <a:pPr>
-              <a:spcBef>
-                <a:spcPts val="300"/>
-              </a:spcBef>
-              <a:defRPr sz="1100" b="1">
-                <a:solidFill>
-                  <a:srgbClr val="0A192F"/>
-                </a:solidFill>
-                <a:latin typeface="Calibri"/>
-              </a:defRPr>
-            </a:pPr>
-            <a:r>
-              <a:rPr dirty="0"/>
-              <a:t>Questions (Metadata Config):</a:t>
-            </a:r>
-          </a:p>
-          <a:p>
-            <a:pPr>
-              <a:spcAft>
-                <a:spcPts val="400"/>
-              </a:spcAft>
-              <a:defRPr sz="1050">
-                <a:solidFill>
-                  <a:srgbClr val="64748B"/>
-                </a:solidFill>
-                <a:latin typeface="Calibri"/>
-              </a:defRPr>
-            </a:pPr>
-            <a:r>
-              <a:rPr dirty="0"/>
-              <a:t>Keeps the system fully data-driven. Checklist questions are loaded from database dynamically without redeploying code.</a:t>
-            </a:r>
-          </a:p>
-          <a:p>
-            <a:pPr>
-              <a:spcBef>
-                <a:spcPts val="300"/>
-              </a:spcBef>
-              <a:defRPr sz="1100" b="1">
-                <a:solidFill>
-                  <a:srgbClr val="0A192F"/>
-                </a:solidFill>
-                <a:latin typeface="Calibri"/>
-              </a:defRPr>
-            </a:pPr>
-            <a:r>
-              <a:rPr dirty="0"/>
-              <a:t>Summary (Header Transaction):</a:t>
-            </a:r>
-          </a:p>
-          <a:p>
-            <a:pPr>
-              <a:spcAft>
-                <a:spcPts val="400"/>
-              </a:spcAft>
-              <a:defRPr sz="1050">
-                <a:solidFill>
-                  <a:srgbClr val="64748B"/>
-                </a:solidFill>
-                <a:latin typeface="Calibri"/>
-              </a:defRPr>
-            </a:pPr>
-            <a:r>
-              <a:rPr dirty="0"/>
-              <a:t>Stores core event details (Inspector name, Overall status, GPS location, timestamp).</a:t>
-            </a:r>
-          </a:p>
-          <a:p>
-            <a:pPr>
-              <a:spcBef>
-                <a:spcPts val="300"/>
-              </a:spcBef>
-              <a:defRPr sz="1100" b="1">
-                <a:solidFill>
-                  <a:srgbClr val="0A192F"/>
-                </a:solidFill>
-                <a:latin typeface="Calibri"/>
-              </a:defRPr>
-            </a:pPr>
-            <a:r>
-              <a:rPr dirty="0"/>
-              <a:t>Response (Line Items Child):</a:t>
-            </a:r>
-          </a:p>
-          <a:p>
-            <a:pPr>
-              <a:spcAft>
-                <a:spcPts val="400"/>
-              </a:spcAft>
-              <a:defRPr sz="1050">
-                <a:solidFill>
-                  <a:srgbClr val="64748B"/>
-                </a:solidFill>
-                <a:latin typeface="Calibri"/>
-              </a:defRPr>
-            </a:pPr>
-            <a:r>
-              <a:rPr dirty="0"/>
-              <a:t>Captures transactional pass/fail answers for 40+ inspection points linked back to Header.</a:t>
-            </a:r>
-          </a:p>
-          <a:p>
-            <a:pPr>
-              <a:spcBef>
-                <a:spcPts val="300"/>
-              </a:spcBef>
-              <a:defRPr sz="1100" b="1">
-                <a:solidFill>
-                  <a:srgbClr val="0A192F"/>
-                </a:solidFill>
-                <a:latin typeface="Calibri"/>
-              </a:defRPr>
-            </a:pPr>
-            <a:r>
-              <a:rPr dirty="0"/>
-              <a:t>Media Metadata (Attachments):</a:t>
-            </a:r>
-          </a:p>
-          <a:p>
-            <a:pPr>
-              <a:spcAft>
-                <a:spcPts val="400"/>
-              </a:spcAft>
-              <a:defRPr sz="1050">
-                <a:solidFill>
-                  <a:srgbClr val="64748B"/>
-                </a:solidFill>
-                <a:latin typeface="Calibri"/>
-              </a:defRPr>
-            </a:pPr>
-            <a:r>
-              <a:rPr dirty="0"/>
-              <a:t>Stores secure photo links. Files are offloaded to a governed SharePoint Document Library to reduce Dataverse storage costs.</a:t>
-            </a:r>
-          </a:p>
-        </p:txBody>
-      </p:sp>
-      <p:pic>
-        <p:nvPicPr>
-          <p:cNvPr id="11" name="Picture 10">
-            <a:extLst>
-              <a:ext uri="{FF2B5EF4-FFF2-40B4-BE49-F238E27FC236}">
-                <a16:creationId xmlns:a16="http://schemas.microsoft.com/office/drawing/2014/main" id="{085715EE-EC60-30F4-376C-30B021D4CDE3}"/>
-              </a:ext>
-            </a:extLst>
-          </p:cNvPr>
-          <p:cNvPicPr>
-            <a:picLocks noChangeAspect="1"/>
-          </p:cNvPicPr>
-          <p:nvPr/>
-        </p:nvPicPr>
-        <p:blipFill>
-          <a:blip r:embed="rId3"/>
-          <a:stretch>
-            <a:fillRect/>
-          </a:stretch>
-        </p:blipFill>
-        <p:spPr>
-          <a:xfrm>
-            <a:off x="5531717" y="1920240"/>
-            <a:ext cx="6202778" cy="4114800"/>
-          </a:xfrm>
-          <a:prstGeom prst="rect">
-            <a:avLst/>
-          </a:prstGeom>
-        </p:spPr>
-      </p:pic>
-    </p:spTree>
   </p:cSld>
   <p:clrMapOvr>
     <a:masterClrMapping/>
@@ -6555,14 +8789,75 @@
       </p:grpSpPr>
       <p:sp>
         <p:nvSpPr>
+          <p:cNvPr id="7" name="Shape 0">
+            <a:extLst>
+              <a:ext uri="{FF2B5EF4-FFF2-40B4-BE49-F238E27FC236}">
+                <a16:creationId xmlns:a16="http://schemas.microsoft.com/office/drawing/2014/main" id="{822165DE-6245-A7CA-6DA6-9C287638AF2B}"/>
+              </a:ext>
+            </a:extLst>
+          </p:cNvPr>
+          <p:cNvSpPr/>
+          <p:nvPr/>
+        </p:nvSpPr>
+        <p:spPr>
+          <a:xfrm>
+            <a:off x="0" y="0"/>
+            <a:ext cx="12192000" cy="6892290"/>
+          </a:xfrm>
+          <a:prstGeom prst="rect">
+            <a:avLst/>
+          </a:prstGeom>
+          <a:solidFill>
+            <a:srgbClr val="071B33"/>
+          </a:solidFill>
+          <a:ln w="12700">
+            <a:solidFill>
+              <a:srgbClr val="333333">
+                <a:alpha val="0"/>
+              </a:srgbClr>
+            </a:solidFill>
+            <a:round/>
+          </a:ln>
+        </p:spPr>
+        <p:style>
+          <a:lnRef idx="0">
+            <a:scrgbClr r="0" g="0" b="0"/>
+          </a:lnRef>
+          <a:fillRef idx="0">
+            <a:scrgbClr r="0" g="0" b="0"/>
+          </a:fillRef>
+          <a:effectRef idx="0">
+            <a:scrgbClr r="0" g="0" b="0"/>
+          </a:effectRef>
+          <a:fontRef idx="minor"/>
+        </p:style>
+        <p:txBody>
+          <a:bodyPr lIns="90000" tIns="45000" rIns="90000" bIns="45000" anchor="t">
+            <a:noAutofit/>
+          </a:bodyPr>
+          <a:lstStyle/>
+          <a:p>
+            <a:endParaRPr lang="en-US" sz="1800" b="0" u="none" strike="noStrike">
+              <a:solidFill>
+                <a:srgbClr val="FFFFFF"/>
+              </a:solidFill>
+              <a:effectLst/>
+              <a:uFillTx/>
+              <a:latin typeface="Arial"/>
+            </a:endParaRPr>
+          </a:p>
+        </p:txBody>
+      </p:sp>
+      <p:sp>
+        <p:nvSpPr>
           <p:cNvPr id="2" name="TextBox 1"/>
           <p:cNvSpPr txBox="1"/>
           <p:nvPr/>
         </p:nvSpPr>
         <p:spPr>
           <a:xfrm>
-            <a:off x="457200" y="274320"/>
-            <a:ext cx="11277295" cy="640080"/>
+            <a:off x="431800" y="143748"/>
+            <a:ext cx="5994400" cy="738664"/>
           </a:xfrm>
           <a:prstGeom prst="rect">
             <a:avLst/>
@@ -6584,7 +8879,12 @@
               </a:defRPr>
             </a:pPr>
             <a:r>
-              <a:t>Structured E2E Lifecycle Delivery Mitigated Implementation Risks</a:t>
+              <a:rPr dirty="0">
+                <a:solidFill>
+                  <a:schemeClr val="bg1"/>
+                </a:solidFill>
+              </a:rPr>
+              <a:t>Secure Relational 3NF Schema Replaced Flat-File Limits</a:t>
             </a:r>
           </a:p>
         </p:txBody>
@@ -6597,8 +8897,8 @@
         </p:nvSpPr>
         <p:spPr>
           <a:xfrm>
-            <a:off x="457200" y="914400"/>
-            <a:ext cx="11277295" cy="365760"/>
+            <a:off x="431800" y="1026160"/>
+            <a:ext cx="11277295" cy="307777"/>
           </a:xfrm>
           <a:prstGeom prst="rect">
             <a:avLst/>
@@ -6620,7 +8920,20 @@
               </a:defRPr>
             </a:pPr>
             <a:r>
-              <a:t>THE ENGINEERING CRAFT (SKILLS &amp; METHODOLOGY)</a:t>
+              <a:rPr lang="en-AU" sz="2000" dirty="0">
+                <a:solidFill>
+                  <a:srgbClr val="F6C514"/>
+                </a:solidFill>
+              </a:rPr>
+              <a:t>Pillar 3.2 : </a:t>
+            </a:r>
+            <a:r>
+              <a:rPr sz="2000" dirty="0">
+                <a:solidFill>
+                  <a:srgbClr val="F6C514"/>
+                </a:solidFill>
+              </a:rPr>
+              <a:t>THE ARCHITECTURAL BLUEPRINT (THE SOLUTION)</a:t>
             </a:r>
           </a:p>
         </p:txBody>
@@ -6640,7 +8953,7 @@
             <a:avLst/>
           </a:prstGeom>
           <a:solidFill>
-            <a:srgbClr val="00C49F"/>
+            <a:srgbClr val="F6C514"/>
           </a:solidFill>
           <a:ln>
             <a:noFill/>
@@ -6677,8 +8990,8 @@
         </p:nvSpPr>
         <p:spPr>
           <a:xfrm>
-            <a:off x="457200" y="1920240"/>
-            <a:ext cx="3474720" cy="4114800"/>
+            <a:off x="240030" y="1579880"/>
+            <a:ext cx="4901184" cy="5003800"/>
           </a:xfrm>
           <a:prstGeom prst="roundRect">
             <a:avLst/>
@@ -6710,9 +9023,9 @@
           <a:p>
             <a:pPr algn="ctr">
               <a:spcAft>
-                <a:spcPts val="600"/>
+                <a:spcPts val="800"/>
               </a:spcAft>
-              <a:defRPr sz="1100" b="1">
+              <a:defRPr sz="1200" b="1">
                 <a:solidFill>
                   <a:srgbClr val="00C49F"/>
                 </a:solidFill>
@@ -6720,15 +9033,16 @@
               </a:defRPr>
             </a:pPr>
             <a:r>
-              <a:t>1. ANALYSING REQUIREMENTS</a:t>
+              <a:rPr sz="1400" dirty="0"/>
+              <a:t>DATABASE NORMALISATION (3NF)</a:t>
             </a:r>
           </a:p>
           <a:p>
             <a:pPr>
               <a:spcAft>
-                <a:spcPts val="1200"/>
+                <a:spcPts val="1000"/>
               </a:spcAft>
-              <a:defRPr sz="1500" b="1">
+              <a:defRPr sz="2000" b="1">
                 <a:solidFill>
                   <a:srgbClr val="0A192F"/>
                 </a:solidFill>
@@ -6736,31 +9050,33 @@
               </a:defRPr>
             </a:pPr>
             <a:r>
-              <a:t>Stakeholder Workshop &amp; SID Elicitation</a:t>
+              <a:rPr sz="1400" dirty="0"/>
+              <a:t>Relational 5-Table Schema</a:t>
             </a:r>
           </a:p>
           <a:p>
             <a:pPr>
-              <a:spcAft>
-                <a:spcPts val="600"/>
-              </a:spcAft>
-              <a:defRPr sz="1100">
-                <a:solidFill>
-                  <a:srgbClr val="64748B"/>
+              <a:spcBef>
+                <a:spcPts val="300"/>
+              </a:spcBef>
+              <a:defRPr sz="1100" b="1">
+                <a:solidFill>
+                  <a:srgbClr val="0A192F"/>
                 </a:solidFill>
                 <a:latin typeface="Calibri"/>
               </a:defRPr>
             </a:pPr>
             <a:r>
-              <a:t>• Facilitated inception workshops directly with frontline patrols to map operational workflows.</a:t>
+              <a:rPr sz="1400" dirty="0"/>
+              <a:t>Vehicle (Master Lookup):</a:t>
             </a:r>
           </a:p>
           <a:p>
             <a:pPr>
               <a:spcAft>
-                <a:spcPts val="600"/>
+                <a:spcPts val="400"/>
               </a:spcAft>
-              <a:defRPr sz="1100">
+              <a:defRPr sz="1050">
                 <a:solidFill>
                   <a:srgbClr val="64748B"/>
                 </a:solidFill>
@@ -6768,31 +9084,33 @@
               </a:defRPr>
             </a:pPr>
             <a:r>
-              <a:t>• Translated fluid business 'pain' into structured technical and functional requirements.</a:t>
+              <a:rPr sz="1400" dirty="0"/>
+              <a:t>Stores persistent asset data (VIN, Rego, Make, Model) to eliminate repetitive typing.</a:t>
             </a:r>
           </a:p>
           <a:p>
             <a:pPr>
-              <a:spcAft>
-                <a:spcPts val="600"/>
-              </a:spcAft>
-              <a:defRPr sz="1100">
-                <a:solidFill>
-                  <a:srgbClr val="64748B"/>
+              <a:spcBef>
+                <a:spcPts val="300"/>
+              </a:spcBef>
+              <a:defRPr sz="1100" b="1">
+                <a:solidFill>
+                  <a:srgbClr val="0A192F"/>
                 </a:solidFill>
                 <a:latin typeface="Calibri"/>
               </a:defRPr>
             </a:pPr>
             <a:r>
-              <a:t>• Authored comprehensive Solution Intent Documents (SIDs) as the single source of truth.</a:t>
+              <a:rPr sz="1400" dirty="0"/>
+              <a:t>Questions (Metadata Config):</a:t>
             </a:r>
           </a:p>
           <a:p>
             <a:pPr>
               <a:spcAft>
-                <a:spcPts val="600"/>
+                <a:spcPts val="400"/>
               </a:spcAft>
-              <a:defRPr sz="1100">
+              <a:defRPr sz="1050">
                 <a:solidFill>
                   <a:srgbClr val="64748B"/>
                 </a:solidFill>
@@ -6800,87 +9118,33 @@
               </a:defRPr>
             </a:pPr>
             <a:r>
-              <a:t>• Managed technical trade-offs, prioritizing immediate MVP features over long-term API extensions.</a:t>
-            </a:r>
-          </a:p>
-        </p:txBody>
-      </p:sp>
-      <p:sp>
-        <p:nvSpPr>
-          <p:cNvPr id="6" name="Rounded Rectangle 5"/>
-          <p:cNvSpPr/>
-          <p:nvPr/>
-        </p:nvSpPr>
-        <p:spPr>
-          <a:xfrm>
-            <a:off x="4297680" y="1920240"/>
-            <a:ext cx="3474720" cy="4114800"/>
-          </a:xfrm>
-          <a:prstGeom prst="roundRect">
-            <a:avLst/>
-          </a:prstGeom>
-          <a:solidFill>
-            <a:srgbClr val="FFFFFF"/>
-          </a:solidFill>
-          <a:ln>
-            <a:noFill/>
-          </a:ln>
-        </p:spPr>
-        <p:style>
-          <a:lnRef idx="1">
-            <a:schemeClr val="accent1"/>
-          </a:lnRef>
-          <a:fillRef idx="3">
-            <a:schemeClr val="accent1"/>
-          </a:fillRef>
-          <a:effectRef idx="2">
-            <a:schemeClr val="accent1"/>
-          </a:effectRef>
-          <a:fontRef idx="minor">
-            <a:schemeClr val="lt1"/>
-          </a:fontRef>
-        </p:style>
-        <p:txBody>
-          <a:bodyPr wrap="square" lIns="228600" tIns="228600" rIns="228600" bIns="228600" rtlCol="0" anchor="ctr"/>
-          <a:lstStyle/>
-          <a:p>
-            <a:pPr algn="ctr">
-              <a:spcAft>
-                <a:spcPts val="600"/>
-              </a:spcAft>
+              <a:rPr sz="1400" dirty="0"/>
+              <a:t>Keeps the system fully data-driven. Checklist questions are loaded from database dynamically without redeploying code.</a:t>
+            </a:r>
+          </a:p>
+          <a:p>
+            <a:pPr>
+              <a:spcBef>
+                <a:spcPts val="300"/>
+              </a:spcBef>
               <a:defRPr sz="1100" b="1">
                 <a:solidFill>
-                  <a:srgbClr val="00C49F"/>
+                  <a:srgbClr val="0A192F"/>
                 </a:solidFill>
                 <a:latin typeface="Calibri"/>
               </a:defRPr>
             </a:pPr>
             <a:r>
-              <a:t>2. SCRUM LEADERSHIP &amp; QA</a:t>
+              <a:rPr sz="1400" dirty="0"/>
+              <a:t>Summary (Header Transaction):</a:t>
             </a:r>
           </a:p>
           <a:p>
             <a:pPr>
               <a:spcAft>
-                <a:spcPts val="1200"/>
+                <a:spcPts val="400"/>
               </a:spcAft>
-              <a:defRPr sz="1500" b="1">
-                <a:solidFill>
-                  <a:srgbClr val="0A192F"/>
-                </a:solidFill>
-                <a:latin typeface="Georgia"/>
-              </a:defRPr>
-            </a:pPr>
-            <a:r>
-              <a:t>Agile Execution &amp; Zephyr Testing</a:t>
-            </a:r>
-          </a:p>
-          <a:p>
-            <a:pPr>
-              <a:spcAft>
-                <a:spcPts val="600"/>
-              </a:spcAft>
-              <a:defRPr sz="1100">
+              <a:defRPr sz="1050">
                 <a:solidFill>
                   <a:srgbClr val="64748B"/>
                 </a:solidFill>
@@ -6888,31 +9152,33 @@
               </a:defRPr>
             </a:pPr>
             <a:r>
-              <a:t>• Operated as Scrum Master (PSM I), facilitating retrospectives, daily scrums, and backlog grooming.</a:t>
+              <a:rPr sz="1400" dirty="0"/>
+              <a:t>Stores core event details (Inspector name, Overall status, GPS location, timestamp).</a:t>
             </a:r>
           </a:p>
           <a:p>
             <a:pPr>
-              <a:spcAft>
-                <a:spcPts val="600"/>
-              </a:spcAft>
-              <a:defRPr sz="1100">
-                <a:solidFill>
-                  <a:srgbClr val="64748B"/>
+              <a:spcBef>
+                <a:spcPts val="300"/>
+              </a:spcBef>
+              <a:defRPr sz="1100" b="1">
+                <a:solidFill>
+                  <a:srgbClr val="0A192F"/>
                 </a:solidFill>
                 <a:latin typeface="Calibri"/>
               </a:defRPr>
             </a:pPr>
             <a:r>
-              <a:t>• Established standard code-quality metrics and coordinated peer reviews with secondary developers.</a:t>
+              <a:rPr sz="1400" dirty="0"/>
+              <a:t>Response (Line Items Child):</a:t>
             </a:r>
           </a:p>
           <a:p>
             <a:pPr>
               <a:spcAft>
-                <a:spcPts val="600"/>
+                <a:spcPts val="400"/>
               </a:spcAft>
-              <a:defRPr sz="1100">
+              <a:defRPr sz="1050">
                 <a:solidFill>
                   <a:srgbClr val="64748B"/>
                 </a:solidFill>
@@ -6920,163 +9186,106 @@
               </a:defRPr>
             </a:pPr>
             <a:r>
-              <a:t>• Authored developer-ready QA checklists and test scripts managed in the Zephyr Scale tool.</a:t>
+              <a:rPr sz="1400" dirty="0"/>
+              <a:t>Captures transactional pass/fail answers for 40+ inspection points linked back to Header.</a:t>
             </a:r>
           </a:p>
           <a:p>
             <a:pPr>
-              <a:spcAft>
-                <a:spcPts val="600"/>
-              </a:spcAft>
-              <a:defRPr sz="1100">
-                <a:solidFill>
-                  <a:srgbClr val="64748B"/>
+              <a:spcBef>
+                <a:spcPts val="300"/>
+              </a:spcBef>
+              <a:defRPr sz="1100" b="1">
+                <a:solidFill>
+                  <a:srgbClr val="0A192F"/>
                 </a:solidFill>
                 <a:latin typeface="Calibri"/>
               </a:defRPr>
             </a:pPr>
             <a:r>
-              <a:t>• Designed try-catch logic and local data imports to troubleshoot and resolve empty-table errors in UAT.</a:t>
-            </a:r>
-          </a:p>
-        </p:txBody>
-      </p:sp>
-      <p:sp>
-        <p:nvSpPr>
-          <p:cNvPr id="7" name="Rounded Rectangle 6"/>
-          <p:cNvSpPr/>
-          <p:nvPr/>
-        </p:nvSpPr>
-        <p:spPr>
-          <a:xfrm>
-            <a:off x="8138160" y="1920240"/>
-            <a:ext cx="3474720" cy="4114800"/>
-          </a:xfrm>
-          <a:prstGeom prst="roundRect">
-            <a:avLst/>
-          </a:prstGeom>
-          <a:solidFill>
-            <a:srgbClr val="FFFFFF"/>
-          </a:solidFill>
-          <a:ln>
-            <a:noFill/>
-          </a:ln>
-        </p:spPr>
-        <p:style>
-          <a:lnRef idx="1">
-            <a:schemeClr val="accent1"/>
-          </a:lnRef>
-          <a:fillRef idx="3">
-            <a:schemeClr val="accent1"/>
-          </a:fillRef>
-          <a:effectRef idx="2">
-            <a:schemeClr val="accent1"/>
-          </a:effectRef>
-          <a:fontRef idx="minor">
-            <a:schemeClr val="lt1"/>
-          </a:fontRef>
-        </p:style>
-        <p:txBody>
-          <a:bodyPr wrap="square" lIns="228600" tIns="228600" rIns="228600" bIns="228600" rtlCol="0" anchor="ctr"/>
-          <a:lstStyle/>
-          <a:p>
-            <a:pPr algn="ctr">
+              <a:rPr sz="1400" dirty="0"/>
+              <a:t>Media Metadata (Attachments):</a:t>
+            </a:r>
+          </a:p>
+          <a:p>
+            <a:pPr>
               <a:spcAft>
-                <a:spcPts val="600"/>
+                <a:spcPts val="400"/>
               </a:spcAft>
-              <a:defRPr sz="1100" b="1">
-                <a:solidFill>
-                  <a:srgbClr val="00C49F"/>
+              <a:defRPr sz="1050">
+                <a:solidFill>
+                  <a:srgbClr val="64748B"/>
                 </a:solidFill>
                 <a:latin typeface="Calibri"/>
               </a:defRPr>
             </a:pPr>
             <a:r>
-              <a:t>3. ALM &amp; DEPLOYMENT GOVERNANCE</a:t>
-            </a:r>
-          </a:p>
-          <a:p>
-            <a:pPr>
-              <a:spcAft>
-                <a:spcPts val="1200"/>
-              </a:spcAft>
-              <a:defRPr sz="1500" b="1">
-                <a:solidFill>
-                  <a:srgbClr val="0A192F"/>
-                </a:solidFill>
-                <a:latin typeface="Georgia"/>
-              </a:defRPr>
-            </a:pPr>
-            <a:r>
-              <a:t>Environment Staging &amp; Helpdesk Handover</a:t>
-            </a:r>
-          </a:p>
-          <a:p>
-            <a:pPr>
-              <a:spcAft>
-                <a:spcPts val="600"/>
-              </a:spcAft>
-              <a:defRPr sz="1100">
-                <a:solidFill>
-                  <a:srgbClr val="64748B"/>
-                </a:solidFill>
-                <a:latin typeface="Calibri"/>
-              </a:defRPr>
-            </a:pPr>
-            <a:r>
-              <a:t>• Standardized Infrastructure as Code (IaC) using automated pipelines (Azure DevOps and GitHub).</a:t>
-            </a:r>
-          </a:p>
-          <a:p>
-            <a:pPr>
-              <a:spcAft>
-                <a:spcPts val="600"/>
-              </a:spcAft>
-              <a:defRPr sz="1100">
-                <a:solidFill>
-                  <a:srgbClr val="64748B"/>
-                </a:solidFill>
-                <a:latin typeface="Calibri"/>
-              </a:defRPr>
-            </a:pPr>
-            <a:r>
-              <a:t>• Created first-of-their-kind, robust deployment guides to manage environment transition.</a:t>
-            </a:r>
-          </a:p>
-          <a:p>
-            <a:pPr>
-              <a:spcAft>
-                <a:spcPts val="600"/>
-              </a:spcAft>
-              <a:defRPr sz="1100">
-                <a:solidFill>
-                  <a:srgbClr val="64748B"/>
-                </a:solidFill>
-                <a:latin typeface="Calibri"/>
-              </a:defRPr>
-            </a:pPr>
-            <a:r>
-              <a:t>• Produced approved Service Definition and Transition checklists for BAU operations.</a:t>
-            </a:r>
-          </a:p>
-          <a:p>
-            <a:pPr>
-              <a:spcAft>
-                <a:spcPts val="600"/>
-              </a:spcAft>
-              <a:defRPr sz="1100">
-                <a:solidFill>
-                  <a:srgbClr val="64748B"/>
-                </a:solidFill>
-                <a:latin typeface="Calibri"/>
-              </a:defRPr>
-            </a:pPr>
-            <a:r>
-              <a:t>• Conducted peer mentorship and training to hand over Level 1 support to the Helpdesk team.</a:t>
-            </a:r>
-          </a:p>
-        </p:txBody>
-      </p:sp>
+              <a:rPr sz="1400" dirty="0"/>
+              <a:t>Stores secure photo links. Files are offloaded to a governed SharePoint Document Library to reduce Dataverse storage costs.</a:t>
+            </a:r>
+          </a:p>
+        </p:txBody>
+      </p:sp>
+      <p:pic>
+        <p:nvPicPr>
+          <p:cNvPr id="11" name="Picture 10">
+            <a:extLst>
+              <a:ext uri="{FF2B5EF4-FFF2-40B4-BE49-F238E27FC236}">
+                <a16:creationId xmlns:a16="http://schemas.microsoft.com/office/drawing/2014/main" id="{085715EE-EC60-30F4-376C-30B021D4CDE3}"/>
+              </a:ext>
+            </a:extLst>
+          </p:cNvPr>
+          <p:cNvPicPr>
+            <a:picLocks noChangeAspect="1"/>
+          </p:cNvPicPr>
+          <p:nvPr/>
+        </p:nvPicPr>
+        <p:blipFill>
+          <a:blip r:embed="rId3"/>
+          <a:stretch>
+            <a:fillRect/>
+          </a:stretch>
+        </p:blipFill>
+        <p:spPr>
+          <a:xfrm>
+            <a:off x="5229236" y="1554480"/>
+            <a:ext cx="6505259" cy="5029200"/>
+          </a:xfrm>
+          <a:prstGeom prst="rect">
+            <a:avLst/>
+          </a:prstGeom>
+        </p:spPr>
+      </p:pic>
+      <p:pic>
+        <p:nvPicPr>
+          <p:cNvPr id="12" name="Picture 11">
+            <a:extLst>
+              <a:ext uri="{FF2B5EF4-FFF2-40B4-BE49-F238E27FC236}">
+                <a16:creationId xmlns:a16="http://schemas.microsoft.com/office/drawing/2014/main" id="{B80B7E2F-F6F1-219A-0CDC-F3786D8F5535}"/>
+              </a:ext>
+            </a:extLst>
+          </p:cNvPr>
+          <p:cNvPicPr>
+            <a:picLocks noChangeAspect="1"/>
+          </p:cNvPicPr>
+          <p:nvPr/>
+        </p:nvPicPr>
+        <p:blipFill>
+          <a:blip r:embed="rId4"/>
+          <a:stretch>
+            <a:fillRect/>
+          </a:stretch>
+        </p:blipFill>
+        <p:spPr>
+          <a:xfrm>
+            <a:off x="6938798" y="187276"/>
+            <a:ext cx="4821402" cy="1118284"/>
+          </a:xfrm>
+          <a:prstGeom prst="rect">
+            <a:avLst/>
+          </a:prstGeom>
+        </p:spPr>
+      </p:pic>
     </p:spTree>
   </p:cSld>
   <p:clrMapOvr>
@@ -7118,7 +9327,7 @@
         </p:nvSpPr>
         <p:spPr>
           <a:xfrm>
-            <a:off x="457200" y="274320"/>
+            <a:off x="457199" y="103284"/>
             <a:ext cx="11277295" cy="640080"/>
           </a:xfrm>
           <a:prstGeom prst="rect">
@@ -7141,6 +9350,7 @@
               </a:defRPr>
             </a:pPr>
             <a:r>
+              <a:rPr dirty="0"/>
               <a:t>Operational &amp; Compliance Transformation Yielded 100% Success</a:t>
             </a:r>
           </a:p>
@@ -7154,8 +9364,8 @@
         </p:nvSpPr>
         <p:spPr>
           <a:xfrm>
-            <a:off x="457200" y="868680"/>
-            <a:ext cx="11277295" cy="365760"/>
+            <a:off x="457200" y="728980"/>
+            <a:ext cx="8960815" cy="615553"/>
           </a:xfrm>
           <a:prstGeom prst="rect">
             <a:avLst/>
@@ -7177,8 +9387,34 @@
               </a:defRPr>
             </a:pPr>
             <a:r>
-              <a:t>DELIVERING DIRECT, MEASURABLE BUSINESS ROI AND ARCHITECTURAL STABILITY</a:t>
-            </a:r>
+              <a:rPr lang="en-AU" sz="2000" dirty="0">
+                <a:solidFill>
+                  <a:srgbClr val="F6C514"/>
+                </a:solidFill>
+              </a:rPr>
+              <a:t>Pillar 4: </a:t>
+            </a:r>
+            <a:r>
+              <a:rPr sz="2000" dirty="0">
+                <a:solidFill>
+                  <a:srgbClr val="F6C514"/>
+                </a:solidFill>
+              </a:rPr>
+              <a:t>DELIVERING DIRECT, MEASURABLE BUSINESS ROI AND </a:t>
+            </a:r>
+            <a:r>
+              <a:rPr lang="en-AU" sz="2000" dirty="0">
+                <a:solidFill>
+                  <a:srgbClr val="F6C514"/>
+                </a:solidFill>
+              </a:rPr>
+              <a:t>FINANICAL SAVINGS WITH OPERATIONAL EXCELLENCE</a:t>
+            </a:r>
+            <a:endParaRPr sz="2000" dirty="0">
+              <a:solidFill>
+                <a:srgbClr val="F6C514"/>
+              </a:solidFill>
+            </a:endParaRPr>
           </a:p>
         </p:txBody>
       </p:sp>
@@ -7197,7 +9433,7 @@
             <a:avLst/>
           </a:prstGeom>
           <a:solidFill>
-            <a:srgbClr val="00C49F"/>
+            <a:srgbClr val="F6C514"/>
           </a:solidFill>
           <a:ln>
             <a:noFill/>
@@ -7234,8 +9470,8 @@
         </p:nvSpPr>
         <p:spPr>
           <a:xfrm>
-            <a:off x="457200" y="1920240"/>
-            <a:ext cx="3474720" cy="4114800"/>
+            <a:off x="3964940" y="3576525"/>
+            <a:ext cx="4606290" cy="2227375"/>
           </a:xfrm>
           <a:prstGeom prst="roundRect">
             <a:avLst/>
@@ -7277,23 +9513,12 @@
               </a:defRPr>
             </a:pPr>
             <a:r>
+              <a:rPr sz="1400" dirty="0">
+                <a:solidFill>
+                  <a:srgbClr val="F6C514"/>
+                </a:solidFill>
+              </a:rPr>
               <a:t>RECLAIMED FRONT-LINE CAPACITY</a:t>
-            </a:r>
-          </a:p>
-          <a:p>
-            <a:pPr>
-              <a:spcAft>
-                <a:spcPts val="1400"/>
-              </a:spcAft>
-              <a:defRPr sz="3600" b="1">
-                <a:solidFill>
-                  <a:srgbClr val="FAF9F6"/>
-                </a:solidFill>
-                <a:latin typeface="Georgia"/>
-              </a:defRPr>
-            </a:pPr>
-            <a:r>
-              <a:t>10,000 Hours</a:t>
             </a:r>
           </a:p>
           <a:p>
@@ -7309,7 +9534,8 @@
               </a:defRPr>
             </a:pPr>
             <a:r>
-              <a:t>• Directly saved 2 to 3 minutes of manual transcription effort per roadside patrol job.</a:t>
+              <a:rPr sz="1600" dirty="0"/>
+              <a:t>• Directly saved 2 to 3 minutes of manual transcription effort per job.</a:t>
             </a:r>
           </a:p>
           <a:p>
@@ -7325,7 +9551,8 @@
               </a:defRPr>
             </a:pPr>
             <a:r>
-              <a:t>• Reclaimed the equivalent productivity of over 5 full-time employees (FTEs), returning them directly back to active field service.</a:t>
+              <a:rPr sz="1600" dirty="0"/>
+              <a:t>• Reclaimed the equivalent productivity of over 5 full-time employees (FTEs)</a:t>
             </a:r>
           </a:p>
           <a:p>
@@ -7341,7 +9568,16 @@
               </a:defRPr>
             </a:pPr>
             <a:r>
-              <a:t>• Completely eliminated transcription error logs and automated field reporting workflows.</a:t>
+              <a:rPr sz="1600" dirty="0"/>
+              <a:t>• </a:t>
+            </a:r>
+            <a:r>
+              <a:rPr lang="en-AU" sz="1600" dirty="0"/>
+              <a:t>Eliminated</a:t>
+            </a:r>
+            <a:r>
+              <a:rPr sz="1600" dirty="0"/>
+              <a:t> transcription error logs and automated field reporting workflows.</a:t>
             </a:r>
           </a:p>
         </p:txBody>
@@ -7354,8 +9590,8 @@
         </p:nvSpPr>
         <p:spPr>
           <a:xfrm>
-            <a:off x="4297680" y="1920240"/>
-            <a:ext cx="3474720" cy="4114800"/>
+            <a:off x="8836660" y="2572067"/>
+            <a:ext cx="3169920" cy="4155854"/>
           </a:xfrm>
           <a:prstGeom prst="roundRect">
             <a:avLst/>
@@ -7397,6 +9633,11 @@
               </a:defRPr>
             </a:pPr>
             <a:r>
+              <a:rPr sz="1400" dirty="0">
+                <a:solidFill>
+                  <a:srgbClr val="F6C514"/>
+                </a:solidFill>
+              </a:rPr>
               <a:t>COMMERCIAL RETURN ON INVESTMENT</a:t>
             </a:r>
           </a:p>
@@ -7413,6 +9654,7 @@
               </a:defRPr>
             </a:pPr>
             <a:r>
+              <a:rPr sz="2400" dirty="0"/>
               <a:t>AU$500,000+</a:t>
             </a:r>
           </a:p>
@@ -7429,6 +9671,7 @@
               </a:defRPr>
             </a:pPr>
             <a:r>
+              <a:rPr sz="1600" dirty="0"/>
               <a:t>• Direct operational capacity and human labor value returned to Motoring Services.</a:t>
             </a:r>
           </a:p>
@@ -7445,6 +9688,7 @@
               </a:defRPr>
             </a:pPr>
             <a:r>
+              <a:rPr sz="1600" dirty="0"/>
               <a:t>• Substantially reduced downstream administrative and data remediation costs.</a:t>
             </a:r>
           </a:p>
@@ -7461,131 +9705,132 @@
               </a:defRPr>
             </a:pPr>
             <a:r>
+              <a:rPr sz="1600" dirty="0"/>
               <a:t>• Established a secure, scalable model for rapid multi-branch system rollout.</a:t>
             </a:r>
           </a:p>
         </p:txBody>
       </p:sp>
-      <p:sp>
-        <p:nvSpPr>
-          <p:cNvPr id="7" name="Rounded Rectangle 6"/>
-          <p:cNvSpPr/>
+      <p:pic>
+        <p:nvPicPr>
+          <p:cNvPr id="11" name="Picture 10">
+            <a:extLst>
+              <a:ext uri="{FF2B5EF4-FFF2-40B4-BE49-F238E27FC236}">
+                <a16:creationId xmlns:a16="http://schemas.microsoft.com/office/drawing/2014/main" id="{FDF4E58F-933D-4A6C-B9F0-5A3A4EC7867B}"/>
+              </a:ext>
+            </a:extLst>
+          </p:cNvPr>
+          <p:cNvPicPr>
+            <a:picLocks noChangeAspect="1"/>
+          </p:cNvPicPr>
           <p:nvPr/>
-        </p:nvSpPr>
+        </p:nvPicPr>
+        <p:blipFill>
+          <a:blip r:embed="rId3"/>
+          <a:stretch>
+            <a:fillRect/>
+          </a:stretch>
+        </p:blipFill>
         <p:spPr>
           <a:xfrm>
-            <a:off x="8138160" y="1920240"/>
-            <a:ext cx="3474720" cy="4114800"/>
+            <a:off x="3788410" y="1515507"/>
+            <a:ext cx="4970780" cy="1950560"/>
           </a:xfrm>
-          <a:prstGeom prst="roundRect">
+          <a:prstGeom prst="rect">
             <a:avLst/>
           </a:prstGeom>
-          <a:solidFill>
-            <a:srgbClr val="1B4965"/>
-          </a:solidFill>
-          <a:ln>
-            <a:noFill/>
-          </a:ln>
         </p:spPr>
-        <p:style>
-          <a:lnRef idx="1">
-            <a:schemeClr val="accent1"/>
-          </a:lnRef>
-          <a:fillRef idx="3">
-            <a:schemeClr val="accent1"/>
-          </a:fillRef>
-          <a:effectRef idx="2">
-            <a:schemeClr val="accent1"/>
-          </a:effectRef>
-          <a:fontRef idx="minor">
-            <a:schemeClr val="lt1"/>
-          </a:fontRef>
-        </p:style>
-        <p:txBody>
-          <a:bodyPr wrap="square" lIns="228600" tIns="228600" rIns="228600" bIns="228600" rtlCol="0" anchor="ctr"/>
-          <a:lstStyle/>
-          <a:p>
-            <a:pPr algn="ctr">
-              <a:spcAft>
-                <a:spcPts val="1000"/>
-              </a:spcAft>
-              <a:defRPr sz="1100" b="1">
-                <a:solidFill>
-                  <a:srgbClr val="00C49F"/>
-                </a:solidFill>
-                <a:latin typeface="Calibri"/>
-              </a:defRPr>
-            </a:pPr>
-            <a:r>
-              <a:t>PLATFORM COMPLIANCE SECURITY</a:t>
-            </a:r>
-          </a:p>
-          <a:p>
-            <a:pPr>
-              <a:spcAft>
-                <a:spcPts val="1400"/>
-              </a:spcAft>
-              <a:defRPr sz="3600" b="1">
-                <a:solidFill>
-                  <a:srgbClr val="FAF9F6"/>
-                </a:solidFill>
-                <a:latin typeface="Georgia"/>
-              </a:defRPr>
-            </a:pPr>
-            <a:r>
-              <a:t>Zero Debt</a:t>
-            </a:r>
-          </a:p>
-          <a:p>
-            <a:pPr>
-              <a:spcAft>
-                <a:spcPts val="600"/>
-              </a:spcAft>
-              <a:defRPr sz="1100">
-                <a:solidFill>
-                  <a:srgbClr val="FAF9F6"/>
-                </a:solidFill>
-                <a:latin typeface="Calibri"/>
-              </a:defRPr>
-            </a:pPr>
-            <a:r>
-              <a:t>• Relational 5-table Dataverse schema successfully cleared all corporate security and compliance audits.</a:t>
-            </a:r>
-          </a:p>
-          <a:p>
-            <a:pPr>
-              <a:spcAft>
-                <a:spcPts val="600"/>
-              </a:spcAft>
-              <a:defRPr sz="1100">
-                <a:solidFill>
-                  <a:srgbClr val="FAF9F6"/>
-                </a:solidFill>
-                <a:latin typeface="Calibri"/>
-              </a:defRPr>
-            </a:pPr>
-            <a:r>
-              <a:t>• Hardened security roles eliminated sensitive PII exposure in the field.</a:t>
-            </a:r>
-          </a:p>
-          <a:p>
-            <a:pPr>
-              <a:spcAft>
-                <a:spcPts val="600"/>
-              </a:spcAft>
-              <a:defRPr sz="1100">
-                <a:solidFill>
-                  <a:srgbClr val="FAF9F6"/>
-                </a:solidFill>
-                <a:latin typeface="Calibri"/>
-              </a:defRPr>
-            </a:pPr>
-            <a:r>
-              <a:t>• Provided a repeatable governance blueprint for future Power Platform implementations.</a:t>
-            </a:r>
-          </a:p>
-        </p:txBody>
-      </p:sp>
+      </p:pic>
+      <p:pic>
+        <p:nvPicPr>
+          <p:cNvPr id="13" name="Picture 12">
+            <a:extLst>
+              <a:ext uri="{FF2B5EF4-FFF2-40B4-BE49-F238E27FC236}">
+                <a16:creationId xmlns:a16="http://schemas.microsoft.com/office/drawing/2014/main" id="{C28B326A-64EC-388C-6C70-4374D6F85C3F}"/>
+              </a:ext>
+            </a:extLst>
+          </p:cNvPr>
+          <p:cNvPicPr>
+            <a:picLocks noChangeAspect="1"/>
+          </p:cNvPicPr>
+          <p:nvPr/>
+        </p:nvPicPr>
+        <p:blipFill>
+          <a:blip r:embed="rId4"/>
+          <a:stretch>
+            <a:fillRect/>
+          </a:stretch>
+        </p:blipFill>
+        <p:spPr>
+          <a:xfrm>
+            <a:off x="82668" y="1515508"/>
+            <a:ext cx="3705742" cy="5154754"/>
+          </a:xfrm>
+          <a:prstGeom prst="rect">
+            <a:avLst/>
+          </a:prstGeom>
+        </p:spPr>
+      </p:pic>
+      <p:pic>
+        <p:nvPicPr>
+          <p:cNvPr id="15" name="Picture 14">
+            <a:extLst>
+              <a:ext uri="{FF2B5EF4-FFF2-40B4-BE49-F238E27FC236}">
+                <a16:creationId xmlns:a16="http://schemas.microsoft.com/office/drawing/2014/main" id="{3A52F083-D7B8-5755-4C95-5A7893305BB3}"/>
+              </a:ext>
+            </a:extLst>
+          </p:cNvPr>
+          <p:cNvPicPr>
+            <a:picLocks noChangeAspect="1"/>
+          </p:cNvPicPr>
+          <p:nvPr/>
+        </p:nvPicPr>
+        <p:blipFill>
+          <a:blip r:embed="rId5"/>
+          <a:stretch>
+            <a:fillRect/>
+          </a:stretch>
+        </p:blipFill>
+        <p:spPr>
+          <a:xfrm>
+            <a:off x="9028575" y="1592998"/>
+            <a:ext cx="2978006" cy="897789"/>
+          </a:xfrm>
+          <a:prstGeom prst="rect">
+            <a:avLst/>
+          </a:prstGeom>
+        </p:spPr>
+      </p:pic>
+      <p:pic>
+        <p:nvPicPr>
+          <p:cNvPr id="17" name="Picture 16">
+            <a:extLst>
+              <a:ext uri="{FF2B5EF4-FFF2-40B4-BE49-F238E27FC236}">
+                <a16:creationId xmlns:a16="http://schemas.microsoft.com/office/drawing/2014/main" id="{84B33F71-4BDB-E94A-E54F-3FD7AA7566AF}"/>
+              </a:ext>
+            </a:extLst>
+          </p:cNvPr>
+          <p:cNvPicPr>
+            <a:picLocks noChangeAspect="1"/>
+          </p:cNvPicPr>
+          <p:nvPr/>
+        </p:nvPicPr>
+        <p:blipFill>
+          <a:blip r:embed="rId6"/>
+          <a:stretch>
+            <a:fillRect/>
+          </a:stretch>
+        </p:blipFill>
+        <p:spPr>
+          <a:xfrm>
+            <a:off x="5054600" y="5927894"/>
+            <a:ext cx="2429674" cy="839521"/>
+          </a:xfrm>
+          <a:prstGeom prst="rect">
+            <a:avLst/>
+          </a:prstGeom>
+        </p:spPr>
+      </p:pic>
     </p:spTree>
   </p:cSld>
   <p:clrMapOvr>

--- a/VIA/vehicle_inspection_app_case_study.pptx
+++ b/VIA/vehicle_inspection_app_case_study.pptx
@@ -5,7 +5,7 @@
     <p:sldMasterId id="2147483648" r:id="rId1"/>
   </p:sldMasterIdLst>
   <p:notesMasterIdLst>
-    <p:notesMasterId r:id="rId9"/>
+    <p:notesMasterId r:id="rId11"/>
   </p:notesMasterIdLst>
   <p:sldIdLst>
     <p:sldId id="256" r:id="rId2"/>
@@ -15,6 +15,8 @@
     <p:sldId id="261" r:id="rId6"/>
     <p:sldId id="258" r:id="rId7"/>
     <p:sldId id="260" r:id="rId8"/>
+    <p:sldId id="264" r:id="rId9"/>
+    <p:sldId id="265" r:id="rId10"/>
   </p:sldIdLst>
   <p:sldSz cx="12192000" cy="6858000"/>
   <p:notesSz cx="6858000" cy="9144000"/>
@@ -130,6 +132,295 @@
     </p:ext>
   </p:extLst>
 </p:presentation>
+</file>
+
+<file path=ppt/charts/chart1.xml><?xml version="1.0" encoding="utf-8"?>
+<c:chartSpace xmlns:c="http://schemas.openxmlformats.org/drawingml/2006/chart" xmlns:a="http://schemas.openxmlformats.org/drawingml/2006/main" xmlns:r="http://schemas.openxmlformats.org/officeDocument/2006/relationships" xmlns:c16r2="http://schemas.microsoft.com/office/drawing/2015/06/chart">
+  <c:date1904 val="0"/>
+  <c:lang val="en-US"/>
+  <c:roundedCorners val="0"/>
+  <mc:AlternateContent xmlns:mc="http://schemas.openxmlformats.org/markup-compatibility/2006">
+    <mc:Choice xmlns:c14="http://schemas.microsoft.com/office/drawing/2007/8/2/chart" Requires="c14">
+      <c14:style val="102"/>
+    </mc:Choice>
+    <mc:Fallback>
+      <c:style val="2"/>
+    </mc:Fallback>
+  </mc:AlternateContent>
+  <c:chart>
+    <c:title>
+      <c:tx>
+        <c:rich>
+          <a:bodyPr rot="0"/>
+          <a:lstStyle/>
+          <a:p>
+            <a:pPr>
+              <a:defRPr sz="1400" b="1" u="none" strike="noStrike">
+                <a:solidFill>
+                  <a:srgbClr val="000000"/>
+                </a:solidFill>
+                <a:uFillTx/>
+                <a:latin typeface="Arial"/>
+              </a:defRPr>
+            </a:pPr>
+            <a:r>
+              <a:rPr lang="en-US" sz="1400" b="1" u="none" strike="noStrike" dirty="0">
+                <a:solidFill>
+                  <a:schemeClr val="bg1"/>
+                </a:solidFill>
+                <a:uFillTx/>
+                <a:latin typeface="Arial"/>
+              </a:rPr>
+              <a:t>Estimated annual frontline hours reclaimed</a:t>
+            </a:r>
+          </a:p>
+        </c:rich>
+      </c:tx>
+      <c:layout>
+        <c:manualLayout>
+          <c:xMode val="edge"/>
+          <c:yMode val="edge"/>
+          <c:x val="8.4129677650211163E-2"/>
+          <c:y val="2.9169152447997455E-2"/>
+        </c:manualLayout>
+      </c:layout>
+      <c:overlay val="0"/>
+      <c:spPr>
+        <a:noFill/>
+        <a:ln w="0">
+          <a:noFill/>
+        </a:ln>
+      </c:spPr>
+    </c:title>
+    <c:autoTitleDeleted val="0"/>
+    <c:plotArea>
+      <c:layout/>
+      <c:barChart>
+        <c:barDir val="col"/>
+        <c:grouping val="clustered"/>
+        <c:varyColors val="0"/>
+        <c:ser>
+          <c:idx val="0"/>
+          <c:order val="0"/>
+          <c:tx>
+            <c:strRef>
+              <c:f>label 0</c:f>
+              <c:strCache>
+                <c:ptCount val="1"/>
+                <c:pt idx="0">
+                  <c:v>Hours</c:v>
+                </c:pt>
+              </c:strCache>
+            </c:strRef>
+          </c:tx>
+          <c:spPr>
+            <a:solidFill>
+              <a:srgbClr val="22D3EE"/>
+            </a:solidFill>
+            <a:ln w="0">
+              <a:noFill/>
+            </a:ln>
+          </c:spPr>
+          <c:invertIfNegative val="0"/>
+          <c:dLbls>
+            <c:numFmt formatCode="#,##0" sourceLinked="0"/>
+            <c:spPr>
+              <a:noFill/>
+              <a:ln>
+                <a:noFill/>
+              </a:ln>
+              <a:effectLst/>
+            </c:spPr>
+            <c:txPr>
+              <a:bodyPr wrap="square"/>
+              <a:lstStyle/>
+              <a:p>
+                <a:pPr>
+                  <a:defRPr sz="1200" b="0" u="none" strike="noStrike">
+                    <a:solidFill>
+                      <a:schemeClr val="bg1"/>
+                    </a:solidFill>
+                    <a:uFillTx/>
+                    <a:latin typeface="Arial"/>
+                  </a:defRPr>
+                </a:pPr>
+                <a:endParaRPr lang="en-US"/>
+              </a:p>
+            </c:txPr>
+            <c:dLblPos val="outEnd"/>
+            <c:showLegendKey val="0"/>
+            <c:showVal val="1"/>
+            <c:showCatName val="0"/>
+            <c:showSerName val="0"/>
+            <c:showPercent val="0"/>
+            <c:showBubbleSize val="1"/>
+            <c:separator>; </c:separator>
+            <c:showLeaderLines val="0"/>
+            <c:extLst>
+              <c:ext xmlns:c15="http://schemas.microsoft.com/office/drawing/2012/chart" uri="{CE6537A1-D6FC-4f65-9D91-7224C49458BB}">
+                <c15:showLeaderLines val="0"/>
+              </c:ext>
+            </c:extLst>
+          </c:dLbls>
+          <c:cat>
+            <c:strRef>
+              <c:f>categories</c:f>
+              <c:strCache>
+                <c:ptCount val="2"/>
+                <c:pt idx="0">
+                  <c:v>2 min/job</c:v>
+                </c:pt>
+                <c:pt idx="1">
+                  <c:v>3 min/job</c:v>
+                </c:pt>
+              </c:strCache>
+            </c:strRef>
+          </c:cat>
+          <c:val>
+            <c:numRef>
+              <c:f>0</c:f>
+              <c:numCache>
+                <c:formatCode>General</c:formatCode>
+                <c:ptCount val="2"/>
+                <c:pt idx="0">
+                  <c:v>6667</c:v>
+                </c:pt>
+                <c:pt idx="1">
+                  <c:v>10000</c:v>
+                </c:pt>
+              </c:numCache>
+            </c:numRef>
+          </c:val>
+          <c:extLst>
+            <c:ext xmlns:c16="http://schemas.microsoft.com/office/drawing/2014/chart" uri="{C3380CC4-5D6E-409C-BE32-E72D297353CC}">
+              <c16:uniqueId val="{00000000-FAD4-4E0D-BEBC-53F8466CB938}"/>
+            </c:ext>
+          </c:extLst>
+        </c:ser>
+        <c:dLbls>
+          <c:showLegendKey val="0"/>
+          <c:showVal val="0"/>
+          <c:showCatName val="0"/>
+          <c:showSerName val="0"/>
+          <c:showPercent val="0"/>
+          <c:showBubbleSize val="0"/>
+        </c:dLbls>
+        <c:gapWidth val="150"/>
+        <c:axId val="87471386"/>
+        <c:axId val="2464718"/>
+      </c:barChart>
+      <c:catAx>
+        <c:axId val="87471386"/>
+        <c:scaling>
+          <c:orientation val="minMax"/>
+        </c:scaling>
+        <c:delete val="0"/>
+        <c:axPos val="b"/>
+        <c:numFmt formatCode="General" sourceLinked="0"/>
+        <c:majorTickMark val="out"/>
+        <c:minorTickMark val="none"/>
+        <c:tickLblPos val="low"/>
+        <c:spPr>
+          <a:ln w="12600">
+            <a:solidFill>
+              <a:srgbClr val="888888"/>
+            </a:solidFill>
+            <a:round/>
+          </a:ln>
+        </c:spPr>
+        <c:txPr>
+          <a:bodyPr/>
+          <a:lstStyle/>
+          <a:p>
+            <a:pPr>
+              <a:defRPr sz="1200" b="0" u="none" strike="noStrike">
+                <a:solidFill>
+                  <a:schemeClr val="bg1"/>
+                </a:solidFill>
+                <a:uFillTx/>
+                <a:latin typeface="Arial"/>
+              </a:defRPr>
+            </a:pPr>
+            <a:endParaRPr lang="en-US"/>
+          </a:p>
+        </c:txPr>
+        <c:crossAx val="2464718"/>
+        <c:crosses val="autoZero"/>
+        <c:auto val="1"/>
+        <c:lblAlgn val="ctr"/>
+        <c:lblOffset val="100"/>
+        <c:noMultiLvlLbl val="0"/>
+      </c:catAx>
+      <c:valAx>
+        <c:axId val="2464718"/>
+        <c:scaling>
+          <c:orientation val="minMax"/>
+          <c:max val="10000"/>
+          <c:min val="0"/>
+        </c:scaling>
+        <c:delete val="0"/>
+        <c:axPos val="l"/>
+        <c:majorGridlines>
+          <c:spPr>
+            <a:ln w="12600">
+              <a:solidFill>
+                <a:srgbClr val="888888"/>
+              </a:solidFill>
+              <a:round/>
+            </a:ln>
+          </c:spPr>
+        </c:majorGridlines>
+        <c:numFmt formatCode="General" sourceLinked="0"/>
+        <c:majorTickMark val="out"/>
+        <c:minorTickMark val="none"/>
+        <c:tickLblPos val="nextTo"/>
+        <c:spPr>
+          <a:ln w="12600">
+            <a:solidFill>
+              <a:srgbClr val="888888"/>
+            </a:solidFill>
+            <a:round/>
+          </a:ln>
+        </c:spPr>
+        <c:txPr>
+          <a:bodyPr/>
+          <a:lstStyle/>
+          <a:p>
+            <a:pPr>
+              <a:defRPr sz="1200" b="0" u="none" strike="noStrike">
+                <a:solidFill>
+                  <a:schemeClr val="bg1"/>
+                </a:solidFill>
+                <a:uFillTx/>
+                <a:latin typeface="Arial"/>
+              </a:defRPr>
+            </a:pPr>
+            <a:endParaRPr lang="en-US"/>
+          </a:p>
+        </c:txPr>
+        <c:crossAx val="87471386"/>
+        <c:crosses val="autoZero"/>
+        <c:crossBetween val="between"/>
+        <c:majorUnit val="2000"/>
+      </c:valAx>
+      <c:spPr>
+        <a:noFill/>
+        <a:ln w="0">
+          <a:noFill/>
+        </a:ln>
+      </c:spPr>
+    </c:plotArea>
+    <c:plotVisOnly val="1"/>
+    <c:dispBlanksAs val="span"/>
+    <c:showDLblsOverMax val="1"/>
+  </c:chart>
+  <c:spPr>
+    <a:noFill/>
+    <a:ln w="0">
+      <a:noFill/>
+    </a:ln>
+  </c:spPr>
+</c:chartSpace>
 </file>
 
 <file path=ppt/notesMasters/notesMaster1.xml><?xml version="1.0" encoding="utf-8"?>
@@ -2336,6 +2627,200 @@
         <p:spPr/>
       </p:sp>
     </p:spTree>
+  </p:cSld>
+  <p:clrMapOvr>
+    <a:masterClrMapping/>
+  </p:clrMapOvr>
+</p:notes>
+</file>
+
+<file path=ppt/notesSlides/notesSlide8.xml><?xml version="1.0" encoding="utf-8"?>
+<p:notes xmlns:a="http://schemas.openxmlformats.org/drawingml/2006/main" xmlns:r="http://schemas.openxmlformats.org/officeDocument/2006/relationships" xmlns:p="http://schemas.openxmlformats.org/presentationml/2006/main">
+  <p:cSld>
+    <p:spTree>
+      <p:nvGrpSpPr>
+        <p:cNvPr id="1" name="">
+          <a:extLst>
+            <a:ext uri="{FF2B5EF4-FFF2-40B4-BE49-F238E27FC236}">
+              <a16:creationId xmlns:a16="http://schemas.microsoft.com/office/drawing/2014/main" id="{37CE16AE-4F3B-F537-C6F4-A2E57CEE68D6}"/>
+            </a:ext>
+          </a:extLst>
+        </p:cNvPr>
+        <p:cNvGrpSpPr/>
+        <p:nvPr/>
+      </p:nvGrpSpPr>
+      <p:grpSpPr>
+        <a:xfrm>
+          <a:off x="0" y="0"/>
+          <a:ext cx="0" cy="0"/>
+          <a:chOff x="0" y="0"/>
+          <a:chExt cx="0" cy="0"/>
+        </a:xfrm>
+      </p:grpSpPr>
+      <p:sp>
+        <p:nvSpPr>
+          <p:cNvPr id="2" name="Slide Image Placeholder 1">
+            <a:extLst>
+              <a:ext uri="{FF2B5EF4-FFF2-40B4-BE49-F238E27FC236}">
+                <a16:creationId xmlns:a16="http://schemas.microsoft.com/office/drawing/2014/main" id="{8F8873C3-DBB7-2F02-5D7A-F3E25494930D}"/>
+              </a:ext>
+            </a:extLst>
+          </p:cNvPr>
+          <p:cNvSpPr>
+            <a:spLocks noGrp="1" noRot="1" noChangeAspect="1"/>
+          </p:cNvSpPr>
+          <p:nvPr>
+            <p:ph type="sldImg" idx="2"/>
+          </p:nvPr>
+        </p:nvSpPr>
+        <p:spPr/>
+      </p:sp>
+      <p:sp>
+        <p:nvSpPr>
+          <p:cNvPr id="3" name="Notes Placeholder 2">
+            <a:extLst>
+              <a:ext uri="{FF2B5EF4-FFF2-40B4-BE49-F238E27FC236}">
+                <a16:creationId xmlns:a16="http://schemas.microsoft.com/office/drawing/2014/main" id="{EF407A39-F9E3-05F0-BF06-F1FD589E8AA9}"/>
+              </a:ext>
+            </a:extLst>
+          </p:cNvPr>
+          <p:cNvSpPr>
+            <a:spLocks noGrp="1"/>
+          </p:cNvSpPr>
+          <p:nvPr>
+            <p:ph type="body" sz="quarter" idx="3"/>
+          </p:nvPr>
+        </p:nvSpPr>
+        <p:spPr/>
+        <p:txBody>
+          <a:bodyPr/>
+          <a:lstStyle/>
+          <a:p>
+            <a:endParaRPr dirty="0"/>
+          </a:p>
+        </p:txBody>
+      </p:sp>
+      <p:sp>
+        <p:nvSpPr>
+          <p:cNvPr id="4" name="Slide Number Placeholder 3">
+            <a:extLst>
+              <a:ext uri="{FF2B5EF4-FFF2-40B4-BE49-F238E27FC236}">
+                <a16:creationId xmlns:a16="http://schemas.microsoft.com/office/drawing/2014/main" id="{D57675BF-223E-F6EC-7AE2-574F90056CB0}"/>
+              </a:ext>
+            </a:extLst>
+          </p:cNvPr>
+          <p:cNvSpPr>
+            <a:spLocks noGrp="1"/>
+          </p:cNvSpPr>
+          <p:nvPr>
+            <p:ph type="sldNum" sz="quarter" idx="5"/>
+          </p:nvPr>
+        </p:nvSpPr>
+        <p:spPr/>
+      </p:sp>
+    </p:spTree>
+    <p:extLst>
+      <p:ext uri="{BB962C8B-B14F-4D97-AF65-F5344CB8AC3E}">
+        <p14:creationId xmlns:p14="http://schemas.microsoft.com/office/powerpoint/2010/main" val="3678396535"/>
+      </p:ext>
+    </p:extLst>
+  </p:cSld>
+  <p:clrMapOvr>
+    <a:masterClrMapping/>
+  </p:clrMapOvr>
+</p:notes>
+</file>
+
+<file path=ppt/notesSlides/notesSlide9.xml><?xml version="1.0" encoding="utf-8"?>
+<p:notes xmlns:a="http://schemas.openxmlformats.org/drawingml/2006/main" xmlns:r="http://schemas.openxmlformats.org/officeDocument/2006/relationships" xmlns:p="http://schemas.openxmlformats.org/presentationml/2006/main">
+  <p:cSld>
+    <p:spTree>
+      <p:nvGrpSpPr>
+        <p:cNvPr id="1" name="">
+          <a:extLst>
+            <a:ext uri="{FF2B5EF4-FFF2-40B4-BE49-F238E27FC236}">
+              <a16:creationId xmlns:a16="http://schemas.microsoft.com/office/drawing/2014/main" id="{AE35ABD5-2AF3-CFDB-0075-4EDCF4B97D27}"/>
+            </a:ext>
+          </a:extLst>
+        </p:cNvPr>
+        <p:cNvGrpSpPr/>
+        <p:nvPr/>
+      </p:nvGrpSpPr>
+      <p:grpSpPr>
+        <a:xfrm>
+          <a:off x="0" y="0"/>
+          <a:ext cx="0" cy="0"/>
+          <a:chOff x="0" y="0"/>
+          <a:chExt cx="0" cy="0"/>
+        </a:xfrm>
+      </p:grpSpPr>
+      <p:sp>
+        <p:nvSpPr>
+          <p:cNvPr id="2" name="Slide Image Placeholder 1">
+            <a:extLst>
+              <a:ext uri="{FF2B5EF4-FFF2-40B4-BE49-F238E27FC236}">
+                <a16:creationId xmlns:a16="http://schemas.microsoft.com/office/drawing/2014/main" id="{054097F1-E91A-8743-D174-20975008B948}"/>
+              </a:ext>
+            </a:extLst>
+          </p:cNvPr>
+          <p:cNvSpPr>
+            <a:spLocks noGrp="1" noRot="1" noChangeAspect="1"/>
+          </p:cNvSpPr>
+          <p:nvPr>
+            <p:ph type="sldImg" idx="2"/>
+          </p:nvPr>
+        </p:nvSpPr>
+        <p:spPr/>
+      </p:sp>
+      <p:sp>
+        <p:nvSpPr>
+          <p:cNvPr id="3" name="Notes Placeholder 2">
+            <a:extLst>
+              <a:ext uri="{FF2B5EF4-FFF2-40B4-BE49-F238E27FC236}">
+                <a16:creationId xmlns:a16="http://schemas.microsoft.com/office/drawing/2014/main" id="{450351FA-DFB9-8012-434E-38A179373926}"/>
+              </a:ext>
+            </a:extLst>
+          </p:cNvPr>
+          <p:cNvSpPr>
+            <a:spLocks noGrp="1"/>
+          </p:cNvSpPr>
+          <p:nvPr>
+            <p:ph type="body" sz="quarter" idx="3"/>
+          </p:nvPr>
+        </p:nvSpPr>
+        <p:spPr/>
+        <p:txBody>
+          <a:bodyPr/>
+          <a:lstStyle/>
+          <a:p>
+            <a:endParaRPr dirty="0"/>
+          </a:p>
+        </p:txBody>
+      </p:sp>
+      <p:sp>
+        <p:nvSpPr>
+          <p:cNvPr id="4" name="Slide Number Placeholder 3">
+            <a:extLst>
+              <a:ext uri="{FF2B5EF4-FFF2-40B4-BE49-F238E27FC236}">
+                <a16:creationId xmlns:a16="http://schemas.microsoft.com/office/drawing/2014/main" id="{96E9D7DE-C1B4-432F-9C74-5F97B237A8C2}"/>
+              </a:ext>
+            </a:extLst>
+          </p:cNvPr>
+          <p:cNvSpPr>
+            <a:spLocks noGrp="1"/>
+          </p:cNvSpPr>
+          <p:nvPr>
+            <p:ph type="sldNum" sz="quarter" idx="5"/>
+          </p:nvPr>
+        </p:nvSpPr>
+        <p:spPr/>
+      </p:sp>
+    </p:spTree>
+    <p:extLst>
+      <p:ext uri="{BB962C8B-B14F-4D97-AF65-F5344CB8AC3E}">
+        <p14:creationId xmlns:p14="http://schemas.microsoft.com/office/powerpoint/2010/main" val="2310712834"/>
+      </p:ext>
+    </p:extLst>
   </p:cSld>
   <p:clrMapOvr>
     <a:masterClrMapping/>
@@ -9365,7 +9850,7 @@
         <p:spPr>
           <a:xfrm>
             <a:off x="457200" y="728980"/>
-            <a:ext cx="8960815" cy="615553"/>
+            <a:ext cx="11277294" cy="615553"/>
           </a:xfrm>
           <a:prstGeom prst="rect">
             <a:avLst/>
@@ -9801,12 +10286,852 @@
           </a:prstGeom>
         </p:spPr>
       </p:pic>
+    </p:spTree>
+  </p:cSld>
+  <p:clrMapOvr>
+    <a:masterClrMapping/>
+  </p:clrMapOvr>
+</p:sld>
+</file>
+
+<file path=ppt/slides/slide8.xml><?xml version="1.0" encoding="utf-8"?>
+<p:sld xmlns:a="http://schemas.openxmlformats.org/drawingml/2006/main" xmlns:r="http://schemas.openxmlformats.org/officeDocument/2006/relationships" xmlns:p="http://schemas.openxmlformats.org/presentationml/2006/main">
+  <p:cSld>
+    <p:bg>
+      <p:bgPr>
+        <a:solidFill>
+          <a:srgbClr val="0A192F"/>
+        </a:solidFill>
+        <a:effectLst/>
+      </p:bgPr>
+    </p:bg>
+    <p:spTree>
+      <p:nvGrpSpPr>
+        <p:cNvPr id="1" name="">
+          <a:extLst>
+            <a:ext uri="{FF2B5EF4-FFF2-40B4-BE49-F238E27FC236}">
+              <a16:creationId xmlns:a16="http://schemas.microsoft.com/office/drawing/2014/main" id="{4C7EA517-17C1-0332-CDC1-43028C1A20E8}"/>
+            </a:ext>
+          </a:extLst>
+        </p:cNvPr>
+        <p:cNvGrpSpPr/>
+        <p:nvPr/>
+      </p:nvGrpSpPr>
+      <p:grpSpPr>
+        <a:xfrm>
+          <a:off x="0" y="0"/>
+          <a:ext cx="0" cy="0"/>
+          <a:chOff x="0" y="0"/>
+          <a:chExt cx="0" cy="0"/>
+        </a:xfrm>
+      </p:grpSpPr>
+      <p:sp>
+        <p:nvSpPr>
+          <p:cNvPr id="2" name="TextBox 1">
+            <a:extLst>
+              <a:ext uri="{FF2B5EF4-FFF2-40B4-BE49-F238E27FC236}">
+                <a16:creationId xmlns:a16="http://schemas.microsoft.com/office/drawing/2014/main" id="{A0E604DA-E7F6-1AB5-9C34-153BC34EC3FE}"/>
+              </a:ext>
+            </a:extLst>
+          </p:cNvPr>
+          <p:cNvSpPr txBox="1"/>
+          <p:nvPr/>
+        </p:nvSpPr>
+        <p:spPr>
+          <a:xfrm>
+            <a:off x="457199" y="103284"/>
+            <a:ext cx="11277295" cy="640080"/>
+          </a:xfrm>
+          <a:prstGeom prst="rect">
+            <a:avLst/>
+          </a:prstGeom>
+          <a:noFill/>
+        </p:spPr>
+        <p:txBody>
+          <a:bodyPr wrap="square" lIns="0" tIns="0" rIns="0" bIns="0">
+            <a:spAutoFit/>
+          </a:bodyPr>
+          <a:lstStyle/>
+          <a:p>
+            <a:pPr>
+              <a:defRPr sz="2400" b="1">
+                <a:solidFill>
+                  <a:srgbClr val="FAF9F6"/>
+                </a:solidFill>
+                <a:latin typeface="Georgia"/>
+              </a:defRPr>
+            </a:pPr>
+            <a:r>
+              <a:rPr dirty="0"/>
+              <a:t>Operational &amp; Compliance Transformation Yielded 100% Success</a:t>
+            </a:r>
+          </a:p>
+        </p:txBody>
+      </p:sp>
+      <p:sp>
+        <p:nvSpPr>
+          <p:cNvPr id="3" name="TextBox 2">
+            <a:extLst>
+              <a:ext uri="{FF2B5EF4-FFF2-40B4-BE49-F238E27FC236}">
+                <a16:creationId xmlns:a16="http://schemas.microsoft.com/office/drawing/2014/main" id="{E7ABDCE0-D15E-D1B7-9332-2108B59DC0FE}"/>
+              </a:ext>
+            </a:extLst>
+          </p:cNvPr>
+          <p:cNvSpPr txBox="1"/>
+          <p:nvPr/>
+        </p:nvSpPr>
+        <p:spPr>
+          <a:xfrm>
+            <a:off x="457200" y="728980"/>
+            <a:ext cx="11277295" cy="615553"/>
+          </a:xfrm>
+          <a:prstGeom prst="rect">
+            <a:avLst/>
+          </a:prstGeom>
+          <a:noFill/>
+        </p:spPr>
+        <p:txBody>
+          <a:bodyPr wrap="square" lIns="0" tIns="0" rIns="0" bIns="0">
+            <a:spAutoFit/>
+          </a:bodyPr>
+          <a:lstStyle/>
+          <a:p>
+            <a:pPr>
+              <a:defRPr sz="1200" b="1">
+                <a:solidFill>
+                  <a:srgbClr val="00C49F"/>
+                </a:solidFill>
+                <a:latin typeface="Calibri"/>
+              </a:defRPr>
+            </a:pPr>
+            <a:r>
+              <a:rPr lang="en-AU" sz="2000" dirty="0">
+                <a:solidFill>
+                  <a:srgbClr val="F6C514"/>
+                </a:solidFill>
+              </a:rPr>
+              <a:t>Pillar 4.1 : </a:t>
+            </a:r>
+            <a:r>
+              <a:rPr sz="2000" dirty="0">
+                <a:solidFill>
+                  <a:srgbClr val="F6C514"/>
+                </a:solidFill>
+              </a:rPr>
+              <a:t>DELIVERING DIRECT, MEASURABLE BUSINESS ROI AND </a:t>
+            </a:r>
+            <a:r>
+              <a:rPr lang="en-AU" sz="2000" dirty="0">
+                <a:solidFill>
+                  <a:srgbClr val="F6C514"/>
+                </a:solidFill>
+              </a:rPr>
+              <a:t>FINANICAL SAVINGS WITH OPERATIONAL EXCELLENCE</a:t>
+            </a:r>
+            <a:endParaRPr sz="2000" dirty="0">
+              <a:solidFill>
+                <a:srgbClr val="F6C514"/>
+              </a:solidFill>
+            </a:endParaRPr>
+          </a:p>
+        </p:txBody>
+      </p:sp>
+      <p:sp>
+        <p:nvSpPr>
+          <p:cNvPr id="4" name="Rectangle 3">
+            <a:extLst>
+              <a:ext uri="{FF2B5EF4-FFF2-40B4-BE49-F238E27FC236}">
+                <a16:creationId xmlns:a16="http://schemas.microsoft.com/office/drawing/2014/main" id="{6CBDF09D-EDCE-E28B-70DC-222C960FD92F}"/>
+              </a:ext>
+            </a:extLst>
+          </p:cNvPr>
+          <p:cNvSpPr/>
+          <p:nvPr/>
+        </p:nvSpPr>
+        <p:spPr>
+          <a:xfrm>
+            <a:off x="457200" y="1417320"/>
+            <a:ext cx="11277295" cy="25400"/>
+          </a:xfrm>
+          <a:prstGeom prst="rect">
+            <a:avLst/>
+          </a:prstGeom>
+          <a:solidFill>
+            <a:srgbClr val="F6C514"/>
+          </a:solidFill>
+          <a:ln>
+            <a:noFill/>
+          </a:ln>
+        </p:spPr>
+        <p:style>
+          <a:lnRef idx="1">
+            <a:schemeClr val="accent1"/>
+          </a:lnRef>
+          <a:fillRef idx="3">
+            <a:schemeClr val="accent1"/>
+          </a:fillRef>
+          <a:effectRef idx="2">
+            <a:schemeClr val="accent1"/>
+          </a:effectRef>
+          <a:fontRef idx="minor">
+            <a:schemeClr val="lt1"/>
+          </a:fontRef>
+        </p:style>
+        <p:txBody>
+          <a:bodyPr rtlCol="0" anchor="ctr"/>
+          <a:lstStyle/>
+          <a:p>
+            <a:pPr algn="ctr"/>
+            <a:endParaRPr/>
+          </a:p>
+        </p:txBody>
+      </p:sp>
+      <p:sp>
+        <p:nvSpPr>
+          <p:cNvPr id="6" name="Rounded Rectangle 5">
+            <a:extLst>
+              <a:ext uri="{FF2B5EF4-FFF2-40B4-BE49-F238E27FC236}">
+                <a16:creationId xmlns:a16="http://schemas.microsoft.com/office/drawing/2014/main" id="{2C135086-EAA6-9E46-2020-A52AF3E67F84}"/>
+              </a:ext>
+            </a:extLst>
+          </p:cNvPr>
+          <p:cNvSpPr/>
+          <p:nvPr/>
+        </p:nvSpPr>
+        <p:spPr>
+          <a:xfrm>
+            <a:off x="8642240" y="1679367"/>
+            <a:ext cx="3169920" cy="1169353"/>
+          </a:xfrm>
+          <a:prstGeom prst="roundRect">
+            <a:avLst/>
+          </a:prstGeom>
+          <a:solidFill>
+            <a:srgbClr val="1B4965"/>
+          </a:solidFill>
+          <a:ln>
+            <a:noFill/>
+          </a:ln>
+        </p:spPr>
+        <p:style>
+          <a:lnRef idx="1">
+            <a:schemeClr val="accent1"/>
+          </a:lnRef>
+          <a:fillRef idx="3">
+            <a:schemeClr val="accent1"/>
+          </a:fillRef>
+          <a:effectRef idx="2">
+            <a:schemeClr val="accent1"/>
+          </a:effectRef>
+          <a:fontRef idx="minor">
+            <a:schemeClr val="lt1"/>
+          </a:fontRef>
+        </p:style>
+        <p:txBody>
+          <a:bodyPr wrap="square" lIns="228600" tIns="228600" rIns="228600" bIns="228600" rtlCol="0" anchor="ctr"/>
+          <a:lstStyle/>
+          <a:p>
+            <a:pPr algn="ctr">
+              <a:spcAft>
+                <a:spcPts val="1000"/>
+              </a:spcAft>
+              <a:defRPr sz="1100" b="1">
+                <a:solidFill>
+                  <a:srgbClr val="00C49F"/>
+                </a:solidFill>
+                <a:latin typeface="Calibri"/>
+              </a:defRPr>
+            </a:pPr>
+            <a:r>
+              <a:rPr lang="en-AU" sz="1600" dirty="0">
+                <a:solidFill>
+                  <a:srgbClr val="F6C514"/>
+                </a:solidFill>
+              </a:rPr>
+              <a:t>GO-LIVE</a:t>
+            </a:r>
+            <a:endParaRPr sz="1600" dirty="0">
+              <a:solidFill>
+                <a:srgbClr val="F6C514"/>
+              </a:solidFill>
+            </a:endParaRPr>
+          </a:p>
+          <a:p>
+            <a:pPr algn="ctr">
+              <a:spcAft>
+                <a:spcPts val="1400"/>
+              </a:spcAft>
+              <a:defRPr sz="3600" b="1">
+                <a:solidFill>
+                  <a:srgbClr val="FAF9F6"/>
+                </a:solidFill>
+                <a:latin typeface="Georgia"/>
+              </a:defRPr>
+            </a:pPr>
+            <a:r>
+              <a:rPr lang="en-AU" sz="2000" dirty="0"/>
+              <a:t>3 June 2024</a:t>
+            </a:r>
+            <a:endParaRPr sz="2000" dirty="0"/>
+          </a:p>
+          <a:p>
+            <a:pPr>
+              <a:spcAft>
+                <a:spcPts val="600"/>
+              </a:spcAft>
+              <a:defRPr sz="1100">
+                <a:solidFill>
+                  <a:srgbClr val="FAF9F6"/>
+                </a:solidFill>
+                <a:latin typeface="Calibri"/>
+              </a:defRPr>
+            </a:pPr>
+            <a:endParaRPr sz="1600" dirty="0"/>
+          </a:p>
+        </p:txBody>
+      </p:sp>
+      <p:sp>
+        <p:nvSpPr>
+          <p:cNvPr id="8" name="Shape 16">
+            <a:extLst>
+              <a:ext uri="{FF2B5EF4-FFF2-40B4-BE49-F238E27FC236}">
+                <a16:creationId xmlns:a16="http://schemas.microsoft.com/office/drawing/2014/main" id="{46EAB4B6-49E4-0335-08C8-6391A784D587}"/>
+              </a:ext>
+            </a:extLst>
+          </p:cNvPr>
+          <p:cNvSpPr/>
+          <p:nvPr/>
+        </p:nvSpPr>
+        <p:spPr>
+          <a:xfrm>
+            <a:off x="457200" y="1673640"/>
+            <a:ext cx="7874000" cy="2085560"/>
+          </a:xfrm>
+          <a:prstGeom prst="roundRect">
+            <a:avLst>
+              <a:gd name="adj" fmla="val 3846"/>
+            </a:avLst>
+          </a:prstGeom>
+          <a:solidFill>
+            <a:srgbClr val="0D2B49"/>
+          </a:solidFill>
+          <a:ln w="12700">
+            <a:solidFill>
+              <a:srgbClr val="071B33"/>
+            </a:solidFill>
+            <a:round/>
+          </a:ln>
+        </p:spPr>
+        <p:style>
+          <a:lnRef idx="0">
+            <a:scrgbClr r="0" g="0" b="0"/>
+          </a:lnRef>
+          <a:fillRef idx="0">
+            <a:scrgbClr r="0" g="0" b="0"/>
+          </a:fillRef>
+          <a:effectRef idx="0">
+            <a:scrgbClr r="0" g="0" b="0"/>
+          </a:effectRef>
+          <a:fontRef idx="minor"/>
+        </p:style>
+        <p:txBody>
+          <a:bodyPr lIns="90000" tIns="45000" rIns="90000" bIns="45000" anchor="t">
+            <a:noAutofit/>
+          </a:bodyPr>
+          <a:lstStyle/>
+          <a:p>
+            <a:endParaRPr lang="en-US" sz="1400" b="0" u="none" strike="noStrike">
+              <a:solidFill>
+                <a:srgbClr val="FFFFFF"/>
+              </a:solidFill>
+              <a:effectLst/>
+              <a:uFillTx/>
+              <a:latin typeface="Arial"/>
+            </a:endParaRPr>
+          </a:p>
+        </p:txBody>
+      </p:sp>
+      <p:sp>
+        <p:nvSpPr>
+          <p:cNvPr id="10" name="Text 17">
+            <a:extLst>
+              <a:ext uri="{FF2B5EF4-FFF2-40B4-BE49-F238E27FC236}">
+                <a16:creationId xmlns:a16="http://schemas.microsoft.com/office/drawing/2014/main" id="{19BBD1AC-49E0-3804-4F4A-26960E385263}"/>
+              </a:ext>
+            </a:extLst>
+          </p:cNvPr>
+          <p:cNvSpPr/>
+          <p:nvPr/>
+        </p:nvSpPr>
+        <p:spPr>
+          <a:xfrm>
+            <a:off x="768240" y="1975320"/>
+            <a:ext cx="1691280" cy="182520"/>
+          </a:xfrm>
+          <a:prstGeom prst="rect">
+            <a:avLst/>
+          </a:prstGeom>
+          <a:noFill/>
+          <a:ln w="0">
+            <a:noFill/>
+          </a:ln>
+        </p:spPr>
+        <p:style>
+          <a:lnRef idx="0">
+            <a:scrgbClr r="0" g="0" b="0"/>
+          </a:lnRef>
+          <a:fillRef idx="0">
+            <a:scrgbClr r="0" g="0" b="0"/>
+          </a:fillRef>
+          <a:effectRef idx="0">
+            <a:scrgbClr r="0" g="0" b="0"/>
+          </a:effectRef>
+          <a:fontRef idx="minor"/>
+        </p:style>
+        <p:txBody>
+          <a:bodyPr lIns="0" tIns="0" rIns="0" bIns="0" anchor="ctr">
+            <a:noAutofit/>
+          </a:bodyPr>
+          <a:lstStyle/>
+          <a:p>
+            <a:pPr defTabSz="914400">
+              <a:lnSpc>
+                <a:spcPct val="100000"/>
+              </a:lnSpc>
+              <a:tabLst>
+                <a:tab pos="0" algn="l"/>
+              </a:tabLst>
+            </a:pPr>
+            <a:r>
+              <a:rPr lang="en-US" sz="1600" b="1" u="none" strike="noStrike" dirty="0">
+                <a:solidFill>
+                  <a:srgbClr val="22D3EE"/>
+                </a:solidFill>
+                <a:effectLst/>
+                <a:uFillTx/>
+                <a:latin typeface="Aptos"/>
+              </a:rPr>
+              <a:t>RECLAIMED CAPACITY</a:t>
+            </a:r>
+            <a:endParaRPr lang="en-US" sz="1600" b="0" u="none" strike="noStrike" dirty="0">
+              <a:solidFill>
+                <a:srgbClr val="000000"/>
+              </a:solidFill>
+              <a:effectLst/>
+              <a:uFillTx/>
+              <a:latin typeface="Arial"/>
+            </a:endParaRPr>
+          </a:p>
+        </p:txBody>
+      </p:sp>
+      <p:sp>
+        <p:nvSpPr>
+          <p:cNvPr id="14" name="Text 18">
+            <a:extLst>
+              <a:ext uri="{FF2B5EF4-FFF2-40B4-BE49-F238E27FC236}">
+                <a16:creationId xmlns:a16="http://schemas.microsoft.com/office/drawing/2014/main" id="{95B59112-3238-CD2E-A0A7-81D69FD5A117}"/>
+              </a:ext>
+            </a:extLst>
+          </p:cNvPr>
+          <p:cNvSpPr/>
+          <p:nvPr/>
+        </p:nvSpPr>
+        <p:spPr>
+          <a:xfrm>
+            <a:off x="2505600" y="1831700"/>
+            <a:ext cx="5825600" cy="365400"/>
+          </a:xfrm>
+          <a:prstGeom prst="rect">
+            <a:avLst/>
+          </a:prstGeom>
+          <a:noFill/>
+          <a:ln w="0">
+            <a:noFill/>
+          </a:ln>
+        </p:spPr>
+        <p:style>
+          <a:lnRef idx="0">
+            <a:scrgbClr r="0" g="0" b="0"/>
+          </a:lnRef>
+          <a:fillRef idx="0">
+            <a:scrgbClr r="0" g="0" b="0"/>
+          </a:fillRef>
+          <a:effectRef idx="0">
+            <a:scrgbClr r="0" g="0" b="0"/>
+          </a:effectRef>
+          <a:fontRef idx="minor"/>
+        </p:style>
+        <p:txBody>
+          <a:bodyPr lIns="0" tIns="0" rIns="0" bIns="0" anchor="ctr">
+            <a:noAutofit/>
+          </a:bodyPr>
+          <a:lstStyle/>
+          <a:p>
+            <a:pPr defTabSz="914400">
+              <a:lnSpc>
+                <a:spcPct val="100000"/>
+              </a:lnSpc>
+              <a:tabLst>
+                <a:tab pos="0" algn="l"/>
+              </a:tabLst>
+            </a:pPr>
+            <a:r>
+              <a:rPr lang="en-US" sz="1600" b="0" u="none" strike="noStrike" dirty="0">
+                <a:solidFill>
+                  <a:srgbClr val="FFFFFF"/>
+                </a:solidFill>
+                <a:effectLst/>
+                <a:uFillTx/>
+                <a:latin typeface="Aptos"/>
+              </a:rPr>
+              <a:t>Equivalent to approximately 277 to 416 twenty-four-hour days</a:t>
+            </a:r>
+            <a:r>
+              <a:rPr lang="en-US" sz="1600" dirty="0">
+                <a:solidFill>
+                  <a:srgbClr val="FFFFFF"/>
+                </a:solidFill>
+                <a:latin typeface="Aptos"/>
+              </a:rPr>
+              <a:t>.</a:t>
+            </a:r>
+            <a:endParaRPr lang="en-US" sz="1600" b="0" u="none" strike="noStrike" dirty="0">
+              <a:solidFill>
+                <a:srgbClr val="000000"/>
+              </a:solidFill>
+              <a:effectLst/>
+              <a:uFillTx/>
+              <a:latin typeface="Arial"/>
+            </a:endParaRPr>
+          </a:p>
+        </p:txBody>
+      </p:sp>
+      <p:sp>
+        <p:nvSpPr>
+          <p:cNvPr id="18" name="Text 19">
+            <a:extLst>
+              <a:ext uri="{FF2B5EF4-FFF2-40B4-BE49-F238E27FC236}">
+                <a16:creationId xmlns:a16="http://schemas.microsoft.com/office/drawing/2014/main" id="{689E3964-5806-72A0-D828-6355955448C9}"/>
+              </a:ext>
+            </a:extLst>
+          </p:cNvPr>
+          <p:cNvSpPr/>
+          <p:nvPr/>
+        </p:nvSpPr>
+        <p:spPr>
+          <a:xfrm>
+            <a:off x="768240" y="2666200"/>
+            <a:ext cx="1691280" cy="182520"/>
+          </a:xfrm>
+          <a:prstGeom prst="rect">
+            <a:avLst/>
+          </a:prstGeom>
+          <a:noFill/>
+          <a:ln w="0">
+            <a:noFill/>
+          </a:ln>
+        </p:spPr>
+        <p:style>
+          <a:lnRef idx="0">
+            <a:scrgbClr r="0" g="0" b="0"/>
+          </a:lnRef>
+          <a:fillRef idx="0">
+            <a:scrgbClr r="0" g="0" b="0"/>
+          </a:fillRef>
+          <a:effectRef idx="0">
+            <a:scrgbClr r="0" g="0" b="0"/>
+          </a:effectRef>
+          <a:fontRef idx="minor"/>
+        </p:style>
+        <p:txBody>
+          <a:bodyPr lIns="0" tIns="0" rIns="0" bIns="0" anchor="ctr">
+            <a:noAutofit/>
+          </a:bodyPr>
+          <a:lstStyle/>
+          <a:p>
+            <a:pPr defTabSz="914400">
+              <a:lnSpc>
+                <a:spcPct val="100000"/>
+              </a:lnSpc>
+              <a:tabLst>
+                <a:tab pos="0" algn="l"/>
+              </a:tabLst>
+            </a:pPr>
+            <a:r>
+              <a:rPr lang="en-US" sz="1600" b="1" u="none" strike="noStrike" dirty="0">
+                <a:solidFill>
+                  <a:srgbClr val="F6C514"/>
+                </a:solidFill>
+                <a:effectLst/>
+                <a:uFillTx/>
+                <a:latin typeface="Aptos"/>
+              </a:rPr>
+              <a:t>QUALITY &amp; REPORTING</a:t>
+            </a:r>
+            <a:endParaRPr lang="en-US" sz="1600" b="0" u="none" strike="noStrike" dirty="0">
+              <a:solidFill>
+                <a:srgbClr val="000000"/>
+              </a:solidFill>
+              <a:effectLst/>
+              <a:uFillTx/>
+              <a:latin typeface="Arial"/>
+            </a:endParaRPr>
+          </a:p>
+        </p:txBody>
+      </p:sp>
+      <p:sp>
+        <p:nvSpPr>
+          <p:cNvPr id="20" name="Text 20">
+            <a:extLst>
+              <a:ext uri="{FF2B5EF4-FFF2-40B4-BE49-F238E27FC236}">
+                <a16:creationId xmlns:a16="http://schemas.microsoft.com/office/drawing/2014/main" id="{5D0E4276-908D-56E4-6681-A959463A6F5E}"/>
+              </a:ext>
+            </a:extLst>
+          </p:cNvPr>
+          <p:cNvSpPr/>
+          <p:nvPr/>
+        </p:nvSpPr>
+        <p:spPr>
+          <a:xfrm>
+            <a:off x="2505600" y="2560680"/>
+            <a:ext cx="5736700" cy="365400"/>
+          </a:xfrm>
+          <a:prstGeom prst="rect">
+            <a:avLst/>
+          </a:prstGeom>
+          <a:noFill/>
+          <a:ln w="0">
+            <a:noFill/>
+          </a:ln>
+        </p:spPr>
+        <p:style>
+          <a:lnRef idx="0">
+            <a:scrgbClr r="0" g="0" b="0"/>
+          </a:lnRef>
+          <a:fillRef idx="0">
+            <a:scrgbClr r="0" g="0" b="0"/>
+          </a:fillRef>
+          <a:effectRef idx="0">
+            <a:scrgbClr r="0" g="0" b="0"/>
+          </a:effectRef>
+          <a:fontRef idx="minor"/>
+        </p:style>
+        <p:txBody>
+          <a:bodyPr lIns="0" tIns="0" rIns="0" bIns="0" anchor="ctr">
+            <a:noAutofit/>
+          </a:bodyPr>
+          <a:lstStyle/>
+          <a:p>
+            <a:pPr defTabSz="914400">
+              <a:lnSpc>
+                <a:spcPct val="100000"/>
+              </a:lnSpc>
+              <a:tabLst>
+                <a:tab pos="0" algn="l"/>
+              </a:tabLst>
+            </a:pPr>
+            <a:r>
+              <a:rPr lang="en-US" sz="1600" b="0" u="none" strike="noStrike" dirty="0">
+                <a:solidFill>
+                  <a:srgbClr val="FFFFFF"/>
+                </a:solidFill>
+                <a:effectLst/>
+                <a:uFillTx/>
+                <a:latin typeface="Aptos"/>
+              </a:rPr>
+              <a:t>Manual paper transcription were eliminated, and field reporting was automated.</a:t>
+            </a:r>
+            <a:endParaRPr lang="en-US" sz="1600" b="0" u="none" strike="noStrike" dirty="0">
+              <a:solidFill>
+                <a:srgbClr val="000000"/>
+              </a:solidFill>
+              <a:effectLst/>
+              <a:uFillTx/>
+              <a:latin typeface="Arial"/>
+            </a:endParaRPr>
+          </a:p>
+        </p:txBody>
+      </p:sp>
+      <p:sp>
+        <p:nvSpPr>
+          <p:cNvPr id="22" name="Text 21">
+            <a:extLst>
+              <a:ext uri="{FF2B5EF4-FFF2-40B4-BE49-F238E27FC236}">
+                <a16:creationId xmlns:a16="http://schemas.microsoft.com/office/drawing/2014/main" id="{BE9ECC1D-D526-8724-E30E-65E81FAFE6F5}"/>
+              </a:ext>
+            </a:extLst>
+          </p:cNvPr>
+          <p:cNvSpPr/>
+          <p:nvPr/>
+        </p:nvSpPr>
+        <p:spPr>
+          <a:xfrm>
+            <a:off x="768240" y="3331680"/>
+            <a:ext cx="1691280" cy="182520"/>
+          </a:xfrm>
+          <a:prstGeom prst="rect">
+            <a:avLst/>
+          </a:prstGeom>
+          <a:noFill/>
+          <a:ln w="0">
+            <a:noFill/>
+          </a:ln>
+        </p:spPr>
+        <p:style>
+          <a:lnRef idx="0">
+            <a:scrgbClr r="0" g="0" b="0"/>
+          </a:lnRef>
+          <a:fillRef idx="0">
+            <a:scrgbClr r="0" g="0" b="0"/>
+          </a:fillRef>
+          <a:effectRef idx="0">
+            <a:scrgbClr r="0" g="0" b="0"/>
+          </a:effectRef>
+          <a:fontRef idx="minor"/>
+        </p:style>
+        <p:txBody>
+          <a:bodyPr lIns="0" tIns="0" rIns="0" bIns="0" anchor="ctr">
+            <a:noAutofit/>
+          </a:bodyPr>
+          <a:lstStyle/>
+          <a:p>
+            <a:pPr defTabSz="914400">
+              <a:lnSpc>
+                <a:spcPct val="100000"/>
+              </a:lnSpc>
+              <a:tabLst>
+                <a:tab pos="0" algn="l"/>
+              </a:tabLst>
+            </a:pPr>
+            <a:r>
+              <a:rPr lang="en-US" sz="1600" b="1" u="none" strike="noStrike" dirty="0">
+                <a:solidFill>
+                  <a:srgbClr val="44C767"/>
+                </a:solidFill>
+                <a:effectLst/>
+                <a:uFillTx/>
+                <a:latin typeface="Aptos"/>
+              </a:rPr>
+              <a:t>SCALE &amp; COMPLIANCE</a:t>
+            </a:r>
+            <a:endParaRPr lang="en-US" sz="1600" b="0" u="none" strike="noStrike" dirty="0">
+              <a:solidFill>
+                <a:srgbClr val="000000"/>
+              </a:solidFill>
+              <a:effectLst/>
+              <a:uFillTx/>
+              <a:latin typeface="Arial"/>
+            </a:endParaRPr>
+          </a:p>
+        </p:txBody>
+      </p:sp>
+      <p:sp>
+        <p:nvSpPr>
+          <p:cNvPr id="24" name="Text 22">
+            <a:extLst>
+              <a:ext uri="{FF2B5EF4-FFF2-40B4-BE49-F238E27FC236}">
+                <a16:creationId xmlns:a16="http://schemas.microsoft.com/office/drawing/2014/main" id="{D03884C0-5904-0B5C-5DD2-E9F034CC4F91}"/>
+              </a:ext>
+            </a:extLst>
+          </p:cNvPr>
+          <p:cNvSpPr/>
+          <p:nvPr/>
+        </p:nvSpPr>
+        <p:spPr>
+          <a:xfrm>
+            <a:off x="2505600" y="3238860"/>
+            <a:ext cx="5825600" cy="365400"/>
+          </a:xfrm>
+          <a:prstGeom prst="rect">
+            <a:avLst/>
+          </a:prstGeom>
+          <a:noFill/>
+          <a:ln w="0">
+            <a:noFill/>
+          </a:ln>
+        </p:spPr>
+        <p:style>
+          <a:lnRef idx="0">
+            <a:scrgbClr r="0" g="0" b="0"/>
+          </a:lnRef>
+          <a:fillRef idx="0">
+            <a:scrgbClr r="0" g="0" b="0"/>
+          </a:fillRef>
+          <a:effectRef idx="0">
+            <a:scrgbClr r="0" g="0" b="0"/>
+          </a:effectRef>
+          <a:fontRef idx="minor"/>
+        </p:style>
+        <p:txBody>
+          <a:bodyPr lIns="0" tIns="0" rIns="0" bIns="0" anchor="ctr">
+            <a:noAutofit/>
+          </a:bodyPr>
+          <a:lstStyle/>
+          <a:p>
+            <a:pPr defTabSz="914400">
+              <a:lnSpc>
+                <a:spcPct val="100000"/>
+              </a:lnSpc>
+              <a:tabLst>
+                <a:tab pos="0" algn="l"/>
+              </a:tabLst>
+            </a:pPr>
+            <a:r>
+              <a:rPr lang="en-US" sz="1600" b="0" u="none" strike="noStrike" dirty="0">
+                <a:solidFill>
+                  <a:srgbClr val="FFFFFF"/>
+                </a:solidFill>
+                <a:effectLst/>
+                <a:uFillTx/>
+                <a:latin typeface="Aptos"/>
+              </a:rPr>
+              <a:t>Five-table Dataverse schema, governed PII and a repeatable rollout blueprint support future expansion.</a:t>
+            </a:r>
+            <a:endParaRPr lang="en-US" sz="1600" b="0" u="none" strike="noStrike" dirty="0">
+              <a:solidFill>
+                <a:srgbClr val="000000"/>
+              </a:solidFill>
+              <a:effectLst/>
+              <a:uFillTx/>
+              <a:latin typeface="Arial"/>
+            </a:endParaRPr>
+          </a:p>
+        </p:txBody>
+      </p:sp>
+      <p:graphicFrame>
+        <p:nvGraphicFramePr>
+          <p:cNvPr id="26" name="Chart 0">
+            <a:extLst>
+              <a:ext uri="{FF2B5EF4-FFF2-40B4-BE49-F238E27FC236}">
+                <a16:creationId xmlns:a16="http://schemas.microsoft.com/office/drawing/2014/main" id="{FEEB16DA-D914-337E-1F8D-725414B8E7B6}"/>
+              </a:ext>
+            </a:extLst>
+          </p:cNvPr>
+          <p:cNvGraphicFramePr/>
+          <p:nvPr>
+            <p:extLst>
+              <p:ext uri="{D42A27DB-BD31-4B8C-83A1-F6EECF244321}">
+                <p14:modId xmlns:p14="http://schemas.microsoft.com/office/powerpoint/2010/main" val="2577966892"/>
+              </p:ext>
+            </p:extLst>
+          </p:nvPr>
+        </p:nvGraphicFramePr>
+        <p:xfrm>
+          <a:off x="495404" y="3840840"/>
+          <a:ext cx="6159396" cy="3017160"/>
+        </p:xfrm>
+        <a:graphic>
+          <a:graphicData uri="http://schemas.openxmlformats.org/drawingml/2006/chart">
+            <c:chart xmlns:c="http://schemas.openxmlformats.org/drawingml/2006/chart" xmlns:r="http://schemas.openxmlformats.org/officeDocument/2006/relationships" r:id="rId3"/>
+          </a:graphicData>
+        </a:graphic>
+      </p:graphicFrame>
       <p:pic>
         <p:nvPicPr>
-          <p:cNvPr id="17" name="Picture 16">
+          <p:cNvPr id="28" name="Picture 27">
             <a:extLst>
               <a:ext uri="{FF2B5EF4-FFF2-40B4-BE49-F238E27FC236}">
-                <a16:creationId xmlns:a16="http://schemas.microsoft.com/office/drawing/2014/main" id="{84B33F71-4BDB-E94A-E54F-3FD7AA7566AF}"/>
+                <a16:creationId xmlns:a16="http://schemas.microsoft.com/office/drawing/2014/main" id="{7E2103FC-B817-2927-0E1C-9977EFF48993}"/>
               </a:ext>
             </a:extLst>
           </p:cNvPr>
@@ -9816,14 +11141,14 @@
           <p:nvPr/>
         </p:nvPicPr>
         <p:blipFill>
-          <a:blip r:embed="rId6"/>
+          <a:blip r:embed="rId4"/>
           <a:stretch>
             <a:fillRect/>
           </a:stretch>
         </p:blipFill>
         <p:spPr>
           <a:xfrm>
-            <a:off x="5054600" y="5927894"/>
+            <a:off x="9075863" y="2919679"/>
             <a:ext cx="2429674" cy="839521"/>
           </a:xfrm>
           <a:prstGeom prst="rect">
@@ -9832,6 +11157,1670 @@
         </p:spPr>
       </p:pic>
     </p:spTree>
+    <p:extLst>
+      <p:ext uri="{BB962C8B-B14F-4D97-AF65-F5344CB8AC3E}">
+        <p14:creationId xmlns:p14="http://schemas.microsoft.com/office/powerpoint/2010/main" val="637102487"/>
+      </p:ext>
+    </p:extLst>
+  </p:cSld>
+  <p:clrMapOvr>
+    <a:masterClrMapping/>
+  </p:clrMapOvr>
+</p:sld>
+</file>
+
+<file path=ppt/slides/slide9.xml><?xml version="1.0" encoding="utf-8"?>
+<p:sld xmlns:a="http://schemas.openxmlformats.org/drawingml/2006/main" xmlns:r="http://schemas.openxmlformats.org/officeDocument/2006/relationships" xmlns:p="http://schemas.openxmlformats.org/presentationml/2006/main">
+  <p:cSld>
+    <p:bg>
+      <p:bgPr>
+        <a:solidFill>
+          <a:srgbClr val="0A192F"/>
+        </a:solidFill>
+        <a:effectLst/>
+      </p:bgPr>
+    </p:bg>
+    <p:spTree>
+      <p:nvGrpSpPr>
+        <p:cNvPr id="1" name="">
+          <a:extLst>
+            <a:ext uri="{FF2B5EF4-FFF2-40B4-BE49-F238E27FC236}">
+              <a16:creationId xmlns:a16="http://schemas.microsoft.com/office/drawing/2014/main" id="{DABFCA3D-7F70-6035-76AF-8DC53F9F09EC}"/>
+            </a:ext>
+          </a:extLst>
+        </p:cNvPr>
+        <p:cNvGrpSpPr/>
+        <p:nvPr/>
+      </p:nvGrpSpPr>
+      <p:grpSpPr>
+        <a:xfrm>
+          <a:off x="0" y="0"/>
+          <a:ext cx="0" cy="0"/>
+          <a:chOff x="0" y="0"/>
+          <a:chExt cx="0" cy="0"/>
+        </a:xfrm>
+      </p:grpSpPr>
+      <p:sp>
+        <p:nvSpPr>
+          <p:cNvPr id="2" name="TextBox 1">
+            <a:extLst>
+              <a:ext uri="{FF2B5EF4-FFF2-40B4-BE49-F238E27FC236}">
+                <a16:creationId xmlns:a16="http://schemas.microsoft.com/office/drawing/2014/main" id="{1B464EEA-8495-C8F6-4F5C-837CC437EB81}"/>
+              </a:ext>
+            </a:extLst>
+          </p:cNvPr>
+          <p:cNvSpPr txBox="1"/>
+          <p:nvPr/>
+        </p:nvSpPr>
+        <p:spPr>
+          <a:xfrm>
+            <a:off x="457199" y="103284"/>
+            <a:ext cx="11277295" cy="369332"/>
+          </a:xfrm>
+          <a:prstGeom prst="rect">
+            <a:avLst/>
+          </a:prstGeom>
+          <a:noFill/>
+        </p:spPr>
+        <p:txBody>
+          <a:bodyPr wrap="square" lIns="0" tIns="0" rIns="0" bIns="0">
+            <a:spAutoFit/>
+          </a:bodyPr>
+          <a:lstStyle/>
+          <a:p>
+            <a:pPr>
+              <a:defRPr sz="2400" b="1">
+                <a:solidFill>
+                  <a:srgbClr val="FAF9F6"/>
+                </a:solidFill>
+                <a:latin typeface="Georgia"/>
+              </a:defRPr>
+            </a:pPr>
+            <a:r>
+              <a:rPr lang="en-AU"/>
+              <a:t>Why the VIA </a:t>
+            </a:r>
+            <a:r>
+              <a:rPr lang="en-AU" dirty="0"/>
+              <a:t>Matters to Managers</a:t>
+            </a:r>
+            <a:endParaRPr dirty="0"/>
+          </a:p>
+        </p:txBody>
+      </p:sp>
+      <p:sp>
+        <p:nvSpPr>
+          <p:cNvPr id="3" name="TextBox 2">
+            <a:extLst>
+              <a:ext uri="{FF2B5EF4-FFF2-40B4-BE49-F238E27FC236}">
+                <a16:creationId xmlns:a16="http://schemas.microsoft.com/office/drawing/2014/main" id="{C12C936D-C6E3-2795-984B-FC9FA92E1198}"/>
+              </a:ext>
+            </a:extLst>
+          </p:cNvPr>
+          <p:cNvSpPr txBox="1"/>
+          <p:nvPr/>
+        </p:nvSpPr>
+        <p:spPr>
+          <a:xfrm>
+            <a:off x="457200" y="728980"/>
+            <a:ext cx="11277295" cy="307777"/>
+          </a:xfrm>
+          <a:prstGeom prst="rect">
+            <a:avLst/>
+          </a:prstGeom>
+          <a:noFill/>
+        </p:spPr>
+        <p:txBody>
+          <a:bodyPr wrap="square" lIns="0" tIns="0" rIns="0" bIns="0">
+            <a:spAutoFit/>
+          </a:bodyPr>
+          <a:lstStyle/>
+          <a:p>
+            <a:pPr>
+              <a:defRPr sz="1200" b="1">
+                <a:solidFill>
+                  <a:srgbClr val="00C49F"/>
+                </a:solidFill>
+                <a:latin typeface="Calibri"/>
+              </a:defRPr>
+            </a:pPr>
+            <a:r>
+              <a:rPr lang="en-AU" sz="2000" dirty="0">
+                <a:solidFill>
+                  <a:srgbClr val="F6C514"/>
+                </a:solidFill>
+              </a:rPr>
+              <a:t>Evidence of David Liong who converts frontline problems into secure, scalable and valuable application.</a:t>
+            </a:r>
+            <a:endParaRPr sz="2000" dirty="0">
+              <a:solidFill>
+                <a:srgbClr val="F6C514"/>
+              </a:solidFill>
+            </a:endParaRPr>
+          </a:p>
+        </p:txBody>
+      </p:sp>
+      <p:sp>
+        <p:nvSpPr>
+          <p:cNvPr id="4" name="Rectangle 3">
+            <a:extLst>
+              <a:ext uri="{FF2B5EF4-FFF2-40B4-BE49-F238E27FC236}">
+                <a16:creationId xmlns:a16="http://schemas.microsoft.com/office/drawing/2014/main" id="{B1187067-2348-80B3-C0B9-019C7DAB420B}"/>
+              </a:ext>
+            </a:extLst>
+          </p:cNvPr>
+          <p:cNvSpPr/>
+          <p:nvPr/>
+        </p:nvSpPr>
+        <p:spPr>
+          <a:xfrm>
+            <a:off x="457200" y="1417320"/>
+            <a:ext cx="11277295" cy="25400"/>
+          </a:xfrm>
+          <a:prstGeom prst="rect">
+            <a:avLst/>
+          </a:prstGeom>
+          <a:solidFill>
+            <a:srgbClr val="F6C514"/>
+          </a:solidFill>
+          <a:ln>
+            <a:noFill/>
+          </a:ln>
+        </p:spPr>
+        <p:style>
+          <a:lnRef idx="1">
+            <a:schemeClr val="accent1"/>
+          </a:lnRef>
+          <a:fillRef idx="3">
+            <a:schemeClr val="accent1"/>
+          </a:fillRef>
+          <a:effectRef idx="2">
+            <a:schemeClr val="accent1"/>
+          </a:effectRef>
+          <a:fontRef idx="minor">
+            <a:schemeClr val="lt1"/>
+          </a:fontRef>
+        </p:style>
+        <p:txBody>
+          <a:bodyPr rtlCol="0" anchor="ctr"/>
+          <a:lstStyle/>
+          <a:p>
+            <a:pPr algn="ctr"/>
+            <a:endParaRPr/>
+          </a:p>
+        </p:txBody>
+      </p:sp>
+      <p:sp>
+        <p:nvSpPr>
+          <p:cNvPr id="6" name="Rounded Rectangle 5">
+            <a:extLst>
+              <a:ext uri="{FF2B5EF4-FFF2-40B4-BE49-F238E27FC236}">
+                <a16:creationId xmlns:a16="http://schemas.microsoft.com/office/drawing/2014/main" id="{BD7233A4-3FE0-F305-7C66-D0AFD53E7D47}"/>
+              </a:ext>
+            </a:extLst>
+          </p:cNvPr>
+          <p:cNvSpPr/>
+          <p:nvPr/>
+        </p:nvSpPr>
+        <p:spPr>
+          <a:xfrm>
+            <a:off x="8642240" y="1679367"/>
+            <a:ext cx="3169920" cy="1169353"/>
+          </a:xfrm>
+          <a:prstGeom prst="roundRect">
+            <a:avLst/>
+          </a:prstGeom>
+          <a:solidFill>
+            <a:srgbClr val="1B4965"/>
+          </a:solidFill>
+          <a:ln>
+            <a:noFill/>
+          </a:ln>
+        </p:spPr>
+        <p:style>
+          <a:lnRef idx="1">
+            <a:schemeClr val="accent1"/>
+          </a:lnRef>
+          <a:fillRef idx="3">
+            <a:schemeClr val="accent1"/>
+          </a:fillRef>
+          <a:effectRef idx="2">
+            <a:schemeClr val="accent1"/>
+          </a:effectRef>
+          <a:fontRef idx="minor">
+            <a:schemeClr val="lt1"/>
+          </a:fontRef>
+        </p:style>
+        <p:txBody>
+          <a:bodyPr wrap="square" lIns="228600" tIns="228600" rIns="228600" bIns="228600" rtlCol="0" anchor="ctr"/>
+          <a:lstStyle/>
+          <a:p>
+            <a:pPr algn="ctr">
+              <a:spcAft>
+                <a:spcPts val="1000"/>
+              </a:spcAft>
+              <a:defRPr sz="1100" b="1">
+                <a:solidFill>
+                  <a:srgbClr val="00C49F"/>
+                </a:solidFill>
+                <a:latin typeface="Calibri"/>
+              </a:defRPr>
+            </a:pPr>
+            <a:endParaRPr sz="1600" dirty="0">
+              <a:solidFill>
+                <a:srgbClr val="F6C514"/>
+              </a:solidFill>
+            </a:endParaRPr>
+          </a:p>
+          <a:p>
+            <a:pPr>
+              <a:spcAft>
+                <a:spcPts val="600"/>
+              </a:spcAft>
+              <a:defRPr sz="1100">
+                <a:solidFill>
+                  <a:srgbClr val="FAF9F6"/>
+                </a:solidFill>
+                <a:latin typeface="Calibri"/>
+              </a:defRPr>
+            </a:pPr>
+            <a:endParaRPr sz="1600" dirty="0"/>
+          </a:p>
+        </p:txBody>
+      </p:sp>
+      <p:sp>
+        <p:nvSpPr>
+          <p:cNvPr id="7" name="Shape 4">
+            <a:extLst>
+              <a:ext uri="{FF2B5EF4-FFF2-40B4-BE49-F238E27FC236}">
+                <a16:creationId xmlns:a16="http://schemas.microsoft.com/office/drawing/2014/main" id="{63410E39-4AFE-E369-0D7F-57BA2254B543}"/>
+              </a:ext>
+            </a:extLst>
+          </p:cNvPr>
+          <p:cNvSpPr/>
+          <p:nvPr/>
+        </p:nvSpPr>
+        <p:spPr>
+          <a:xfrm>
+            <a:off x="502920" y="1517760"/>
+            <a:ext cx="6811920" cy="731160"/>
+          </a:xfrm>
+          <a:prstGeom prst="roundRect">
+            <a:avLst>
+              <a:gd name="adj" fmla="val 12500"/>
+            </a:avLst>
+          </a:prstGeom>
+          <a:solidFill>
+            <a:srgbClr val="FFFFFF"/>
+          </a:solidFill>
+          <a:ln w="12700">
+            <a:solidFill>
+              <a:srgbClr val="D9E6EE"/>
+            </a:solidFill>
+            <a:round/>
+          </a:ln>
+          <a:effectLst>
+            <a:outerShdw blurRad="12600" dist="4582" dir="2700000" algn="bl" rotWithShape="0">
+              <a:srgbClr val="000000">
+                <a:alpha val="12000"/>
+              </a:srgbClr>
+            </a:outerShdw>
+          </a:effectLst>
+        </p:spPr>
+        <p:style>
+          <a:lnRef idx="0">
+            <a:scrgbClr r="0" g="0" b="0"/>
+          </a:lnRef>
+          <a:fillRef idx="0">
+            <a:scrgbClr r="0" g="0" b="0"/>
+          </a:fillRef>
+          <a:effectRef idx="0">
+            <a:scrgbClr r="0" g="0" b="0"/>
+          </a:effectRef>
+          <a:fontRef idx="minor"/>
+        </p:style>
+        <p:txBody>
+          <a:bodyPr lIns="90000" tIns="45000" rIns="90000" bIns="45000" anchor="t">
+            <a:noAutofit/>
+          </a:bodyPr>
+          <a:lstStyle/>
+          <a:p>
+            <a:endParaRPr lang="en-US" sz="1400" b="0" u="none" strike="noStrike">
+              <a:solidFill>
+                <a:srgbClr val="000000"/>
+              </a:solidFill>
+              <a:effectLst/>
+              <a:uFillTx/>
+              <a:latin typeface="Arial"/>
+            </a:endParaRPr>
+          </a:p>
+        </p:txBody>
+      </p:sp>
+      <p:sp>
+        <p:nvSpPr>
+          <p:cNvPr id="11" name="Shape 5">
+            <a:extLst>
+              <a:ext uri="{FF2B5EF4-FFF2-40B4-BE49-F238E27FC236}">
+                <a16:creationId xmlns:a16="http://schemas.microsoft.com/office/drawing/2014/main" id="{91177199-86C1-C900-AEED-E280C16F0AD0}"/>
+              </a:ext>
+            </a:extLst>
+          </p:cNvPr>
+          <p:cNvSpPr/>
+          <p:nvPr/>
+        </p:nvSpPr>
+        <p:spPr>
+          <a:xfrm>
+            <a:off x="502920" y="1517760"/>
+            <a:ext cx="91080" cy="731160"/>
+          </a:xfrm>
+          <a:prstGeom prst="rect">
+            <a:avLst/>
+          </a:prstGeom>
+          <a:solidFill>
+            <a:srgbClr val="F6C514"/>
+          </a:solidFill>
+          <a:ln w="12700">
+            <a:solidFill>
+              <a:srgbClr val="333333">
+                <a:alpha val="0"/>
+              </a:srgbClr>
+            </a:solidFill>
+            <a:round/>
+          </a:ln>
+        </p:spPr>
+        <p:style>
+          <a:lnRef idx="0">
+            <a:scrgbClr r="0" g="0" b="0"/>
+          </a:lnRef>
+          <a:fillRef idx="0">
+            <a:scrgbClr r="0" g="0" b="0"/>
+          </a:fillRef>
+          <a:effectRef idx="0">
+            <a:scrgbClr r="0" g="0" b="0"/>
+          </a:effectRef>
+          <a:fontRef idx="minor"/>
+        </p:style>
+        <p:txBody>
+          <a:bodyPr lIns="90000" tIns="45000" rIns="90000" bIns="45000" anchor="t">
+            <a:noAutofit/>
+          </a:bodyPr>
+          <a:lstStyle/>
+          <a:p>
+            <a:endParaRPr lang="en-US" sz="1400" b="0" u="none" strike="noStrike">
+              <a:solidFill>
+                <a:srgbClr val="000000"/>
+              </a:solidFill>
+              <a:effectLst/>
+              <a:uFillTx/>
+              <a:latin typeface="Arial"/>
+            </a:endParaRPr>
+          </a:p>
+        </p:txBody>
+      </p:sp>
+      <p:sp>
+        <p:nvSpPr>
+          <p:cNvPr id="13" name="Text 6">
+            <a:extLst>
+              <a:ext uri="{FF2B5EF4-FFF2-40B4-BE49-F238E27FC236}">
+                <a16:creationId xmlns:a16="http://schemas.microsoft.com/office/drawing/2014/main" id="{4805F436-1B53-2860-27DD-1229F2A0DC82}"/>
+              </a:ext>
+            </a:extLst>
+          </p:cNvPr>
+          <p:cNvSpPr/>
+          <p:nvPr/>
+        </p:nvSpPr>
+        <p:spPr>
+          <a:xfrm>
+            <a:off x="758880" y="1682640"/>
+            <a:ext cx="1874160" cy="182520"/>
+          </a:xfrm>
+          <a:prstGeom prst="rect">
+            <a:avLst/>
+          </a:prstGeom>
+          <a:noFill/>
+          <a:ln w="0">
+            <a:noFill/>
+          </a:ln>
+        </p:spPr>
+        <p:style>
+          <a:lnRef idx="0">
+            <a:scrgbClr r="0" g="0" b="0"/>
+          </a:lnRef>
+          <a:fillRef idx="0">
+            <a:scrgbClr r="0" g="0" b="0"/>
+          </a:fillRef>
+          <a:effectRef idx="0">
+            <a:scrgbClr r="0" g="0" b="0"/>
+          </a:effectRef>
+          <a:fontRef idx="minor"/>
+        </p:style>
+        <p:txBody>
+          <a:bodyPr lIns="0" tIns="0" rIns="0" bIns="0" anchor="ctr">
+            <a:noAutofit/>
+          </a:bodyPr>
+          <a:lstStyle/>
+          <a:p>
+            <a:pPr defTabSz="914400">
+              <a:lnSpc>
+                <a:spcPct val="100000"/>
+              </a:lnSpc>
+              <a:tabLst>
+                <a:tab pos="0" algn="l"/>
+              </a:tabLst>
+            </a:pPr>
+            <a:r>
+              <a:rPr lang="en-US" sz="1400" b="1" u="none" strike="noStrike" dirty="0">
+                <a:solidFill>
+                  <a:srgbClr val="F6C514"/>
+                </a:solidFill>
+                <a:effectLst>
+                  <a:outerShdw blurRad="38100" dist="38100" dir="2700000" algn="tl">
+                    <a:srgbClr val="000000">
+                      <a:alpha val="43137"/>
+                    </a:srgbClr>
+                  </a:outerShdw>
+                </a:effectLst>
+                <a:uFillTx/>
+                <a:latin typeface="Aptos"/>
+              </a:rPr>
+              <a:t>BUSINESS ANALYSIS</a:t>
+            </a:r>
+            <a:endParaRPr lang="en-US" sz="1400" b="0" u="none" strike="noStrike" dirty="0">
+              <a:solidFill>
+                <a:srgbClr val="000000"/>
+              </a:solidFill>
+              <a:effectLst>
+                <a:outerShdw blurRad="38100" dist="38100" dir="2700000" algn="tl">
+                  <a:srgbClr val="000000">
+                    <a:alpha val="43137"/>
+                  </a:srgbClr>
+                </a:outerShdw>
+              </a:effectLst>
+              <a:uFillTx/>
+              <a:latin typeface="Arial"/>
+            </a:endParaRPr>
+          </a:p>
+        </p:txBody>
+      </p:sp>
+      <p:sp>
+        <p:nvSpPr>
+          <p:cNvPr id="16" name="Text 7">
+            <a:extLst>
+              <a:ext uri="{FF2B5EF4-FFF2-40B4-BE49-F238E27FC236}">
+                <a16:creationId xmlns:a16="http://schemas.microsoft.com/office/drawing/2014/main" id="{C934E3BB-1B10-5DCB-6EB6-5F0A2FCB7A49}"/>
+              </a:ext>
+            </a:extLst>
+          </p:cNvPr>
+          <p:cNvSpPr/>
+          <p:nvPr/>
+        </p:nvSpPr>
+        <p:spPr>
+          <a:xfrm>
+            <a:off x="2697480" y="1703760"/>
+            <a:ext cx="4503420" cy="383760"/>
+          </a:xfrm>
+          <a:prstGeom prst="rect">
+            <a:avLst/>
+          </a:prstGeom>
+          <a:noFill/>
+          <a:ln w="0">
+            <a:noFill/>
+          </a:ln>
+        </p:spPr>
+        <p:style>
+          <a:lnRef idx="0">
+            <a:scrgbClr r="0" g="0" b="0"/>
+          </a:lnRef>
+          <a:fillRef idx="0">
+            <a:scrgbClr r="0" g="0" b="0"/>
+          </a:fillRef>
+          <a:effectRef idx="0">
+            <a:scrgbClr r="0" g="0" b="0"/>
+          </a:effectRef>
+          <a:fontRef idx="minor"/>
+        </p:style>
+        <p:txBody>
+          <a:bodyPr lIns="0" tIns="0" rIns="0" bIns="0" anchor="ctr">
+            <a:noAutofit/>
+          </a:bodyPr>
+          <a:lstStyle/>
+          <a:p>
+            <a:pPr defTabSz="914400">
+              <a:lnSpc>
+                <a:spcPct val="100000"/>
+              </a:lnSpc>
+              <a:tabLst>
+                <a:tab pos="0" algn="l"/>
+              </a:tabLst>
+            </a:pPr>
+            <a:r>
+              <a:rPr lang="en-US" sz="1600" b="0" u="none" strike="noStrike" dirty="0">
+                <a:solidFill>
+                  <a:srgbClr val="1D2D3F"/>
+                </a:solidFill>
+                <a:effectLst/>
+                <a:uFillTx/>
+                <a:latin typeface="Aptos"/>
+              </a:rPr>
+              <a:t>Facilitated frontline workshops, authored SIDs and converted operational pain into a </a:t>
+            </a:r>
+            <a:r>
+              <a:rPr lang="en-US" sz="1600" b="0" u="none" strike="noStrike" dirty="0" err="1">
+                <a:solidFill>
+                  <a:srgbClr val="1D2D3F"/>
+                </a:solidFill>
+                <a:effectLst/>
+                <a:uFillTx/>
+                <a:latin typeface="Aptos"/>
+              </a:rPr>
+              <a:t>prioritised</a:t>
+            </a:r>
+            <a:r>
+              <a:rPr lang="en-US" sz="1600" b="0" u="none" strike="noStrike" dirty="0">
+                <a:solidFill>
+                  <a:srgbClr val="1D2D3F"/>
+                </a:solidFill>
+                <a:effectLst/>
+                <a:uFillTx/>
+                <a:latin typeface="Aptos"/>
+              </a:rPr>
+              <a:t> MVP.</a:t>
+            </a:r>
+            <a:endParaRPr lang="en-US" sz="1600" b="0" u="none" strike="noStrike" dirty="0">
+              <a:solidFill>
+                <a:srgbClr val="000000"/>
+              </a:solidFill>
+              <a:effectLst/>
+              <a:uFillTx/>
+              <a:latin typeface="Arial"/>
+            </a:endParaRPr>
+          </a:p>
+        </p:txBody>
+      </p:sp>
+      <p:sp>
+        <p:nvSpPr>
+          <p:cNvPr id="19" name="Shape 8">
+            <a:extLst>
+              <a:ext uri="{FF2B5EF4-FFF2-40B4-BE49-F238E27FC236}">
+                <a16:creationId xmlns:a16="http://schemas.microsoft.com/office/drawing/2014/main" id="{37AE76B9-EDF1-8B2F-3B38-DAF11348877F}"/>
+              </a:ext>
+            </a:extLst>
+          </p:cNvPr>
+          <p:cNvSpPr/>
+          <p:nvPr/>
+        </p:nvSpPr>
+        <p:spPr>
+          <a:xfrm>
+            <a:off x="502920" y="2477880"/>
+            <a:ext cx="6811920" cy="731160"/>
+          </a:xfrm>
+          <a:prstGeom prst="roundRect">
+            <a:avLst>
+              <a:gd name="adj" fmla="val 12500"/>
+            </a:avLst>
+          </a:prstGeom>
+          <a:solidFill>
+            <a:srgbClr val="FFFFFF"/>
+          </a:solidFill>
+          <a:ln w="12700">
+            <a:solidFill>
+              <a:srgbClr val="D9E6EE"/>
+            </a:solidFill>
+            <a:round/>
+          </a:ln>
+          <a:effectLst>
+            <a:outerShdw blurRad="12600" dist="4582" dir="2700000" algn="bl" rotWithShape="0">
+              <a:srgbClr val="000000">
+                <a:alpha val="12000"/>
+              </a:srgbClr>
+            </a:outerShdw>
+          </a:effectLst>
+        </p:spPr>
+        <p:style>
+          <a:lnRef idx="0">
+            <a:scrgbClr r="0" g="0" b="0"/>
+          </a:lnRef>
+          <a:fillRef idx="0">
+            <a:scrgbClr r="0" g="0" b="0"/>
+          </a:fillRef>
+          <a:effectRef idx="0">
+            <a:scrgbClr r="0" g="0" b="0"/>
+          </a:effectRef>
+          <a:fontRef idx="minor"/>
+        </p:style>
+        <p:txBody>
+          <a:bodyPr lIns="90000" tIns="45000" rIns="90000" bIns="45000" anchor="t">
+            <a:noAutofit/>
+          </a:bodyPr>
+          <a:lstStyle/>
+          <a:p>
+            <a:endParaRPr lang="en-US" sz="1400" b="0" u="none" strike="noStrike">
+              <a:solidFill>
+                <a:srgbClr val="000000"/>
+              </a:solidFill>
+              <a:effectLst/>
+              <a:uFillTx/>
+              <a:latin typeface="Arial"/>
+            </a:endParaRPr>
+          </a:p>
+        </p:txBody>
+      </p:sp>
+      <p:sp>
+        <p:nvSpPr>
+          <p:cNvPr id="23" name="Shape 9">
+            <a:extLst>
+              <a:ext uri="{FF2B5EF4-FFF2-40B4-BE49-F238E27FC236}">
+                <a16:creationId xmlns:a16="http://schemas.microsoft.com/office/drawing/2014/main" id="{E5359991-04CD-70AA-3364-76A0F76BF3D2}"/>
+              </a:ext>
+            </a:extLst>
+          </p:cNvPr>
+          <p:cNvSpPr/>
+          <p:nvPr/>
+        </p:nvSpPr>
+        <p:spPr>
+          <a:xfrm>
+            <a:off x="502920" y="2477880"/>
+            <a:ext cx="91080" cy="731160"/>
+          </a:xfrm>
+          <a:prstGeom prst="rect">
+            <a:avLst/>
+          </a:prstGeom>
+          <a:solidFill>
+            <a:srgbClr val="22D3EE"/>
+          </a:solidFill>
+          <a:ln w="12700">
+            <a:solidFill>
+              <a:srgbClr val="333333">
+                <a:alpha val="0"/>
+              </a:srgbClr>
+            </a:solidFill>
+            <a:round/>
+          </a:ln>
+        </p:spPr>
+        <p:style>
+          <a:lnRef idx="0">
+            <a:scrgbClr r="0" g="0" b="0"/>
+          </a:lnRef>
+          <a:fillRef idx="0">
+            <a:scrgbClr r="0" g="0" b="0"/>
+          </a:fillRef>
+          <a:effectRef idx="0">
+            <a:scrgbClr r="0" g="0" b="0"/>
+          </a:effectRef>
+          <a:fontRef idx="minor"/>
+        </p:style>
+        <p:txBody>
+          <a:bodyPr lIns="90000" tIns="45000" rIns="90000" bIns="45000" anchor="t">
+            <a:noAutofit/>
+          </a:bodyPr>
+          <a:lstStyle/>
+          <a:p>
+            <a:endParaRPr lang="en-US" sz="1400" b="0" u="none" strike="noStrike">
+              <a:solidFill>
+                <a:srgbClr val="000000"/>
+              </a:solidFill>
+              <a:effectLst/>
+              <a:uFillTx/>
+              <a:latin typeface="Arial"/>
+            </a:endParaRPr>
+          </a:p>
+        </p:txBody>
+      </p:sp>
+      <p:sp>
+        <p:nvSpPr>
+          <p:cNvPr id="27" name="Text 10">
+            <a:extLst>
+              <a:ext uri="{FF2B5EF4-FFF2-40B4-BE49-F238E27FC236}">
+                <a16:creationId xmlns:a16="http://schemas.microsoft.com/office/drawing/2014/main" id="{0BB422BA-F586-C798-10F7-299D6A14FEFE}"/>
+              </a:ext>
+            </a:extLst>
+          </p:cNvPr>
+          <p:cNvSpPr/>
+          <p:nvPr/>
+        </p:nvSpPr>
+        <p:spPr>
+          <a:xfrm>
+            <a:off x="758880" y="2642760"/>
+            <a:ext cx="1874160" cy="383580"/>
+          </a:xfrm>
+          <a:prstGeom prst="rect">
+            <a:avLst/>
+          </a:prstGeom>
+          <a:noFill/>
+          <a:ln w="0">
+            <a:noFill/>
+          </a:ln>
+        </p:spPr>
+        <p:style>
+          <a:lnRef idx="0">
+            <a:scrgbClr r="0" g="0" b="0"/>
+          </a:lnRef>
+          <a:fillRef idx="0">
+            <a:scrgbClr r="0" g="0" b="0"/>
+          </a:fillRef>
+          <a:effectRef idx="0">
+            <a:scrgbClr r="0" g="0" b="0"/>
+          </a:effectRef>
+          <a:fontRef idx="minor"/>
+        </p:style>
+        <p:txBody>
+          <a:bodyPr lIns="0" tIns="0" rIns="0" bIns="0" anchor="ctr">
+            <a:noAutofit/>
+          </a:bodyPr>
+          <a:lstStyle/>
+          <a:p>
+            <a:pPr defTabSz="914400">
+              <a:lnSpc>
+                <a:spcPct val="100000"/>
+              </a:lnSpc>
+              <a:tabLst>
+                <a:tab pos="0" algn="l"/>
+              </a:tabLst>
+            </a:pPr>
+            <a:r>
+              <a:rPr lang="en-US" sz="1400" b="1" u="none" strike="noStrike" dirty="0">
+                <a:solidFill>
+                  <a:srgbClr val="22D3EE"/>
+                </a:solidFill>
+                <a:effectLst>
+                  <a:outerShdw blurRad="38100" dist="38100" dir="2700000" algn="tl">
+                    <a:srgbClr val="000000">
+                      <a:alpha val="43137"/>
+                    </a:srgbClr>
+                  </a:outerShdw>
+                </a:effectLst>
+                <a:uFillTx/>
+                <a:latin typeface="Aptos"/>
+              </a:rPr>
+              <a:t>SOLUTION ARCHITECTURE</a:t>
+            </a:r>
+            <a:endParaRPr lang="en-US" sz="1400" b="0" u="none" strike="noStrike" dirty="0">
+              <a:solidFill>
+                <a:srgbClr val="000000"/>
+              </a:solidFill>
+              <a:effectLst>
+                <a:outerShdw blurRad="38100" dist="38100" dir="2700000" algn="tl">
+                  <a:srgbClr val="000000">
+                    <a:alpha val="43137"/>
+                  </a:srgbClr>
+                </a:outerShdw>
+              </a:effectLst>
+              <a:uFillTx/>
+              <a:latin typeface="Arial"/>
+            </a:endParaRPr>
+          </a:p>
+        </p:txBody>
+      </p:sp>
+      <p:sp>
+        <p:nvSpPr>
+          <p:cNvPr id="30" name="Text 11">
+            <a:extLst>
+              <a:ext uri="{FF2B5EF4-FFF2-40B4-BE49-F238E27FC236}">
+                <a16:creationId xmlns:a16="http://schemas.microsoft.com/office/drawing/2014/main" id="{1AD489C3-468E-C5DC-4991-B54AF4F46617}"/>
+              </a:ext>
+            </a:extLst>
+          </p:cNvPr>
+          <p:cNvSpPr/>
+          <p:nvPr/>
+        </p:nvSpPr>
+        <p:spPr>
+          <a:xfrm>
+            <a:off x="2697480" y="2651180"/>
+            <a:ext cx="4503420" cy="383760"/>
+          </a:xfrm>
+          <a:prstGeom prst="rect">
+            <a:avLst/>
+          </a:prstGeom>
+          <a:noFill/>
+          <a:ln w="0">
+            <a:noFill/>
+          </a:ln>
+        </p:spPr>
+        <p:style>
+          <a:lnRef idx="0">
+            <a:scrgbClr r="0" g="0" b="0"/>
+          </a:lnRef>
+          <a:fillRef idx="0">
+            <a:scrgbClr r="0" g="0" b="0"/>
+          </a:fillRef>
+          <a:effectRef idx="0">
+            <a:scrgbClr r="0" g="0" b="0"/>
+          </a:effectRef>
+          <a:fontRef idx="minor"/>
+        </p:style>
+        <p:txBody>
+          <a:bodyPr lIns="0" tIns="0" rIns="0" bIns="0" anchor="ctr">
+            <a:noAutofit/>
+          </a:bodyPr>
+          <a:lstStyle/>
+          <a:p>
+            <a:pPr defTabSz="914400">
+              <a:lnSpc>
+                <a:spcPct val="100000"/>
+              </a:lnSpc>
+              <a:tabLst>
+                <a:tab pos="0" algn="l"/>
+              </a:tabLst>
+            </a:pPr>
+            <a:r>
+              <a:rPr lang="en-US" sz="1600" b="0" u="none" strike="noStrike" dirty="0">
+                <a:solidFill>
+                  <a:srgbClr val="1D2D3F"/>
+                </a:solidFill>
+                <a:effectLst/>
+                <a:uFillTx/>
+                <a:latin typeface="Aptos"/>
+              </a:rPr>
+              <a:t>Designed a secure 3NF Dataverse model, data-driven questions and governed document storage.</a:t>
+            </a:r>
+            <a:endParaRPr lang="en-US" sz="1600" b="0" u="none" strike="noStrike" dirty="0">
+              <a:solidFill>
+                <a:srgbClr val="000000"/>
+              </a:solidFill>
+              <a:effectLst/>
+              <a:uFillTx/>
+              <a:latin typeface="Arial"/>
+            </a:endParaRPr>
+          </a:p>
+        </p:txBody>
+      </p:sp>
+      <p:sp>
+        <p:nvSpPr>
+          <p:cNvPr id="32" name="Shape 12">
+            <a:extLst>
+              <a:ext uri="{FF2B5EF4-FFF2-40B4-BE49-F238E27FC236}">
+                <a16:creationId xmlns:a16="http://schemas.microsoft.com/office/drawing/2014/main" id="{CC1DAD1D-3EB5-8677-2CB5-E803BC4C5531}"/>
+              </a:ext>
+            </a:extLst>
+          </p:cNvPr>
+          <p:cNvSpPr/>
+          <p:nvPr/>
+        </p:nvSpPr>
+        <p:spPr>
+          <a:xfrm>
+            <a:off x="502920" y="3438000"/>
+            <a:ext cx="6811920" cy="731160"/>
+          </a:xfrm>
+          <a:prstGeom prst="roundRect">
+            <a:avLst>
+              <a:gd name="adj" fmla="val 12500"/>
+            </a:avLst>
+          </a:prstGeom>
+          <a:solidFill>
+            <a:srgbClr val="FFFFFF"/>
+          </a:solidFill>
+          <a:ln w="12700">
+            <a:solidFill>
+              <a:srgbClr val="D9E6EE"/>
+            </a:solidFill>
+            <a:round/>
+          </a:ln>
+          <a:effectLst>
+            <a:outerShdw blurRad="12600" dist="4582" dir="2700000" algn="bl" rotWithShape="0">
+              <a:srgbClr val="000000">
+                <a:alpha val="12000"/>
+              </a:srgbClr>
+            </a:outerShdw>
+          </a:effectLst>
+        </p:spPr>
+        <p:style>
+          <a:lnRef idx="0">
+            <a:scrgbClr r="0" g="0" b="0"/>
+          </a:lnRef>
+          <a:fillRef idx="0">
+            <a:scrgbClr r="0" g="0" b="0"/>
+          </a:fillRef>
+          <a:effectRef idx="0">
+            <a:scrgbClr r="0" g="0" b="0"/>
+          </a:effectRef>
+          <a:fontRef idx="minor"/>
+        </p:style>
+        <p:txBody>
+          <a:bodyPr lIns="90000" tIns="45000" rIns="90000" bIns="45000" anchor="t">
+            <a:noAutofit/>
+          </a:bodyPr>
+          <a:lstStyle/>
+          <a:p>
+            <a:endParaRPr lang="en-US" sz="1400" b="0" u="none" strike="noStrike">
+              <a:solidFill>
+                <a:srgbClr val="000000"/>
+              </a:solidFill>
+              <a:effectLst/>
+              <a:uFillTx/>
+              <a:latin typeface="Arial"/>
+            </a:endParaRPr>
+          </a:p>
+        </p:txBody>
+      </p:sp>
+      <p:sp>
+        <p:nvSpPr>
+          <p:cNvPr id="34" name="Shape 13">
+            <a:extLst>
+              <a:ext uri="{FF2B5EF4-FFF2-40B4-BE49-F238E27FC236}">
+                <a16:creationId xmlns:a16="http://schemas.microsoft.com/office/drawing/2014/main" id="{B9FF3AF1-0065-1B7B-DC36-67E98E423F91}"/>
+              </a:ext>
+            </a:extLst>
+          </p:cNvPr>
+          <p:cNvSpPr/>
+          <p:nvPr/>
+        </p:nvSpPr>
+        <p:spPr>
+          <a:xfrm>
+            <a:off x="502920" y="3438000"/>
+            <a:ext cx="91080" cy="731160"/>
+          </a:xfrm>
+          <a:prstGeom prst="rect">
+            <a:avLst/>
+          </a:prstGeom>
+          <a:solidFill>
+            <a:srgbClr val="8064D7"/>
+          </a:solidFill>
+          <a:ln w="12700">
+            <a:solidFill>
+              <a:srgbClr val="333333">
+                <a:alpha val="0"/>
+              </a:srgbClr>
+            </a:solidFill>
+            <a:round/>
+          </a:ln>
+        </p:spPr>
+        <p:style>
+          <a:lnRef idx="0">
+            <a:scrgbClr r="0" g="0" b="0"/>
+          </a:lnRef>
+          <a:fillRef idx="0">
+            <a:scrgbClr r="0" g="0" b="0"/>
+          </a:fillRef>
+          <a:effectRef idx="0">
+            <a:scrgbClr r="0" g="0" b="0"/>
+          </a:effectRef>
+          <a:fontRef idx="minor"/>
+        </p:style>
+        <p:txBody>
+          <a:bodyPr lIns="90000" tIns="45000" rIns="90000" bIns="45000" anchor="t">
+            <a:noAutofit/>
+          </a:bodyPr>
+          <a:lstStyle/>
+          <a:p>
+            <a:endParaRPr lang="en-US" sz="1400" b="0" u="none" strike="noStrike">
+              <a:solidFill>
+                <a:srgbClr val="FFFFFF"/>
+              </a:solidFill>
+              <a:effectLst/>
+              <a:uFillTx/>
+              <a:latin typeface="Arial"/>
+            </a:endParaRPr>
+          </a:p>
+        </p:txBody>
+      </p:sp>
+      <p:sp>
+        <p:nvSpPr>
+          <p:cNvPr id="36" name="Text 14">
+            <a:extLst>
+              <a:ext uri="{FF2B5EF4-FFF2-40B4-BE49-F238E27FC236}">
+                <a16:creationId xmlns:a16="http://schemas.microsoft.com/office/drawing/2014/main" id="{6D7EAAF2-8134-5CE8-EC1B-6AB83B9AB512}"/>
+              </a:ext>
+            </a:extLst>
+          </p:cNvPr>
+          <p:cNvSpPr/>
+          <p:nvPr/>
+        </p:nvSpPr>
+        <p:spPr>
+          <a:xfrm>
+            <a:off x="758880" y="3602880"/>
+            <a:ext cx="1874160" cy="182520"/>
+          </a:xfrm>
+          <a:prstGeom prst="rect">
+            <a:avLst/>
+          </a:prstGeom>
+          <a:noFill/>
+          <a:ln w="0">
+            <a:noFill/>
+          </a:ln>
+        </p:spPr>
+        <p:style>
+          <a:lnRef idx="0">
+            <a:scrgbClr r="0" g="0" b="0"/>
+          </a:lnRef>
+          <a:fillRef idx="0">
+            <a:scrgbClr r="0" g="0" b="0"/>
+          </a:fillRef>
+          <a:effectRef idx="0">
+            <a:scrgbClr r="0" g="0" b="0"/>
+          </a:effectRef>
+          <a:fontRef idx="minor"/>
+        </p:style>
+        <p:txBody>
+          <a:bodyPr lIns="0" tIns="0" rIns="0" bIns="0" anchor="ctr">
+            <a:noAutofit/>
+          </a:bodyPr>
+          <a:lstStyle/>
+          <a:p>
+            <a:pPr defTabSz="914400">
+              <a:lnSpc>
+                <a:spcPct val="100000"/>
+              </a:lnSpc>
+              <a:tabLst>
+                <a:tab pos="0" algn="l"/>
+              </a:tabLst>
+            </a:pPr>
+            <a:r>
+              <a:rPr lang="en-US" sz="1400" b="1" u="none" strike="noStrike" dirty="0">
+                <a:solidFill>
+                  <a:srgbClr val="8064D7"/>
+                </a:solidFill>
+                <a:effectLst>
+                  <a:outerShdw blurRad="38100" dist="38100" dir="2700000" algn="tl">
+                    <a:srgbClr val="000000">
+                      <a:alpha val="43137"/>
+                    </a:srgbClr>
+                  </a:outerShdw>
+                </a:effectLst>
+                <a:uFillTx/>
+                <a:latin typeface="Aptos"/>
+              </a:rPr>
+              <a:t>DELIVERY LEADERSHIP</a:t>
+            </a:r>
+            <a:endParaRPr lang="en-US" sz="1400" b="0" u="none" strike="noStrike" dirty="0">
+              <a:solidFill>
+                <a:srgbClr val="000000"/>
+              </a:solidFill>
+              <a:effectLst>
+                <a:outerShdw blurRad="38100" dist="38100" dir="2700000" algn="tl">
+                  <a:srgbClr val="000000">
+                    <a:alpha val="43137"/>
+                  </a:srgbClr>
+                </a:outerShdw>
+              </a:effectLst>
+              <a:uFillTx/>
+              <a:latin typeface="Arial"/>
+            </a:endParaRPr>
+          </a:p>
+        </p:txBody>
+      </p:sp>
+      <p:sp>
+        <p:nvSpPr>
+          <p:cNvPr id="38" name="Text 15">
+            <a:extLst>
+              <a:ext uri="{FF2B5EF4-FFF2-40B4-BE49-F238E27FC236}">
+                <a16:creationId xmlns:a16="http://schemas.microsoft.com/office/drawing/2014/main" id="{8E6EF326-EF67-7DF9-8C0B-F774C24B76D6}"/>
+              </a:ext>
+            </a:extLst>
+          </p:cNvPr>
+          <p:cNvSpPr/>
+          <p:nvPr/>
+        </p:nvSpPr>
+        <p:spPr>
+          <a:xfrm>
+            <a:off x="2773680" y="3547800"/>
+            <a:ext cx="4503420" cy="383760"/>
+          </a:xfrm>
+          <a:prstGeom prst="rect">
+            <a:avLst/>
+          </a:prstGeom>
+          <a:noFill/>
+          <a:ln w="0">
+            <a:noFill/>
+          </a:ln>
+        </p:spPr>
+        <p:style>
+          <a:lnRef idx="0">
+            <a:scrgbClr r="0" g="0" b="0"/>
+          </a:lnRef>
+          <a:fillRef idx="0">
+            <a:scrgbClr r="0" g="0" b="0"/>
+          </a:fillRef>
+          <a:effectRef idx="0">
+            <a:scrgbClr r="0" g="0" b="0"/>
+          </a:effectRef>
+          <a:fontRef idx="minor"/>
+        </p:style>
+        <p:txBody>
+          <a:bodyPr lIns="0" tIns="0" rIns="0" bIns="0" anchor="ctr">
+            <a:noAutofit/>
+          </a:bodyPr>
+          <a:lstStyle/>
+          <a:p>
+            <a:pPr defTabSz="914400">
+              <a:lnSpc>
+                <a:spcPct val="100000"/>
+              </a:lnSpc>
+              <a:tabLst>
+                <a:tab pos="0" algn="l"/>
+              </a:tabLst>
+            </a:pPr>
+            <a:r>
+              <a:rPr lang="en-US" sz="1600" b="0" u="none" strike="noStrike" dirty="0">
+                <a:solidFill>
+                  <a:srgbClr val="1D2D3F"/>
+                </a:solidFill>
+                <a:effectLst/>
+                <a:uFillTx/>
+                <a:latin typeface="Aptos"/>
+              </a:rPr>
+              <a:t>Led Scrum, QA, peer review, ALM pipelines, deployment guides and Helpdesk transition.</a:t>
+            </a:r>
+            <a:endParaRPr lang="en-US" sz="1600" b="0" u="none" strike="noStrike" dirty="0">
+              <a:solidFill>
+                <a:srgbClr val="000000"/>
+              </a:solidFill>
+              <a:effectLst/>
+              <a:uFillTx/>
+              <a:latin typeface="Arial"/>
+            </a:endParaRPr>
+          </a:p>
+        </p:txBody>
+      </p:sp>
+      <p:sp>
+        <p:nvSpPr>
+          <p:cNvPr id="40" name="Shape 16">
+            <a:extLst>
+              <a:ext uri="{FF2B5EF4-FFF2-40B4-BE49-F238E27FC236}">
+                <a16:creationId xmlns:a16="http://schemas.microsoft.com/office/drawing/2014/main" id="{044A26AA-E7E3-3E1D-4AEC-8CB39F95C79F}"/>
+              </a:ext>
+            </a:extLst>
+          </p:cNvPr>
+          <p:cNvSpPr/>
+          <p:nvPr/>
+        </p:nvSpPr>
+        <p:spPr>
+          <a:xfrm>
+            <a:off x="502920" y="4398120"/>
+            <a:ext cx="6811920" cy="731160"/>
+          </a:xfrm>
+          <a:prstGeom prst="roundRect">
+            <a:avLst>
+              <a:gd name="adj" fmla="val 12500"/>
+            </a:avLst>
+          </a:prstGeom>
+          <a:solidFill>
+            <a:srgbClr val="FFFFFF"/>
+          </a:solidFill>
+          <a:ln w="12700">
+            <a:solidFill>
+              <a:srgbClr val="D9E6EE"/>
+            </a:solidFill>
+            <a:round/>
+          </a:ln>
+          <a:effectLst>
+            <a:outerShdw blurRad="12600" dist="4582" dir="2700000" algn="bl" rotWithShape="0">
+              <a:srgbClr val="000000">
+                <a:alpha val="12000"/>
+              </a:srgbClr>
+            </a:outerShdw>
+          </a:effectLst>
+        </p:spPr>
+        <p:style>
+          <a:lnRef idx="0">
+            <a:scrgbClr r="0" g="0" b="0"/>
+          </a:lnRef>
+          <a:fillRef idx="0">
+            <a:scrgbClr r="0" g="0" b="0"/>
+          </a:fillRef>
+          <a:effectRef idx="0">
+            <a:scrgbClr r="0" g="0" b="0"/>
+          </a:effectRef>
+          <a:fontRef idx="minor"/>
+        </p:style>
+        <p:txBody>
+          <a:bodyPr lIns="90000" tIns="45000" rIns="90000" bIns="45000" anchor="t">
+            <a:noAutofit/>
+          </a:bodyPr>
+          <a:lstStyle/>
+          <a:p>
+            <a:endParaRPr lang="en-US" sz="1400" b="0" u="none" strike="noStrike">
+              <a:solidFill>
+                <a:srgbClr val="000000"/>
+              </a:solidFill>
+              <a:effectLst/>
+              <a:uFillTx/>
+              <a:latin typeface="Arial"/>
+            </a:endParaRPr>
+          </a:p>
+        </p:txBody>
+      </p:sp>
+      <p:sp>
+        <p:nvSpPr>
+          <p:cNvPr id="42" name="Shape 17">
+            <a:extLst>
+              <a:ext uri="{FF2B5EF4-FFF2-40B4-BE49-F238E27FC236}">
+                <a16:creationId xmlns:a16="http://schemas.microsoft.com/office/drawing/2014/main" id="{20A5191E-A64B-54CE-40BA-B870144E244A}"/>
+              </a:ext>
+            </a:extLst>
+          </p:cNvPr>
+          <p:cNvSpPr/>
+          <p:nvPr/>
+        </p:nvSpPr>
+        <p:spPr>
+          <a:xfrm>
+            <a:off x="502920" y="4398120"/>
+            <a:ext cx="91080" cy="731160"/>
+          </a:xfrm>
+          <a:prstGeom prst="rect">
+            <a:avLst/>
+          </a:prstGeom>
+          <a:solidFill>
+            <a:srgbClr val="44C767"/>
+          </a:solidFill>
+          <a:ln w="12700">
+            <a:solidFill>
+              <a:srgbClr val="333333">
+                <a:alpha val="0"/>
+              </a:srgbClr>
+            </a:solidFill>
+            <a:round/>
+          </a:ln>
+        </p:spPr>
+        <p:style>
+          <a:lnRef idx="0">
+            <a:scrgbClr r="0" g="0" b="0"/>
+          </a:lnRef>
+          <a:fillRef idx="0">
+            <a:scrgbClr r="0" g="0" b="0"/>
+          </a:fillRef>
+          <a:effectRef idx="0">
+            <a:scrgbClr r="0" g="0" b="0"/>
+          </a:effectRef>
+          <a:fontRef idx="minor"/>
+        </p:style>
+        <p:txBody>
+          <a:bodyPr lIns="90000" tIns="45000" rIns="90000" bIns="45000" anchor="t">
+            <a:noAutofit/>
+          </a:bodyPr>
+          <a:lstStyle/>
+          <a:p>
+            <a:endParaRPr lang="en-US" sz="1400" b="0" u="none" strike="noStrike">
+              <a:solidFill>
+                <a:srgbClr val="000000"/>
+              </a:solidFill>
+              <a:effectLst/>
+              <a:uFillTx/>
+              <a:latin typeface="Arial"/>
+            </a:endParaRPr>
+          </a:p>
+        </p:txBody>
+      </p:sp>
+      <p:sp>
+        <p:nvSpPr>
+          <p:cNvPr id="44" name="Text 18">
+            <a:extLst>
+              <a:ext uri="{FF2B5EF4-FFF2-40B4-BE49-F238E27FC236}">
+                <a16:creationId xmlns:a16="http://schemas.microsoft.com/office/drawing/2014/main" id="{E6F5F0AE-71D7-4F85-9DED-65E70CAFD9FC}"/>
+              </a:ext>
+            </a:extLst>
+          </p:cNvPr>
+          <p:cNvSpPr/>
+          <p:nvPr/>
+        </p:nvSpPr>
+        <p:spPr>
+          <a:xfrm>
+            <a:off x="758880" y="4563000"/>
+            <a:ext cx="1874160" cy="182520"/>
+          </a:xfrm>
+          <a:prstGeom prst="rect">
+            <a:avLst/>
+          </a:prstGeom>
+          <a:noFill/>
+          <a:ln w="0">
+            <a:noFill/>
+          </a:ln>
+        </p:spPr>
+        <p:style>
+          <a:lnRef idx="0">
+            <a:scrgbClr r="0" g="0" b="0"/>
+          </a:lnRef>
+          <a:fillRef idx="0">
+            <a:scrgbClr r="0" g="0" b="0"/>
+          </a:fillRef>
+          <a:effectRef idx="0">
+            <a:scrgbClr r="0" g="0" b="0"/>
+          </a:effectRef>
+          <a:fontRef idx="minor"/>
+        </p:style>
+        <p:txBody>
+          <a:bodyPr lIns="0" tIns="0" rIns="0" bIns="0" anchor="ctr">
+            <a:noAutofit/>
+          </a:bodyPr>
+          <a:lstStyle/>
+          <a:p>
+            <a:pPr defTabSz="914400">
+              <a:lnSpc>
+                <a:spcPct val="100000"/>
+              </a:lnSpc>
+              <a:tabLst>
+                <a:tab pos="0" algn="l"/>
+              </a:tabLst>
+            </a:pPr>
+            <a:r>
+              <a:rPr lang="en-US" sz="1400" b="1" u="none" strike="noStrike" dirty="0">
+                <a:solidFill>
+                  <a:srgbClr val="44C767"/>
+                </a:solidFill>
+                <a:effectLst>
+                  <a:outerShdw blurRad="38100" dist="38100" dir="2700000" algn="tl">
+                    <a:srgbClr val="000000">
+                      <a:alpha val="43137"/>
+                    </a:srgbClr>
+                  </a:outerShdw>
+                </a:effectLst>
+                <a:uFillTx/>
+                <a:latin typeface="Aptos"/>
+              </a:rPr>
+              <a:t>COMMERCIAL IMPACT</a:t>
+            </a:r>
+            <a:endParaRPr lang="en-US" sz="1400" b="0" u="none" strike="noStrike" dirty="0">
+              <a:solidFill>
+                <a:srgbClr val="000000"/>
+              </a:solidFill>
+              <a:effectLst>
+                <a:outerShdw blurRad="38100" dist="38100" dir="2700000" algn="tl">
+                  <a:srgbClr val="000000">
+                    <a:alpha val="43137"/>
+                  </a:srgbClr>
+                </a:outerShdw>
+              </a:effectLst>
+              <a:uFillTx/>
+              <a:latin typeface="Arial"/>
+            </a:endParaRPr>
+          </a:p>
+        </p:txBody>
+      </p:sp>
+      <p:sp>
+        <p:nvSpPr>
+          <p:cNvPr id="46" name="Text 19">
+            <a:extLst>
+              <a:ext uri="{FF2B5EF4-FFF2-40B4-BE49-F238E27FC236}">
+                <a16:creationId xmlns:a16="http://schemas.microsoft.com/office/drawing/2014/main" id="{E53B3152-CB05-6894-4F31-1A70332A775D}"/>
+              </a:ext>
+            </a:extLst>
+          </p:cNvPr>
+          <p:cNvSpPr/>
+          <p:nvPr/>
+        </p:nvSpPr>
+        <p:spPr>
+          <a:xfrm>
+            <a:off x="2697480" y="4558720"/>
+            <a:ext cx="4503420" cy="383760"/>
+          </a:xfrm>
+          <a:prstGeom prst="rect">
+            <a:avLst/>
+          </a:prstGeom>
+          <a:noFill/>
+          <a:ln w="0">
+            <a:noFill/>
+          </a:ln>
+        </p:spPr>
+        <p:style>
+          <a:lnRef idx="0">
+            <a:scrgbClr r="0" g="0" b="0"/>
+          </a:lnRef>
+          <a:fillRef idx="0">
+            <a:scrgbClr r="0" g="0" b="0"/>
+          </a:fillRef>
+          <a:effectRef idx="0">
+            <a:scrgbClr r="0" g="0" b="0"/>
+          </a:effectRef>
+          <a:fontRef idx="minor"/>
+        </p:style>
+        <p:txBody>
+          <a:bodyPr lIns="0" tIns="0" rIns="0" bIns="0" anchor="ctr">
+            <a:noAutofit/>
+          </a:bodyPr>
+          <a:lstStyle/>
+          <a:p>
+            <a:pPr defTabSz="914400">
+              <a:lnSpc>
+                <a:spcPct val="100000"/>
+              </a:lnSpc>
+              <a:tabLst>
+                <a:tab pos="0" algn="l"/>
+              </a:tabLst>
+            </a:pPr>
+            <a:r>
+              <a:rPr lang="en-US" sz="1600" b="0" u="none" strike="noStrike" dirty="0">
+                <a:solidFill>
+                  <a:srgbClr val="1D2D3F"/>
+                </a:solidFill>
+                <a:effectLst/>
+                <a:uFillTx/>
+                <a:latin typeface="Aptos"/>
+              </a:rPr>
+              <a:t>Returned 6,667 to 10,000 hours annually and more than AU$500K in operational value.</a:t>
+            </a:r>
+            <a:endParaRPr lang="en-US" sz="1600" b="0" u="none" strike="noStrike" dirty="0">
+              <a:solidFill>
+                <a:srgbClr val="000000"/>
+              </a:solidFill>
+              <a:effectLst/>
+              <a:uFillTx/>
+              <a:latin typeface="Arial"/>
+            </a:endParaRPr>
+          </a:p>
+        </p:txBody>
+      </p:sp>
+      <p:sp>
+        <p:nvSpPr>
+          <p:cNvPr id="48" name="Shape 34">
+            <a:extLst>
+              <a:ext uri="{FF2B5EF4-FFF2-40B4-BE49-F238E27FC236}">
+                <a16:creationId xmlns:a16="http://schemas.microsoft.com/office/drawing/2014/main" id="{56AF2BC6-7FF4-DDDF-E6D1-1252681E2433}"/>
+              </a:ext>
+            </a:extLst>
+          </p:cNvPr>
+          <p:cNvSpPr/>
+          <p:nvPr/>
+        </p:nvSpPr>
+        <p:spPr>
+          <a:xfrm>
+            <a:off x="486300" y="5783940"/>
+            <a:ext cx="11219400" cy="731160"/>
+          </a:xfrm>
+          <a:prstGeom prst="roundRect">
+            <a:avLst>
+              <a:gd name="adj" fmla="val 17857"/>
+            </a:avLst>
+          </a:prstGeom>
+          <a:solidFill>
+            <a:srgbClr val="F6C514"/>
+          </a:solidFill>
+          <a:ln w="12700">
+            <a:solidFill>
+              <a:srgbClr val="333333">
+                <a:alpha val="0"/>
+              </a:srgbClr>
+            </a:solidFill>
+            <a:round/>
+          </a:ln>
+        </p:spPr>
+        <p:style>
+          <a:lnRef idx="0">
+            <a:scrgbClr r="0" g="0" b="0"/>
+          </a:lnRef>
+          <a:fillRef idx="0">
+            <a:scrgbClr r="0" g="0" b="0"/>
+          </a:fillRef>
+          <a:effectRef idx="0">
+            <a:scrgbClr r="0" g="0" b="0"/>
+          </a:effectRef>
+          <a:fontRef idx="minor"/>
+        </p:style>
+        <p:txBody>
+          <a:bodyPr lIns="90000" tIns="45000" rIns="90000" bIns="45000" anchor="t">
+            <a:noAutofit/>
+          </a:bodyPr>
+          <a:lstStyle/>
+          <a:p>
+            <a:endParaRPr lang="en-US" sz="1600" b="0" u="none" strike="noStrike">
+              <a:solidFill>
+                <a:srgbClr val="000000"/>
+              </a:solidFill>
+              <a:effectLst/>
+              <a:uFillTx/>
+              <a:latin typeface="Arial"/>
+            </a:endParaRPr>
+          </a:p>
+        </p:txBody>
+      </p:sp>
+      <p:sp>
+        <p:nvSpPr>
+          <p:cNvPr id="50" name="Text 35">
+            <a:extLst>
+              <a:ext uri="{FF2B5EF4-FFF2-40B4-BE49-F238E27FC236}">
+                <a16:creationId xmlns:a16="http://schemas.microsoft.com/office/drawing/2014/main" id="{9388E002-746A-7819-E7F9-C046556B4315}"/>
+              </a:ext>
+            </a:extLst>
+          </p:cNvPr>
+          <p:cNvSpPr/>
+          <p:nvPr/>
+        </p:nvSpPr>
+        <p:spPr>
+          <a:xfrm>
+            <a:off x="760620" y="6071220"/>
+            <a:ext cx="10698120" cy="257920"/>
+          </a:xfrm>
+          <a:prstGeom prst="rect">
+            <a:avLst/>
+          </a:prstGeom>
+          <a:noFill/>
+          <a:ln w="0">
+            <a:noFill/>
+          </a:ln>
+        </p:spPr>
+        <p:style>
+          <a:lnRef idx="0">
+            <a:scrgbClr r="0" g="0" b="0"/>
+          </a:lnRef>
+          <a:fillRef idx="0">
+            <a:scrgbClr r="0" g="0" b="0"/>
+          </a:fillRef>
+          <a:effectRef idx="0">
+            <a:scrgbClr r="0" g="0" b="0"/>
+          </a:effectRef>
+          <a:fontRef idx="minor"/>
+        </p:style>
+        <p:txBody>
+          <a:bodyPr lIns="0" tIns="0" rIns="0" bIns="0" anchor="ctr">
+            <a:noAutofit/>
+          </a:bodyPr>
+          <a:lstStyle/>
+          <a:p>
+            <a:pPr algn="ctr" defTabSz="914400">
+              <a:lnSpc>
+                <a:spcPct val="100000"/>
+              </a:lnSpc>
+              <a:tabLst>
+                <a:tab pos="0" algn="l"/>
+              </a:tabLst>
+            </a:pPr>
+            <a:r>
+              <a:rPr lang="en-US" sz="1600" b="1" dirty="0">
+                <a:solidFill>
+                  <a:srgbClr val="071B33"/>
+                </a:solidFill>
+                <a:latin typeface="Aptos"/>
+              </a:rPr>
+              <a:t>David</a:t>
+            </a:r>
+            <a:r>
+              <a:rPr lang="en-US" sz="1600" b="1" u="none" strike="noStrike" dirty="0">
+                <a:solidFill>
+                  <a:srgbClr val="071B33"/>
+                </a:solidFill>
+                <a:effectLst/>
+                <a:uFillTx/>
+                <a:latin typeface="Aptos"/>
+              </a:rPr>
+              <a:t> do not just build apps. </a:t>
+            </a:r>
+            <a:r>
+              <a:rPr lang="en-US" sz="1600" b="1" dirty="0">
+                <a:solidFill>
+                  <a:srgbClr val="071B33"/>
+                </a:solidFill>
+                <a:latin typeface="Aptos"/>
+              </a:rPr>
+              <a:t>He </a:t>
+            </a:r>
+            <a:r>
+              <a:rPr lang="en-US" sz="1600" b="1" u="none" strike="noStrike" dirty="0">
+                <a:solidFill>
+                  <a:srgbClr val="071B33"/>
+                </a:solidFill>
+                <a:effectLst/>
+                <a:uFillTx/>
+                <a:latin typeface="Aptos"/>
+              </a:rPr>
+              <a:t>translate requirements, manage trade-offs and </a:t>
+            </a:r>
+            <a:r>
+              <a:rPr lang="en-US" sz="1600" b="1" u="none" strike="noStrike" dirty="0" err="1">
+                <a:solidFill>
+                  <a:srgbClr val="071B33"/>
+                </a:solidFill>
+                <a:effectLst/>
+                <a:uFillTx/>
+                <a:latin typeface="Aptos"/>
+              </a:rPr>
+              <a:t>solutionise</a:t>
+            </a:r>
+            <a:r>
+              <a:rPr lang="en-US" sz="1600" b="1" u="none" strike="noStrike" dirty="0">
+                <a:solidFill>
+                  <a:srgbClr val="071B33"/>
+                </a:solidFill>
+                <a:effectLst/>
+                <a:uFillTx/>
+                <a:latin typeface="Aptos"/>
+              </a:rPr>
+              <a:t> platforms that deliver measurable value.</a:t>
+            </a:r>
+            <a:endParaRPr lang="en-US" sz="1600" b="0" u="none" strike="noStrike" dirty="0">
+              <a:solidFill>
+                <a:srgbClr val="000000"/>
+              </a:solidFill>
+              <a:effectLst/>
+              <a:uFillTx/>
+              <a:latin typeface="Arial"/>
+            </a:endParaRPr>
+          </a:p>
+        </p:txBody>
+      </p:sp>
+      <p:pic>
+        <p:nvPicPr>
+          <p:cNvPr id="54" name="Picture 53">
+            <a:extLst>
+              <a:ext uri="{FF2B5EF4-FFF2-40B4-BE49-F238E27FC236}">
+                <a16:creationId xmlns:a16="http://schemas.microsoft.com/office/drawing/2014/main" id="{58A340C4-35CF-F3F6-00B4-7E80BA25A142}"/>
+              </a:ext>
+            </a:extLst>
+          </p:cNvPr>
+          <p:cNvPicPr>
+            <a:picLocks noChangeAspect="1"/>
+          </p:cNvPicPr>
+          <p:nvPr/>
+        </p:nvPicPr>
+        <p:blipFill>
+          <a:blip r:embed="rId3"/>
+          <a:stretch>
+            <a:fillRect/>
+          </a:stretch>
+        </p:blipFill>
+        <p:spPr>
+          <a:xfrm>
+            <a:off x="8340560" y="1635773"/>
+            <a:ext cx="3471600" cy="2104866"/>
+          </a:xfrm>
+          <a:prstGeom prst="rect">
+            <a:avLst/>
+          </a:prstGeom>
+        </p:spPr>
+      </p:pic>
+    </p:spTree>
+    <p:extLst>
+      <p:ext uri="{BB962C8B-B14F-4D97-AF65-F5344CB8AC3E}">
+        <p14:creationId xmlns:p14="http://schemas.microsoft.com/office/powerpoint/2010/main" val="113352188"/>
+      </p:ext>
+    </p:extLst>
   </p:cSld>
   <p:clrMapOvr>
     <a:masterClrMapping/>
